--- a/presentazione-elaborato.pptx
+++ b/presentazione-elaborato.pptx
@@ -5,13 +5,33 @@
     <p:sldMasterId id="2147483648" r:id="rId1"/>
   </p:sldMasterIdLst>
   <p:notesMasterIdLst>
-    <p:notesMasterId r:id="rId4"/>
+    <p:notesMasterId r:id="rId24"/>
   </p:notesMasterIdLst>
   <p:handoutMasterIdLst>
-    <p:handoutMasterId r:id="rId5"/>
+    <p:handoutMasterId r:id="rId25"/>
   </p:handoutMasterIdLst>
   <p:sldIdLst>
     <p:sldId id="256" r:id="rId3"/>
+    <p:sldId id="257" r:id="rId4"/>
+    <p:sldId id="258" r:id="rId5"/>
+    <p:sldId id="259" r:id="rId6"/>
+    <p:sldId id="261" r:id="rId7"/>
+    <p:sldId id="276" r:id="rId8"/>
+    <p:sldId id="260" r:id="rId9"/>
+    <p:sldId id="262" r:id="rId10"/>
+    <p:sldId id="263" r:id="rId11"/>
+    <p:sldId id="264" r:id="rId12"/>
+    <p:sldId id="265" r:id="rId13"/>
+    <p:sldId id="266" r:id="rId14"/>
+    <p:sldId id="267" r:id="rId15"/>
+    <p:sldId id="268" r:id="rId16"/>
+    <p:sldId id="269" r:id="rId17"/>
+    <p:sldId id="270" r:id="rId18"/>
+    <p:sldId id="271" r:id="rId19"/>
+    <p:sldId id="272" r:id="rId20"/>
+    <p:sldId id="273" r:id="rId21"/>
+    <p:sldId id="274" r:id="rId22"/>
+    <p:sldId id="275" r:id="rId23"/>
   </p:sldIdLst>
   <p:sldSz cx="12192000" cy="6858000"/>
   <p:notesSz cx="7103745" cy="10234295"/>
@@ -111,6 +131,4512 @@
     </a:lvl9pPr>
   </p:defaultTextStyle>
 </p:presentation>
+</file>
+
+<file path=ppt/diagrams/colors1.xml><?xml version="1.0" encoding="utf-8"?>
+<dgm:colorsDef xmlns:dgm="http://schemas.openxmlformats.org/drawingml/2006/diagram" xmlns:a="http://schemas.openxmlformats.org/drawingml/2006/main" uniqueId="urn:microsoft.com/office/officeart/2005/8/colors/accent6_1">
+  <dgm:title val=""/>
+  <dgm:desc val=""/>
+  <dgm:catLst>
+    <dgm:cat type="accent6" pri="11100"/>
+  </dgm:catLst>
+  <dgm:styleLbl name="alignAcc1">
+    <dgm:fillClrLst meth="repeat">
+      <a:schemeClr val="accent6">
+        <a:alpha val="90000"/>
+        <a:tint val="40000"/>
+      </a:schemeClr>
+    </dgm:fillClrLst>
+    <dgm:linClrLst meth="repeat">
+      <a:schemeClr val="accent6"/>
+    </dgm:linClrLst>
+    <dgm:effectClrLst/>
+    <dgm:txLinClrLst/>
+    <dgm:txFillClrLst meth="repeat">
+      <a:schemeClr val="dk1"/>
+    </dgm:txFillClrLst>
+    <dgm:txEffectClrLst/>
+  </dgm:styleLbl>
+  <dgm:styleLbl name="alignAccFollowNode1">
+    <dgm:fillClrLst meth="repeat">
+      <a:schemeClr val="lt1">
+        <a:alpha val="90000"/>
+        <a:tint val="40000"/>
+      </a:schemeClr>
+    </dgm:fillClrLst>
+    <dgm:linClrLst meth="repeat">
+      <a:schemeClr val="accent6">
+        <a:alpha val="90000"/>
+      </a:schemeClr>
+    </dgm:linClrLst>
+    <dgm:effectClrLst/>
+    <dgm:txLinClrLst/>
+    <dgm:txFillClrLst meth="repeat">
+      <a:schemeClr val="dk1"/>
+    </dgm:txFillClrLst>
+    <dgm:txEffectClrLst/>
+  </dgm:styleLbl>
+  <dgm:styleLbl name="alignImgPlace1">
+    <dgm:fillClrLst meth="repeat">
+      <a:schemeClr val="accent6">
+        <a:tint val="40000"/>
+      </a:schemeClr>
+    </dgm:fillClrLst>
+    <dgm:linClrLst meth="repeat">
+      <a:schemeClr val="accent6">
+        <a:shade val="80000"/>
+      </a:schemeClr>
+    </dgm:linClrLst>
+    <dgm:effectClrLst/>
+    <dgm:txLinClrLst/>
+    <dgm:txFillClrLst meth="repeat">
+      <a:schemeClr val="lt1"/>
+    </dgm:txFillClrLst>
+    <dgm:txEffectClrLst/>
+  </dgm:styleLbl>
+  <dgm:styleLbl name="alignNode1">
+    <dgm:fillClrLst meth="repeat">
+      <a:schemeClr val="lt1"/>
+    </dgm:fillClrLst>
+    <dgm:linClrLst meth="repeat">
+      <a:schemeClr val="accent6">
+        <a:shade val="80000"/>
+      </a:schemeClr>
+    </dgm:linClrLst>
+    <dgm:effectClrLst/>
+    <dgm:txLinClrLst/>
+    <dgm:txFillClrLst meth="repeat">
+      <a:schemeClr val="dk1"/>
+    </dgm:txFillClrLst>
+    <dgm:txEffectClrLst/>
+  </dgm:styleLbl>
+  <dgm:styleLbl name="asst0">
+    <dgm:fillClrLst meth="repeat">
+      <a:schemeClr val="lt1"/>
+    </dgm:fillClrLst>
+    <dgm:linClrLst meth="repeat">
+      <a:schemeClr val="accent6">
+        <a:shade val="80000"/>
+      </a:schemeClr>
+    </dgm:linClrLst>
+    <dgm:effectClrLst/>
+    <dgm:txLinClrLst/>
+    <dgm:txFillClrLst meth="repeat">
+      <a:schemeClr val="dk1"/>
+    </dgm:txFillClrLst>
+    <dgm:txEffectClrLst/>
+  </dgm:styleLbl>
+  <dgm:styleLbl name="asst1">
+    <dgm:fillClrLst meth="repeat">
+      <a:schemeClr val="lt1"/>
+    </dgm:fillClrLst>
+    <dgm:linClrLst meth="repeat">
+      <a:schemeClr val="accent6">
+        <a:shade val="80000"/>
+      </a:schemeClr>
+    </dgm:linClrLst>
+    <dgm:effectClrLst/>
+    <dgm:txLinClrLst/>
+    <dgm:txFillClrLst meth="repeat">
+      <a:schemeClr val="dk1"/>
+    </dgm:txFillClrLst>
+    <dgm:txEffectClrLst/>
+  </dgm:styleLbl>
+  <dgm:styleLbl name="asst2">
+    <dgm:fillClrLst meth="repeat">
+      <a:schemeClr val="lt1"/>
+    </dgm:fillClrLst>
+    <dgm:linClrLst meth="repeat">
+      <a:schemeClr val="accent6">
+        <a:shade val="80000"/>
+      </a:schemeClr>
+    </dgm:linClrLst>
+    <dgm:effectClrLst/>
+    <dgm:txLinClrLst/>
+    <dgm:txFillClrLst meth="repeat">
+      <a:schemeClr val="dk1"/>
+    </dgm:txFillClrLst>
+    <dgm:txEffectClrLst/>
+  </dgm:styleLbl>
+  <dgm:styleLbl name="asst3">
+    <dgm:fillClrLst meth="repeat">
+      <a:schemeClr val="lt1"/>
+    </dgm:fillClrLst>
+    <dgm:linClrLst meth="repeat">
+      <a:schemeClr val="accent6">
+        <a:shade val="80000"/>
+      </a:schemeClr>
+    </dgm:linClrLst>
+    <dgm:effectClrLst/>
+    <dgm:txLinClrLst/>
+    <dgm:txFillClrLst meth="repeat">
+      <a:schemeClr val="dk1"/>
+    </dgm:txFillClrLst>
+    <dgm:txEffectClrLst/>
+  </dgm:styleLbl>
+  <dgm:styleLbl name="asst4">
+    <dgm:fillClrLst meth="repeat">
+      <a:schemeClr val="lt1"/>
+    </dgm:fillClrLst>
+    <dgm:linClrLst meth="repeat">
+      <a:schemeClr val="accent6">
+        <a:shade val="80000"/>
+      </a:schemeClr>
+    </dgm:linClrLst>
+    <dgm:effectClrLst/>
+    <dgm:txLinClrLst/>
+    <dgm:txFillClrLst meth="repeat">
+      <a:schemeClr val="dk1"/>
+    </dgm:txFillClrLst>
+    <dgm:txEffectClrLst/>
+  </dgm:styleLbl>
+  <dgm:styleLbl name="bgAcc1">
+    <dgm:fillClrLst meth="repeat">
+      <a:schemeClr val="accent6">
+        <a:alpha val="90000"/>
+        <a:tint val="40000"/>
+      </a:schemeClr>
+    </dgm:fillClrLst>
+    <dgm:linClrLst meth="repeat">
+      <a:schemeClr val="accent6"/>
+    </dgm:linClrLst>
+    <dgm:effectClrLst/>
+    <dgm:txLinClrLst/>
+    <dgm:txFillClrLst meth="repeat">
+      <a:schemeClr val="dk1"/>
+    </dgm:txFillClrLst>
+    <dgm:txEffectClrLst/>
+  </dgm:styleLbl>
+  <dgm:styleLbl name="bgAccFollowNode1">
+    <dgm:fillClrLst meth="repeat">
+      <a:schemeClr val="lt1">
+        <a:alpha val="90000"/>
+        <a:tint val="40000"/>
+      </a:schemeClr>
+    </dgm:fillClrLst>
+    <dgm:linClrLst meth="repeat">
+      <a:schemeClr val="accent6">
+        <a:alpha val="90000"/>
+      </a:schemeClr>
+    </dgm:linClrLst>
+    <dgm:effectClrLst/>
+    <dgm:txLinClrLst/>
+    <dgm:txFillClrLst meth="repeat">
+      <a:schemeClr val="dk1"/>
+    </dgm:txFillClrLst>
+    <dgm:txEffectClrLst/>
+  </dgm:styleLbl>
+  <dgm:styleLbl name="bgImgPlace1">
+    <dgm:fillClrLst meth="repeat">
+      <a:schemeClr val="accent6">
+        <a:tint val="40000"/>
+      </a:schemeClr>
+    </dgm:fillClrLst>
+    <dgm:linClrLst meth="repeat">
+      <a:schemeClr val="accent6">
+        <a:shade val="80000"/>
+      </a:schemeClr>
+    </dgm:linClrLst>
+    <dgm:effectClrLst/>
+    <dgm:txLinClrLst/>
+    <dgm:txFillClrLst meth="repeat">
+      <a:schemeClr val="lt1"/>
+    </dgm:txFillClrLst>
+    <dgm:txEffectClrLst/>
+  </dgm:styleLbl>
+  <dgm:styleLbl name="bgShp">
+    <dgm:fillClrLst meth="repeat">
+      <a:schemeClr val="accent6">
+        <a:tint val="40000"/>
+      </a:schemeClr>
+    </dgm:fillClrLst>
+    <dgm:linClrLst meth="repeat">
+      <a:schemeClr val="accent6"/>
+    </dgm:linClrLst>
+    <dgm:effectClrLst/>
+    <dgm:txLinClrLst/>
+    <dgm:txFillClrLst meth="repeat">
+      <a:schemeClr val="dk1"/>
+    </dgm:txFillClrLst>
+    <dgm:txEffectClrLst/>
+  </dgm:styleLbl>
+  <dgm:styleLbl name="bgSibTrans2D1">
+    <dgm:fillClrLst meth="repeat">
+      <a:schemeClr val="accent6">
+        <a:tint val="60000"/>
+      </a:schemeClr>
+    </dgm:fillClrLst>
+    <dgm:linClrLst meth="repeat">
+      <a:schemeClr val="accent6">
+        <a:tint val="60000"/>
+      </a:schemeClr>
+    </dgm:linClrLst>
+    <dgm:effectClrLst/>
+    <dgm:txLinClrLst/>
+    <dgm:txFillClrLst meth="repeat">
+      <a:schemeClr val="dk1"/>
+    </dgm:txFillClrLst>
+    <dgm:txEffectClrLst/>
+  </dgm:styleLbl>
+  <dgm:styleLbl name="callout">
+    <dgm:fillClrLst meth="repeat">
+      <a:schemeClr val="accent6"/>
+    </dgm:fillClrLst>
+    <dgm:linClrLst meth="repeat">
+      <a:schemeClr val="accent6"/>
+    </dgm:linClrLst>
+    <dgm:effectClrLst/>
+    <dgm:txLinClrLst/>
+    <dgm:txFillClrLst meth="repeat">
+      <a:schemeClr val="tx1"/>
+    </dgm:txFillClrLst>
+    <dgm:txEffectClrLst/>
+  </dgm:styleLbl>
+  <dgm:styleLbl name="conFgAcc1">
+    <dgm:fillClrLst meth="repeat">
+      <a:schemeClr val="accent6">
+        <a:alpha val="90000"/>
+        <a:tint val="40000"/>
+      </a:schemeClr>
+    </dgm:fillClrLst>
+    <dgm:linClrLst meth="repeat">
+      <a:schemeClr val="accent6"/>
+    </dgm:linClrLst>
+    <dgm:effectClrLst/>
+    <dgm:txLinClrLst/>
+    <dgm:txFillClrLst meth="repeat">
+      <a:schemeClr val="dk1"/>
+    </dgm:txFillClrLst>
+    <dgm:txEffectClrLst/>
+  </dgm:styleLbl>
+  <dgm:styleLbl name="dkBgShp">
+    <dgm:fillClrLst meth="repeat">
+      <a:schemeClr val="accent6">
+        <a:shade val="80000"/>
+      </a:schemeClr>
+    </dgm:fillClrLst>
+    <dgm:linClrLst meth="repeat">
+      <a:schemeClr val="accent6"/>
+    </dgm:linClrLst>
+    <dgm:effectClrLst/>
+    <dgm:txLinClrLst/>
+    <dgm:txFillClrLst meth="repeat">
+      <a:schemeClr val="lt1"/>
+    </dgm:txFillClrLst>
+    <dgm:txEffectClrLst/>
+  </dgm:styleLbl>
+  <dgm:styleLbl name="fgAcc0">
+    <dgm:fillClrLst meth="repeat">
+      <a:schemeClr val="accent6">
+        <a:alpha val="90000"/>
+        <a:tint val="40000"/>
+      </a:schemeClr>
+    </dgm:fillClrLst>
+    <dgm:linClrLst meth="repeat">
+      <a:schemeClr val="accent6"/>
+    </dgm:linClrLst>
+    <dgm:effectClrLst/>
+    <dgm:txLinClrLst/>
+    <dgm:txFillClrLst meth="repeat">
+      <a:schemeClr val="dk1"/>
+    </dgm:txFillClrLst>
+    <dgm:txEffectClrLst/>
+  </dgm:styleLbl>
+  <dgm:styleLbl name="fgAcc1">
+    <dgm:fillClrLst meth="repeat">
+      <a:schemeClr val="accent6">
+        <a:alpha val="90000"/>
+        <a:tint val="40000"/>
+      </a:schemeClr>
+    </dgm:fillClrLst>
+    <dgm:linClrLst meth="repeat">
+      <a:schemeClr val="accent6"/>
+    </dgm:linClrLst>
+    <dgm:effectClrLst/>
+    <dgm:txLinClrLst/>
+    <dgm:txFillClrLst meth="repeat">
+      <a:schemeClr val="dk1"/>
+    </dgm:txFillClrLst>
+    <dgm:txEffectClrLst/>
+  </dgm:styleLbl>
+  <dgm:styleLbl name="fgAcc2">
+    <dgm:fillClrLst meth="repeat">
+      <a:schemeClr val="accent6">
+        <a:alpha val="90000"/>
+        <a:tint val="40000"/>
+      </a:schemeClr>
+    </dgm:fillClrLst>
+    <dgm:linClrLst meth="repeat">
+      <a:schemeClr val="accent6"/>
+    </dgm:linClrLst>
+    <dgm:effectClrLst/>
+    <dgm:txLinClrLst/>
+    <dgm:txFillClrLst meth="repeat">
+      <a:schemeClr val="dk1"/>
+    </dgm:txFillClrLst>
+    <dgm:txEffectClrLst/>
+  </dgm:styleLbl>
+  <dgm:styleLbl name="fgAcc3">
+    <dgm:fillClrLst meth="repeat">
+      <a:schemeClr val="accent6">
+        <a:alpha val="90000"/>
+        <a:tint val="40000"/>
+      </a:schemeClr>
+    </dgm:fillClrLst>
+    <dgm:linClrLst meth="repeat">
+      <a:schemeClr val="accent6"/>
+    </dgm:linClrLst>
+    <dgm:effectClrLst/>
+    <dgm:txLinClrLst/>
+    <dgm:txFillClrLst meth="repeat">
+      <a:schemeClr val="dk1"/>
+    </dgm:txFillClrLst>
+    <dgm:txEffectClrLst/>
+  </dgm:styleLbl>
+  <dgm:styleLbl name="fgAcc4">
+    <dgm:fillClrLst meth="repeat">
+      <a:schemeClr val="accent6">
+        <a:alpha val="90000"/>
+        <a:tint val="40000"/>
+      </a:schemeClr>
+    </dgm:fillClrLst>
+    <dgm:linClrLst meth="repeat">
+      <a:schemeClr val="accent6"/>
+    </dgm:linClrLst>
+    <dgm:effectClrLst/>
+    <dgm:txLinClrLst/>
+    <dgm:txFillClrLst meth="repeat">
+      <a:schemeClr val="dk1"/>
+    </dgm:txFillClrLst>
+    <dgm:txEffectClrLst/>
+  </dgm:styleLbl>
+  <dgm:styleLbl name="fgAccFollowNode1">
+    <dgm:fillClrLst meth="repeat">
+      <a:schemeClr val="lt1">
+        <a:alpha val="90000"/>
+        <a:tint val="40000"/>
+      </a:schemeClr>
+    </dgm:fillClrLst>
+    <dgm:linClrLst meth="repeat">
+      <a:schemeClr val="accent6">
+        <a:alpha val="90000"/>
+      </a:schemeClr>
+    </dgm:linClrLst>
+    <dgm:effectClrLst/>
+    <dgm:txLinClrLst/>
+    <dgm:txFillClrLst meth="repeat">
+      <a:schemeClr val="dk1"/>
+    </dgm:txFillClrLst>
+    <dgm:txEffectClrLst/>
+  </dgm:styleLbl>
+  <dgm:styleLbl name="fgImgPlace1">
+    <dgm:fillClrLst meth="repeat">
+      <a:schemeClr val="accent6">
+        <a:tint val="40000"/>
+      </a:schemeClr>
+    </dgm:fillClrLst>
+    <dgm:linClrLst meth="repeat">
+      <a:schemeClr val="accent6">
+        <a:shade val="80000"/>
+      </a:schemeClr>
+    </dgm:linClrLst>
+    <dgm:effectClrLst/>
+    <dgm:txLinClrLst/>
+    <dgm:txFillClrLst meth="repeat">
+      <a:schemeClr val="lt1"/>
+    </dgm:txFillClrLst>
+    <dgm:txEffectClrLst/>
+  </dgm:styleLbl>
+  <dgm:styleLbl name="fgShp">
+    <dgm:fillClrLst meth="repeat">
+      <a:schemeClr val="accent6">
+        <a:tint val="60000"/>
+      </a:schemeClr>
+    </dgm:fillClrLst>
+    <dgm:linClrLst meth="repeat">
+      <a:schemeClr val="lt1"/>
+    </dgm:linClrLst>
+    <dgm:effectClrLst/>
+    <dgm:txLinClrLst/>
+    <dgm:txFillClrLst meth="repeat">
+      <a:schemeClr val="dk1"/>
+    </dgm:txFillClrLst>
+    <dgm:txEffectClrLst/>
+  </dgm:styleLbl>
+  <dgm:styleLbl name="fgSibTrans2D1">
+    <dgm:fillClrLst meth="repeat">
+      <a:schemeClr val="accent6">
+        <a:tint val="60000"/>
+      </a:schemeClr>
+    </dgm:fillClrLst>
+    <dgm:linClrLst meth="repeat">
+      <a:schemeClr val="accent6">
+        <a:tint val="60000"/>
+      </a:schemeClr>
+    </dgm:linClrLst>
+    <dgm:effectClrLst/>
+    <dgm:txLinClrLst/>
+    <dgm:txFillClrLst meth="repeat">
+      <a:schemeClr val="dk1"/>
+    </dgm:txFillClrLst>
+    <dgm:txEffectClrLst/>
+  </dgm:styleLbl>
+  <dgm:styleLbl name="lnNode1">
+    <dgm:fillClrLst meth="repeat">
+      <a:schemeClr val="lt1"/>
+    </dgm:fillClrLst>
+    <dgm:linClrLst meth="repeat">
+      <a:schemeClr val="accent6">
+        <a:shade val="80000"/>
+      </a:schemeClr>
+    </dgm:linClrLst>
+    <dgm:effectClrLst/>
+    <dgm:txLinClrLst/>
+    <dgm:txFillClrLst meth="repeat">
+      <a:schemeClr val="dk1"/>
+    </dgm:txFillClrLst>
+    <dgm:txEffectClrLst/>
+  </dgm:styleLbl>
+  <dgm:styleLbl name="node0">
+    <dgm:fillClrLst meth="repeat">
+      <a:schemeClr val="lt1"/>
+    </dgm:fillClrLst>
+    <dgm:linClrLst meth="repeat">
+      <a:schemeClr val="accent6">
+        <a:shade val="80000"/>
+      </a:schemeClr>
+    </dgm:linClrLst>
+    <dgm:effectClrLst/>
+    <dgm:txLinClrLst/>
+    <dgm:txFillClrLst meth="repeat">
+      <a:schemeClr val="dk1"/>
+    </dgm:txFillClrLst>
+    <dgm:txEffectClrLst/>
+  </dgm:styleLbl>
+  <dgm:styleLbl name="node1">
+    <dgm:fillClrLst meth="repeat">
+      <a:schemeClr val="lt1"/>
+    </dgm:fillClrLst>
+    <dgm:linClrLst meth="repeat">
+      <a:schemeClr val="accent6">
+        <a:shade val="80000"/>
+      </a:schemeClr>
+    </dgm:linClrLst>
+    <dgm:effectClrLst/>
+    <dgm:txLinClrLst/>
+    <dgm:txFillClrLst meth="repeat">
+      <a:schemeClr val="dk1"/>
+    </dgm:txFillClrLst>
+    <dgm:txEffectClrLst/>
+  </dgm:styleLbl>
+  <dgm:styleLbl name="node2">
+    <dgm:fillClrLst meth="repeat">
+      <a:schemeClr val="lt1"/>
+    </dgm:fillClrLst>
+    <dgm:linClrLst meth="repeat">
+      <a:schemeClr val="accent6">
+        <a:shade val="80000"/>
+      </a:schemeClr>
+    </dgm:linClrLst>
+    <dgm:effectClrLst/>
+    <dgm:txLinClrLst/>
+    <dgm:txFillClrLst meth="repeat">
+      <a:schemeClr val="dk1"/>
+    </dgm:txFillClrLst>
+    <dgm:txEffectClrLst/>
+  </dgm:styleLbl>
+  <dgm:styleLbl name="node3">
+    <dgm:fillClrLst meth="repeat">
+      <a:schemeClr val="lt1"/>
+    </dgm:fillClrLst>
+    <dgm:linClrLst meth="repeat">
+      <a:schemeClr val="accent6">
+        <a:shade val="80000"/>
+      </a:schemeClr>
+    </dgm:linClrLst>
+    <dgm:effectClrLst/>
+    <dgm:txLinClrLst/>
+    <dgm:txFillClrLst meth="repeat">
+      <a:schemeClr val="dk1"/>
+    </dgm:txFillClrLst>
+    <dgm:txEffectClrLst/>
+  </dgm:styleLbl>
+  <dgm:styleLbl name="node4">
+    <dgm:fillClrLst meth="repeat">
+      <a:schemeClr val="lt1"/>
+    </dgm:fillClrLst>
+    <dgm:linClrLst meth="repeat">
+      <a:schemeClr val="accent6">
+        <a:shade val="80000"/>
+      </a:schemeClr>
+    </dgm:linClrLst>
+    <dgm:effectClrLst/>
+    <dgm:txLinClrLst/>
+    <dgm:txFillClrLst meth="repeat">
+      <a:schemeClr val="dk1"/>
+    </dgm:txFillClrLst>
+    <dgm:txEffectClrLst/>
+  </dgm:styleLbl>
+  <dgm:styleLbl name="parChTrans1D1">
+    <dgm:fillClrLst meth="repeat">
+      <a:schemeClr val="accent6"/>
+    </dgm:fillClrLst>
+    <dgm:linClrLst meth="repeat">
+      <a:schemeClr val="accent6">
+        <a:shade val="60000"/>
+      </a:schemeClr>
+    </dgm:linClrLst>
+    <dgm:effectClrLst/>
+    <dgm:txLinClrLst/>
+    <dgm:txFillClrLst meth="repeat">
+      <a:schemeClr val="tx1"/>
+    </dgm:txFillClrLst>
+    <dgm:txEffectClrLst/>
+  </dgm:styleLbl>
+  <dgm:styleLbl name="parChTrans1D2">
+    <dgm:fillClrLst meth="repeat">
+      <a:schemeClr val="accent6"/>
+    </dgm:fillClrLst>
+    <dgm:linClrLst meth="repeat">
+      <a:schemeClr val="accent6">
+        <a:shade val="60000"/>
+      </a:schemeClr>
+    </dgm:linClrLst>
+    <dgm:effectClrLst/>
+    <dgm:txLinClrLst/>
+    <dgm:txFillClrLst meth="repeat">
+      <a:schemeClr val="tx1"/>
+    </dgm:txFillClrLst>
+    <dgm:txEffectClrLst/>
+  </dgm:styleLbl>
+  <dgm:styleLbl name="parChTrans1D3">
+    <dgm:fillClrLst meth="repeat">
+      <a:schemeClr val="accent6"/>
+    </dgm:fillClrLst>
+    <dgm:linClrLst meth="repeat">
+      <a:schemeClr val="accent6">
+        <a:shade val="80000"/>
+      </a:schemeClr>
+    </dgm:linClrLst>
+    <dgm:effectClrLst/>
+    <dgm:txLinClrLst/>
+    <dgm:txFillClrLst meth="repeat">
+      <a:schemeClr val="tx1"/>
+    </dgm:txFillClrLst>
+    <dgm:txEffectClrLst/>
+  </dgm:styleLbl>
+  <dgm:styleLbl name="parChTrans1D4">
+    <dgm:fillClrLst meth="repeat">
+      <a:schemeClr val="accent6"/>
+    </dgm:fillClrLst>
+    <dgm:linClrLst meth="repeat">
+      <a:schemeClr val="accent6">
+        <a:shade val="80000"/>
+      </a:schemeClr>
+    </dgm:linClrLst>
+    <dgm:effectClrLst/>
+    <dgm:txLinClrLst/>
+    <dgm:txFillClrLst meth="repeat">
+      <a:schemeClr val="tx1"/>
+    </dgm:txFillClrLst>
+    <dgm:txEffectClrLst/>
+  </dgm:styleLbl>
+  <dgm:styleLbl name="parChTrans2D1">
+    <dgm:fillClrLst meth="repeat">
+      <a:schemeClr val="accent6">
+        <a:tint val="60000"/>
+      </a:schemeClr>
+    </dgm:fillClrLst>
+    <dgm:linClrLst meth="repeat">
+      <a:schemeClr val="accent6">
+        <a:tint val="60000"/>
+      </a:schemeClr>
+    </dgm:linClrLst>
+    <dgm:effectClrLst/>
+    <dgm:txLinClrLst/>
+    <dgm:txFillClrLst/>
+    <dgm:txEffectClrLst/>
+  </dgm:styleLbl>
+  <dgm:styleLbl name="parChTrans2D2">
+    <dgm:fillClrLst meth="repeat">
+      <a:schemeClr val="accent6"/>
+    </dgm:fillClrLst>
+    <dgm:linClrLst meth="repeat">
+      <a:schemeClr val="accent6"/>
+    </dgm:linClrLst>
+    <dgm:effectClrLst/>
+    <dgm:txLinClrLst/>
+    <dgm:txFillClrLst/>
+    <dgm:txEffectClrLst/>
+  </dgm:styleLbl>
+  <dgm:styleLbl name="parChTrans2D3">
+    <dgm:fillClrLst meth="repeat">
+      <a:schemeClr val="accent6"/>
+    </dgm:fillClrLst>
+    <dgm:linClrLst meth="repeat">
+      <a:schemeClr val="accent6"/>
+    </dgm:linClrLst>
+    <dgm:effectClrLst/>
+    <dgm:txLinClrLst/>
+    <dgm:txFillClrLst/>
+    <dgm:txEffectClrLst/>
+  </dgm:styleLbl>
+  <dgm:styleLbl name="parChTrans2D4">
+    <dgm:fillClrLst meth="repeat">
+      <a:schemeClr val="accent6"/>
+    </dgm:fillClrLst>
+    <dgm:linClrLst meth="repeat">
+      <a:schemeClr val="accent6"/>
+    </dgm:linClrLst>
+    <dgm:effectClrLst/>
+    <dgm:txLinClrLst/>
+    <dgm:txFillClrLst meth="repeat">
+      <a:schemeClr val="lt1"/>
+    </dgm:txFillClrLst>
+    <dgm:txEffectClrLst/>
+  </dgm:styleLbl>
+  <dgm:styleLbl name="revTx">
+    <dgm:fillClrLst meth="repeat">
+      <a:schemeClr val="lt1">
+        <a:alpha val="0"/>
+      </a:schemeClr>
+    </dgm:fillClrLst>
+    <dgm:linClrLst meth="repeat">
+      <a:schemeClr val="dk1">
+        <a:alpha val="0"/>
+      </a:schemeClr>
+    </dgm:linClrLst>
+    <dgm:effectClrLst/>
+    <dgm:txLinClrLst/>
+    <dgm:txFillClrLst meth="repeat">
+      <a:schemeClr val="tx1"/>
+    </dgm:txFillClrLst>
+    <dgm:txEffectClrLst/>
+  </dgm:styleLbl>
+  <dgm:styleLbl name="sibTrans1D1">
+    <dgm:fillClrLst meth="repeat">
+      <a:schemeClr val="accent6"/>
+    </dgm:fillClrLst>
+    <dgm:linClrLst meth="repeat">
+      <a:schemeClr val="accent6"/>
+    </dgm:linClrLst>
+    <dgm:effectClrLst/>
+    <dgm:txLinClrLst/>
+    <dgm:txFillClrLst meth="repeat">
+      <a:schemeClr val="tx1"/>
+    </dgm:txFillClrLst>
+    <dgm:txEffectClrLst/>
+  </dgm:styleLbl>
+  <dgm:styleLbl name="sibTrans2D1">
+    <dgm:fillClrLst meth="repeat">
+      <a:schemeClr val="accent6">
+        <a:tint val="60000"/>
+      </a:schemeClr>
+    </dgm:fillClrLst>
+    <dgm:linClrLst meth="repeat">
+      <a:schemeClr val="accent6">
+        <a:tint val="60000"/>
+      </a:schemeClr>
+    </dgm:linClrLst>
+    <dgm:effectClrLst/>
+    <dgm:txLinClrLst/>
+    <dgm:txFillClrLst meth="repeat">
+      <a:schemeClr val="dk1"/>
+    </dgm:txFillClrLst>
+    <dgm:txEffectClrLst/>
+  </dgm:styleLbl>
+  <dgm:styleLbl name="solidAlignAcc1">
+    <dgm:fillClrLst meth="repeat">
+      <a:schemeClr val="lt1"/>
+    </dgm:fillClrLst>
+    <dgm:linClrLst meth="repeat">
+      <a:schemeClr val="accent6"/>
+    </dgm:linClrLst>
+    <dgm:effectClrLst/>
+    <dgm:txLinClrLst/>
+    <dgm:txFillClrLst meth="repeat">
+      <a:schemeClr val="dk1"/>
+    </dgm:txFillClrLst>
+    <dgm:txEffectClrLst/>
+  </dgm:styleLbl>
+  <dgm:styleLbl name="solidBgAcc1">
+    <dgm:fillClrLst meth="repeat">
+      <a:schemeClr val="lt1"/>
+    </dgm:fillClrLst>
+    <dgm:linClrLst meth="repeat">
+      <a:schemeClr val="accent6"/>
+    </dgm:linClrLst>
+    <dgm:effectClrLst/>
+    <dgm:txLinClrLst/>
+    <dgm:txFillClrLst meth="repeat">
+      <a:schemeClr val="dk1"/>
+    </dgm:txFillClrLst>
+    <dgm:txEffectClrLst/>
+  </dgm:styleLbl>
+  <dgm:styleLbl name="solidFgAcc1">
+    <dgm:fillClrLst meth="repeat">
+      <a:schemeClr val="lt1"/>
+    </dgm:fillClrLst>
+    <dgm:linClrLst meth="repeat">
+      <a:schemeClr val="accent6"/>
+    </dgm:linClrLst>
+    <dgm:effectClrLst/>
+    <dgm:txLinClrLst/>
+    <dgm:txFillClrLst meth="repeat">
+      <a:schemeClr val="dk1"/>
+    </dgm:txFillClrLst>
+    <dgm:txEffectClrLst/>
+  </dgm:styleLbl>
+  <dgm:styleLbl name="trAlignAcc1">
+    <dgm:fillClrLst meth="repeat">
+      <a:schemeClr val="accent6">
+        <a:alpha val="40000"/>
+        <a:tint val="40000"/>
+      </a:schemeClr>
+    </dgm:fillClrLst>
+    <dgm:linClrLst meth="repeat">
+      <a:schemeClr val="accent6"/>
+    </dgm:linClrLst>
+    <dgm:effectClrLst/>
+    <dgm:txLinClrLst/>
+    <dgm:txFillClrLst meth="repeat">
+      <a:schemeClr val="dk1"/>
+    </dgm:txFillClrLst>
+    <dgm:txEffectClrLst/>
+  </dgm:styleLbl>
+  <dgm:styleLbl name="trBgShp">
+    <dgm:fillClrLst meth="repeat">
+      <a:schemeClr val="accent6">
+        <a:tint val="50000"/>
+        <a:alpha val="40000"/>
+      </a:schemeClr>
+    </dgm:fillClrLst>
+    <dgm:linClrLst meth="repeat">
+      <a:schemeClr val="accent6"/>
+    </dgm:linClrLst>
+    <dgm:effectClrLst/>
+    <dgm:txLinClrLst/>
+    <dgm:txFillClrLst meth="repeat">
+      <a:schemeClr val="lt1"/>
+    </dgm:txFillClrLst>
+    <dgm:txEffectClrLst/>
+  </dgm:styleLbl>
+  <dgm:styleLbl name="vennNode1">
+    <dgm:fillClrLst meth="repeat">
+      <a:schemeClr val="lt1">
+        <a:alpha val="50000"/>
+      </a:schemeClr>
+    </dgm:fillClrLst>
+    <dgm:linClrLst meth="repeat">
+      <a:schemeClr val="accent6">
+        <a:shade val="80000"/>
+      </a:schemeClr>
+    </dgm:linClrLst>
+    <dgm:effectClrLst/>
+    <dgm:txLinClrLst/>
+    <dgm:txFillClrLst/>
+    <dgm:txEffectClrLst/>
+  </dgm:styleLbl>
+</dgm:colorsDef>
+</file>
+
+<file path=ppt/diagrams/data1.xml><?xml version="1.0" encoding="utf-8"?>
+<dgm:dataModel xmlns:dgm="http://schemas.openxmlformats.org/drawingml/2006/diagram" xmlns:a="http://schemas.openxmlformats.org/drawingml/2006/main">
+  <dgm:ptLst>
+    <dgm:pt modelId="{4BE40EF7-4FDB-46DC-AD5C-7AA9927BCDC4}" type="doc">
+      <dgm:prSet loTypeId="process" loCatId="process" qsTypeId="urn:microsoft.com/office/officeart/2005/8/quickstyle/simple2" qsCatId="simple" csTypeId="urn:microsoft.com/office/officeart/2005/8/colors/accent6_1" csCatId="accent1" phldr="false"/>
+      <dgm:spPr/>
+      <dgm:t>
+        <a:bodyPr/>
+        <a:p>
+          <a:endParaRPr lang="en-US"/>
+        </a:p>
+      </dgm:t>
+    </dgm:pt>
+    <dgm:pt modelId="{79A907BE-6A57-46F9-949B-2F83975E5013}">
+      <dgm:prSet phldrT="[Text]" phldr="false" custT="false"/>
+      <dgm:spPr/>
+      <dgm:t>
+        <a:bodyPr vert="horz" wrap="square"/>
+        <a:p>
+          <a:pPr>
+            <a:lnSpc>
+              <a:spcPct val="100000"/>
+            </a:lnSpc>
+            <a:spcBef>
+              <a:spcPct val="0"/>
+            </a:spcBef>
+            <a:spcAft>
+              <a:spcPct val="35000"/>
+            </a:spcAft>
+          </a:pPr>
+          <a:r>
+            <a:rPr lang="en-US" altLang="en-US" cap="all">
+              <a:uFillTx/>
+            </a:rPr>
+            <a:t>Osservazione</a:t>
+          </a:r>
+          <a:r>
+            <a:rPr lang="en-US" altLang="en-US" cap="all">
+              <a:uFillTx/>
+            </a:rPr>
+            <a:t/>
+          </a:r>
+          <a:endParaRPr lang="en-US" altLang="en-US" cap="all">
+            <a:uFillTx/>
+          </a:endParaRPr>
+        </a:p>
+      </dgm:t>
+    </dgm:pt>
+    <dgm:pt modelId="{27508ADE-09B9-4692-B3B1-997C0A038367}" cxnId="{2C8D89BD-E59B-4414-8B24-7BBA3B03E0DC}" type="parTrans">
+      <dgm:prSet/>
+      <dgm:spPr/>
+      <dgm:t>
+        <a:bodyPr/>
+        <a:p>
+          <a:endParaRPr lang="en-US"/>
+        </a:p>
+      </dgm:t>
+    </dgm:pt>
+    <dgm:pt modelId="{6E764295-1C97-4A8A-BB23-8F6587B65D20}" cxnId="{2C8D89BD-E59B-4414-8B24-7BBA3B03E0DC}" type="sibTrans">
+      <dgm:prSet/>
+      <dgm:spPr/>
+      <dgm:t>
+        <a:bodyPr/>
+        <a:p>
+          <a:endParaRPr lang="en-US"/>
+        </a:p>
+      </dgm:t>
+    </dgm:pt>
+    <dgm:pt modelId="{047E9EF6-99D9-47D4-8421-7851F36A512F}">
+      <dgm:prSet phldrT="[Text]" phldr="false" custT="false"/>
+      <dgm:spPr/>
+      <dgm:t>
+        <a:bodyPr vert="horz" wrap="square"/>
+        <a:p>
+          <a:pPr>
+            <a:lnSpc>
+              <a:spcPct val="100000"/>
+            </a:lnSpc>
+            <a:spcBef>
+              <a:spcPct val="0"/>
+            </a:spcBef>
+            <a:spcAft>
+              <a:spcPct val="35000"/>
+            </a:spcAft>
+          </a:pPr>
+          <a:r>
+            <a:rPr lang="en-US" altLang="en-US"/>
+            <a:t>Individuazione del problema</a:t>
+          </a:r>
+          <a:r>
+            <a:rPr lang="en-US" altLang="en-US"/>
+            <a:t/>
+          </a:r>
+          <a:endParaRPr lang="en-US" altLang="en-US"/>
+        </a:p>
+      </dgm:t>
+    </dgm:pt>
+    <dgm:pt modelId="{2AC7BC3F-1829-4928-9FDD-1BD085861192}" cxnId="{EB280F5E-EE85-4BAC-A296-B994C0FFB6A1}" type="parTrans">
+      <dgm:prSet/>
+      <dgm:spPr/>
+      <dgm:t>
+        <a:bodyPr/>
+        <a:p>
+          <a:endParaRPr lang="en-US"/>
+        </a:p>
+      </dgm:t>
+    </dgm:pt>
+    <dgm:pt modelId="{B3A60D08-4CF1-4AD3-A554-8DA1472F6362}" cxnId="{EB280F5E-EE85-4BAC-A296-B994C0FFB6A1}" type="sibTrans">
+      <dgm:prSet/>
+      <dgm:spPr/>
+      <dgm:t>
+        <a:bodyPr/>
+        <a:p>
+          <a:endParaRPr lang="en-US"/>
+        </a:p>
+      </dgm:t>
+    </dgm:pt>
+    <dgm:pt modelId="{9B99C3CE-0550-4254-B164-BB9424E18E56}">
+      <dgm:prSet phldrT="[Text]" phldr="false" custT="false"/>
+      <dgm:spPr/>
+      <dgm:t>
+        <a:bodyPr vert="horz" wrap="square"/>
+        <a:p>
+          <a:pPr>
+            <a:lnSpc>
+              <a:spcPct val="100000"/>
+            </a:lnSpc>
+            <a:spcBef>
+              <a:spcPct val="0"/>
+            </a:spcBef>
+            <a:spcAft>
+              <a:spcPct val="35000"/>
+            </a:spcAft>
+          </a:pPr>
+          <a:r>
+            <a:rPr lang="en-US" altLang="en-US"/>
+            <a:t>Documentazione</a:t>
+          </a:r>
+          <a:r>
+            <a:rPr lang="en-US" altLang="en-US"/>
+            <a:t/>
+          </a:r>
+          <a:endParaRPr lang="en-US" altLang="en-US"/>
+        </a:p>
+      </dgm:t>
+    </dgm:pt>
+    <dgm:pt modelId="{CF18C7ED-262E-47EB-A8BC-BC18A4B2756C}" cxnId="{700F5984-0F48-4168-9326-A096CC609B76}" type="parTrans">
+      <dgm:prSet/>
+      <dgm:spPr/>
+      <dgm:t>
+        <a:bodyPr/>
+        <a:p>
+          <a:endParaRPr lang="en-US"/>
+        </a:p>
+      </dgm:t>
+    </dgm:pt>
+    <dgm:pt modelId="{C20DFEDB-A5DA-48B1-860C-C64E9FB9889D}" cxnId="{700F5984-0F48-4168-9326-A096CC609B76}" type="sibTrans">
+      <dgm:prSet/>
+      <dgm:spPr/>
+      <dgm:t>
+        <a:bodyPr/>
+        <a:p>
+          <a:endParaRPr lang="en-US"/>
+        </a:p>
+      </dgm:t>
+    </dgm:pt>
+    <dgm:pt modelId="{4DBF9FC0-7F11-49D1-A13A-F9EF16035E78}">
+      <dgm:prSet phldrT="[Text]" phldr="false" custT="false"/>
+      <dgm:spPr/>
+      <dgm:t>
+        <a:bodyPr vert="horz" wrap="square"/>
+        <a:p>
+          <a:pPr>
+            <a:lnSpc>
+              <a:spcPct val="100000"/>
+            </a:lnSpc>
+            <a:spcBef>
+              <a:spcPct val="0"/>
+            </a:spcBef>
+            <a:spcAft>
+              <a:spcPct val="35000"/>
+            </a:spcAft>
+          </a:pPr>
+          <a:r>
+            <a:rPr lang="en-US" altLang="en-US"/>
+            <a:t>Formulazione dell’ipotesi</a:t>
+          </a:r>
+          <a:endParaRPr lang="en-US" altLang="en-US"/>
+        </a:p>
+      </dgm:t>
+    </dgm:pt>
+    <dgm:pt modelId="{716438C4-1259-4C94-B7A8-3756D5685E48}" cxnId="{551AA8AF-4A93-4C7B-9822-042263F60660}" type="parTrans">
+      <dgm:prSet/>
+      <dgm:spPr/>
+      <dgm:t>
+        <a:bodyPr/>
+        <a:p>
+          <a:endParaRPr lang="en-US"/>
+        </a:p>
+      </dgm:t>
+    </dgm:pt>
+    <dgm:pt modelId="{627790A7-E5AF-4DEF-9847-DE068ABD657B}" cxnId="{551AA8AF-4A93-4C7B-9822-042263F60660}" type="sibTrans">
+      <dgm:prSet/>
+      <dgm:spPr/>
+      <dgm:t>
+        <a:bodyPr/>
+        <a:p>
+          <a:endParaRPr lang="en-US"/>
+        </a:p>
+      </dgm:t>
+    </dgm:pt>
+    <dgm:pt modelId="{3B57DE3A-D0CA-4A4A-A50B-01FBE031AA69}">
+      <dgm:prSet phldrT="[Text]" phldr="false" custT="false"/>
+      <dgm:spPr/>
+      <dgm:t>
+        <a:bodyPr vert="horz" wrap="square"/>
+        <a:p>
+          <a:pPr>
+            <a:lnSpc>
+              <a:spcPct val="100000"/>
+            </a:lnSpc>
+            <a:spcBef>
+              <a:spcPct val="0"/>
+            </a:spcBef>
+            <a:spcAft>
+              <a:spcPct val="35000"/>
+            </a:spcAft>
+          </a:pPr>
+          <a:r>
+            <a:rPr lang="en-US" altLang="en-US"/>
+            <a:t>Verifica sperimentale</a:t>
+          </a:r>
+          <a:endParaRPr lang="en-US" altLang="en-US"/>
+        </a:p>
+      </dgm:t>
+    </dgm:pt>
+    <dgm:pt modelId="{98FA3677-4FAE-4C5E-B3CE-CF3B6D80F4A1}" cxnId="{849CC6C0-17F5-422D-8068-606495A4D1CE}" type="parTrans">
+      <dgm:prSet/>
+      <dgm:spPr/>
+      <dgm:t>
+        <a:bodyPr/>
+        <a:p>
+          <a:endParaRPr lang="en-US"/>
+        </a:p>
+      </dgm:t>
+    </dgm:pt>
+    <dgm:pt modelId="{D4875198-FB6C-46A1-9EC3-6A21426D178B}" cxnId="{849CC6C0-17F5-422D-8068-606495A4D1CE}" type="sibTrans">
+      <dgm:prSet/>
+      <dgm:spPr/>
+      <dgm:t>
+        <a:bodyPr/>
+        <a:p>
+          <a:endParaRPr lang="en-US"/>
+        </a:p>
+      </dgm:t>
+    </dgm:pt>
+    <dgm:pt modelId="{35D741BB-77C5-49F1-844D-6D9105C84015}">
+      <dgm:prSet phldr="false" custT="false"/>
+      <dgm:spPr/>
+      <dgm:t>
+        <a:bodyPr vert="horz" wrap="square"/>
+        <a:p>
+          <a:pPr>
+            <a:lnSpc>
+              <a:spcPct val="100000"/>
+            </a:lnSpc>
+            <a:spcBef>
+              <a:spcPct val="0"/>
+            </a:spcBef>
+            <a:spcAft>
+              <a:spcPct val="35000"/>
+            </a:spcAft>
+          </a:pPr>
+          <a:r>
+            <a:rPr lang="en-US"/>
+            <a:t>Analisi dei dati</a:t>
+          </a:r>
+          <a:endParaRPr lang="en-US"/>
+        </a:p>
+      </dgm:t>
+    </dgm:pt>
+    <dgm:pt modelId="{33D4312F-F820-4195-A2D5-6AEA8F459136}" cxnId="{59D37CAD-1177-4C0E-B59E-DFE527BF5D07}" type="parTrans">
+      <dgm:prSet/>
+      <dgm:spPr/>
+    </dgm:pt>
+    <dgm:pt modelId="{8AAF24B2-DCD8-49F5-B32A-E5896BB6673B}" cxnId="{59D37CAD-1177-4C0E-B59E-DFE527BF5D07}" type="sibTrans">
+      <dgm:prSet/>
+      <dgm:spPr/>
+    </dgm:pt>
+    <dgm:pt modelId="{0CBCCB41-4C6E-46D9-9AF7-878DCABCD693}">
+      <dgm:prSet phldr="false" custT="false"/>
+      <dgm:spPr/>
+      <dgm:t>
+        <a:bodyPr vert="horz" wrap="square"/>
+        <a:p>
+          <a:pPr>
+            <a:lnSpc>
+              <a:spcPct val="100000"/>
+            </a:lnSpc>
+            <a:spcBef>
+              <a:spcPct val="0"/>
+            </a:spcBef>
+            <a:spcAft>
+              <a:spcPct val="35000"/>
+            </a:spcAft>
+          </a:pPr>
+          <a:r>
+            <a:rPr lang="en-US"/>
+            <a:t>Ipotesi confermata</a:t>
+          </a:r>
+          <a:endParaRPr lang="en-US"/>
+        </a:p>
+      </dgm:t>
+    </dgm:pt>
+    <dgm:pt modelId="{13CA5603-C15B-4BC2-846F-2A9C570D98EA}" cxnId="{9C14E2BA-FC73-4EB0-AA81-D6579F413EC6}" type="parTrans">
+      <dgm:prSet/>
+      <dgm:spPr/>
+    </dgm:pt>
+    <dgm:pt modelId="{21861301-58AD-42B8-B900-8AD351B4E506}" cxnId="{9C14E2BA-FC73-4EB0-AA81-D6579F413EC6}" type="sibTrans">
+      <dgm:prSet/>
+      <dgm:spPr/>
+    </dgm:pt>
+    <dgm:pt modelId="{B064E4B4-A932-4043-89FB-F01D06BADBCD}">
+      <dgm:prSet phldr="false" custT="false"/>
+      <dgm:spPr/>
+      <dgm:t>
+        <a:bodyPr vert="horz" wrap="square"/>
+        <a:p>
+          <a:pPr>
+            <a:lnSpc>
+              <a:spcPct val="100000"/>
+            </a:lnSpc>
+            <a:spcBef>
+              <a:spcPct val="0"/>
+            </a:spcBef>
+            <a:spcAft>
+              <a:spcPct val="35000"/>
+            </a:spcAft>
+          </a:pPr>
+          <a:r>
+            <a:rPr lang="en-US"/>
+            <a:t>Comunicazione dei risultati</a:t>
+          </a:r>
+          <a:endParaRPr lang="en-US"/>
+        </a:p>
+      </dgm:t>
+    </dgm:pt>
+    <dgm:pt modelId="{E225B113-D57E-4E49-8511-231E27AB1E97}" cxnId="{FD79F4A0-0842-4529-B987-09FE0D371FB4}" type="parTrans">
+      <dgm:prSet/>
+      <dgm:spPr/>
+    </dgm:pt>
+    <dgm:pt modelId="{87224BD6-8B6A-4332-8A32-C10B20A8B3FA}" cxnId="{FD79F4A0-0842-4529-B987-09FE0D371FB4}" type="sibTrans">
+      <dgm:prSet/>
+      <dgm:spPr/>
+    </dgm:pt>
+    <dgm:pt modelId="{E039BAFA-2E94-4454-BD39-E719F745DFD2}">
+      <dgm:prSet phldr="false" custT="false"/>
+      <dgm:spPr/>
+      <dgm:t>
+        <a:bodyPr vert="horz" wrap="square"/>
+        <a:p>
+          <a:pPr>
+            <a:lnSpc>
+              <a:spcPct val="100000"/>
+            </a:lnSpc>
+            <a:spcBef>
+              <a:spcPct val="0"/>
+            </a:spcBef>
+            <a:spcAft>
+              <a:spcPct val="35000"/>
+            </a:spcAft>
+          </a:pPr>
+          <a:r>
+            <a:rPr lang="en-US"/>
+            <a:t>Ricerche e verifiche ulteriori</a:t>
+          </a:r>
+          <a:endParaRPr lang="en-US"/>
+        </a:p>
+      </dgm:t>
+    </dgm:pt>
+    <dgm:pt modelId="{5BAA3B82-568B-45D6-B99E-62F1B6CC7763}" cxnId="{487CF02D-7CE3-4CF6-905F-487292164C86}" type="parTrans">
+      <dgm:prSet/>
+      <dgm:spPr/>
+    </dgm:pt>
+    <dgm:pt modelId="{7D58E61C-4C21-4EF8-A4A6-CE9F1EA7F074}" cxnId="{487CF02D-7CE3-4CF6-905F-487292164C86}" type="sibTrans">
+      <dgm:prSet/>
+      <dgm:spPr/>
+    </dgm:pt>
+    <dgm:pt modelId="{528A2CAA-AD05-47AF-9747-E266F390039B}">
+      <dgm:prSet phldr="false" custT="false"/>
+      <dgm:spPr/>
+      <dgm:t>
+        <a:bodyPr vert="horz" wrap="square"/>
+        <a:p>
+          <a:pPr>
+            <a:lnSpc>
+              <a:spcPct val="100000"/>
+            </a:lnSpc>
+            <a:spcBef>
+              <a:spcPct val="0"/>
+            </a:spcBef>
+            <a:spcAft>
+              <a:spcPct val="35000"/>
+            </a:spcAft>
+          </a:pPr>
+          <a:r>
+            <a:rPr lang="en-US" cap="all">
+              <a:uFillTx/>
+            </a:rPr>
+            <a:t>Formulazione della legge</a:t>
+          </a:r>
+          <a:r>
+            <a:rPr lang="en-US" cap="all">
+              <a:uFillTx/>
+            </a:rPr>
+            <a:t/>
+          </a:r>
+          <a:endParaRPr lang="en-US" cap="all">
+            <a:uFillTx/>
+          </a:endParaRPr>
+        </a:p>
+      </dgm:t>
+    </dgm:pt>
+    <dgm:pt modelId="{7BBE736D-581B-4263-A589-6BC58CEB79A4}" cxnId="{3561C6DB-4FEC-454E-BD5A-0CC9C0D9F7CA}" type="parTrans">
+      <dgm:prSet/>
+      <dgm:spPr/>
+    </dgm:pt>
+    <dgm:pt modelId="{FF482F08-D34D-4229-B509-0FBCB03C4E9E}" cxnId="{3561C6DB-4FEC-454E-BD5A-0CC9C0D9F7CA}" type="sibTrans">
+      <dgm:prSet/>
+      <dgm:spPr/>
+    </dgm:pt>
+    <dgm:pt modelId="{1623B4C5-2499-4637-B07C-6AE8AE2BD718}" type="pres">
+      <dgm:prSet presAssocID="{4BE40EF7-4FDB-46DC-AD5C-7AA9927BCDC4}" presName="Name0" presStyleCnt="0">
+        <dgm:presLayoutVars>
+          <dgm:dir/>
+          <dgm:resizeHandles val="exact"/>
+        </dgm:presLayoutVars>
+      </dgm:prSet>
+      <dgm:spPr/>
+    </dgm:pt>
+    <dgm:pt modelId="{2FBE2C1E-1D94-400F-A227-985D4DA10085}" type="pres">
+      <dgm:prSet presAssocID="{79A907BE-6A57-46F9-949B-2F83975E5013}" presName="node" presStyleLbl="node1" presStyleIdx="0" presStyleCnt="10">
+        <dgm:presLayoutVars>
+          <dgm:bulletEnabled val="true"/>
+        </dgm:presLayoutVars>
+      </dgm:prSet>
+      <dgm:spPr/>
+    </dgm:pt>
+    <dgm:pt modelId="{9F73252C-5345-45F1-A6FA-69E44781CCB0}" type="pres">
+      <dgm:prSet presAssocID="{6E764295-1C97-4A8A-BB23-8F6587B65D20}" presName="sibTrans" presStyleLbl="sibTrans1D1" presStyleIdx="0" presStyleCnt="9"/>
+      <dgm:spPr/>
+    </dgm:pt>
+    <dgm:pt modelId="{0A91809B-8299-4CB8-B3C9-28D901126CE1}" type="pres">
+      <dgm:prSet presAssocID="{6E764295-1C97-4A8A-BB23-8F6587B65D20}" presName="connectorText" presStyleCnt="0"/>
+      <dgm:spPr/>
+    </dgm:pt>
+    <dgm:pt modelId="{0482690C-586E-41D6-8B40-4CA7581A9CE9}" type="pres">
+      <dgm:prSet presAssocID="{047E9EF6-99D9-47D4-8421-7851F36A512F}" presName="node" presStyleLbl="node1" presStyleIdx="1" presStyleCnt="10">
+        <dgm:presLayoutVars>
+          <dgm:bulletEnabled val="true"/>
+        </dgm:presLayoutVars>
+      </dgm:prSet>
+      <dgm:spPr/>
+    </dgm:pt>
+    <dgm:pt modelId="{EBB69596-36AB-40F1-91C5-FC3350A00067}" type="pres">
+      <dgm:prSet presAssocID="{B3A60D08-4CF1-4AD3-A554-8DA1472F6362}" presName="sibTrans" presStyleLbl="sibTrans1D1" presStyleIdx="1" presStyleCnt="9"/>
+      <dgm:spPr/>
+    </dgm:pt>
+    <dgm:pt modelId="{9F0FF7A9-40E9-4C02-BFFF-6F0641C2389B}" type="pres">
+      <dgm:prSet presAssocID="{B3A60D08-4CF1-4AD3-A554-8DA1472F6362}" presName="connectorText" presStyleCnt="0"/>
+      <dgm:spPr/>
+    </dgm:pt>
+    <dgm:pt modelId="{E5145E43-B450-47CE-B1E5-1482BCF4071D}" type="pres">
+      <dgm:prSet presAssocID="{9B99C3CE-0550-4254-B164-BB9424E18E56}" presName="node" presStyleLbl="node1" presStyleIdx="2" presStyleCnt="10">
+        <dgm:presLayoutVars>
+          <dgm:bulletEnabled val="true"/>
+        </dgm:presLayoutVars>
+      </dgm:prSet>
+      <dgm:spPr/>
+    </dgm:pt>
+    <dgm:pt modelId="{31F3FE5F-74B2-48F8-89DC-AE29DBB498B0}" type="pres">
+      <dgm:prSet presAssocID="{C20DFEDB-A5DA-48B1-860C-C64E9FB9889D}" presName="sibTrans" presStyleLbl="sibTrans1D1" presStyleIdx="2" presStyleCnt="9"/>
+      <dgm:spPr/>
+    </dgm:pt>
+    <dgm:pt modelId="{EF27A438-6BA1-43B2-9139-DBAF3CBBEF89}" type="pres">
+      <dgm:prSet presAssocID="{C20DFEDB-A5DA-48B1-860C-C64E9FB9889D}" presName="connectorText" presStyleCnt="0"/>
+      <dgm:spPr/>
+    </dgm:pt>
+    <dgm:pt modelId="{13492D71-E670-42C9-A619-1DE9B5F887F1}" type="pres">
+      <dgm:prSet presAssocID="{4DBF9FC0-7F11-49D1-A13A-F9EF16035E78}" presName="node" presStyleLbl="node1" presStyleIdx="3" presStyleCnt="10">
+        <dgm:presLayoutVars>
+          <dgm:bulletEnabled val="true"/>
+        </dgm:presLayoutVars>
+      </dgm:prSet>
+      <dgm:spPr/>
+    </dgm:pt>
+    <dgm:pt modelId="{8C52703D-FEAE-4AA9-949F-F5EC21A49406}" type="pres">
+      <dgm:prSet presAssocID="{627790A7-E5AF-4DEF-9847-DE068ABD657B}" presName="sibTrans" presStyleLbl="sibTrans1D1" presStyleIdx="3" presStyleCnt="9"/>
+      <dgm:spPr/>
+    </dgm:pt>
+    <dgm:pt modelId="{25682F77-3616-4F0B-8522-3E0CC5E8212D}" type="pres">
+      <dgm:prSet presAssocID="{627790A7-E5AF-4DEF-9847-DE068ABD657B}" presName="connectorText" presStyleCnt="0"/>
+      <dgm:spPr/>
+    </dgm:pt>
+    <dgm:pt modelId="{F80816D7-392E-4741-B9A3-C73586F7EC67}" type="pres">
+      <dgm:prSet presAssocID="{3B57DE3A-D0CA-4A4A-A50B-01FBE031AA69}" presName="node" presStyleLbl="node1" presStyleIdx="4" presStyleCnt="10">
+        <dgm:presLayoutVars>
+          <dgm:bulletEnabled val="true"/>
+        </dgm:presLayoutVars>
+      </dgm:prSet>
+      <dgm:spPr/>
+    </dgm:pt>
+    <dgm:pt modelId="{3D35D559-FC15-4723-8F76-803A74E52A30}" type="pres">
+      <dgm:prSet presAssocID="{D4875198-FB6C-46A1-9EC3-6A21426D178B}" presName="sibTrans" presStyleLbl="sibTrans1D1" presStyleIdx="4" presStyleCnt="9"/>
+      <dgm:spPr/>
+    </dgm:pt>
+    <dgm:pt modelId="{3057F46B-8FE8-4F2A-9C39-D9BB70E16CC4}" type="pres">
+      <dgm:prSet presAssocID="{D4875198-FB6C-46A1-9EC3-6A21426D178B}" presName="connectorText" presStyleCnt="0"/>
+      <dgm:spPr/>
+    </dgm:pt>
+    <dgm:pt modelId="{FBA0A77B-8352-4C42-B7D5-7C83363A7874}" type="pres">
+      <dgm:prSet presAssocID="{35D741BB-77C5-49F1-844D-6D9105C84015}" presName="node" presStyleLbl="node1" presStyleIdx="5" presStyleCnt="10">
+        <dgm:presLayoutVars>
+          <dgm:bulletEnabled val="true"/>
+        </dgm:presLayoutVars>
+      </dgm:prSet>
+      <dgm:spPr/>
+    </dgm:pt>
+    <dgm:pt modelId="{AF0F3B5A-6BF1-4C0D-ACE3-FC3229887631}" type="pres">
+      <dgm:prSet presAssocID="{8AAF24B2-DCD8-49F5-B32A-E5896BB6673B}" presName="sibTrans" presStyleLbl="sibTrans1D1" presStyleIdx="5" presStyleCnt="9"/>
+      <dgm:spPr/>
+    </dgm:pt>
+    <dgm:pt modelId="{E6FC4B6E-D89F-427D-9D2B-82937C0C44CB}" type="pres">
+      <dgm:prSet presAssocID="{8AAF24B2-DCD8-49F5-B32A-E5896BB6673B}" presName="connectorText" presStyleCnt="0"/>
+      <dgm:spPr/>
+    </dgm:pt>
+    <dgm:pt modelId="{073A29C7-3BC3-42A7-AA3F-6B8157543E42}" type="pres">
+      <dgm:prSet presAssocID="{0CBCCB41-4C6E-46D9-9AF7-878DCABCD693}" presName="node" presStyleLbl="node1" presStyleIdx="6" presStyleCnt="10">
+        <dgm:presLayoutVars>
+          <dgm:bulletEnabled val="true"/>
+        </dgm:presLayoutVars>
+      </dgm:prSet>
+      <dgm:spPr/>
+    </dgm:pt>
+    <dgm:pt modelId="{54CDD26F-E6A2-4870-924B-05FF04E085DB}" type="pres">
+      <dgm:prSet presAssocID="{21861301-58AD-42B8-B900-8AD351B4E506}" presName="sibTrans" presStyleLbl="sibTrans1D1" presStyleIdx="6" presStyleCnt="9"/>
+      <dgm:spPr/>
+    </dgm:pt>
+    <dgm:pt modelId="{6C27CAF1-3033-404D-B882-95D8BC58DF2D}" type="pres">
+      <dgm:prSet presAssocID="{21861301-58AD-42B8-B900-8AD351B4E506}" presName="connectorText" presStyleCnt="0"/>
+      <dgm:spPr/>
+    </dgm:pt>
+    <dgm:pt modelId="{7B777F2E-D527-4A8C-B26F-6E19ADC1AD96}" type="pres">
+      <dgm:prSet presAssocID="{B064E4B4-A932-4043-89FB-F01D06BADBCD}" presName="node" presStyleLbl="node1" presStyleIdx="7" presStyleCnt="10">
+        <dgm:presLayoutVars>
+          <dgm:bulletEnabled val="true"/>
+        </dgm:presLayoutVars>
+      </dgm:prSet>
+      <dgm:spPr/>
+    </dgm:pt>
+    <dgm:pt modelId="{2CDEA325-E5C0-43C8-BD90-51BC76F2EA8B}" type="pres">
+      <dgm:prSet presAssocID="{87224BD6-8B6A-4332-8A32-C10B20A8B3FA}" presName="sibTrans" presStyleLbl="sibTrans1D1" presStyleIdx="7" presStyleCnt="9"/>
+      <dgm:spPr/>
+    </dgm:pt>
+    <dgm:pt modelId="{8A3BA126-A69D-46AE-BFC5-B9721275CE59}" type="pres">
+      <dgm:prSet presAssocID="{87224BD6-8B6A-4332-8A32-C10B20A8B3FA}" presName="connectorText" presStyleCnt="0"/>
+      <dgm:spPr/>
+    </dgm:pt>
+    <dgm:pt modelId="{9A9EA554-7DA0-401D-AEA2-6155D0FA75D9}" type="pres">
+      <dgm:prSet presAssocID="{E039BAFA-2E94-4454-BD39-E719F745DFD2}" presName="node" presStyleLbl="node1" presStyleIdx="8" presStyleCnt="10">
+        <dgm:presLayoutVars>
+          <dgm:bulletEnabled val="true"/>
+        </dgm:presLayoutVars>
+      </dgm:prSet>
+      <dgm:spPr/>
+    </dgm:pt>
+    <dgm:pt modelId="{87A2B6C2-D221-4807-B0CE-037D50AF34AD}" type="pres">
+      <dgm:prSet presAssocID="{7D58E61C-4C21-4EF8-A4A6-CE9F1EA7F074}" presName="sibTrans" presStyleLbl="sibTrans1D1" presStyleIdx="8" presStyleCnt="9"/>
+      <dgm:spPr/>
+    </dgm:pt>
+    <dgm:pt modelId="{3C6AC5CE-4067-41EE-8E93-71E8FDCD9B41}" type="pres">
+      <dgm:prSet presAssocID="{7D58E61C-4C21-4EF8-A4A6-CE9F1EA7F074}" presName="connectorText" presStyleCnt="0"/>
+      <dgm:spPr/>
+    </dgm:pt>
+    <dgm:pt modelId="{657023FC-9007-4B07-A54B-73FC1F99DD9A}" type="pres">
+      <dgm:prSet presAssocID="{528A2CAA-AD05-47AF-9747-E266F390039B}" presName="node" presStyleLbl="node1" presStyleIdx="9" presStyleCnt="10">
+        <dgm:presLayoutVars>
+          <dgm:bulletEnabled val="true"/>
+        </dgm:presLayoutVars>
+      </dgm:prSet>
+      <dgm:spPr/>
+    </dgm:pt>
+  </dgm:ptLst>
+  <dgm:cxnLst>
+    <dgm:cxn modelId="{2C8D89BD-E59B-4414-8B24-7BBA3B03E0DC}" srcId="{4BE40EF7-4FDB-46DC-AD5C-7AA9927BCDC4}" destId="{79A907BE-6A57-46F9-949B-2F83975E5013}" srcOrd="0" destOrd="0" parTransId="{27508ADE-09B9-4692-B3B1-997C0A038367}" sibTransId="{6E764295-1C97-4A8A-BB23-8F6587B65D20}"/>
+    <dgm:cxn modelId="{EB280F5E-EE85-4BAC-A296-B994C0FFB6A1}" srcId="{4BE40EF7-4FDB-46DC-AD5C-7AA9927BCDC4}" destId="{047E9EF6-99D9-47D4-8421-7851F36A512F}" srcOrd="1" destOrd="0" parTransId="{2AC7BC3F-1829-4928-9FDD-1BD085861192}" sibTransId="{B3A60D08-4CF1-4AD3-A554-8DA1472F6362}"/>
+    <dgm:cxn modelId="{700F5984-0F48-4168-9326-A096CC609B76}" srcId="{4BE40EF7-4FDB-46DC-AD5C-7AA9927BCDC4}" destId="{9B99C3CE-0550-4254-B164-BB9424E18E56}" srcOrd="2" destOrd="0" parTransId="{CF18C7ED-262E-47EB-A8BC-BC18A4B2756C}" sibTransId="{C20DFEDB-A5DA-48B1-860C-C64E9FB9889D}"/>
+    <dgm:cxn modelId="{551AA8AF-4A93-4C7B-9822-042263F60660}" srcId="{4BE40EF7-4FDB-46DC-AD5C-7AA9927BCDC4}" destId="{4DBF9FC0-7F11-49D1-A13A-F9EF16035E78}" srcOrd="3" destOrd="0" parTransId="{716438C4-1259-4C94-B7A8-3756D5685E48}" sibTransId="{627790A7-E5AF-4DEF-9847-DE068ABD657B}"/>
+    <dgm:cxn modelId="{849CC6C0-17F5-422D-8068-606495A4D1CE}" srcId="{4BE40EF7-4FDB-46DC-AD5C-7AA9927BCDC4}" destId="{3B57DE3A-D0CA-4A4A-A50B-01FBE031AA69}" srcOrd="4" destOrd="0" parTransId="{98FA3677-4FAE-4C5E-B3CE-CF3B6D80F4A1}" sibTransId="{D4875198-FB6C-46A1-9EC3-6A21426D178B}"/>
+    <dgm:cxn modelId="{59D37CAD-1177-4C0E-B59E-DFE527BF5D07}" srcId="{4BE40EF7-4FDB-46DC-AD5C-7AA9927BCDC4}" destId="{35D741BB-77C5-49F1-844D-6D9105C84015}" srcOrd="5" destOrd="0" parTransId="{33D4312F-F820-4195-A2D5-6AEA8F459136}" sibTransId="{8AAF24B2-DCD8-49F5-B32A-E5896BB6673B}"/>
+    <dgm:cxn modelId="{9C14E2BA-FC73-4EB0-AA81-D6579F413EC6}" srcId="{4BE40EF7-4FDB-46DC-AD5C-7AA9927BCDC4}" destId="{0CBCCB41-4C6E-46D9-9AF7-878DCABCD693}" srcOrd="6" destOrd="0" parTransId="{13CA5603-C15B-4BC2-846F-2A9C570D98EA}" sibTransId="{21861301-58AD-42B8-B900-8AD351B4E506}"/>
+    <dgm:cxn modelId="{FD79F4A0-0842-4529-B987-09FE0D371FB4}" srcId="{4BE40EF7-4FDB-46DC-AD5C-7AA9927BCDC4}" destId="{B064E4B4-A932-4043-89FB-F01D06BADBCD}" srcOrd="7" destOrd="0" parTransId="{E225B113-D57E-4E49-8511-231E27AB1E97}" sibTransId="{87224BD6-8B6A-4332-8A32-C10B20A8B3FA}"/>
+    <dgm:cxn modelId="{487CF02D-7CE3-4CF6-905F-487292164C86}" srcId="{4BE40EF7-4FDB-46DC-AD5C-7AA9927BCDC4}" destId="{E039BAFA-2E94-4454-BD39-E719F745DFD2}" srcOrd="8" destOrd="0" parTransId="{5BAA3B82-568B-45D6-B99E-62F1B6CC7763}" sibTransId="{7D58E61C-4C21-4EF8-A4A6-CE9F1EA7F074}"/>
+    <dgm:cxn modelId="{3561C6DB-4FEC-454E-BD5A-0CC9C0D9F7CA}" srcId="{4BE40EF7-4FDB-46DC-AD5C-7AA9927BCDC4}" destId="{528A2CAA-AD05-47AF-9747-E266F390039B}" srcOrd="9" destOrd="0" parTransId="{7BBE736D-581B-4263-A589-6BC58CEB79A4}" sibTransId="{FF482F08-D34D-4229-B509-0FBCB03C4E9E}"/>
+    <dgm:cxn modelId="{275BE831-AD0D-4BD8-BBCE-BFF89971F22E}" type="presOf" srcId="{4BE40EF7-4FDB-46DC-AD5C-7AA9927BCDC4}" destId="{1623B4C5-2499-4637-B07C-6AE8AE2BD718}" srcOrd="0" destOrd="0" presId="urn:microsoft.com/office/officeart/2005/8/layout/bProcess3"/>
+    <dgm:cxn modelId="{89A2C3B8-0EF8-41F0-A849-5A9ACBD509E5}" type="presParOf" srcId="{1623B4C5-2499-4637-B07C-6AE8AE2BD718}" destId="{2FBE2C1E-1D94-400F-A227-985D4DA10085}" srcOrd="0" destOrd="0" presId="urn:microsoft.com/office/officeart/2005/8/layout/bProcess3"/>
+    <dgm:cxn modelId="{CE36B8BD-4488-4287-B302-1C306275E4FB}" type="presOf" srcId="{79A907BE-6A57-46F9-949B-2F83975E5013}" destId="{2FBE2C1E-1D94-400F-A227-985D4DA10085}" srcOrd="0" destOrd="0" presId="urn:microsoft.com/office/officeart/2005/8/layout/bProcess3"/>
+    <dgm:cxn modelId="{D3622E04-DE8F-4C52-BAED-DCDE54672384}" type="presParOf" srcId="{1623B4C5-2499-4637-B07C-6AE8AE2BD718}" destId="{9F73252C-5345-45F1-A6FA-69E44781CCB0}" srcOrd="1" destOrd="0" presId="urn:microsoft.com/office/officeart/2005/8/layout/bProcess3"/>
+    <dgm:cxn modelId="{4ADD6546-C669-432B-94AD-2E021F4DB16C}" type="presOf" srcId="{6E764295-1C97-4A8A-BB23-8F6587B65D20}" destId="{9F73252C-5345-45F1-A6FA-69E44781CCB0}" srcOrd="0" destOrd="0" presId="urn:microsoft.com/office/officeart/2005/8/layout/bProcess3"/>
+    <dgm:cxn modelId="{F312C004-29EC-4356-921E-6906D26EF097}" type="presParOf" srcId="{9F73252C-5345-45F1-A6FA-69E44781CCB0}" destId="{0A91809B-8299-4CB8-B3C9-28D901126CE1}" srcOrd="0" destOrd="1" presId="urn:microsoft.com/office/officeart/2005/8/layout/bProcess3"/>
+    <dgm:cxn modelId="{E8D4AFD7-59E8-4760-8A5A-47174F74A17A}" type="presOf" srcId="{6E764295-1C97-4A8A-BB23-8F6587B65D20}" destId="{0A91809B-8299-4CB8-B3C9-28D901126CE1}" srcOrd="1" destOrd="0" presId="urn:microsoft.com/office/officeart/2005/8/layout/bProcess3"/>
+    <dgm:cxn modelId="{FCEBE120-A4D8-4D3A-957B-AF623FF54AF1}" type="presParOf" srcId="{1623B4C5-2499-4637-B07C-6AE8AE2BD718}" destId="{0482690C-586E-41D6-8B40-4CA7581A9CE9}" srcOrd="2" destOrd="0" presId="urn:microsoft.com/office/officeart/2005/8/layout/bProcess3"/>
+    <dgm:cxn modelId="{8C05D957-0722-45B3-8835-50E08251993E}" type="presOf" srcId="{047E9EF6-99D9-47D4-8421-7851F36A512F}" destId="{0482690C-586E-41D6-8B40-4CA7581A9CE9}" srcOrd="0" destOrd="0" presId="urn:microsoft.com/office/officeart/2005/8/layout/bProcess3"/>
+    <dgm:cxn modelId="{435AAAC1-70B6-4E86-9F89-92198429539E}" type="presParOf" srcId="{1623B4C5-2499-4637-B07C-6AE8AE2BD718}" destId="{EBB69596-36AB-40F1-91C5-FC3350A00067}" srcOrd="3" destOrd="0" presId="urn:microsoft.com/office/officeart/2005/8/layout/bProcess3"/>
+    <dgm:cxn modelId="{8D4FC6C9-00A0-4D8F-9ECE-4CBF9EE4200B}" type="presOf" srcId="{B3A60D08-4CF1-4AD3-A554-8DA1472F6362}" destId="{EBB69596-36AB-40F1-91C5-FC3350A00067}" srcOrd="0" destOrd="0" presId="urn:microsoft.com/office/officeart/2005/8/layout/bProcess3"/>
+    <dgm:cxn modelId="{E38CC75D-23BC-4EE3-9262-38ED585B7C78}" type="presParOf" srcId="{EBB69596-36AB-40F1-91C5-FC3350A00067}" destId="{9F0FF7A9-40E9-4C02-BFFF-6F0641C2389B}" srcOrd="0" destOrd="3" presId="urn:microsoft.com/office/officeart/2005/8/layout/bProcess3"/>
+    <dgm:cxn modelId="{2B8263EF-912E-4EC7-9ABD-ADBCE3CE9825}" type="presOf" srcId="{B3A60D08-4CF1-4AD3-A554-8DA1472F6362}" destId="{9F0FF7A9-40E9-4C02-BFFF-6F0641C2389B}" srcOrd="1" destOrd="0" presId="urn:microsoft.com/office/officeart/2005/8/layout/bProcess3"/>
+    <dgm:cxn modelId="{AC712006-3D0E-460A-B6A6-DE6BF79F35CE}" type="presParOf" srcId="{1623B4C5-2499-4637-B07C-6AE8AE2BD718}" destId="{E5145E43-B450-47CE-B1E5-1482BCF4071D}" srcOrd="4" destOrd="0" presId="urn:microsoft.com/office/officeart/2005/8/layout/bProcess3"/>
+    <dgm:cxn modelId="{39823F3D-D2AD-463E-8E5B-53EE28837663}" type="presOf" srcId="{9B99C3CE-0550-4254-B164-BB9424E18E56}" destId="{E5145E43-B450-47CE-B1E5-1482BCF4071D}" srcOrd="0" destOrd="0" presId="urn:microsoft.com/office/officeart/2005/8/layout/bProcess3"/>
+    <dgm:cxn modelId="{B7D202CF-9994-4994-9FF3-627F791355AE}" type="presParOf" srcId="{1623B4C5-2499-4637-B07C-6AE8AE2BD718}" destId="{31F3FE5F-74B2-48F8-89DC-AE29DBB498B0}" srcOrd="5" destOrd="0" presId="urn:microsoft.com/office/officeart/2005/8/layout/bProcess3"/>
+    <dgm:cxn modelId="{09D69F85-90AF-4F8C-8881-FE6F9779FB40}" type="presOf" srcId="{C20DFEDB-A5DA-48B1-860C-C64E9FB9889D}" destId="{31F3FE5F-74B2-48F8-89DC-AE29DBB498B0}" srcOrd="0" destOrd="0" presId="urn:microsoft.com/office/officeart/2005/8/layout/bProcess3"/>
+    <dgm:cxn modelId="{B466427A-F3D2-4CFE-A603-C69FE608714A}" type="presParOf" srcId="{31F3FE5F-74B2-48F8-89DC-AE29DBB498B0}" destId="{EF27A438-6BA1-43B2-9139-DBAF3CBBEF89}" srcOrd="0" destOrd="5" presId="urn:microsoft.com/office/officeart/2005/8/layout/bProcess3"/>
+    <dgm:cxn modelId="{8F728125-251E-451D-9ABF-3DF374B158C7}" type="presOf" srcId="{C20DFEDB-A5DA-48B1-860C-C64E9FB9889D}" destId="{EF27A438-6BA1-43B2-9139-DBAF3CBBEF89}" srcOrd="1" destOrd="0" presId="urn:microsoft.com/office/officeart/2005/8/layout/bProcess3"/>
+    <dgm:cxn modelId="{555229DB-4665-4F95-80F4-87E868E2091C}" type="presParOf" srcId="{1623B4C5-2499-4637-B07C-6AE8AE2BD718}" destId="{13492D71-E670-42C9-A619-1DE9B5F887F1}" srcOrd="6" destOrd="0" presId="urn:microsoft.com/office/officeart/2005/8/layout/bProcess3"/>
+    <dgm:cxn modelId="{D5F55318-2E0C-446E-8899-1D35FDBDFFBE}" type="presOf" srcId="{4DBF9FC0-7F11-49D1-A13A-F9EF16035E78}" destId="{13492D71-E670-42C9-A619-1DE9B5F887F1}" srcOrd="0" destOrd="0" presId="urn:microsoft.com/office/officeart/2005/8/layout/bProcess3"/>
+    <dgm:cxn modelId="{F642FC9B-6E62-48EB-A9B4-64E69661D573}" type="presParOf" srcId="{1623B4C5-2499-4637-B07C-6AE8AE2BD718}" destId="{8C52703D-FEAE-4AA9-949F-F5EC21A49406}" srcOrd="7" destOrd="0" presId="urn:microsoft.com/office/officeart/2005/8/layout/bProcess3"/>
+    <dgm:cxn modelId="{19070686-0F3E-47C8-8783-21B338E22562}" type="presOf" srcId="{627790A7-E5AF-4DEF-9847-DE068ABD657B}" destId="{8C52703D-FEAE-4AA9-949F-F5EC21A49406}" srcOrd="0" destOrd="0" presId="urn:microsoft.com/office/officeart/2005/8/layout/bProcess3"/>
+    <dgm:cxn modelId="{CD50920F-BF2A-4465-93F0-9D807A00168D}" type="presParOf" srcId="{8C52703D-FEAE-4AA9-949F-F5EC21A49406}" destId="{25682F77-3616-4F0B-8522-3E0CC5E8212D}" srcOrd="0" destOrd="7" presId="urn:microsoft.com/office/officeart/2005/8/layout/bProcess3"/>
+    <dgm:cxn modelId="{6CE064D4-4D53-45B0-A150-D62A91458C49}" type="presOf" srcId="{627790A7-E5AF-4DEF-9847-DE068ABD657B}" destId="{25682F77-3616-4F0B-8522-3E0CC5E8212D}" srcOrd="1" destOrd="0" presId="urn:microsoft.com/office/officeart/2005/8/layout/bProcess3"/>
+    <dgm:cxn modelId="{C63C638C-2609-45A5-A26F-B83E9649CBAD}" type="presParOf" srcId="{1623B4C5-2499-4637-B07C-6AE8AE2BD718}" destId="{F80816D7-392E-4741-B9A3-C73586F7EC67}" srcOrd="8" destOrd="0" presId="urn:microsoft.com/office/officeart/2005/8/layout/bProcess3"/>
+    <dgm:cxn modelId="{4AFC2151-FE04-4DFC-9600-8E34939C55C7}" type="presOf" srcId="{3B57DE3A-D0CA-4A4A-A50B-01FBE031AA69}" destId="{F80816D7-392E-4741-B9A3-C73586F7EC67}" srcOrd="0" destOrd="0" presId="urn:microsoft.com/office/officeart/2005/8/layout/bProcess3"/>
+    <dgm:cxn modelId="{197D898F-83C6-4262-9016-E4D768691EFD}" type="presParOf" srcId="{1623B4C5-2499-4637-B07C-6AE8AE2BD718}" destId="{3D35D559-FC15-4723-8F76-803A74E52A30}" srcOrd="9" destOrd="0" presId="urn:microsoft.com/office/officeart/2005/8/layout/bProcess3"/>
+    <dgm:cxn modelId="{4CA1D326-A755-4436-9069-875A800FB9AD}" type="presOf" srcId="{D4875198-FB6C-46A1-9EC3-6A21426D178B}" destId="{3D35D559-FC15-4723-8F76-803A74E52A30}" srcOrd="0" destOrd="0" presId="urn:microsoft.com/office/officeart/2005/8/layout/bProcess3"/>
+    <dgm:cxn modelId="{01EAAE6B-010C-4248-96E5-585903777B0C}" type="presParOf" srcId="{3D35D559-FC15-4723-8F76-803A74E52A30}" destId="{3057F46B-8FE8-4F2A-9C39-D9BB70E16CC4}" srcOrd="0" destOrd="9" presId="urn:microsoft.com/office/officeart/2005/8/layout/bProcess3"/>
+    <dgm:cxn modelId="{0E5E2A16-5F15-4941-B969-D4EC604A2C35}" type="presOf" srcId="{D4875198-FB6C-46A1-9EC3-6A21426D178B}" destId="{3057F46B-8FE8-4F2A-9C39-D9BB70E16CC4}" srcOrd="1" destOrd="0" presId="urn:microsoft.com/office/officeart/2005/8/layout/bProcess3"/>
+    <dgm:cxn modelId="{BA61D0F6-DFCB-468C-9ADA-4DE01118676E}" type="presParOf" srcId="{1623B4C5-2499-4637-B07C-6AE8AE2BD718}" destId="{FBA0A77B-8352-4C42-B7D5-7C83363A7874}" srcOrd="10" destOrd="0" presId="urn:microsoft.com/office/officeart/2005/8/layout/bProcess3"/>
+    <dgm:cxn modelId="{2FD5BD7E-7501-458F-9465-E525BC15A55B}" type="presOf" srcId="{35D741BB-77C5-49F1-844D-6D9105C84015}" destId="{FBA0A77B-8352-4C42-B7D5-7C83363A7874}" srcOrd="0" destOrd="0" presId="urn:microsoft.com/office/officeart/2005/8/layout/bProcess3"/>
+    <dgm:cxn modelId="{FD222D49-F787-4BD1-91F8-4E7EF8D2C09D}" type="presParOf" srcId="{1623B4C5-2499-4637-B07C-6AE8AE2BD718}" destId="{AF0F3B5A-6BF1-4C0D-ACE3-FC3229887631}" srcOrd="11" destOrd="0" presId="urn:microsoft.com/office/officeart/2005/8/layout/bProcess3"/>
+    <dgm:cxn modelId="{A5FE5CDA-2994-4E42-8BC1-DB71E3E71203}" type="presOf" srcId="{8AAF24B2-DCD8-49F5-B32A-E5896BB6673B}" destId="{AF0F3B5A-6BF1-4C0D-ACE3-FC3229887631}" srcOrd="0" destOrd="0" presId="urn:microsoft.com/office/officeart/2005/8/layout/bProcess3"/>
+    <dgm:cxn modelId="{9CDD7A2D-D4E7-4864-A869-DD12D362CA88}" type="presParOf" srcId="{AF0F3B5A-6BF1-4C0D-ACE3-FC3229887631}" destId="{E6FC4B6E-D89F-427D-9D2B-82937C0C44CB}" srcOrd="0" destOrd="11" presId="urn:microsoft.com/office/officeart/2005/8/layout/bProcess3"/>
+    <dgm:cxn modelId="{410BC259-748F-41A2-98A4-AFE306ABBF6F}" type="presOf" srcId="{8AAF24B2-DCD8-49F5-B32A-E5896BB6673B}" destId="{E6FC4B6E-D89F-427D-9D2B-82937C0C44CB}" srcOrd="1" destOrd="0" presId="urn:microsoft.com/office/officeart/2005/8/layout/bProcess3"/>
+    <dgm:cxn modelId="{4FCC9209-CB61-45C5-863D-402A8E886651}" type="presParOf" srcId="{1623B4C5-2499-4637-B07C-6AE8AE2BD718}" destId="{073A29C7-3BC3-42A7-AA3F-6B8157543E42}" srcOrd="12" destOrd="0" presId="urn:microsoft.com/office/officeart/2005/8/layout/bProcess3"/>
+    <dgm:cxn modelId="{C4FBB814-1062-4C63-99BE-816BF849C5EF}" type="presOf" srcId="{0CBCCB41-4C6E-46D9-9AF7-878DCABCD693}" destId="{073A29C7-3BC3-42A7-AA3F-6B8157543E42}" srcOrd="0" destOrd="0" presId="urn:microsoft.com/office/officeart/2005/8/layout/bProcess3"/>
+    <dgm:cxn modelId="{AEFED1F5-2C9F-407F-A86A-0B97A93249C1}" type="presParOf" srcId="{1623B4C5-2499-4637-B07C-6AE8AE2BD718}" destId="{54CDD26F-E6A2-4870-924B-05FF04E085DB}" srcOrd="13" destOrd="0" presId="urn:microsoft.com/office/officeart/2005/8/layout/bProcess3"/>
+    <dgm:cxn modelId="{7B3C4FEB-C224-4B65-8867-7C63BFDB5CEE}" type="presOf" srcId="{21861301-58AD-42B8-B900-8AD351B4E506}" destId="{54CDD26F-E6A2-4870-924B-05FF04E085DB}" srcOrd="0" destOrd="0" presId="urn:microsoft.com/office/officeart/2005/8/layout/bProcess3"/>
+    <dgm:cxn modelId="{965D9B72-8F1A-49B9-874A-EFB8CCF0AEDE}" type="presParOf" srcId="{54CDD26F-E6A2-4870-924B-05FF04E085DB}" destId="{6C27CAF1-3033-404D-B882-95D8BC58DF2D}" srcOrd="0" destOrd="13" presId="urn:microsoft.com/office/officeart/2005/8/layout/bProcess3"/>
+    <dgm:cxn modelId="{805ED038-C915-42DC-9B25-9F14554B6660}" type="presOf" srcId="{21861301-58AD-42B8-B900-8AD351B4E506}" destId="{6C27CAF1-3033-404D-B882-95D8BC58DF2D}" srcOrd="1" destOrd="0" presId="urn:microsoft.com/office/officeart/2005/8/layout/bProcess3"/>
+    <dgm:cxn modelId="{609E57E2-7285-4750-862B-E51F67A6D8B8}" type="presParOf" srcId="{1623B4C5-2499-4637-B07C-6AE8AE2BD718}" destId="{7B777F2E-D527-4A8C-B26F-6E19ADC1AD96}" srcOrd="14" destOrd="0" presId="urn:microsoft.com/office/officeart/2005/8/layout/bProcess3"/>
+    <dgm:cxn modelId="{5CE0EA5C-8F80-475E-A19A-30F5C7ADE0D2}" type="presOf" srcId="{B064E4B4-A932-4043-89FB-F01D06BADBCD}" destId="{7B777F2E-D527-4A8C-B26F-6E19ADC1AD96}" srcOrd="0" destOrd="0" presId="urn:microsoft.com/office/officeart/2005/8/layout/bProcess3"/>
+    <dgm:cxn modelId="{F6DDD4B0-F0BC-454A-A71E-9B2F5B68970C}" type="presParOf" srcId="{1623B4C5-2499-4637-B07C-6AE8AE2BD718}" destId="{2CDEA325-E5C0-43C8-BD90-51BC76F2EA8B}" srcOrd="15" destOrd="0" presId="urn:microsoft.com/office/officeart/2005/8/layout/bProcess3"/>
+    <dgm:cxn modelId="{DB8873F5-DCAE-4434-BCE6-0764A560A3C0}" type="presOf" srcId="{87224BD6-8B6A-4332-8A32-C10B20A8B3FA}" destId="{2CDEA325-E5C0-43C8-BD90-51BC76F2EA8B}" srcOrd="0" destOrd="0" presId="urn:microsoft.com/office/officeart/2005/8/layout/bProcess3"/>
+    <dgm:cxn modelId="{BBF74B16-8E8E-4EDB-A110-5C37E8213198}" type="presParOf" srcId="{2CDEA325-E5C0-43C8-BD90-51BC76F2EA8B}" destId="{8A3BA126-A69D-46AE-BFC5-B9721275CE59}" srcOrd="0" destOrd="15" presId="urn:microsoft.com/office/officeart/2005/8/layout/bProcess3"/>
+    <dgm:cxn modelId="{3F274FD5-572F-4A2D-AD6E-AA5FD91FB34D}" type="presOf" srcId="{87224BD6-8B6A-4332-8A32-C10B20A8B3FA}" destId="{8A3BA126-A69D-46AE-BFC5-B9721275CE59}" srcOrd="1" destOrd="0" presId="urn:microsoft.com/office/officeart/2005/8/layout/bProcess3"/>
+    <dgm:cxn modelId="{840E4C28-7076-43E9-9AD6-6ABD4E36864A}" type="presParOf" srcId="{1623B4C5-2499-4637-B07C-6AE8AE2BD718}" destId="{9A9EA554-7DA0-401D-AEA2-6155D0FA75D9}" srcOrd="16" destOrd="0" presId="urn:microsoft.com/office/officeart/2005/8/layout/bProcess3"/>
+    <dgm:cxn modelId="{D759141D-6D4C-43F3-B276-7F7C0F2EE4C4}" type="presOf" srcId="{E039BAFA-2E94-4454-BD39-E719F745DFD2}" destId="{9A9EA554-7DA0-401D-AEA2-6155D0FA75D9}" srcOrd="0" destOrd="0" presId="urn:microsoft.com/office/officeart/2005/8/layout/bProcess3"/>
+    <dgm:cxn modelId="{CA0EF945-768A-4DE1-B8BE-D7A46E8BDE6C}" type="presParOf" srcId="{1623B4C5-2499-4637-B07C-6AE8AE2BD718}" destId="{87A2B6C2-D221-4807-B0CE-037D50AF34AD}" srcOrd="17" destOrd="0" presId="urn:microsoft.com/office/officeart/2005/8/layout/bProcess3"/>
+    <dgm:cxn modelId="{19272794-FF4C-4BB9-BE32-CDF72C92A4CA}" type="presOf" srcId="{7D58E61C-4C21-4EF8-A4A6-CE9F1EA7F074}" destId="{87A2B6C2-D221-4807-B0CE-037D50AF34AD}" srcOrd="0" destOrd="0" presId="urn:microsoft.com/office/officeart/2005/8/layout/bProcess3"/>
+    <dgm:cxn modelId="{133B0E84-8899-45BC-B4D5-A98A565E846D}" type="presParOf" srcId="{87A2B6C2-D221-4807-B0CE-037D50AF34AD}" destId="{3C6AC5CE-4067-41EE-8E93-71E8FDCD9B41}" srcOrd="0" destOrd="17" presId="urn:microsoft.com/office/officeart/2005/8/layout/bProcess3"/>
+    <dgm:cxn modelId="{24EE8900-F7E1-4CE0-A046-2A1173857C81}" type="presOf" srcId="{7D58E61C-4C21-4EF8-A4A6-CE9F1EA7F074}" destId="{3C6AC5CE-4067-41EE-8E93-71E8FDCD9B41}" srcOrd="1" destOrd="0" presId="urn:microsoft.com/office/officeart/2005/8/layout/bProcess3"/>
+    <dgm:cxn modelId="{D75DEAB8-4EB5-40E6-98BA-6E4D947D7433}" type="presParOf" srcId="{1623B4C5-2499-4637-B07C-6AE8AE2BD718}" destId="{657023FC-9007-4B07-A54B-73FC1F99DD9A}" srcOrd="18" destOrd="0" presId="urn:microsoft.com/office/officeart/2005/8/layout/bProcess3"/>
+    <dgm:cxn modelId="{EC9C81CA-22D3-4FD6-8DA6-B864F4194BBD}" type="presOf" srcId="{528A2CAA-AD05-47AF-9747-E266F390039B}" destId="{657023FC-9007-4B07-A54B-73FC1F99DD9A}" srcOrd="0" destOrd="0" presId="urn:microsoft.com/office/officeart/2005/8/layout/bProcess3"/>
+  </dgm:cxnLst>
+  <dgm:bg/>
+  <dgm:whole/>
+  <dgm:extLst>
+    <a:ext uri="http://schemas.microsoft.com/office/drawing/2008/diagram">
+      <dsp:dataModelExt xmlns:dsp="http://schemas.microsoft.com/office/drawing/2008/diagram" relId="rId7" minVer="http://schemas.openxmlformats.org/drawingml/2006/diagram"/>
+    </a:ext>
+  </dgm:extLst>
+</dgm:dataModel>
+</file>
+
+<file path=ppt/diagrams/drawing1.xml><?xml version="1.0" encoding="utf-8"?>
+<dsp:drawing xmlns:dgm="http://schemas.openxmlformats.org/drawingml/2006/diagram" xmlns:dsp="http://schemas.microsoft.com/office/drawing/2008/diagram" xmlns:a="http://schemas.openxmlformats.org/drawingml/2006/main" xmlns:r="http://schemas.openxmlformats.org/officeDocument/2006/relationships">
+  <dsp:spTree>
+    <dsp:nvGrpSpPr>
+      <dsp:cNvPr id="2" name="Group 1"/>
+      <dsp:cNvGrpSpPr/>
+    </dsp:nvGrpSpPr>
+    <dsp:grpSpPr>
+      <a:xfrm>
+        <a:off x="0" y="0"/>
+        <a:ext cx="3185160" cy="4949825"/>
+        <a:chOff x="0" y="0"/>
+        <a:chExt cx="3185160" cy="4949825"/>
+      </a:xfrm>
+    </dsp:grpSpPr>
+    <dsp:sp modelId="{9F73252C-5345-45F1-A6FA-69E44781CCB0}">
+      <dsp:nvSpPr>
+        <dsp:cNvPr id="4" name="Freeform 3"/>
+        <dsp:cNvSpPr/>
+      </dsp:nvSpPr>
+      <dsp:spPr bwMode="white">
+        <a:xfrm>
+          <a:off x="1449263" y="383003"/>
+          <a:ext cx="290102" cy="0"/>
+        </a:xfrm>
+        <a:custGeom>
+          <a:avLst/>
+          <a:gdLst/>
+          <a:ahLst/>
+          <a:cxnLst/>
+          <a:pathLst>
+            <a:path w="457">
+              <a:moveTo>
+                <a:pt x="0" y="0"/>
+              </a:moveTo>
+              <a:lnTo>
+                <a:pt x="457" y="0"/>
+              </a:lnTo>
+            </a:path>
+          </a:pathLst>
+        </a:custGeom>
+        <a:ln>
+          <a:tailEnd type="arrow" w="lg" len="med"/>
+        </a:ln>
+      </dsp:spPr>
+      <dsp:style>
+        <a:lnRef idx="1">
+          <a:schemeClr val="accent6"/>
+        </a:lnRef>
+        <a:fillRef idx="0">
+          <a:schemeClr val="accent6"/>
+        </a:fillRef>
+        <a:effectRef idx="0">
+          <a:scrgbClr r="0" g="0" b="0"/>
+        </a:effectRef>
+        <a:fontRef idx="minor"/>
+      </dsp:style>
+      <dsp:txBody>
+        <a:bodyPr lIns="12700" tIns="0" rIns="12700" bIns="0" anchor="ctr"/>
+        <a:lstStyle>
+          <a:lvl1pPr algn="ctr">
+            <a:defRPr sz="5500"/>
+          </a:lvl1pPr>
+          <a:lvl2pPr marL="285750" indent="-285750" algn="ctr">
+            <a:defRPr sz="4200"/>
+          </a:lvl2pPr>
+          <a:lvl3pPr marL="571500" indent="-285750" algn="ctr">
+            <a:defRPr sz="4200"/>
+          </a:lvl3pPr>
+          <a:lvl4pPr marL="857250" indent="-285750" algn="ctr">
+            <a:defRPr sz="4200"/>
+          </a:lvl4pPr>
+          <a:lvl5pPr marL="1143000" indent="-285750" algn="ctr">
+            <a:defRPr sz="4200"/>
+          </a:lvl5pPr>
+          <a:lvl6pPr marL="1428750" indent="-285750" algn="ctr">
+            <a:defRPr sz="4200"/>
+          </a:lvl6pPr>
+          <a:lvl7pPr marL="1714500" indent="-285750" algn="ctr">
+            <a:defRPr sz="4200"/>
+          </a:lvl7pPr>
+          <a:lvl8pPr marL="2000250" indent="-285750" algn="ctr">
+            <a:defRPr sz="4200"/>
+          </a:lvl8pPr>
+          <a:lvl9pPr marL="2286000" indent="-285750" algn="ctr">
+            <a:defRPr sz="4200"/>
+          </a:lvl9pPr>
+        </a:lstStyle>
+        <a:p>
+          <a:pPr lvl="0">
+            <a:lnSpc>
+              <a:spcPct val="100000"/>
+            </a:lnSpc>
+            <a:spcBef>
+              <a:spcPct val="0"/>
+            </a:spcBef>
+            <a:spcAft>
+              <a:spcPct val="35000"/>
+            </a:spcAft>
+          </a:pPr>
+          <a:endParaRPr lang="en-US">
+            <a:solidFill>
+              <a:schemeClr val="dk1"/>
+            </a:solidFill>
+          </a:endParaRPr>
+        </a:p>
+      </dsp:txBody>
+      <dsp:txXfrm>
+        <a:off x="1449263" y="383003"/>
+        <a:ext cx="290102" cy="0"/>
+      </dsp:txXfrm>
+    </dsp:sp>
+    <dsp:sp modelId="{2FBE2C1E-1D94-400F-A227-985D4DA10085}">
+      <dsp:nvSpPr>
+        <dsp:cNvPr id="3" name="Rectangle 2"/>
+        <dsp:cNvSpPr/>
+      </dsp:nvSpPr>
+      <dsp:spPr bwMode="white">
+        <a:xfrm>
+          <a:off x="187952" y="4609"/>
+          <a:ext cx="1261311" cy="756787"/>
+        </a:xfrm>
+        <a:prstGeom prst="rect">
+          <a:avLst/>
+        </a:prstGeom>
+      </dsp:spPr>
+      <dsp:style>
+        <a:lnRef idx="3">
+          <a:schemeClr val="accent6">
+            <a:shade val="80000"/>
+          </a:schemeClr>
+        </a:lnRef>
+        <a:fillRef idx="1">
+          <a:schemeClr val="lt1"/>
+        </a:fillRef>
+        <a:effectRef idx="1">
+          <a:scrgbClr r="0" g="0" b="0"/>
+        </a:effectRef>
+        <a:fontRef idx="minor">
+          <a:schemeClr val="lt1"/>
+        </a:fontRef>
+      </dsp:style>
+      <dsp:txBody>
+        <a:bodyPr vert="horz" wrap="square" lIns="78232" tIns="78232" rIns="78232" bIns="78232" anchor="ctr"/>
+        <a:lstStyle>
+          <a:lvl1pPr algn="ctr">
+            <a:defRPr sz="1100"/>
+          </a:lvl1pPr>
+          <a:lvl2pPr marL="57150" indent="-57150" algn="ctr">
+            <a:defRPr sz="800"/>
+          </a:lvl2pPr>
+          <a:lvl3pPr marL="114300" indent="-57150" algn="ctr">
+            <a:defRPr sz="800"/>
+          </a:lvl3pPr>
+          <a:lvl4pPr marL="171450" indent="-57150" algn="ctr">
+            <a:defRPr sz="800"/>
+          </a:lvl4pPr>
+          <a:lvl5pPr marL="228600" indent="-57150" algn="ctr">
+            <a:defRPr sz="800"/>
+          </a:lvl5pPr>
+          <a:lvl6pPr marL="285750" indent="-57150" algn="ctr">
+            <a:defRPr sz="800"/>
+          </a:lvl6pPr>
+          <a:lvl7pPr marL="342900" indent="-57150" algn="ctr">
+            <a:defRPr sz="800"/>
+          </a:lvl7pPr>
+          <a:lvl8pPr marL="400050" indent="-57150" algn="ctr">
+            <a:defRPr sz="800"/>
+          </a:lvl8pPr>
+          <a:lvl9pPr marL="457200" indent="-57150" algn="ctr">
+            <a:defRPr sz="800"/>
+          </a:lvl9pPr>
+        </a:lstStyle>
+        <a:p>
+          <a:pPr lvl="0">
+            <a:lnSpc>
+              <a:spcPct val="100000"/>
+            </a:lnSpc>
+            <a:spcBef>
+              <a:spcPct val="0"/>
+            </a:spcBef>
+            <a:spcAft>
+              <a:spcPct val="35000"/>
+            </a:spcAft>
+          </a:pPr>
+          <a:r>
+            <a:rPr lang="" altLang="en-US" cap="all">
+              <a:solidFill>
+                <a:schemeClr val="dk1"/>
+              </a:solidFill>
+              <a:uFillTx/>
+            </a:rPr>
+            <a:t>Osservazione</a:t>
+          </a:r>
+          <a:endParaRPr lang="" altLang="en-US" cap="all">
+            <a:solidFill>
+              <a:schemeClr val="dk1"/>
+            </a:solidFill>
+            <a:uFillTx/>
+          </a:endParaRPr>
+        </a:p>
+      </dsp:txBody>
+      <dsp:txXfrm>
+        <a:off x="187952" y="4609"/>
+        <a:ext cx="1261311" cy="756787"/>
+      </dsp:txXfrm>
+    </dsp:sp>
+    <dsp:sp modelId="{EBB69596-36AB-40F1-91C5-FC3350A00067}">
+      <dsp:nvSpPr>
+        <dsp:cNvPr id="6" name="Freeform 5"/>
+        <dsp:cNvSpPr/>
+      </dsp:nvSpPr>
+      <dsp:spPr bwMode="white">
+        <a:xfrm>
+          <a:off x="818608" y="761396"/>
+          <a:ext cx="1551412" cy="289168"/>
+        </a:xfrm>
+        <a:custGeom>
+          <a:avLst/>
+          <a:gdLst/>
+          <a:ahLst/>
+          <a:cxnLst/>
+          <a:pathLst>
+            <a:path w="2443" h="455">
+              <a:moveTo>
+                <a:pt x="2443" y="0"/>
+              </a:moveTo>
+              <a:lnTo>
+                <a:pt x="2443" y="228"/>
+              </a:lnTo>
+              <a:lnTo>
+                <a:pt x="0" y="228"/>
+              </a:lnTo>
+              <a:lnTo>
+                <a:pt x="0" y="455"/>
+              </a:lnTo>
+            </a:path>
+          </a:pathLst>
+        </a:custGeom>
+        <a:ln>
+          <a:tailEnd type="arrow" w="lg" len="med"/>
+        </a:ln>
+      </dsp:spPr>
+      <dsp:style>
+        <a:lnRef idx="1">
+          <a:schemeClr val="accent6"/>
+        </a:lnRef>
+        <a:fillRef idx="0">
+          <a:schemeClr val="accent6"/>
+        </a:fillRef>
+        <a:effectRef idx="0">
+          <a:scrgbClr r="0" g="0" b="0"/>
+        </a:effectRef>
+        <a:fontRef idx="minor"/>
+      </dsp:style>
+      <dsp:txBody>
+        <a:bodyPr lIns="12700" tIns="0" rIns="12700" bIns="0" anchor="ctr"/>
+        <a:lstStyle>
+          <a:lvl1pPr algn="ctr">
+            <a:defRPr sz="5500"/>
+          </a:lvl1pPr>
+          <a:lvl2pPr marL="285750" indent="-285750" algn="ctr">
+            <a:defRPr sz="4200"/>
+          </a:lvl2pPr>
+          <a:lvl3pPr marL="571500" indent="-285750" algn="ctr">
+            <a:defRPr sz="4200"/>
+          </a:lvl3pPr>
+          <a:lvl4pPr marL="857250" indent="-285750" algn="ctr">
+            <a:defRPr sz="4200"/>
+          </a:lvl4pPr>
+          <a:lvl5pPr marL="1143000" indent="-285750" algn="ctr">
+            <a:defRPr sz="4200"/>
+          </a:lvl5pPr>
+          <a:lvl6pPr marL="1428750" indent="-285750" algn="ctr">
+            <a:defRPr sz="4200"/>
+          </a:lvl6pPr>
+          <a:lvl7pPr marL="1714500" indent="-285750" algn="ctr">
+            <a:defRPr sz="4200"/>
+          </a:lvl7pPr>
+          <a:lvl8pPr marL="2000250" indent="-285750" algn="ctr">
+            <a:defRPr sz="4200"/>
+          </a:lvl8pPr>
+          <a:lvl9pPr marL="2286000" indent="-285750" algn="ctr">
+            <a:defRPr sz="4200"/>
+          </a:lvl9pPr>
+        </a:lstStyle>
+        <a:p>
+          <a:pPr lvl="0">
+            <a:lnSpc>
+              <a:spcPct val="100000"/>
+            </a:lnSpc>
+            <a:spcBef>
+              <a:spcPct val="0"/>
+            </a:spcBef>
+            <a:spcAft>
+              <a:spcPct val="35000"/>
+            </a:spcAft>
+          </a:pPr>
+          <a:endParaRPr lang="en-US">
+            <a:solidFill>
+              <a:schemeClr val="dk1"/>
+            </a:solidFill>
+          </a:endParaRPr>
+        </a:p>
+      </dsp:txBody>
+      <dsp:txXfrm>
+        <a:off x="818608" y="761396"/>
+        <a:ext cx="1551412" cy="289168"/>
+      </dsp:txXfrm>
+    </dsp:sp>
+    <dsp:sp modelId="{0482690C-586E-41D6-8B40-4CA7581A9CE9}">
+      <dsp:nvSpPr>
+        <dsp:cNvPr id="5" name="Rectangle 4"/>
+        <dsp:cNvSpPr/>
+      </dsp:nvSpPr>
+      <dsp:spPr bwMode="white">
+        <a:xfrm>
+          <a:off x="1739365" y="4609"/>
+          <a:ext cx="1261311" cy="756787"/>
+        </a:xfrm>
+        <a:prstGeom prst="rect">
+          <a:avLst/>
+        </a:prstGeom>
+      </dsp:spPr>
+      <dsp:style>
+        <a:lnRef idx="3">
+          <a:schemeClr val="accent6">
+            <a:shade val="80000"/>
+          </a:schemeClr>
+        </a:lnRef>
+        <a:fillRef idx="1">
+          <a:schemeClr val="lt1"/>
+        </a:fillRef>
+        <a:effectRef idx="1">
+          <a:scrgbClr r="0" g="0" b="0"/>
+        </a:effectRef>
+        <a:fontRef idx="minor">
+          <a:schemeClr val="lt1"/>
+        </a:fontRef>
+      </dsp:style>
+      <dsp:txBody>
+        <a:bodyPr vert="horz" wrap="square" lIns="78232" tIns="78232" rIns="78232" bIns="78232" anchor="ctr"/>
+        <a:lstStyle>
+          <a:lvl1pPr algn="ctr">
+            <a:defRPr sz="1100"/>
+          </a:lvl1pPr>
+          <a:lvl2pPr marL="57150" indent="-57150" algn="ctr">
+            <a:defRPr sz="800"/>
+          </a:lvl2pPr>
+          <a:lvl3pPr marL="114300" indent="-57150" algn="ctr">
+            <a:defRPr sz="800"/>
+          </a:lvl3pPr>
+          <a:lvl4pPr marL="171450" indent="-57150" algn="ctr">
+            <a:defRPr sz="800"/>
+          </a:lvl4pPr>
+          <a:lvl5pPr marL="228600" indent="-57150" algn="ctr">
+            <a:defRPr sz="800"/>
+          </a:lvl5pPr>
+          <a:lvl6pPr marL="285750" indent="-57150" algn="ctr">
+            <a:defRPr sz="800"/>
+          </a:lvl6pPr>
+          <a:lvl7pPr marL="342900" indent="-57150" algn="ctr">
+            <a:defRPr sz="800"/>
+          </a:lvl7pPr>
+          <a:lvl8pPr marL="400050" indent="-57150" algn="ctr">
+            <a:defRPr sz="800"/>
+          </a:lvl8pPr>
+          <a:lvl9pPr marL="457200" indent="-57150" algn="ctr">
+            <a:defRPr sz="800"/>
+          </a:lvl9pPr>
+        </a:lstStyle>
+        <a:p>
+          <a:pPr lvl="0">
+            <a:lnSpc>
+              <a:spcPct val="100000"/>
+            </a:lnSpc>
+            <a:spcBef>
+              <a:spcPct val="0"/>
+            </a:spcBef>
+            <a:spcAft>
+              <a:spcPct val="35000"/>
+            </a:spcAft>
+          </a:pPr>
+          <a:r>
+            <a:rPr lang="" altLang="en-US">
+              <a:solidFill>
+                <a:schemeClr val="dk1"/>
+              </a:solidFill>
+            </a:rPr>
+            <a:t>Individuazione del problema</a:t>
+          </a:r>
+          <a:endParaRPr lang="" altLang="en-US">
+            <a:solidFill>
+              <a:schemeClr val="dk1"/>
+            </a:solidFill>
+          </a:endParaRPr>
+        </a:p>
+      </dsp:txBody>
+      <dsp:txXfrm>
+        <a:off x="1739365" y="4609"/>
+        <a:ext cx="1261311" cy="756787"/>
+      </dsp:txXfrm>
+    </dsp:sp>
+    <dsp:sp modelId="{31F3FE5F-74B2-48F8-89DC-AE29DBB498B0}">
+      <dsp:nvSpPr>
+        <dsp:cNvPr id="8" name="Freeform 7"/>
+        <dsp:cNvSpPr/>
+      </dsp:nvSpPr>
+      <dsp:spPr bwMode="white">
+        <a:xfrm>
+          <a:off x="1449263" y="1428958"/>
+          <a:ext cx="290102" cy="0"/>
+        </a:xfrm>
+        <a:custGeom>
+          <a:avLst/>
+          <a:gdLst/>
+          <a:ahLst/>
+          <a:cxnLst/>
+          <a:pathLst>
+            <a:path w="457">
+              <a:moveTo>
+                <a:pt x="0" y="0"/>
+              </a:moveTo>
+              <a:lnTo>
+                <a:pt x="457" y="0"/>
+              </a:lnTo>
+            </a:path>
+          </a:pathLst>
+        </a:custGeom>
+        <a:ln>
+          <a:tailEnd type="arrow" w="lg" len="med"/>
+        </a:ln>
+      </dsp:spPr>
+      <dsp:style>
+        <a:lnRef idx="1">
+          <a:schemeClr val="accent6"/>
+        </a:lnRef>
+        <a:fillRef idx="0">
+          <a:schemeClr val="accent6"/>
+        </a:fillRef>
+        <a:effectRef idx="0">
+          <a:scrgbClr r="0" g="0" b="0"/>
+        </a:effectRef>
+        <a:fontRef idx="minor"/>
+      </dsp:style>
+      <dsp:txBody>
+        <a:bodyPr lIns="12700" tIns="0" rIns="12700" bIns="0" anchor="ctr"/>
+        <a:lstStyle>
+          <a:lvl1pPr algn="ctr">
+            <a:defRPr sz="5500"/>
+          </a:lvl1pPr>
+          <a:lvl2pPr marL="285750" indent="-285750" algn="ctr">
+            <a:defRPr sz="4200"/>
+          </a:lvl2pPr>
+          <a:lvl3pPr marL="571500" indent="-285750" algn="ctr">
+            <a:defRPr sz="4200"/>
+          </a:lvl3pPr>
+          <a:lvl4pPr marL="857250" indent="-285750" algn="ctr">
+            <a:defRPr sz="4200"/>
+          </a:lvl4pPr>
+          <a:lvl5pPr marL="1143000" indent="-285750" algn="ctr">
+            <a:defRPr sz="4200"/>
+          </a:lvl5pPr>
+          <a:lvl6pPr marL="1428750" indent="-285750" algn="ctr">
+            <a:defRPr sz="4200"/>
+          </a:lvl6pPr>
+          <a:lvl7pPr marL="1714500" indent="-285750" algn="ctr">
+            <a:defRPr sz="4200"/>
+          </a:lvl7pPr>
+          <a:lvl8pPr marL="2000250" indent="-285750" algn="ctr">
+            <a:defRPr sz="4200"/>
+          </a:lvl8pPr>
+          <a:lvl9pPr marL="2286000" indent="-285750" algn="ctr">
+            <a:defRPr sz="4200"/>
+          </a:lvl9pPr>
+        </a:lstStyle>
+        <a:p>
+          <a:pPr lvl="0">
+            <a:lnSpc>
+              <a:spcPct val="100000"/>
+            </a:lnSpc>
+            <a:spcBef>
+              <a:spcPct val="0"/>
+            </a:spcBef>
+            <a:spcAft>
+              <a:spcPct val="35000"/>
+            </a:spcAft>
+          </a:pPr>
+          <a:endParaRPr lang="en-US">
+            <a:solidFill>
+              <a:schemeClr val="dk1"/>
+            </a:solidFill>
+          </a:endParaRPr>
+        </a:p>
+      </dsp:txBody>
+      <dsp:txXfrm>
+        <a:off x="1449263" y="1428958"/>
+        <a:ext cx="290102" cy="0"/>
+      </dsp:txXfrm>
+    </dsp:sp>
+    <dsp:sp modelId="{E5145E43-B450-47CE-B1E5-1482BCF4071D}">
+      <dsp:nvSpPr>
+        <dsp:cNvPr id="7" name="Rectangle 6"/>
+        <dsp:cNvSpPr/>
+      </dsp:nvSpPr>
+      <dsp:spPr bwMode="white">
+        <a:xfrm>
+          <a:off x="187952" y="1050564"/>
+          <a:ext cx="1261311" cy="756787"/>
+        </a:xfrm>
+        <a:prstGeom prst="rect">
+          <a:avLst/>
+        </a:prstGeom>
+      </dsp:spPr>
+      <dsp:style>
+        <a:lnRef idx="3">
+          <a:schemeClr val="accent6">
+            <a:shade val="80000"/>
+          </a:schemeClr>
+        </a:lnRef>
+        <a:fillRef idx="1">
+          <a:schemeClr val="lt1"/>
+        </a:fillRef>
+        <a:effectRef idx="1">
+          <a:scrgbClr r="0" g="0" b="0"/>
+        </a:effectRef>
+        <a:fontRef idx="minor">
+          <a:schemeClr val="lt1"/>
+        </a:fontRef>
+      </dsp:style>
+      <dsp:txBody>
+        <a:bodyPr vert="horz" wrap="square" lIns="78232" tIns="78232" rIns="78232" bIns="78232" anchor="ctr"/>
+        <a:lstStyle>
+          <a:lvl1pPr algn="ctr">
+            <a:defRPr sz="1100"/>
+          </a:lvl1pPr>
+          <a:lvl2pPr marL="57150" indent="-57150" algn="ctr">
+            <a:defRPr sz="800"/>
+          </a:lvl2pPr>
+          <a:lvl3pPr marL="114300" indent="-57150" algn="ctr">
+            <a:defRPr sz="800"/>
+          </a:lvl3pPr>
+          <a:lvl4pPr marL="171450" indent="-57150" algn="ctr">
+            <a:defRPr sz="800"/>
+          </a:lvl4pPr>
+          <a:lvl5pPr marL="228600" indent="-57150" algn="ctr">
+            <a:defRPr sz="800"/>
+          </a:lvl5pPr>
+          <a:lvl6pPr marL="285750" indent="-57150" algn="ctr">
+            <a:defRPr sz="800"/>
+          </a:lvl6pPr>
+          <a:lvl7pPr marL="342900" indent="-57150" algn="ctr">
+            <a:defRPr sz="800"/>
+          </a:lvl7pPr>
+          <a:lvl8pPr marL="400050" indent="-57150" algn="ctr">
+            <a:defRPr sz="800"/>
+          </a:lvl8pPr>
+          <a:lvl9pPr marL="457200" indent="-57150" algn="ctr">
+            <a:defRPr sz="800"/>
+          </a:lvl9pPr>
+        </a:lstStyle>
+        <a:p>
+          <a:pPr lvl="0">
+            <a:lnSpc>
+              <a:spcPct val="100000"/>
+            </a:lnSpc>
+            <a:spcBef>
+              <a:spcPct val="0"/>
+            </a:spcBef>
+            <a:spcAft>
+              <a:spcPct val="35000"/>
+            </a:spcAft>
+          </a:pPr>
+          <a:r>
+            <a:rPr lang="" altLang="en-US">
+              <a:solidFill>
+                <a:schemeClr val="dk1"/>
+              </a:solidFill>
+            </a:rPr>
+            <a:t>Documentazione</a:t>
+          </a:r>
+          <a:endParaRPr lang="" altLang="en-US">
+            <a:solidFill>
+              <a:schemeClr val="dk1"/>
+            </a:solidFill>
+          </a:endParaRPr>
+        </a:p>
+      </dsp:txBody>
+      <dsp:txXfrm>
+        <a:off x="187952" y="1050564"/>
+        <a:ext cx="1261311" cy="756787"/>
+      </dsp:txXfrm>
+    </dsp:sp>
+    <dsp:sp modelId="{8C52703D-FEAE-4AA9-949F-F5EC21A49406}">
+      <dsp:nvSpPr>
+        <dsp:cNvPr id="13" name="Freeform 12"/>
+        <dsp:cNvSpPr/>
+      </dsp:nvSpPr>
+      <dsp:spPr bwMode="white">
+        <a:xfrm>
+          <a:off x="818608" y="1807351"/>
+          <a:ext cx="1551412" cy="289168"/>
+        </a:xfrm>
+        <a:custGeom>
+          <a:avLst/>
+          <a:gdLst/>
+          <a:ahLst/>
+          <a:cxnLst/>
+          <a:pathLst>
+            <a:path w="2443" h="455">
+              <a:moveTo>
+                <a:pt x="2443" y="0"/>
+              </a:moveTo>
+              <a:lnTo>
+                <a:pt x="2443" y="228"/>
+              </a:lnTo>
+              <a:lnTo>
+                <a:pt x="0" y="228"/>
+              </a:lnTo>
+              <a:lnTo>
+                <a:pt x="0" y="455"/>
+              </a:lnTo>
+            </a:path>
+          </a:pathLst>
+        </a:custGeom>
+        <a:ln>
+          <a:tailEnd type="arrow" w="lg" len="med"/>
+        </a:ln>
+      </dsp:spPr>
+      <dsp:style>
+        <a:lnRef idx="1">
+          <a:schemeClr val="accent6"/>
+        </a:lnRef>
+        <a:fillRef idx="0">
+          <a:schemeClr val="accent6"/>
+        </a:fillRef>
+        <a:effectRef idx="0">
+          <a:scrgbClr r="0" g="0" b="0"/>
+        </a:effectRef>
+        <a:fontRef idx="minor"/>
+      </dsp:style>
+      <dsp:txBody>
+        <a:bodyPr lIns="12700" tIns="0" rIns="12700" bIns="0" anchor="ctr"/>
+        <a:lstStyle>
+          <a:lvl1pPr algn="ctr">
+            <a:defRPr sz="5500"/>
+          </a:lvl1pPr>
+          <a:lvl2pPr marL="285750" indent="-285750" algn="ctr">
+            <a:defRPr sz="4200"/>
+          </a:lvl2pPr>
+          <a:lvl3pPr marL="571500" indent="-285750" algn="ctr">
+            <a:defRPr sz="4200"/>
+          </a:lvl3pPr>
+          <a:lvl4pPr marL="857250" indent="-285750" algn="ctr">
+            <a:defRPr sz="4200"/>
+          </a:lvl4pPr>
+          <a:lvl5pPr marL="1143000" indent="-285750" algn="ctr">
+            <a:defRPr sz="4200"/>
+          </a:lvl5pPr>
+          <a:lvl6pPr marL="1428750" indent="-285750" algn="ctr">
+            <a:defRPr sz="4200"/>
+          </a:lvl6pPr>
+          <a:lvl7pPr marL="1714500" indent="-285750" algn="ctr">
+            <a:defRPr sz="4200"/>
+          </a:lvl7pPr>
+          <a:lvl8pPr marL="2000250" indent="-285750" algn="ctr">
+            <a:defRPr sz="4200"/>
+          </a:lvl8pPr>
+          <a:lvl9pPr marL="2286000" indent="-285750" algn="ctr">
+            <a:defRPr sz="4200"/>
+          </a:lvl9pPr>
+        </a:lstStyle>
+        <a:p>
+          <a:pPr lvl="0">
+            <a:lnSpc>
+              <a:spcPct val="100000"/>
+            </a:lnSpc>
+            <a:spcBef>
+              <a:spcPct val="0"/>
+            </a:spcBef>
+            <a:spcAft>
+              <a:spcPct val="35000"/>
+            </a:spcAft>
+          </a:pPr>
+          <a:endParaRPr lang="en-US">
+            <a:solidFill>
+              <a:schemeClr val="dk1"/>
+            </a:solidFill>
+          </a:endParaRPr>
+        </a:p>
+      </dsp:txBody>
+      <dsp:txXfrm>
+        <a:off x="818608" y="1807351"/>
+        <a:ext cx="1551412" cy="289168"/>
+      </dsp:txXfrm>
+    </dsp:sp>
+    <dsp:sp modelId="{13492D71-E670-42C9-A619-1DE9B5F887F1}">
+      <dsp:nvSpPr>
+        <dsp:cNvPr id="9" name="Rectangle 8"/>
+        <dsp:cNvSpPr/>
+      </dsp:nvSpPr>
+      <dsp:spPr bwMode="white">
+        <a:xfrm>
+          <a:off x="1739365" y="1050564"/>
+          <a:ext cx="1261311" cy="756787"/>
+        </a:xfrm>
+        <a:prstGeom prst="rect">
+          <a:avLst/>
+        </a:prstGeom>
+      </dsp:spPr>
+      <dsp:style>
+        <a:lnRef idx="3">
+          <a:schemeClr val="accent6">
+            <a:shade val="80000"/>
+          </a:schemeClr>
+        </a:lnRef>
+        <a:fillRef idx="1">
+          <a:schemeClr val="lt1"/>
+        </a:fillRef>
+        <a:effectRef idx="1">
+          <a:scrgbClr r="0" g="0" b="0"/>
+        </a:effectRef>
+        <a:fontRef idx="minor">
+          <a:schemeClr val="lt1"/>
+        </a:fontRef>
+      </dsp:style>
+      <dsp:txBody>
+        <a:bodyPr vert="horz" wrap="square" lIns="78232" tIns="78232" rIns="78232" bIns="78232" anchor="ctr"/>
+        <a:lstStyle>
+          <a:lvl1pPr algn="ctr">
+            <a:defRPr sz="1100"/>
+          </a:lvl1pPr>
+          <a:lvl2pPr marL="57150" indent="-57150" algn="ctr">
+            <a:defRPr sz="800"/>
+          </a:lvl2pPr>
+          <a:lvl3pPr marL="114300" indent="-57150" algn="ctr">
+            <a:defRPr sz="800"/>
+          </a:lvl3pPr>
+          <a:lvl4pPr marL="171450" indent="-57150" algn="ctr">
+            <a:defRPr sz="800"/>
+          </a:lvl4pPr>
+          <a:lvl5pPr marL="228600" indent="-57150" algn="ctr">
+            <a:defRPr sz="800"/>
+          </a:lvl5pPr>
+          <a:lvl6pPr marL="285750" indent="-57150" algn="ctr">
+            <a:defRPr sz="800"/>
+          </a:lvl6pPr>
+          <a:lvl7pPr marL="342900" indent="-57150" algn="ctr">
+            <a:defRPr sz="800"/>
+          </a:lvl7pPr>
+          <a:lvl8pPr marL="400050" indent="-57150" algn="ctr">
+            <a:defRPr sz="800"/>
+          </a:lvl8pPr>
+          <a:lvl9pPr marL="457200" indent="-57150" algn="ctr">
+            <a:defRPr sz="800"/>
+          </a:lvl9pPr>
+        </a:lstStyle>
+        <a:p>
+          <a:pPr lvl="0">
+            <a:lnSpc>
+              <a:spcPct val="100000"/>
+            </a:lnSpc>
+            <a:spcBef>
+              <a:spcPct val="0"/>
+            </a:spcBef>
+            <a:spcAft>
+              <a:spcPct val="35000"/>
+            </a:spcAft>
+          </a:pPr>
+          <a:r>
+            <a:rPr lang="" altLang="en-US">
+              <a:solidFill>
+                <a:schemeClr val="dk1"/>
+              </a:solidFill>
+            </a:rPr>
+            <a:t>Formulazione dell’ipotesi</a:t>
+          </a:r>
+          <a:endParaRPr lang="" altLang="en-US">
+            <a:solidFill>
+              <a:schemeClr val="dk1"/>
+            </a:solidFill>
+          </a:endParaRPr>
+        </a:p>
+      </dsp:txBody>
+      <dsp:txXfrm>
+        <a:off x="1739365" y="1050564"/>
+        <a:ext cx="1261311" cy="756787"/>
+      </dsp:txXfrm>
+    </dsp:sp>
+    <dsp:sp modelId="{3D35D559-FC15-4723-8F76-803A74E52A30}">
+      <dsp:nvSpPr>
+        <dsp:cNvPr id="14" name="Freeform 13"/>
+        <dsp:cNvSpPr/>
+      </dsp:nvSpPr>
+      <dsp:spPr bwMode="white">
+        <a:xfrm>
+          <a:off x="1449263" y="2474912"/>
+          <a:ext cx="290102" cy="0"/>
+        </a:xfrm>
+        <a:custGeom>
+          <a:avLst/>
+          <a:gdLst/>
+          <a:ahLst/>
+          <a:cxnLst/>
+          <a:pathLst>
+            <a:path w="457">
+              <a:moveTo>
+                <a:pt x="0" y="0"/>
+              </a:moveTo>
+              <a:lnTo>
+                <a:pt x="457" y="0"/>
+              </a:lnTo>
+            </a:path>
+          </a:pathLst>
+        </a:custGeom>
+        <a:ln>
+          <a:tailEnd type="arrow" w="lg" len="med"/>
+        </a:ln>
+      </dsp:spPr>
+      <dsp:style>
+        <a:lnRef idx="1">
+          <a:schemeClr val="accent6"/>
+        </a:lnRef>
+        <a:fillRef idx="0">
+          <a:schemeClr val="accent6"/>
+        </a:fillRef>
+        <a:effectRef idx="0">
+          <a:scrgbClr r="0" g="0" b="0"/>
+        </a:effectRef>
+        <a:fontRef idx="minor"/>
+      </dsp:style>
+      <dsp:txBody>
+        <a:bodyPr lIns="12700" tIns="0" rIns="12700" bIns="0" anchor="ctr"/>
+        <a:lstStyle>
+          <a:lvl1pPr algn="ctr">
+            <a:defRPr sz="5500"/>
+          </a:lvl1pPr>
+          <a:lvl2pPr marL="285750" indent="-285750" algn="ctr">
+            <a:defRPr sz="4200"/>
+          </a:lvl2pPr>
+          <a:lvl3pPr marL="571500" indent="-285750" algn="ctr">
+            <a:defRPr sz="4200"/>
+          </a:lvl3pPr>
+          <a:lvl4pPr marL="857250" indent="-285750" algn="ctr">
+            <a:defRPr sz="4200"/>
+          </a:lvl4pPr>
+          <a:lvl5pPr marL="1143000" indent="-285750" algn="ctr">
+            <a:defRPr sz="4200"/>
+          </a:lvl5pPr>
+          <a:lvl6pPr marL="1428750" indent="-285750" algn="ctr">
+            <a:defRPr sz="4200"/>
+          </a:lvl6pPr>
+          <a:lvl7pPr marL="1714500" indent="-285750" algn="ctr">
+            <a:defRPr sz="4200"/>
+          </a:lvl7pPr>
+          <a:lvl8pPr marL="2000250" indent="-285750" algn="ctr">
+            <a:defRPr sz="4200"/>
+          </a:lvl8pPr>
+          <a:lvl9pPr marL="2286000" indent="-285750" algn="ctr">
+            <a:defRPr sz="4200"/>
+          </a:lvl9pPr>
+        </a:lstStyle>
+        <a:p>
+          <a:pPr lvl="0">
+            <a:lnSpc>
+              <a:spcPct val="100000"/>
+            </a:lnSpc>
+            <a:spcBef>
+              <a:spcPct val="0"/>
+            </a:spcBef>
+            <a:spcAft>
+              <a:spcPct val="35000"/>
+            </a:spcAft>
+          </a:pPr>
+          <a:endParaRPr lang="en-US">
+            <a:solidFill>
+              <a:schemeClr val="dk1"/>
+            </a:solidFill>
+          </a:endParaRPr>
+        </a:p>
+      </dsp:txBody>
+      <dsp:txXfrm>
+        <a:off x="1449263" y="2474912"/>
+        <a:ext cx="290102" cy="0"/>
+      </dsp:txXfrm>
+    </dsp:sp>
+    <dsp:sp modelId="{F80816D7-392E-4741-B9A3-C73586F7EC67}">
+      <dsp:nvSpPr>
+        <dsp:cNvPr id="11" name="Rectangle 10"/>
+        <dsp:cNvSpPr/>
+      </dsp:nvSpPr>
+      <dsp:spPr bwMode="white">
+        <a:xfrm>
+          <a:off x="187952" y="2096519"/>
+          <a:ext cx="1261311" cy="756787"/>
+        </a:xfrm>
+        <a:prstGeom prst="rect">
+          <a:avLst/>
+        </a:prstGeom>
+      </dsp:spPr>
+      <dsp:style>
+        <a:lnRef idx="3">
+          <a:schemeClr val="accent6">
+            <a:shade val="80000"/>
+          </a:schemeClr>
+        </a:lnRef>
+        <a:fillRef idx="1">
+          <a:schemeClr val="lt1"/>
+        </a:fillRef>
+        <a:effectRef idx="1">
+          <a:scrgbClr r="0" g="0" b="0"/>
+        </a:effectRef>
+        <a:fontRef idx="minor">
+          <a:schemeClr val="lt1"/>
+        </a:fontRef>
+      </dsp:style>
+      <dsp:txBody>
+        <a:bodyPr vert="horz" wrap="square" lIns="78232" tIns="78232" rIns="78232" bIns="78232" anchor="ctr"/>
+        <a:lstStyle>
+          <a:lvl1pPr algn="ctr">
+            <a:defRPr sz="1100"/>
+          </a:lvl1pPr>
+          <a:lvl2pPr marL="57150" indent="-57150" algn="ctr">
+            <a:defRPr sz="800"/>
+          </a:lvl2pPr>
+          <a:lvl3pPr marL="114300" indent="-57150" algn="ctr">
+            <a:defRPr sz="800"/>
+          </a:lvl3pPr>
+          <a:lvl4pPr marL="171450" indent="-57150" algn="ctr">
+            <a:defRPr sz="800"/>
+          </a:lvl4pPr>
+          <a:lvl5pPr marL="228600" indent="-57150" algn="ctr">
+            <a:defRPr sz="800"/>
+          </a:lvl5pPr>
+          <a:lvl6pPr marL="285750" indent="-57150" algn="ctr">
+            <a:defRPr sz="800"/>
+          </a:lvl6pPr>
+          <a:lvl7pPr marL="342900" indent="-57150" algn="ctr">
+            <a:defRPr sz="800"/>
+          </a:lvl7pPr>
+          <a:lvl8pPr marL="400050" indent="-57150" algn="ctr">
+            <a:defRPr sz="800"/>
+          </a:lvl8pPr>
+          <a:lvl9pPr marL="457200" indent="-57150" algn="ctr">
+            <a:defRPr sz="800"/>
+          </a:lvl9pPr>
+        </a:lstStyle>
+        <a:p>
+          <a:pPr lvl="0">
+            <a:lnSpc>
+              <a:spcPct val="100000"/>
+            </a:lnSpc>
+            <a:spcBef>
+              <a:spcPct val="0"/>
+            </a:spcBef>
+            <a:spcAft>
+              <a:spcPct val="35000"/>
+            </a:spcAft>
+          </a:pPr>
+          <a:r>
+            <a:rPr lang="" altLang="en-US">
+              <a:solidFill>
+                <a:schemeClr val="dk1"/>
+              </a:solidFill>
+            </a:rPr>
+            <a:t>Verifica sperimentale</a:t>
+          </a:r>
+          <a:endParaRPr lang="" altLang="en-US">
+            <a:solidFill>
+              <a:schemeClr val="dk1"/>
+            </a:solidFill>
+          </a:endParaRPr>
+        </a:p>
+      </dsp:txBody>
+      <dsp:txXfrm>
+        <a:off x="187952" y="2096519"/>
+        <a:ext cx="1261311" cy="756787"/>
+      </dsp:txXfrm>
+    </dsp:sp>
+    <dsp:sp modelId="{AF0F3B5A-6BF1-4C0D-ACE3-FC3229887631}">
+      <dsp:nvSpPr>
+        <dsp:cNvPr id="16" name="Freeform 15"/>
+        <dsp:cNvSpPr/>
+      </dsp:nvSpPr>
+      <dsp:spPr bwMode="white">
+        <a:xfrm>
+          <a:off x="818608" y="2853306"/>
+          <a:ext cx="1551412" cy="289168"/>
+        </a:xfrm>
+        <a:custGeom>
+          <a:avLst/>
+          <a:gdLst/>
+          <a:ahLst/>
+          <a:cxnLst/>
+          <a:pathLst>
+            <a:path w="2443" h="455">
+              <a:moveTo>
+                <a:pt x="2443" y="0"/>
+              </a:moveTo>
+              <a:lnTo>
+                <a:pt x="2443" y="228"/>
+              </a:lnTo>
+              <a:lnTo>
+                <a:pt x="0" y="228"/>
+              </a:lnTo>
+              <a:lnTo>
+                <a:pt x="0" y="455"/>
+              </a:lnTo>
+            </a:path>
+          </a:pathLst>
+        </a:custGeom>
+        <a:ln>
+          <a:tailEnd type="arrow" w="lg" len="med"/>
+        </a:ln>
+      </dsp:spPr>
+      <dsp:style>
+        <a:lnRef idx="1">
+          <a:schemeClr val="accent6"/>
+        </a:lnRef>
+        <a:fillRef idx="0">
+          <a:schemeClr val="accent6"/>
+        </a:fillRef>
+        <a:effectRef idx="0">
+          <a:scrgbClr r="0" g="0" b="0"/>
+        </a:effectRef>
+        <a:fontRef idx="minor"/>
+      </dsp:style>
+      <dsp:txBody>
+        <a:bodyPr lIns="12700" tIns="0" rIns="12700" bIns="0" anchor="ctr"/>
+        <a:lstStyle>
+          <a:lvl1pPr algn="ctr">
+            <a:defRPr sz="5500"/>
+          </a:lvl1pPr>
+          <a:lvl2pPr marL="285750" indent="-285750" algn="ctr">
+            <a:defRPr sz="4200"/>
+          </a:lvl2pPr>
+          <a:lvl3pPr marL="571500" indent="-285750" algn="ctr">
+            <a:defRPr sz="4200"/>
+          </a:lvl3pPr>
+          <a:lvl4pPr marL="857250" indent="-285750" algn="ctr">
+            <a:defRPr sz="4200"/>
+          </a:lvl4pPr>
+          <a:lvl5pPr marL="1143000" indent="-285750" algn="ctr">
+            <a:defRPr sz="4200"/>
+          </a:lvl5pPr>
+          <a:lvl6pPr marL="1428750" indent="-285750" algn="ctr">
+            <a:defRPr sz="4200"/>
+          </a:lvl6pPr>
+          <a:lvl7pPr marL="1714500" indent="-285750" algn="ctr">
+            <a:defRPr sz="4200"/>
+          </a:lvl7pPr>
+          <a:lvl8pPr marL="2000250" indent="-285750" algn="ctr">
+            <a:defRPr sz="4200"/>
+          </a:lvl8pPr>
+          <a:lvl9pPr marL="2286000" indent="-285750" algn="ctr">
+            <a:defRPr sz="4200"/>
+          </a:lvl9pPr>
+        </a:lstStyle>
+        <a:p>
+          <a:pPr lvl="0">
+            <a:lnSpc>
+              <a:spcPct val="100000"/>
+            </a:lnSpc>
+            <a:spcBef>
+              <a:spcPct val="0"/>
+            </a:spcBef>
+            <a:spcAft>
+              <a:spcPct val="35000"/>
+            </a:spcAft>
+          </a:pPr>
+          <a:endParaRPr>
+            <a:solidFill>
+              <a:schemeClr val="dk1"/>
+            </a:solidFill>
+          </a:endParaRPr>
+        </a:p>
+      </dsp:txBody>
+      <dsp:txXfrm>
+        <a:off x="818608" y="2853306"/>
+        <a:ext cx="1551412" cy="289168"/>
+      </dsp:txXfrm>
+    </dsp:sp>
+    <dsp:sp modelId="{FBA0A77B-8352-4C42-B7D5-7C83363A7874}">
+      <dsp:nvSpPr>
+        <dsp:cNvPr id="15" name="Rectangle 14"/>
+        <dsp:cNvSpPr/>
+      </dsp:nvSpPr>
+      <dsp:spPr bwMode="white">
+        <a:xfrm>
+          <a:off x="1739365" y="2096519"/>
+          <a:ext cx="1261311" cy="756787"/>
+        </a:xfrm>
+        <a:prstGeom prst="rect">
+          <a:avLst/>
+        </a:prstGeom>
+      </dsp:spPr>
+      <dsp:style>
+        <a:lnRef idx="3">
+          <a:schemeClr val="accent6">
+            <a:shade val="80000"/>
+          </a:schemeClr>
+        </a:lnRef>
+        <a:fillRef idx="1">
+          <a:schemeClr val="lt1"/>
+        </a:fillRef>
+        <a:effectRef idx="1">
+          <a:scrgbClr r="0" g="0" b="0"/>
+        </a:effectRef>
+        <a:fontRef idx="minor">
+          <a:schemeClr val="lt1"/>
+        </a:fontRef>
+      </dsp:style>
+      <dsp:txBody>
+        <a:bodyPr vert="horz" wrap="square" lIns="78232" tIns="78232" rIns="78232" bIns="78232" anchor="ctr"/>
+        <a:lstStyle>
+          <a:lvl1pPr algn="ctr">
+            <a:defRPr sz="1100"/>
+          </a:lvl1pPr>
+          <a:lvl2pPr marL="57150" indent="-57150" algn="ctr">
+            <a:defRPr sz="800"/>
+          </a:lvl2pPr>
+          <a:lvl3pPr marL="114300" indent="-57150" algn="ctr">
+            <a:defRPr sz="800"/>
+          </a:lvl3pPr>
+          <a:lvl4pPr marL="171450" indent="-57150" algn="ctr">
+            <a:defRPr sz="800"/>
+          </a:lvl4pPr>
+          <a:lvl5pPr marL="228600" indent="-57150" algn="ctr">
+            <a:defRPr sz="800"/>
+          </a:lvl5pPr>
+          <a:lvl6pPr marL="285750" indent="-57150" algn="ctr">
+            <a:defRPr sz="800"/>
+          </a:lvl6pPr>
+          <a:lvl7pPr marL="342900" indent="-57150" algn="ctr">
+            <a:defRPr sz="800"/>
+          </a:lvl7pPr>
+          <a:lvl8pPr marL="400050" indent="-57150" algn="ctr">
+            <a:defRPr sz="800"/>
+          </a:lvl8pPr>
+          <a:lvl9pPr marL="457200" indent="-57150" algn="ctr">
+            <a:defRPr sz="800"/>
+          </a:lvl9pPr>
+        </a:lstStyle>
+        <a:p>
+          <a:pPr lvl="0">
+            <a:lnSpc>
+              <a:spcPct val="100000"/>
+            </a:lnSpc>
+            <a:spcBef>
+              <a:spcPct val="0"/>
+            </a:spcBef>
+            <a:spcAft>
+              <a:spcPct val="35000"/>
+            </a:spcAft>
+          </a:pPr>
+          <a:r>
+            <a:rPr lang="">
+              <a:solidFill>
+                <a:schemeClr val="dk1"/>
+              </a:solidFill>
+            </a:rPr>
+            <a:t>Analisi dei dati</a:t>
+          </a:r>
+          <a:endParaRPr lang="">
+            <a:solidFill>
+              <a:schemeClr val="dk1"/>
+            </a:solidFill>
+          </a:endParaRPr>
+        </a:p>
+      </dsp:txBody>
+      <dsp:txXfrm>
+        <a:off x="1739365" y="2096519"/>
+        <a:ext cx="1261311" cy="756787"/>
+      </dsp:txXfrm>
+    </dsp:sp>
+    <dsp:sp modelId="{54CDD26F-E6A2-4870-924B-05FF04E085DB}">
+      <dsp:nvSpPr>
+        <dsp:cNvPr id="18" name="Freeform 17"/>
+        <dsp:cNvSpPr/>
+      </dsp:nvSpPr>
+      <dsp:spPr bwMode="white">
+        <a:xfrm>
+          <a:off x="1449263" y="3520867"/>
+          <a:ext cx="290102" cy="0"/>
+        </a:xfrm>
+        <a:custGeom>
+          <a:avLst/>
+          <a:gdLst/>
+          <a:ahLst/>
+          <a:cxnLst/>
+          <a:pathLst>
+            <a:path w="457">
+              <a:moveTo>
+                <a:pt x="0" y="0"/>
+              </a:moveTo>
+              <a:lnTo>
+                <a:pt x="457" y="0"/>
+              </a:lnTo>
+            </a:path>
+          </a:pathLst>
+        </a:custGeom>
+        <a:ln>
+          <a:tailEnd type="arrow" w="lg" len="med"/>
+        </a:ln>
+      </dsp:spPr>
+      <dsp:style>
+        <a:lnRef idx="1">
+          <a:schemeClr val="accent6"/>
+        </a:lnRef>
+        <a:fillRef idx="0">
+          <a:schemeClr val="accent6"/>
+        </a:fillRef>
+        <a:effectRef idx="0">
+          <a:scrgbClr r="0" g="0" b="0"/>
+        </a:effectRef>
+        <a:fontRef idx="minor"/>
+      </dsp:style>
+      <dsp:txBody>
+        <a:bodyPr lIns="12700" tIns="0" rIns="12700" bIns="0" anchor="ctr"/>
+        <a:lstStyle>
+          <a:lvl1pPr algn="ctr">
+            <a:defRPr sz="5500"/>
+          </a:lvl1pPr>
+          <a:lvl2pPr marL="285750" indent="-285750" algn="ctr">
+            <a:defRPr sz="4200"/>
+          </a:lvl2pPr>
+          <a:lvl3pPr marL="571500" indent="-285750" algn="ctr">
+            <a:defRPr sz="4200"/>
+          </a:lvl3pPr>
+          <a:lvl4pPr marL="857250" indent="-285750" algn="ctr">
+            <a:defRPr sz="4200"/>
+          </a:lvl4pPr>
+          <a:lvl5pPr marL="1143000" indent="-285750" algn="ctr">
+            <a:defRPr sz="4200"/>
+          </a:lvl5pPr>
+          <a:lvl6pPr marL="1428750" indent="-285750" algn="ctr">
+            <a:defRPr sz="4200"/>
+          </a:lvl6pPr>
+          <a:lvl7pPr marL="1714500" indent="-285750" algn="ctr">
+            <a:defRPr sz="4200"/>
+          </a:lvl7pPr>
+          <a:lvl8pPr marL="2000250" indent="-285750" algn="ctr">
+            <a:defRPr sz="4200"/>
+          </a:lvl8pPr>
+          <a:lvl9pPr marL="2286000" indent="-285750" algn="ctr">
+            <a:defRPr sz="4200"/>
+          </a:lvl9pPr>
+        </a:lstStyle>
+        <a:p>
+          <a:pPr lvl="0">
+            <a:lnSpc>
+              <a:spcPct val="100000"/>
+            </a:lnSpc>
+            <a:spcBef>
+              <a:spcPct val="0"/>
+            </a:spcBef>
+            <a:spcAft>
+              <a:spcPct val="35000"/>
+            </a:spcAft>
+          </a:pPr>
+          <a:endParaRPr>
+            <a:solidFill>
+              <a:schemeClr val="dk1"/>
+            </a:solidFill>
+          </a:endParaRPr>
+        </a:p>
+      </dsp:txBody>
+      <dsp:txXfrm>
+        <a:off x="1449263" y="3520867"/>
+        <a:ext cx="290102" cy="0"/>
+      </dsp:txXfrm>
+    </dsp:sp>
+    <dsp:sp modelId="{073A29C7-3BC3-42A7-AA3F-6B8157543E42}">
+      <dsp:nvSpPr>
+        <dsp:cNvPr id="17" name="Rectangle 16"/>
+        <dsp:cNvSpPr/>
+      </dsp:nvSpPr>
+      <dsp:spPr bwMode="white">
+        <a:xfrm>
+          <a:off x="187952" y="3142474"/>
+          <a:ext cx="1261311" cy="756787"/>
+        </a:xfrm>
+        <a:prstGeom prst="rect">
+          <a:avLst/>
+        </a:prstGeom>
+      </dsp:spPr>
+      <dsp:style>
+        <a:lnRef idx="3">
+          <a:schemeClr val="accent6">
+            <a:shade val="80000"/>
+          </a:schemeClr>
+        </a:lnRef>
+        <a:fillRef idx="1">
+          <a:schemeClr val="lt1"/>
+        </a:fillRef>
+        <a:effectRef idx="1">
+          <a:scrgbClr r="0" g="0" b="0"/>
+        </a:effectRef>
+        <a:fontRef idx="minor">
+          <a:schemeClr val="lt1"/>
+        </a:fontRef>
+      </dsp:style>
+      <dsp:txBody>
+        <a:bodyPr vert="horz" wrap="square" lIns="78232" tIns="78232" rIns="78232" bIns="78232" anchor="ctr"/>
+        <a:lstStyle>
+          <a:lvl1pPr algn="ctr">
+            <a:defRPr sz="1100"/>
+          </a:lvl1pPr>
+          <a:lvl2pPr marL="57150" indent="-57150" algn="ctr">
+            <a:defRPr sz="800"/>
+          </a:lvl2pPr>
+          <a:lvl3pPr marL="114300" indent="-57150" algn="ctr">
+            <a:defRPr sz="800"/>
+          </a:lvl3pPr>
+          <a:lvl4pPr marL="171450" indent="-57150" algn="ctr">
+            <a:defRPr sz="800"/>
+          </a:lvl4pPr>
+          <a:lvl5pPr marL="228600" indent="-57150" algn="ctr">
+            <a:defRPr sz="800"/>
+          </a:lvl5pPr>
+          <a:lvl6pPr marL="285750" indent="-57150" algn="ctr">
+            <a:defRPr sz="800"/>
+          </a:lvl6pPr>
+          <a:lvl7pPr marL="342900" indent="-57150" algn="ctr">
+            <a:defRPr sz="800"/>
+          </a:lvl7pPr>
+          <a:lvl8pPr marL="400050" indent="-57150" algn="ctr">
+            <a:defRPr sz="800"/>
+          </a:lvl8pPr>
+          <a:lvl9pPr marL="457200" indent="-57150" algn="ctr">
+            <a:defRPr sz="800"/>
+          </a:lvl9pPr>
+        </a:lstStyle>
+        <a:p>
+          <a:pPr lvl="0">
+            <a:lnSpc>
+              <a:spcPct val="100000"/>
+            </a:lnSpc>
+            <a:spcBef>
+              <a:spcPct val="0"/>
+            </a:spcBef>
+            <a:spcAft>
+              <a:spcPct val="35000"/>
+            </a:spcAft>
+          </a:pPr>
+          <a:r>
+            <a:rPr lang="">
+              <a:solidFill>
+                <a:schemeClr val="dk1"/>
+              </a:solidFill>
+            </a:rPr>
+            <a:t>Ipotesi confermata</a:t>
+          </a:r>
+          <a:endParaRPr lang="">
+            <a:solidFill>
+              <a:schemeClr val="dk1"/>
+            </a:solidFill>
+          </a:endParaRPr>
+        </a:p>
+      </dsp:txBody>
+      <dsp:txXfrm>
+        <a:off x="187952" y="3142474"/>
+        <a:ext cx="1261311" cy="756787"/>
+      </dsp:txXfrm>
+    </dsp:sp>
+    <dsp:sp modelId="{2CDEA325-E5C0-43C8-BD90-51BC76F2EA8B}">
+      <dsp:nvSpPr>
+        <dsp:cNvPr id="20" name="Freeform 19"/>
+        <dsp:cNvSpPr/>
+      </dsp:nvSpPr>
+      <dsp:spPr bwMode="white">
+        <a:xfrm>
+          <a:off x="818608" y="3899261"/>
+          <a:ext cx="1551412" cy="289168"/>
+        </a:xfrm>
+        <a:custGeom>
+          <a:avLst/>
+          <a:gdLst/>
+          <a:ahLst/>
+          <a:cxnLst/>
+          <a:pathLst>
+            <a:path w="2443" h="455">
+              <a:moveTo>
+                <a:pt x="2443" y="0"/>
+              </a:moveTo>
+              <a:lnTo>
+                <a:pt x="2443" y="228"/>
+              </a:lnTo>
+              <a:lnTo>
+                <a:pt x="0" y="228"/>
+              </a:lnTo>
+              <a:lnTo>
+                <a:pt x="0" y="455"/>
+              </a:lnTo>
+            </a:path>
+          </a:pathLst>
+        </a:custGeom>
+        <a:ln>
+          <a:tailEnd type="arrow" w="lg" len="med"/>
+        </a:ln>
+      </dsp:spPr>
+      <dsp:style>
+        <a:lnRef idx="1">
+          <a:schemeClr val="accent6"/>
+        </a:lnRef>
+        <a:fillRef idx="0">
+          <a:schemeClr val="accent6"/>
+        </a:fillRef>
+        <a:effectRef idx="0">
+          <a:scrgbClr r="0" g="0" b="0"/>
+        </a:effectRef>
+        <a:fontRef idx="minor"/>
+      </dsp:style>
+      <dsp:txBody>
+        <a:bodyPr lIns="12700" tIns="0" rIns="12700" bIns="0" anchor="ctr"/>
+        <a:lstStyle>
+          <a:lvl1pPr algn="ctr">
+            <a:defRPr sz="5500"/>
+          </a:lvl1pPr>
+          <a:lvl2pPr marL="285750" indent="-285750" algn="ctr">
+            <a:defRPr sz="4200"/>
+          </a:lvl2pPr>
+          <a:lvl3pPr marL="571500" indent="-285750" algn="ctr">
+            <a:defRPr sz="4200"/>
+          </a:lvl3pPr>
+          <a:lvl4pPr marL="857250" indent="-285750" algn="ctr">
+            <a:defRPr sz="4200"/>
+          </a:lvl4pPr>
+          <a:lvl5pPr marL="1143000" indent="-285750" algn="ctr">
+            <a:defRPr sz="4200"/>
+          </a:lvl5pPr>
+          <a:lvl6pPr marL="1428750" indent="-285750" algn="ctr">
+            <a:defRPr sz="4200"/>
+          </a:lvl6pPr>
+          <a:lvl7pPr marL="1714500" indent="-285750" algn="ctr">
+            <a:defRPr sz="4200"/>
+          </a:lvl7pPr>
+          <a:lvl8pPr marL="2000250" indent="-285750" algn="ctr">
+            <a:defRPr sz="4200"/>
+          </a:lvl8pPr>
+          <a:lvl9pPr marL="2286000" indent="-285750" algn="ctr">
+            <a:defRPr sz="4200"/>
+          </a:lvl9pPr>
+        </a:lstStyle>
+        <a:p>
+          <a:pPr lvl="0">
+            <a:lnSpc>
+              <a:spcPct val="100000"/>
+            </a:lnSpc>
+            <a:spcBef>
+              <a:spcPct val="0"/>
+            </a:spcBef>
+            <a:spcAft>
+              <a:spcPct val="35000"/>
+            </a:spcAft>
+          </a:pPr>
+          <a:endParaRPr>
+            <a:solidFill>
+              <a:schemeClr val="dk1"/>
+            </a:solidFill>
+          </a:endParaRPr>
+        </a:p>
+      </dsp:txBody>
+      <dsp:txXfrm>
+        <a:off x="818608" y="3899261"/>
+        <a:ext cx="1551412" cy="289168"/>
+      </dsp:txXfrm>
+    </dsp:sp>
+    <dsp:sp modelId="{7B777F2E-D527-4A8C-B26F-6E19ADC1AD96}">
+      <dsp:nvSpPr>
+        <dsp:cNvPr id="19" name="Rectangle 18"/>
+        <dsp:cNvSpPr/>
+      </dsp:nvSpPr>
+      <dsp:spPr bwMode="white">
+        <a:xfrm>
+          <a:off x="1739365" y="3142474"/>
+          <a:ext cx="1261311" cy="756787"/>
+        </a:xfrm>
+        <a:prstGeom prst="rect">
+          <a:avLst/>
+        </a:prstGeom>
+      </dsp:spPr>
+      <dsp:style>
+        <a:lnRef idx="3">
+          <a:schemeClr val="accent6">
+            <a:shade val="80000"/>
+          </a:schemeClr>
+        </a:lnRef>
+        <a:fillRef idx="1">
+          <a:schemeClr val="lt1"/>
+        </a:fillRef>
+        <a:effectRef idx="1">
+          <a:scrgbClr r="0" g="0" b="0"/>
+        </a:effectRef>
+        <a:fontRef idx="minor">
+          <a:schemeClr val="lt1"/>
+        </a:fontRef>
+      </dsp:style>
+      <dsp:txBody>
+        <a:bodyPr vert="horz" wrap="square" lIns="78232" tIns="78232" rIns="78232" bIns="78232" anchor="ctr"/>
+        <a:lstStyle>
+          <a:lvl1pPr algn="ctr">
+            <a:defRPr sz="1100"/>
+          </a:lvl1pPr>
+          <a:lvl2pPr marL="57150" indent="-57150" algn="ctr">
+            <a:defRPr sz="800"/>
+          </a:lvl2pPr>
+          <a:lvl3pPr marL="114300" indent="-57150" algn="ctr">
+            <a:defRPr sz="800"/>
+          </a:lvl3pPr>
+          <a:lvl4pPr marL="171450" indent="-57150" algn="ctr">
+            <a:defRPr sz="800"/>
+          </a:lvl4pPr>
+          <a:lvl5pPr marL="228600" indent="-57150" algn="ctr">
+            <a:defRPr sz="800"/>
+          </a:lvl5pPr>
+          <a:lvl6pPr marL="285750" indent="-57150" algn="ctr">
+            <a:defRPr sz="800"/>
+          </a:lvl6pPr>
+          <a:lvl7pPr marL="342900" indent="-57150" algn="ctr">
+            <a:defRPr sz="800"/>
+          </a:lvl7pPr>
+          <a:lvl8pPr marL="400050" indent="-57150" algn="ctr">
+            <a:defRPr sz="800"/>
+          </a:lvl8pPr>
+          <a:lvl9pPr marL="457200" indent="-57150" algn="ctr">
+            <a:defRPr sz="800"/>
+          </a:lvl9pPr>
+        </a:lstStyle>
+        <a:p>
+          <a:pPr lvl="0">
+            <a:lnSpc>
+              <a:spcPct val="100000"/>
+            </a:lnSpc>
+            <a:spcBef>
+              <a:spcPct val="0"/>
+            </a:spcBef>
+            <a:spcAft>
+              <a:spcPct val="35000"/>
+            </a:spcAft>
+          </a:pPr>
+          <a:r>
+            <a:rPr lang="">
+              <a:solidFill>
+                <a:schemeClr val="dk1"/>
+              </a:solidFill>
+            </a:rPr>
+            <a:t>Comunicazione dei risultati</a:t>
+          </a:r>
+          <a:endParaRPr lang="">
+            <a:solidFill>
+              <a:schemeClr val="dk1"/>
+            </a:solidFill>
+          </a:endParaRPr>
+        </a:p>
+      </dsp:txBody>
+      <dsp:txXfrm>
+        <a:off x="1739365" y="3142474"/>
+        <a:ext cx="1261311" cy="756787"/>
+      </dsp:txXfrm>
+    </dsp:sp>
+    <dsp:sp modelId="{87A2B6C2-D221-4807-B0CE-037D50AF34AD}">
+      <dsp:nvSpPr>
+        <dsp:cNvPr id="22" name="Freeform 21"/>
+        <dsp:cNvSpPr/>
+      </dsp:nvSpPr>
+      <dsp:spPr bwMode="white">
+        <a:xfrm>
+          <a:off x="1449263" y="4566822"/>
+          <a:ext cx="290102" cy="0"/>
+        </a:xfrm>
+        <a:custGeom>
+          <a:avLst/>
+          <a:gdLst/>
+          <a:ahLst/>
+          <a:cxnLst/>
+          <a:pathLst>
+            <a:path w="457">
+              <a:moveTo>
+                <a:pt x="0" y="0"/>
+              </a:moveTo>
+              <a:lnTo>
+                <a:pt x="457" y="0"/>
+              </a:lnTo>
+            </a:path>
+          </a:pathLst>
+        </a:custGeom>
+        <a:ln>
+          <a:tailEnd type="arrow" w="lg" len="med"/>
+        </a:ln>
+      </dsp:spPr>
+      <dsp:style>
+        <a:lnRef idx="1">
+          <a:schemeClr val="accent6"/>
+        </a:lnRef>
+        <a:fillRef idx="0">
+          <a:schemeClr val="accent6"/>
+        </a:fillRef>
+        <a:effectRef idx="0">
+          <a:scrgbClr r="0" g="0" b="0"/>
+        </a:effectRef>
+        <a:fontRef idx="minor"/>
+      </dsp:style>
+      <dsp:txBody>
+        <a:bodyPr lIns="12700" tIns="0" rIns="12700" bIns="0" anchor="ctr"/>
+        <a:lstStyle>
+          <a:lvl1pPr algn="ctr">
+            <a:defRPr sz="5500"/>
+          </a:lvl1pPr>
+          <a:lvl2pPr marL="285750" indent="-285750" algn="ctr">
+            <a:defRPr sz="4200"/>
+          </a:lvl2pPr>
+          <a:lvl3pPr marL="571500" indent="-285750" algn="ctr">
+            <a:defRPr sz="4200"/>
+          </a:lvl3pPr>
+          <a:lvl4pPr marL="857250" indent="-285750" algn="ctr">
+            <a:defRPr sz="4200"/>
+          </a:lvl4pPr>
+          <a:lvl5pPr marL="1143000" indent="-285750" algn="ctr">
+            <a:defRPr sz="4200"/>
+          </a:lvl5pPr>
+          <a:lvl6pPr marL="1428750" indent="-285750" algn="ctr">
+            <a:defRPr sz="4200"/>
+          </a:lvl6pPr>
+          <a:lvl7pPr marL="1714500" indent="-285750" algn="ctr">
+            <a:defRPr sz="4200"/>
+          </a:lvl7pPr>
+          <a:lvl8pPr marL="2000250" indent="-285750" algn="ctr">
+            <a:defRPr sz="4200"/>
+          </a:lvl8pPr>
+          <a:lvl9pPr marL="2286000" indent="-285750" algn="ctr">
+            <a:defRPr sz="4200"/>
+          </a:lvl9pPr>
+        </a:lstStyle>
+        <a:p>
+          <a:pPr lvl="0">
+            <a:lnSpc>
+              <a:spcPct val="100000"/>
+            </a:lnSpc>
+            <a:spcBef>
+              <a:spcPct val="0"/>
+            </a:spcBef>
+            <a:spcAft>
+              <a:spcPct val="35000"/>
+            </a:spcAft>
+          </a:pPr>
+          <a:endParaRPr>
+            <a:solidFill>
+              <a:schemeClr val="dk1"/>
+            </a:solidFill>
+          </a:endParaRPr>
+        </a:p>
+      </dsp:txBody>
+      <dsp:txXfrm>
+        <a:off x="1449263" y="4566822"/>
+        <a:ext cx="290102" cy="0"/>
+      </dsp:txXfrm>
+    </dsp:sp>
+    <dsp:sp modelId="{9A9EA554-7DA0-401D-AEA2-6155D0FA75D9}">
+      <dsp:nvSpPr>
+        <dsp:cNvPr id="21" name="Rectangle 20"/>
+        <dsp:cNvSpPr/>
+      </dsp:nvSpPr>
+      <dsp:spPr bwMode="white">
+        <a:xfrm>
+          <a:off x="187952" y="4188429"/>
+          <a:ext cx="1261311" cy="756787"/>
+        </a:xfrm>
+        <a:prstGeom prst="rect">
+          <a:avLst/>
+        </a:prstGeom>
+      </dsp:spPr>
+      <dsp:style>
+        <a:lnRef idx="3">
+          <a:schemeClr val="accent6">
+            <a:shade val="80000"/>
+          </a:schemeClr>
+        </a:lnRef>
+        <a:fillRef idx="1">
+          <a:schemeClr val="lt1"/>
+        </a:fillRef>
+        <a:effectRef idx="1">
+          <a:scrgbClr r="0" g="0" b="0"/>
+        </a:effectRef>
+        <a:fontRef idx="minor">
+          <a:schemeClr val="lt1"/>
+        </a:fontRef>
+      </dsp:style>
+      <dsp:txBody>
+        <a:bodyPr vert="horz" wrap="square" lIns="78232" tIns="78232" rIns="78232" bIns="78232" anchor="ctr"/>
+        <a:lstStyle>
+          <a:lvl1pPr algn="ctr">
+            <a:defRPr sz="1100"/>
+          </a:lvl1pPr>
+          <a:lvl2pPr marL="57150" indent="-57150" algn="ctr">
+            <a:defRPr sz="800"/>
+          </a:lvl2pPr>
+          <a:lvl3pPr marL="114300" indent="-57150" algn="ctr">
+            <a:defRPr sz="800"/>
+          </a:lvl3pPr>
+          <a:lvl4pPr marL="171450" indent="-57150" algn="ctr">
+            <a:defRPr sz="800"/>
+          </a:lvl4pPr>
+          <a:lvl5pPr marL="228600" indent="-57150" algn="ctr">
+            <a:defRPr sz="800"/>
+          </a:lvl5pPr>
+          <a:lvl6pPr marL="285750" indent="-57150" algn="ctr">
+            <a:defRPr sz="800"/>
+          </a:lvl6pPr>
+          <a:lvl7pPr marL="342900" indent="-57150" algn="ctr">
+            <a:defRPr sz="800"/>
+          </a:lvl7pPr>
+          <a:lvl8pPr marL="400050" indent="-57150" algn="ctr">
+            <a:defRPr sz="800"/>
+          </a:lvl8pPr>
+          <a:lvl9pPr marL="457200" indent="-57150" algn="ctr">
+            <a:defRPr sz="800"/>
+          </a:lvl9pPr>
+        </a:lstStyle>
+        <a:p>
+          <a:pPr lvl="0">
+            <a:lnSpc>
+              <a:spcPct val="100000"/>
+            </a:lnSpc>
+            <a:spcBef>
+              <a:spcPct val="0"/>
+            </a:spcBef>
+            <a:spcAft>
+              <a:spcPct val="35000"/>
+            </a:spcAft>
+          </a:pPr>
+          <a:r>
+            <a:rPr lang="">
+              <a:solidFill>
+                <a:schemeClr val="dk1"/>
+              </a:solidFill>
+            </a:rPr>
+            <a:t>Ricerche e verifiche ulteriori</a:t>
+          </a:r>
+          <a:endParaRPr lang="">
+            <a:solidFill>
+              <a:schemeClr val="dk1"/>
+            </a:solidFill>
+          </a:endParaRPr>
+        </a:p>
+      </dsp:txBody>
+      <dsp:txXfrm>
+        <a:off x="187952" y="4188429"/>
+        <a:ext cx="1261311" cy="756787"/>
+      </dsp:txXfrm>
+    </dsp:sp>
+    <dsp:sp modelId="{657023FC-9007-4B07-A54B-73FC1F99DD9A}">
+      <dsp:nvSpPr>
+        <dsp:cNvPr id="23" name="Rectangle 22"/>
+        <dsp:cNvSpPr/>
+      </dsp:nvSpPr>
+      <dsp:spPr bwMode="white">
+        <a:xfrm>
+          <a:off x="1739365" y="4188429"/>
+          <a:ext cx="1261311" cy="756787"/>
+        </a:xfrm>
+        <a:prstGeom prst="rect">
+          <a:avLst/>
+        </a:prstGeom>
+      </dsp:spPr>
+      <dsp:style>
+        <a:lnRef idx="3">
+          <a:schemeClr val="accent6">
+            <a:shade val="80000"/>
+          </a:schemeClr>
+        </a:lnRef>
+        <a:fillRef idx="1">
+          <a:schemeClr val="lt1"/>
+        </a:fillRef>
+        <a:effectRef idx="1">
+          <a:scrgbClr r="0" g="0" b="0"/>
+        </a:effectRef>
+        <a:fontRef idx="minor">
+          <a:schemeClr val="lt1"/>
+        </a:fontRef>
+      </dsp:style>
+      <dsp:txBody>
+        <a:bodyPr vert="horz" wrap="square" lIns="78232" tIns="78232" rIns="78232" bIns="78232" anchor="ctr"/>
+        <a:lstStyle>
+          <a:lvl1pPr algn="ctr">
+            <a:defRPr sz="1100"/>
+          </a:lvl1pPr>
+          <a:lvl2pPr marL="57150" indent="-57150" algn="ctr">
+            <a:defRPr sz="800"/>
+          </a:lvl2pPr>
+          <a:lvl3pPr marL="114300" indent="-57150" algn="ctr">
+            <a:defRPr sz="800"/>
+          </a:lvl3pPr>
+          <a:lvl4pPr marL="171450" indent="-57150" algn="ctr">
+            <a:defRPr sz="800"/>
+          </a:lvl4pPr>
+          <a:lvl5pPr marL="228600" indent="-57150" algn="ctr">
+            <a:defRPr sz="800"/>
+          </a:lvl5pPr>
+          <a:lvl6pPr marL="285750" indent="-57150" algn="ctr">
+            <a:defRPr sz="800"/>
+          </a:lvl6pPr>
+          <a:lvl7pPr marL="342900" indent="-57150" algn="ctr">
+            <a:defRPr sz="800"/>
+          </a:lvl7pPr>
+          <a:lvl8pPr marL="400050" indent="-57150" algn="ctr">
+            <a:defRPr sz="800"/>
+          </a:lvl8pPr>
+          <a:lvl9pPr marL="457200" indent="-57150" algn="ctr">
+            <a:defRPr sz="800"/>
+          </a:lvl9pPr>
+        </a:lstStyle>
+        <a:p>
+          <a:pPr lvl="0">
+            <a:lnSpc>
+              <a:spcPct val="100000"/>
+            </a:lnSpc>
+            <a:spcBef>
+              <a:spcPct val="0"/>
+            </a:spcBef>
+            <a:spcAft>
+              <a:spcPct val="35000"/>
+            </a:spcAft>
+          </a:pPr>
+          <a:r>
+            <a:rPr lang="" cap="all">
+              <a:solidFill>
+                <a:schemeClr val="dk1"/>
+              </a:solidFill>
+              <a:uFillTx/>
+            </a:rPr>
+            <a:t>Formulazione della legge</a:t>
+          </a:r>
+          <a:endParaRPr lang="" cap="all">
+            <a:solidFill>
+              <a:schemeClr val="dk1"/>
+            </a:solidFill>
+            <a:uFillTx/>
+          </a:endParaRPr>
+        </a:p>
+      </dsp:txBody>
+      <dsp:txXfrm>
+        <a:off x="1739365" y="4188429"/>
+        <a:ext cx="1261311" cy="756787"/>
+      </dsp:txXfrm>
+    </dsp:sp>
+  </dsp:spTree>
+</dsp:drawing>
+</file>
+
+<file path=ppt/diagrams/layout1.xml><?xml version="1.0" encoding="utf-8"?>
+<dgm:layoutDef xmlns:dgm="http://schemas.openxmlformats.org/drawingml/2006/diagram" xmlns:a="http://schemas.openxmlformats.org/drawingml/2006/main" uniqueId="urn:microsoft.com/office/officeart/2005/8/layout/bProcess3">
+  <dgm:title val=""/>
+  <dgm:desc val=""/>
+  <dgm:catLst>
+    <dgm:cat type="process" pri="18000"/>
+  </dgm:catLst>
+  <dgm:sampData>
+    <dgm:dataModel>
+      <dgm:ptLst>
+        <dgm:pt modelId="0" type="doc"/>
+        <dgm:pt modelId="1">
+          <dgm:prSet phldr="true"/>
+        </dgm:pt>
+        <dgm:pt modelId="2">
+          <dgm:prSet phldr="true"/>
+        </dgm:pt>
+        <dgm:pt modelId="3">
+          <dgm:prSet phldr="true"/>
+        </dgm:pt>
+        <dgm:pt modelId="4">
+          <dgm:prSet phldr="true"/>
+        </dgm:pt>
+        <dgm:pt modelId="5">
+          <dgm:prSet phldr="true"/>
+        </dgm:pt>
+      </dgm:ptLst>
+      <dgm:cxnLst>
+        <dgm:cxn modelId="7" srcId="0" destId="1" srcOrd="0" destOrd="0"/>
+        <dgm:cxn modelId="8" srcId="0" destId="2" srcOrd="1" destOrd="0"/>
+        <dgm:cxn modelId="9" srcId="0" destId="3" srcOrd="2" destOrd="0"/>
+        <dgm:cxn modelId="10" srcId="0" destId="4" srcOrd="3" destOrd="0"/>
+        <dgm:cxn modelId="11" srcId="0" destId="5" srcOrd="4" destOrd="0"/>
+      </dgm:cxnLst>
+      <dgm:bg/>
+      <dgm:whole/>
+    </dgm:dataModel>
+  </dgm:sampData>
+  <dgm:styleData>
+    <dgm:dataModel>
+      <dgm:ptLst>
+        <dgm:pt modelId="0" type="doc">
+          <dgm:prSet qsTypeId="urn:microsoft.com/office/officeart/2005/8/quickstyle/simple5"/>
+        </dgm:pt>
+        <dgm:pt modelId="1"/>
+        <dgm:pt modelId="2"/>
+      </dgm:ptLst>
+      <dgm:cxnLst>
+        <dgm:cxn modelId="3" srcId="0" destId="1" srcOrd="0" destOrd="0"/>
+        <dgm:cxn modelId="4" srcId="0" destId="2" srcOrd="1" destOrd="0"/>
+      </dgm:cxnLst>
+      <dgm:bg/>
+      <dgm:whole/>
+    </dgm:dataModel>
+  </dgm:styleData>
+  <dgm:clrData>
+    <dgm:dataModel>
+      <dgm:ptLst>
+        <dgm:pt modelId="0" type="doc">
+          <dgm:prSet csTypeId="urn:microsoft.com/office/officeart/2005/8/colors/accent6_5"/>
+        </dgm:pt>
+        <dgm:pt modelId="1"/>
+        <dgm:pt modelId="2"/>
+        <dgm:pt modelId="3"/>
+        <dgm:pt modelId="4"/>
+      </dgm:ptLst>
+      <dgm:cxnLst>
+        <dgm:cxn modelId="5" srcId="0" destId="1" srcOrd="0" destOrd="0"/>
+        <dgm:cxn modelId="6" srcId="0" destId="2" srcOrd="1" destOrd="0"/>
+        <dgm:cxn modelId="7" srcId="0" destId="3" srcOrd="2" destOrd="0"/>
+        <dgm:cxn modelId="8" srcId="0" destId="4" srcOrd="3" destOrd="0"/>
+      </dgm:cxnLst>
+      <dgm:bg/>
+      <dgm:whole/>
+    </dgm:dataModel>
+  </dgm:clrData>
+  <dgm:layoutNode name="Name0">
+    <dgm:varLst>
+      <dgm:dir/>
+      <dgm:resizeHandles val="exact"/>
+    </dgm:varLst>
+    <dgm:choose name="Name1">
+      <dgm:if name="Name2" axis="self" func="var" arg="dir" op="equ" val="norm">
+        <dgm:alg type="snake">
+          <dgm:param type="bkpt" val="endCnv"/>
+          <dgm:param type="contDir" val="sameDir"/>
+          <dgm:param type="grDir" val="tL"/>
+          <dgm:param type="flowDir" val="row"/>
+        </dgm:alg>
+      </dgm:if>
+      <dgm:else name="Name3">
+        <dgm:alg type="snake">
+          <dgm:param type="bkpt" val="endCnv"/>
+          <dgm:param type="contDir" val="sameDir"/>
+          <dgm:param type="grDir" val="tR"/>
+          <dgm:param type="flowDir" val="row"/>
+        </dgm:alg>
+      </dgm:else>
+    </dgm:choose>
+    <dgm:shape xmlns:r="http://schemas.openxmlformats.org/officeDocument/2006/relationships" r:blip="">
+      <dgm:adjLst/>
+    </dgm:shape>
+    <dgm:presOf/>
+    <dgm:constrLst>
+      <dgm:constr type="w" for="ch" ptType="node" refType="w"/>
+      <dgm:constr type="w" for="ch" forName="sibTrans" refType="w" refFor="ch" refPtType="node" op="equ" fact="0.23"/>
+      <dgm:constr type="sp" refType="w" refFor="ch" refForName="sibTrans" op="equ"/>
+      <dgm:constr type="userB" for="des" forName="connectorText" refType="sp"/>
+      <dgm:constr type="primFontSz" for="ch" ptType="node" op="equ" val="65"/>
+      <dgm:constr type="h" for="ch" ptType="sibTrans" op="equ"/>
+      <dgm:constr type="primFontSz" for="des" forName="connectorText" op="equ" val="55"/>
+      <dgm:constr type="primFontSz" for="des" forName="connectorText" refType="primFontSz" refFor="ch" refPtType="node" op="lte" fact="0.8"/>
+    </dgm:constrLst>
+    <dgm:ruleLst/>
+    <dgm:forEach name="nodesForEach" axis="ch" ptType="node">
+      <dgm:layoutNode name="node">
+        <dgm:varLst>
+          <dgm:bulletEnabled val="true"/>
+        </dgm:varLst>
+        <dgm:alg type="tx"/>
+        <dgm:shape xmlns:r="http://schemas.openxmlformats.org/officeDocument/2006/relationships" type="rect" r:blip="">
+          <dgm:adjLst/>
+        </dgm:shape>
+        <dgm:presOf axis="desOrSelf" ptType="node"/>
+        <dgm:constrLst>
+          <dgm:constr type="h" refType="w" fact="0.6"/>
+        </dgm:constrLst>
+        <dgm:ruleLst>
+          <dgm:rule type="primFontSz" val="5" fact="NaN" max="NaN"/>
+        </dgm:ruleLst>
+      </dgm:layoutNode>
+      <dgm:forEach name="sibTransForEach" axis="followSib" ptType="sibTrans" cnt="1">
+        <dgm:layoutNode name="sibTrans">
+          <dgm:choose name="Name4">
+            <dgm:if name="Name5" axis="self" func="var" arg="dir" op="equ" val="norm">
+              <dgm:alg type="conn">
+                <dgm:param type="dim" val="1D"/>
+                <dgm:param type="connRout" val="bend"/>
+                <dgm:param type="begPts" val="midR bCtr"/>
+                <dgm:param type="endPts" val="midL tCtr"/>
+              </dgm:alg>
+            </dgm:if>
+            <dgm:else name="Name6">
+              <dgm:alg type="conn">
+                <dgm:param type="dim" val="1D"/>
+                <dgm:param type="connRout" val="bend"/>
+                <dgm:param type="begPts" val="midL bCtr"/>
+                <dgm:param type="endPts" val="midR tCtr"/>
+              </dgm:alg>
+            </dgm:else>
+          </dgm:choose>
+          <dgm:shape xmlns:r="http://schemas.openxmlformats.org/officeDocument/2006/relationships" type="conn" r:blip="" zOrderOff="-2">
+            <dgm:adjLst/>
+          </dgm:shape>
+          <dgm:presOf axis="self"/>
+          <dgm:constrLst>
+            <dgm:constr type="begPad" val="-0.05"/>
+            <dgm:constr type="endPad" val="0.9"/>
+            <dgm:constr type="userA" for="ch" refType="connDist"/>
+          </dgm:constrLst>
+          <dgm:ruleLst/>
+          <dgm:layoutNode name="connectorText">
+            <dgm:alg type="tx">
+              <dgm:param type="autoTxRot" val="upr"/>
+            </dgm:alg>
+            <dgm:shape xmlns:r="http://schemas.openxmlformats.org/officeDocument/2006/relationships" type="rect" r:blip="" hideGeom="true">
+              <dgm:adjLst/>
+            </dgm:shape>
+            <dgm:presOf axis="self"/>
+            <dgm:constrLst>
+              <dgm:constr type="userA"/>
+              <dgm:constr type="userB"/>
+              <dgm:constr type="w" refType="userA" fact="0.05"/>
+              <dgm:constr type="h" refType="userB" fact="0.01"/>
+              <dgm:constr type="lMarg" val="1"/>
+              <dgm:constr type="rMarg" val="1"/>
+              <dgm:constr type="tMarg"/>
+              <dgm:constr type="bMarg"/>
+            </dgm:constrLst>
+            <dgm:ruleLst>
+              <dgm:rule type="w" val="NaN" fact="0.6" max="NaN"/>
+              <dgm:rule type="h" val="NaN" fact="0.6" max="NaN"/>
+              <dgm:rule type="primFontSz" val="5" fact="NaN" max="NaN"/>
+            </dgm:ruleLst>
+          </dgm:layoutNode>
+        </dgm:layoutNode>
+      </dgm:forEach>
+    </dgm:forEach>
+  </dgm:layoutNode>
+</dgm:layoutDef>
+</file>
+
+<file path=ppt/diagrams/quickStyle1.xml><?xml version="1.0" encoding="utf-8"?>
+<dgm:styleDef xmlns:dgm="http://schemas.openxmlformats.org/drawingml/2006/diagram" xmlns:a="http://schemas.openxmlformats.org/drawingml/2006/main" uniqueId="urn:microsoft.com/office/officeart/2005/8/quickstyle/simple2">
+  <dgm:title val=""/>
+  <dgm:desc val=""/>
+  <dgm:catLst>
+    <dgm:cat type="simple" pri="10200"/>
+  </dgm:catLst>
+  <dgm:scene3d>
+    <a:camera prst="orthographicFront"/>
+    <a:lightRig rig="threePt" dir="t"/>
+  </dgm:scene3d>
+  <dgm:styleLbl name="alignAcc1">
+    <dgm:scene3d>
+      <a:camera prst="orthographicFront"/>
+      <a:lightRig rig="threePt" dir="t"/>
+    </dgm:scene3d>
+    <dgm:txPr/>
+    <dgm:style>
+      <a:lnRef idx="2">
+        <a:scrgbClr r="0" g="0" b="0"/>
+      </a:lnRef>
+      <a:fillRef idx="1">
+        <a:scrgbClr r="0" g="0" b="0"/>
+      </a:fillRef>
+      <a:effectRef idx="0">
+        <a:scrgbClr r="0" g="0" b="0"/>
+      </a:effectRef>
+      <a:fontRef idx="minor"/>
+    </dgm:style>
+  </dgm:styleLbl>
+  <dgm:styleLbl name="alignAccFollowNode1">
+    <dgm:scene3d>
+      <a:camera prst="orthographicFront"/>
+      <a:lightRig rig="threePt" dir="t"/>
+    </dgm:scene3d>
+    <dgm:txPr/>
+    <dgm:style>
+      <a:lnRef idx="2">
+        <a:scrgbClr r="0" g="0" b="0"/>
+      </a:lnRef>
+      <a:fillRef idx="1">
+        <a:scrgbClr r="0" g="0" b="0"/>
+      </a:fillRef>
+      <a:effectRef idx="0">
+        <a:scrgbClr r="0" g="0" b="0"/>
+      </a:effectRef>
+      <a:fontRef idx="minor"/>
+    </dgm:style>
+  </dgm:styleLbl>
+  <dgm:styleLbl name="alignImgPlace1">
+    <dgm:scene3d>
+      <a:camera prst="orthographicFront"/>
+      <a:lightRig rig="threePt" dir="t"/>
+    </dgm:scene3d>
+    <dgm:txPr/>
+    <dgm:style>
+      <a:lnRef idx="3">
+        <a:scrgbClr r="0" g="0" b="0"/>
+      </a:lnRef>
+      <a:fillRef idx="1">
+        <a:scrgbClr r="0" g="0" b="0"/>
+      </a:fillRef>
+      <a:effectRef idx="1">
+        <a:scrgbClr r="0" g="0" b="0"/>
+      </a:effectRef>
+      <a:fontRef idx="minor"/>
+    </dgm:style>
+  </dgm:styleLbl>
+  <dgm:styleLbl name="alignNode1">
+    <dgm:scene3d>
+      <a:camera prst="orthographicFront"/>
+      <a:lightRig rig="threePt" dir="t"/>
+    </dgm:scene3d>
+    <dgm:txPr/>
+    <dgm:style>
+      <a:lnRef idx="2">
+        <a:scrgbClr r="0" g="0" b="0"/>
+      </a:lnRef>
+      <a:fillRef idx="1">
+        <a:scrgbClr r="0" g="0" b="0"/>
+      </a:fillRef>
+      <a:effectRef idx="1">
+        <a:scrgbClr r="0" g="0" b="0"/>
+      </a:effectRef>
+      <a:fontRef idx="minor">
+        <a:schemeClr val="lt1"/>
+      </a:fontRef>
+    </dgm:style>
+  </dgm:styleLbl>
+  <dgm:styleLbl name="asst0">
+    <dgm:scene3d>
+      <a:camera prst="orthographicFront"/>
+      <a:lightRig rig="threePt" dir="t"/>
+    </dgm:scene3d>
+    <dgm:txPr/>
+    <dgm:style>
+      <a:lnRef idx="3">
+        <a:scrgbClr r="0" g="0" b="0"/>
+      </a:lnRef>
+      <a:fillRef idx="1">
+        <a:scrgbClr r="0" g="0" b="0"/>
+      </a:fillRef>
+      <a:effectRef idx="1">
+        <a:scrgbClr r="0" g="0" b="0"/>
+      </a:effectRef>
+      <a:fontRef idx="minor">
+        <a:schemeClr val="lt1"/>
+      </a:fontRef>
+    </dgm:style>
+  </dgm:styleLbl>
+  <dgm:styleLbl name="asst1">
+    <dgm:scene3d>
+      <a:camera prst="orthographicFront"/>
+      <a:lightRig rig="threePt" dir="t"/>
+    </dgm:scene3d>
+    <dgm:txPr/>
+    <dgm:style>
+      <a:lnRef idx="3">
+        <a:scrgbClr r="0" g="0" b="0"/>
+      </a:lnRef>
+      <a:fillRef idx="1">
+        <a:scrgbClr r="0" g="0" b="0"/>
+      </a:fillRef>
+      <a:effectRef idx="1">
+        <a:scrgbClr r="0" g="0" b="0"/>
+      </a:effectRef>
+      <a:fontRef idx="minor">
+        <a:schemeClr val="lt1"/>
+      </a:fontRef>
+    </dgm:style>
+  </dgm:styleLbl>
+  <dgm:styleLbl name="asst2">
+    <dgm:scene3d>
+      <a:camera prst="orthographicFront"/>
+      <a:lightRig rig="threePt" dir="t"/>
+    </dgm:scene3d>
+    <dgm:txPr/>
+    <dgm:style>
+      <a:lnRef idx="3">
+        <a:scrgbClr r="0" g="0" b="0"/>
+      </a:lnRef>
+      <a:fillRef idx="1">
+        <a:scrgbClr r="0" g="0" b="0"/>
+      </a:fillRef>
+      <a:effectRef idx="1">
+        <a:scrgbClr r="0" g="0" b="0"/>
+      </a:effectRef>
+      <a:fontRef idx="minor">
+        <a:schemeClr val="lt1"/>
+      </a:fontRef>
+    </dgm:style>
+  </dgm:styleLbl>
+  <dgm:styleLbl name="asst3">
+    <dgm:scene3d>
+      <a:camera prst="orthographicFront"/>
+      <a:lightRig rig="threePt" dir="t"/>
+    </dgm:scene3d>
+    <dgm:txPr/>
+    <dgm:style>
+      <a:lnRef idx="3">
+        <a:scrgbClr r="0" g="0" b="0"/>
+      </a:lnRef>
+      <a:fillRef idx="1">
+        <a:scrgbClr r="0" g="0" b="0"/>
+      </a:fillRef>
+      <a:effectRef idx="1">
+        <a:scrgbClr r="0" g="0" b="0"/>
+      </a:effectRef>
+      <a:fontRef idx="minor">
+        <a:schemeClr val="lt1"/>
+      </a:fontRef>
+    </dgm:style>
+  </dgm:styleLbl>
+  <dgm:styleLbl name="asst4">
+    <dgm:scene3d>
+      <a:camera prst="orthographicFront"/>
+      <a:lightRig rig="threePt" dir="t"/>
+    </dgm:scene3d>
+    <dgm:txPr/>
+    <dgm:style>
+      <a:lnRef idx="3">
+        <a:scrgbClr r="0" g="0" b="0"/>
+      </a:lnRef>
+      <a:fillRef idx="1">
+        <a:scrgbClr r="0" g="0" b="0"/>
+      </a:fillRef>
+      <a:effectRef idx="1">
+        <a:scrgbClr r="0" g="0" b="0"/>
+      </a:effectRef>
+      <a:fontRef idx="minor">
+        <a:schemeClr val="lt1"/>
+      </a:fontRef>
+    </dgm:style>
+  </dgm:styleLbl>
+  <dgm:styleLbl name="bgAcc1">
+    <dgm:scene3d>
+      <a:camera prst="orthographicFront"/>
+      <a:lightRig rig="threePt" dir="t"/>
+    </dgm:scene3d>
+    <dgm:txPr/>
+    <dgm:style>
+      <a:lnRef idx="2">
+        <a:scrgbClr r="0" g="0" b="0"/>
+      </a:lnRef>
+      <a:fillRef idx="1">
+        <a:scrgbClr r="0" g="0" b="0"/>
+      </a:fillRef>
+      <a:effectRef idx="0">
+        <a:scrgbClr r="0" g="0" b="0"/>
+      </a:effectRef>
+      <a:fontRef idx="minor"/>
+    </dgm:style>
+  </dgm:styleLbl>
+  <dgm:styleLbl name="bgAccFollowNode1">
+    <dgm:scene3d>
+      <a:camera prst="orthographicFront"/>
+      <a:lightRig rig="threePt" dir="t"/>
+    </dgm:scene3d>
+    <dgm:txPr/>
+    <dgm:style>
+      <a:lnRef idx="2">
+        <a:scrgbClr r="0" g="0" b="0"/>
+      </a:lnRef>
+      <a:fillRef idx="1">
+        <a:scrgbClr r="0" g="0" b="0"/>
+      </a:fillRef>
+      <a:effectRef idx="0">
+        <a:scrgbClr r="0" g="0" b="0"/>
+      </a:effectRef>
+      <a:fontRef idx="minor"/>
+    </dgm:style>
+  </dgm:styleLbl>
+  <dgm:styleLbl name="bgImgPlace1">
+    <dgm:scene3d>
+      <a:camera prst="orthographicFront"/>
+      <a:lightRig rig="threePt" dir="t"/>
+    </dgm:scene3d>
+    <dgm:txPr/>
+    <dgm:style>
+      <a:lnRef idx="3">
+        <a:scrgbClr r="0" g="0" b="0"/>
+      </a:lnRef>
+      <a:fillRef idx="1">
+        <a:scrgbClr r="0" g="0" b="0"/>
+      </a:fillRef>
+      <a:effectRef idx="1">
+        <a:scrgbClr r="0" g="0" b="0"/>
+      </a:effectRef>
+      <a:fontRef idx="minor"/>
+    </dgm:style>
+  </dgm:styleLbl>
+  <dgm:styleLbl name="bgShp">
+    <dgm:scene3d>
+      <a:camera prst="orthographicFront"/>
+      <a:lightRig rig="threePt" dir="t"/>
+    </dgm:scene3d>
+    <dgm:txPr/>
+    <dgm:style>
+      <a:lnRef idx="0">
+        <a:scrgbClr r="0" g="0" b="0"/>
+      </a:lnRef>
+      <a:fillRef idx="1">
+        <a:scrgbClr r="0" g="0" b="0"/>
+      </a:fillRef>
+      <a:effectRef idx="0">
+        <a:scrgbClr r="0" g="0" b="0"/>
+      </a:effectRef>
+      <a:fontRef idx="minor"/>
+    </dgm:style>
+  </dgm:styleLbl>
+  <dgm:styleLbl name="bgSibTrans2D1">
+    <dgm:scene3d>
+      <a:camera prst="orthographicFront"/>
+      <a:lightRig rig="threePt" dir="t"/>
+    </dgm:scene3d>
+    <dgm:txPr/>
+    <dgm:style>
+      <a:lnRef idx="0">
+        <a:scrgbClr r="0" g="0" b="0"/>
+      </a:lnRef>
+      <a:fillRef idx="1">
+        <a:scrgbClr r="0" g="0" b="0"/>
+      </a:fillRef>
+      <a:effectRef idx="1">
+        <a:scrgbClr r="0" g="0" b="0"/>
+      </a:effectRef>
+      <a:fontRef idx="minor">
+        <a:schemeClr val="lt1"/>
+      </a:fontRef>
+    </dgm:style>
+  </dgm:styleLbl>
+  <dgm:styleLbl name="callout">
+    <dgm:scene3d>
+      <a:camera prst="orthographicFront"/>
+      <a:lightRig rig="threePt" dir="t"/>
+    </dgm:scene3d>
+    <dgm:txPr/>
+    <dgm:style>
+      <a:lnRef idx="2">
+        <a:scrgbClr r="0" g="0" b="0"/>
+      </a:lnRef>
+      <a:fillRef idx="1">
+        <a:scrgbClr r="0" g="0" b="0"/>
+      </a:fillRef>
+      <a:effectRef idx="1">
+        <a:scrgbClr r="0" g="0" b="0"/>
+      </a:effectRef>
+      <a:fontRef idx="minor"/>
+    </dgm:style>
+  </dgm:styleLbl>
+  <dgm:styleLbl name="conFgAcc1">
+    <dgm:scene3d>
+      <a:camera prst="orthographicFront"/>
+      <a:lightRig rig="threePt" dir="t"/>
+    </dgm:scene3d>
+    <dgm:txPr/>
+    <dgm:style>
+      <a:lnRef idx="2">
+        <a:scrgbClr r="0" g="0" b="0"/>
+      </a:lnRef>
+      <a:fillRef idx="1">
+        <a:scrgbClr r="0" g="0" b="0"/>
+      </a:fillRef>
+      <a:effectRef idx="0">
+        <a:scrgbClr r="0" g="0" b="0"/>
+      </a:effectRef>
+      <a:fontRef idx="minor"/>
+    </dgm:style>
+  </dgm:styleLbl>
+  <dgm:styleLbl name="dkBgShp">
+    <dgm:scene3d>
+      <a:camera prst="orthographicFront"/>
+      <a:lightRig rig="threePt" dir="t"/>
+    </dgm:scene3d>
+    <dgm:txPr/>
+    <dgm:style>
+      <a:lnRef idx="0">
+        <a:scrgbClr r="0" g="0" b="0"/>
+      </a:lnRef>
+      <a:fillRef idx="1">
+        <a:scrgbClr r="0" g="0" b="0"/>
+      </a:fillRef>
+      <a:effectRef idx="0">
+        <a:scrgbClr r="0" g="0" b="0"/>
+      </a:effectRef>
+      <a:fontRef idx="minor"/>
+    </dgm:style>
+  </dgm:styleLbl>
+  <dgm:styleLbl name="fgAcc0">
+    <dgm:scene3d>
+      <a:camera prst="orthographicFront"/>
+      <a:lightRig rig="threePt" dir="t"/>
+    </dgm:scene3d>
+    <dgm:txPr/>
+    <dgm:style>
+      <a:lnRef idx="2">
+        <a:scrgbClr r="0" g="0" b="0"/>
+      </a:lnRef>
+      <a:fillRef idx="1">
+        <a:scrgbClr r="0" g="0" b="0"/>
+      </a:fillRef>
+      <a:effectRef idx="0">
+        <a:scrgbClr r="0" g="0" b="0"/>
+      </a:effectRef>
+      <a:fontRef idx="minor"/>
+    </dgm:style>
+  </dgm:styleLbl>
+  <dgm:styleLbl name="fgAcc1">
+    <dgm:scene3d>
+      <a:camera prst="orthographicFront"/>
+      <a:lightRig rig="threePt" dir="t"/>
+    </dgm:scene3d>
+    <dgm:txPr/>
+    <dgm:style>
+      <a:lnRef idx="2">
+        <a:scrgbClr r="0" g="0" b="0"/>
+      </a:lnRef>
+      <a:fillRef idx="1">
+        <a:scrgbClr r="0" g="0" b="0"/>
+      </a:fillRef>
+      <a:effectRef idx="0">
+        <a:scrgbClr r="0" g="0" b="0"/>
+      </a:effectRef>
+      <a:fontRef idx="minor"/>
+    </dgm:style>
+  </dgm:styleLbl>
+  <dgm:styleLbl name="fgAcc2">
+    <dgm:scene3d>
+      <a:camera prst="orthographicFront"/>
+      <a:lightRig rig="threePt" dir="t"/>
+    </dgm:scene3d>
+    <dgm:txPr/>
+    <dgm:style>
+      <a:lnRef idx="2">
+        <a:scrgbClr r="0" g="0" b="0"/>
+      </a:lnRef>
+      <a:fillRef idx="1">
+        <a:scrgbClr r="0" g="0" b="0"/>
+      </a:fillRef>
+      <a:effectRef idx="0">
+        <a:scrgbClr r="0" g="0" b="0"/>
+      </a:effectRef>
+      <a:fontRef idx="minor"/>
+    </dgm:style>
+  </dgm:styleLbl>
+  <dgm:styleLbl name="fgAcc3">
+    <dgm:scene3d>
+      <a:camera prst="orthographicFront"/>
+      <a:lightRig rig="threePt" dir="t"/>
+    </dgm:scene3d>
+    <dgm:txPr/>
+    <dgm:style>
+      <a:lnRef idx="2">
+        <a:scrgbClr r="0" g="0" b="0"/>
+      </a:lnRef>
+      <a:fillRef idx="1">
+        <a:scrgbClr r="0" g="0" b="0"/>
+      </a:fillRef>
+      <a:effectRef idx="0">
+        <a:scrgbClr r="0" g="0" b="0"/>
+      </a:effectRef>
+      <a:fontRef idx="minor"/>
+    </dgm:style>
+  </dgm:styleLbl>
+  <dgm:styleLbl name="fgAcc4">
+    <dgm:scene3d>
+      <a:camera prst="orthographicFront"/>
+      <a:lightRig rig="threePt" dir="t"/>
+    </dgm:scene3d>
+    <dgm:txPr/>
+    <dgm:style>
+      <a:lnRef idx="2">
+        <a:scrgbClr r="0" g="0" b="0"/>
+      </a:lnRef>
+      <a:fillRef idx="1">
+        <a:scrgbClr r="0" g="0" b="0"/>
+      </a:fillRef>
+      <a:effectRef idx="0">
+        <a:scrgbClr r="0" g="0" b="0"/>
+      </a:effectRef>
+      <a:fontRef idx="minor"/>
+    </dgm:style>
+  </dgm:styleLbl>
+  <dgm:styleLbl name="fgAccFollowNode1">
+    <dgm:scene3d>
+      <a:camera prst="orthographicFront"/>
+      <a:lightRig rig="threePt" dir="t"/>
+    </dgm:scene3d>
+    <dgm:txPr/>
+    <dgm:style>
+      <a:lnRef idx="2">
+        <a:scrgbClr r="0" g="0" b="0"/>
+      </a:lnRef>
+      <a:fillRef idx="1">
+        <a:scrgbClr r="0" g="0" b="0"/>
+      </a:fillRef>
+      <a:effectRef idx="0">
+        <a:scrgbClr r="0" g="0" b="0"/>
+      </a:effectRef>
+      <a:fontRef idx="minor"/>
+    </dgm:style>
+  </dgm:styleLbl>
+  <dgm:styleLbl name="fgImgPlace1">
+    <dgm:scene3d>
+      <a:camera prst="orthographicFront"/>
+      <a:lightRig rig="threePt" dir="t"/>
+    </dgm:scene3d>
+    <dgm:txPr/>
+    <dgm:style>
+      <a:lnRef idx="3">
+        <a:scrgbClr r="0" g="0" b="0"/>
+      </a:lnRef>
+      <a:fillRef idx="1">
+        <a:scrgbClr r="0" g="0" b="0"/>
+      </a:fillRef>
+      <a:effectRef idx="1">
+        <a:scrgbClr r="0" g="0" b="0"/>
+      </a:effectRef>
+      <a:fontRef idx="minor"/>
+    </dgm:style>
+  </dgm:styleLbl>
+  <dgm:styleLbl name="fgShp">
+    <dgm:scene3d>
+      <a:camera prst="orthographicFront"/>
+      <a:lightRig rig="threePt" dir="t"/>
+    </dgm:scene3d>
+    <dgm:txPr/>
+    <dgm:style>
+      <a:lnRef idx="3">
+        <a:scrgbClr r="0" g="0" b="0"/>
+      </a:lnRef>
+      <a:fillRef idx="1">
+        <a:scrgbClr r="0" g="0" b="0"/>
+      </a:fillRef>
+      <a:effectRef idx="1">
+        <a:scrgbClr r="0" g="0" b="0"/>
+      </a:effectRef>
+      <a:fontRef idx="minor"/>
+    </dgm:style>
+  </dgm:styleLbl>
+  <dgm:styleLbl name="fgSibTrans2D1">
+    <dgm:scene3d>
+      <a:camera prst="orthographicFront"/>
+      <a:lightRig rig="threePt" dir="t"/>
+    </dgm:scene3d>
+    <dgm:txPr/>
+    <dgm:style>
+      <a:lnRef idx="0">
+        <a:scrgbClr r="0" g="0" b="0"/>
+      </a:lnRef>
+      <a:fillRef idx="1">
+        <a:scrgbClr r="0" g="0" b="0"/>
+      </a:fillRef>
+      <a:effectRef idx="1">
+        <a:scrgbClr r="0" g="0" b="0"/>
+      </a:effectRef>
+      <a:fontRef idx="minor">
+        <a:schemeClr val="lt1"/>
+      </a:fontRef>
+    </dgm:style>
+  </dgm:styleLbl>
+  <dgm:styleLbl name="lnNode1">
+    <dgm:scene3d>
+      <a:camera prst="orthographicFront"/>
+      <a:lightRig rig="threePt" dir="t"/>
+    </dgm:scene3d>
+    <dgm:txPr/>
+    <dgm:style>
+      <a:lnRef idx="3">
+        <a:scrgbClr r="0" g="0" b="0"/>
+      </a:lnRef>
+      <a:fillRef idx="1">
+        <a:scrgbClr r="0" g="0" b="0"/>
+      </a:fillRef>
+      <a:effectRef idx="1">
+        <a:scrgbClr r="0" g="0" b="0"/>
+      </a:effectRef>
+      <a:fontRef idx="minor">
+        <a:schemeClr val="lt1"/>
+      </a:fontRef>
+    </dgm:style>
+  </dgm:styleLbl>
+  <dgm:styleLbl name="node0">
+    <dgm:scene3d>
+      <a:camera prst="orthographicFront"/>
+      <a:lightRig rig="threePt" dir="t"/>
+    </dgm:scene3d>
+    <dgm:txPr/>
+    <dgm:style>
+      <a:lnRef idx="3">
+        <a:scrgbClr r="0" g="0" b="0"/>
+      </a:lnRef>
+      <a:fillRef idx="1">
+        <a:scrgbClr r="0" g="0" b="0"/>
+      </a:fillRef>
+      <a:effectRef idx="1">
+        <a:scrgbClr r="0" g="0" b="0"/>
+      </a:effectRef>
+      <a:fontRef idx="minor">
+        <a:schemeClr val="lt1"/>
+      </a:fontRef>
+    </dgm:style>
+  </dgm:styleLbl>
+  <dgm:styleLbl name="node1">
+    <dgm:scene3d>
+      <a:camera prst="orthographicFront"/>
+      <a:lightRig rig="threePt" dir="t"/>
+    </dgm:scene3d>
+    <dgm:txPr/>
+    <dgm:style>
+      <a:lnRef idx="3">
+        <a:scrgbClr r="0" g="0" b="0"/>
+      </a:lnRef>
+      <a:fillRef idx="1">
+        <a:scrgbClr r="0" g="0" b="0"/>
+      </a:fillRef>
+      <a:effectRef idx="1">
+        <a:scrgbClr r="0" g="0" b="0"/>
+      </a:effectRef>
+      <a:fontRef idx="minor">
+        <a:schemeClr val="lt1"/>
+      </a:fontRef>
+    </dgm:style>
+  </dgm:styleLbl>
+  <dgm:styleLbl name="node2">
+    <dgm:scene3d>
+      <a:camera prst="orthographicFront"/>
+      <a:lightRig rig="threePt" dir="t"/>
+    </dgm:scene3d>
+    <dgm:txPr/>
+    <dgm:style>
+      <a:lnRef idx="3">
+        <a:scrgbClr r="0" g="0" b="0"/>
+      </a:lnRef>
+      <a:fillRef idx="1">
+        <a:scrgbClr r="0" g="0" b="0"/>
+      </a:fillRef>
+      <a:effectRef idx="1">
+        <a:scrgbClr r="0" g="0" b="0"/>
+      </a:effectRef>
+      <a:fontRef idx="minor">
+        <a:schemeClr val="lt1"/>
+      </a:fontRef>
+    </dgm:style>
+  </dgm:styleLbl>
+  <dgm:styleLbl name="node3">
+    <dgm:scene3d>
+      <a:camera prst="orthographicFront"/>
+      <a:lightRig rig="threePt" dir="t"/>
+    </dgm:scene3d>
+    <dgm:txPr/>
+    <dgm:style>
+      <a:lnRef idx="3">
+        <a:scrgbClr r="0" g="0" b="0"/>
+      </a:lnRef>
+      <a:fillRef idx="1">
+        <a:scrgbClr r="0" g="0" b="0"/>
+      </a:fillRef>
+      <a:effectRef idx="1">
+        <a:scrgbClr r="0" g="0" b="0"/>
+      </a:effectRef>
+      <a:fontRef idx="minor">
+        <a:schemeClr val="lt1"/>
+      </a:fontRef>
+    </dgm:style>
+  </dgm:styleLbl>
+  <dgm:styleLbl name="node4">
+    <dgm:scene3d>
+      <a:camera prst="orthographicFront"/>
+      <a:lightRig rig="threePt" dir="t"/>
+    </dgm:scene3d>
+    <dgm:txPr/>
+    <dgm:style>
+      <a:lnRef idx="3">
+        <a:scrgbClr r="0" g="0" b="0"/>
+      </a:lnRef>
+      <a:fillRef idx="1">
+        <a:scrgbClr r="0" g="0" b="0"/>
+      </a:fillRef>
+      <a:effectRef idx="1">
+        <a:scrgbClr r="0" g="0" b="0"/>
+      </a:effectRef>
+      <a:fontRef idx="minor">
+        <a:schemeClr val="lt1"/>
+      </a:fontRef>
+    </dgm:style>
+  </dgm:styleLbl>
+  <dgm:styleLbl name="parChTrans1D1">
+    <dgm:scene3d>
+      <a:camera prst="orthographicFront"/>
+      <a:lightRig rig="threePt" dir="t"/>
+    </dgm:scene3d>
+    <dgm:txPr/>
+    <dgm:style>
+      <a:lnRef idx="2">
+        <a:scrgbClr r="0" g="0" b="0"/>
+      </a:lnRef>
+      <a:fillRef idx="0">
+        <a:scrgbClr r="0" g="0" b="0"/>
+      </a:fillRef>
+      <a:effectRef idx="0">
+        <a:scrgbClr r="0" g="0" b="0"/>
+      </a:effectRef>
+      <a:fontRef idx="minor"/>
+    </dgm:style>
+  </dgm:styleLbl>
+  <dgm:styleLbl name="parChTrans1D2">
+    <dgm:scene3d>
+      <a:camera prst="orthographicFront"/>
+      <a:lightRig rig="threePt" dir="t"/>
+    </dgm:scene3d>
+    <dgm:txPr/>
+    <dgm:style>
+      <a:lnRef idx="2">
+        <a:scrgbClr r="0" g="0" b="0"/>
+      </a:lnRef>
+      <a:fillRef idx="0">
+        <a:scrgbClr r="0" g="0" b="0"/>
+      </a:fillRef>
+      <a:effectRef idx="0">
+        <a:scrgbClr r="0" g="0" b="0"/>
+      </a:effectRef>
+      <a:fontRef idx="minor"/>
+    </dgm:style>
+  </dgm:styleLbl>
+  <dgm:styleLbl name="parChTrans1D3">
+    <dgm:scene3d>
+      <a:camera prst="orthographicFront"/>
+      <a:lightRig rig="threePt" dir="t"/>
+    </dgm:scene3d>
+    <dgm:txPr/>
+    <dgm:style>
+      <a:lnRef idx="2">
+        <a:scrgbClr r="0" g="0" b="0"/>
+      </a:lnRef>
+      <a:fillRef idx="0">
+        <a:scrgbClr r="0" g="0" b="0"/>
+      </a:fillRef>
+      <a:effectRef idx="0">
+        <a:scrgbClr r="0" g="0" b="0"/>
+      </a:effectRef>
+      <a:fontRef idx="minor"/>
+    </dgm:style>
+  </dgm:styleLbl>
+  <dgm:styleLbl name="parChTrans1D4">
+    <dgm:scene3d>
+      <a:camera prst="orthographicFront"/>
+      <a:lightRig rig="threePt" dir="t"/>
+    </dgm:scene3d>
+    <dgm:txPr/>
+    <dgm:style>
+      <a:lnRef idx="2">
+        <a:scrgbClr r="0" g="0" b="0"/>
+      </a:lnRef>
+      <a:fillRef idx="0">
+        <a:scrgbClr r="0" g="0" b="0"/>
+      </a:fillRef>
+      <a:effectRef idx="0">
+        <a:scrgbClr r="0" g="0" b="0"/>
+      </a:effectRef>
+      <a:fontRef idx="minor"/>
+    </dgm:style>
+  </dgm:styleLbl>
+  <dgm:styleLbl name="parChTrans2D1">
+    <dgm:scene3d>
+      <a:camera prst="orthographicFront"/>
+      <a:lightRig rig="threePt" dir="t"/>
+    </dgm:scene3d>
+    <dgm:txPr/>
+    <dgm:style>
+      <a:lnRef idx="3">
+        <a:scrgbClr r="0" g="0" b="0"/>
+      </a:lnRef>
+      <a:fillRef idx="1">
+        <a:scrgbClr r="0" g="0" b="0"/>
+      </a:fillRef>
+      <a:effectRef idx="1">
+        <a:scrgbClr r="0" g="0" b="0"/>
+      </a:effectRef>
+      <a:fontRef idx="minor">
+        <a:schemeClr val="lt1"/>
+      </a:fontRef>
+    </dgm:style>
+  </dgm:styleLbl>
+  <dgm:styleLbl name="parChTrans2D2">
+    <dgm:scene3d>
+      <a:camera prst="orthographicFront"/>
+      <a:lightRig rig="threePt" dir="t"/>
+    </dgm:scene3d>
+    <dgm:txPr/>
+    <dgm:style>
+      <a:lnRef idx="3">
+        <a:scrgbClr r="0" g="0" b="0"/>
+      </a:lnRef>
+      <a:fillRef idx="1">
+        <a:scrgbClr r="0" g="0" b="0"/>
+      </a:fillRef>
+      <a:effectRef idx="1">
+        <a:scrgbClr r="0" g="0" b="0"/>
+      </a:effectRef>
+      <a:fontRef idx="minor">
+        <a:schemeClr val="lt1"/>
+      </a:fontRef>
+    </dgm:style>
+  </dgm:styleLbl>
+  <dgm:styleLbl name="parChTrans2D3">
+    <dgm:scene3d>
+      <a:camera prst="orthographicFront"/>
+      <a:lightRig rig="threePt" dir="t"/>
+    </dgm:scene3d>
+    <dgm:txPr/>
+    <dgm:style>
+      <a:lnRef idx="3">
+        <a:scrgbClr r="0" g="0" b="0"/>
+      </a:lnRef>
+      <a:fillRef idx="1">
+        <a:scrgbClr r="0" g="0" b="0"/>
+      </a:fillRef>
+      <a:effectRef idx="1">
+        <a:scrgbClr r="0" g="0" b="0"/>
+      </a:effectRef>
+      <a:fontRef idx="minor">
+        <a:schemeClr val="lt1"/>
+      </a:fontRef>
+    </dgm:style>
+  </dgm:styleLbl>
+  <dgm:styleLbl name="parChTrans2D4">
+    <dgm:scene3d>
+      <a:camera prst="orthographicFront"/>
+      <a:lightRig rig="threePt" dir="t"/>
+    </dgm:scene3d>
+    <dgm:txPr/>
+    <dgm:style>
+      <a:lnRef idx="3">
+        <a:scrgbClr r="0" g="0" b="0"/>
+      </a:lnRef>
+      <a:fillRef idx="1">
+        <a:scrgbClr r="0" g="0" b="0"/>
+      </a:fillRef>
+      <a:effectRef idx="1">
+        <a:scrgbClr r="0" g="0" b="0"/>
+      </a:effectRef>
+      <a:fontRef idx="minor">
+        <a:schemeClr val="lt1"/>
+      </a:fontRef>
+    </dgm:style>
+  </dgm:styleLbl>
+  <dgm:styleLbl name="revTx">
+    <dgm:scene3d>
+      <a:camera prst="orthographicFront"/>
+      <a:lightRig rig="threePt" dir="t"/>
+    </dgm:scene3d>
+    <dgm:txPr/>
+    <dgm:style>
+      <a:lnRef idx="0">
+        <a:scrgbClr r="0" g="0" b="0"/>
+      </a:lnRef>
+      <a:fillRef idx="0">
+        <a:scrgbClr r="0" g="0" b="0"/>
+      </a:fillRef>
+      <a:effectRef idx="0">
+        <a:scrgbClr r="0" g="0" b="0"/>
+      </a:effectRef>
+      <a:fontRef idx="minor"/>
+    </dgm:style>
+  </dgm:styleLbl>
+  <dgm:styleLbl name="sibTrans1D1">
+    <dgm:scene3d>
+      <a:camera prst="orthographicFront"/>
+      <a:lightRig rig="threePt" dir="t"/>
+    </dgm:scene3d>
+    <dgm:txPr/>
+    <dgm:style>
+      <a:lnRef idx="1">
+        <a:scrgbClr r="0" g="0" b="0"/>
+      </a:lnRef>
+      <a:fillRef idx="0">
+        <a:scrgbClr r="0" g="0" b="0"/>
+      </a:fillRef>
+      <a:effectRef idx="0">
+        <a:scrgbClr r="0" g="0" b="0"/>
+      </a:effectRef>
+      <a:fontRef idx="minor"/>
+    </dgm:style>
+  </dgm:styleLbl>
+  <dgm:styleLbl name="sibTrans2D1">
+    <dgm:scene3d>
+      <a:camera prst="orthographicFront"/>
+      <a:lightRig rig="threePt" dir="t"/>
+    </dgm:scene3d>
+    <dgm:txPr/>
+    <dgm:style>
+      <a:lnRef idx="0">
+        <a:scrgbClr r="0" g="0" b="0"/>
+      </a:lnRef>
+      <a:fillRef idx="1">
+        <a:scrgbClr r="0" g="0" b="0"/>
+      </a:fillRef>
+      <a:effectRef idx="1">
+        <a:scrgbClr r="0" g="0" b="0"/>
+      </a:effectRef>
+      <a:fontRef idx="minor">
+        <a:schemeClr val="lt1"/>
+      </a:fontRef>
+    </dgm:style>
+  </dgm:styleLbl>
+  <dgm:styleLbl name="solidAlignAcc1">
+    <dgm:scene3d>
+      <a:camera prst="orthographicFront"/>
+      <a:lightRig rig="threePt" dir="t"/>
+    </dgm:scene3d>
+    <dgm:txPr/>
+    <dgm:style>
+      <a:lnRef idx="2">
+        <a:scrgbClr r="0" g="0" b="0"/>
+      </a:lnRef>
+      <a:fillRef idx="1">
+        <a:scrgbClr r="0" g="0" b="0"/>
+      </a:fillRef>
+      <a:effectRef idx="0">
+        <a:scrgbClr r="0" g="0" b="0"/>
+      </a:effectRef>
+      <a:fontRef idx="minor"/>
+    </dgm:style>
+  </dgm:styleLbl>
+  <dgm:styleLbl name="solidBgAcc1">
+    <dgm:scene3d>
+      <a:camera prst="orthographicFront"/>
+      <a:lightRig rig="threePt" dir="t"/>
+    </dgm:scene3d>
+    <dgm:txPr/>
+    <dgm:style>
+      <a:lnRef idx="2">
+        <a:scrgbClr r="0" g="0" b="0"/>
+      </a:lnRef>
+      <a:fillRef idx="1">
+        <a:scrgbClr r="0" g="0" b="0"/>
+      </a:fillRef>
+      <a:effectRef idx="0">
+        <a:scrgbClr r="0" g="0" b="0"/>
+      </a:effectRef>
+      <a:fontRef idx="minor"/>
+    </dgm:style>
+  </dgm:styleLbl>
+  <dgm:styleLbl name="solidFgAcc1">
+    <dgm:scene3d>
+      <a:camera prst="orthographicFront"/>
+      <a:lightRig rig="threePt" dir="t"/>
+    </dgm:scene3d>
+    <dgm:txPr/>
+    <dgm:style>
+      <a:lnRef idx="2">
+        <a:scrgbClr r="0" g="0" b="0"/>
+      </a:lnRef>
+      <a:fillRef idx="1">
+        <a:scrgbClr r="0" g="0" b="0"/>
+      </a:fillRef>
+      <a:effectRef idx="0">
+        <a:scrgbClr r="0" g="0" b="0"/>
+      </a:effectRef>
+      <a:fontRef idx="minor"/>
+    </dgm:style>
+  </dgm:styleLbl>
+  <dgm:styleLbl name="trAlignAcc1">
+    <dgm:scene3d>
+      <a:camera prst="orthographicFront"/>
+      <a:lightRig rig="threePt" dir="t"/>
+    </dgm:scene3d>
+    <dgm:txPr/>
+    <dgm:style>
+      <a:lnRef idx="1">
+        <a:scrgbClr r="0" g="0" b="0"/>
+      </a:lnRef>
+      <a:fillRef idx="1">
+        <a:scrgbClr r="0" g="0" b="0"/>
+      </a:fillRef>
+      <a:effectRef idx="0">
+        <a:scrgbClr r="0" g="0" b="0"/>
+      </a:effectRef>
+      <a:fontRef idx="minor"/>
+    </dgm:style>
+  </dgm:styleLbl>
+  <dgm:styleLbl name="trBgShp">
+    <dgm:scene3d>
+      <a:camera prst="orthographicFront"/>
+      <a:lightRig rig="threePt" dir="t"/>
+    </dgm:scene3d>
+    <dgm:txPr/>
+    <dgm:style>
+      <a:lnRef idx="0">
+        <a:scrgbClr r="0" g="0" b="0"/>
+      </a:lnRef>
+      <a:fillRef idx="1">
+        <a:scrgbClr r="0" g="0" b="0"/>
+      </a:fillRef>
+      <a:effectRef idx="0">
+        <a:scrgbClr r="0" g="0" b="0"/>
+      </a:effectRef>
+      <a:fontRef idx="minor"/>
+    </dgm:style>
+  </dgm:styleLbl>
+  <dgm:styleLbl name="vennNode1">
+    <dgm:scene3d>
+      <a:camera prst="orthographicFront"/>
+      <a:lightRig rig="threePt" dir="t"/>
+    </dgm:scene3d>
+    <dgm:txPr/>
+    <dgm:style>
+      <a:lnRef idx="3">
+        <a:scrgbClr r="0" g="0" b="0"/>
+      </a:lnRef>
+      <a:fillRef idx="1">
+        <a:scrgbClr r="0" g="0" b="0"/>
+      </a:fillRef>
+      <a:effectRef idx="0">
+        <a:scrgbClr r="0" g="0" b="0"/>
+      </a:effectRef>
+      <a:fontRef idx="minor">
+        <a:schemeClr val="tx1"/>
+      </a:fontRef>
+    </dgm:style>
+  </dgm:styleLbl>
+</dgm:styleDef>
 </file>
 
 <file path=ppt/handoutMasters/handoutMaster1.xml><?xml version="1.0" encoding="utf-8"?>
@@ -3524,14 +8050,339 @@
   <p:cSld>
     <p:bg>
       <p:bgPr>
-        <a:pattFill prst="pct5">
+        <a:pattFill prst="pct10">
           <a:fgClr>
-            <a:srgbClr val="FF3300"/>
+            <a:srgbClr val="FF400D"/>
           </a:fgClr>
           <a:bgClr>
             <a:schemeClr val="tx1">
-              <a:lumMod val="75000"/>
-              <a:lumOff val="25000"/>
+              <a:lumMod val="65000"/>
+              <a:lumOff val="35000"/>
+            </a:schemeClr>
+          </a:bgClr>
+        </a:pattFill>
+        <a:effectLst/>
+      </p:bgPr>
+    </p:bg>
+    <p:spTree>
+      <p:nvGrpSpPr>
+        <p:cNvPr id="1" name=""/>
+        <p:cNvGrpSpPr/>
+        <p:nvPr/>
+      </p:nvGrpSpPr>
+      <p:grpSpPr/>
+      <p:pic>
+        <p:nvPicPr>
+          <p:cNvPr id="2" name="Picture 1" descr="lithium-2784853_1920"/>
+          <p:cNvPicPr>
+            <a:picLocks noChangeAspect="true"/>
+          </p:cNvPicPr>
+          <p:nvPr/>
+        </p:nvPicPr>
+        <p:blipFill>
+          <a:blip r:embed="rId1"/>
+          <a:stretch>
+            <a:fillRect/>
+          </a:stretch>
+        </p:blipFill>
+        <p:spPr>
+          <a:xfrm>
+            <a:off x="-802640" y="734060"/>
+            <a:ext cx="6633845" cy="4429125"/>
+          </a:xfrm>
+          <a:prstGeom prst="rect">
+            <a:avLst/>
+          </a:prstGeom>
+        </p:spPr>
+      </p:pic>
+      <p:pic>
+        <p:nvPicPr>
+          <p:cNvPr id="7" name="Picture 6" descr="pavimento"/>
+          <p:cNvPicPr>
+            <a:picLocks noChangeAspect="true"/>
+          </p:cNvPicPr>
+          <p:nvPr/>
+        </p:nvPicPr>
+        <p:blipFill>
+          <a:blip r:embed="rId2"/>
+          <a:stretch>
+            <a:fillRect/>
+          </a:stretch>
+        </p:blipFill>
+        <p:spPr>
+          <a:xfrm>
+            <a:off x="-246380" y="6127750"/>
+            <a:ext cx="12650470" cy="974090"/>
+          </a:xfrm>
+          <a:prstGeom prst="rect">
+            <a:avLst/>
+          </a:prstGeom>
+        </p:spPr>
+      </p:pic>
+      <p:sp>
+        <p:nvSpPr>
+          <p:cNvPr id="3" name="Text Box 2"/>
+          <p:cNvSpPr txBox="true"/>
+          <p:nvPr/>
+        </p:nvSpPr>
+        <p:spPr>
+          <a:xfrm>
+            <a:off x="1183005" y="5047615"/>
+            <a:ext cx="2153920" cy="337185"/>
+          </a:xfrm>
+          <a:prstGeom prst="rect">
+            <a:avLst/>
+          </a:prstGeom>
+          <a:noFill/>
+        </p:spPr>
+        <p:txBody>
+          <a:bodyPr wrap="square" rtlCol="0">
+            <a:spAutoFit/>
+          </a:bodyPr>
+          <a:p>
+            <a:pPr fontAlgn="auto"/>
+            <a:r>
+              <a:rPr lang="en-US" altLang="en-US" sz="1600">
+                <a:ln w="0" cmpd="sng">
+                  <a:noFill/>
+                  <a:prstDash val="solid"/>
+                </a:ln>
+                <a:solidFill>
+                  <a:srgbClr val="47FF52"/>
+                </a:solidFill>
+                <a:latin typeface="OPTINational-Gothic" charset="0"/>
+                <a:cs typeface="OPTINational-Gothic" charset="0"/>
+              </a:rPr>
+              <a:t>- Modello atomico di Bohr</a:t>
+            </a:r>
+            <a:endParaRPr lang="en-US" altLang="en-US" sz="1600">
+              <a:ln w="0" cmpd="sng">
+                <a:noFill/>
+                <a:prstDash val="solid"/>
+              </a:ln>
+              <a:solidFill>
+                <a:srgbClr val="47FF52"/>
+              </a:solidFill>
+              <a:latin typeface="OPTINational-Gothic" charset="0"/>
+              <a:cs typeface="OPTINational-Gothic" charset="0"/>
+            </a:endParaRPr>
+          </a:p>
+        </p:txBody>
+      </p:sp>
+      <p:graphicFrame>
+        <p:nvGraphicFramePr>
+          <p:cNvPr id="4" name="Diagram 3"/>
+          <p:cNvGraphicFramePr/>
+          <p:nvPr/>
+        </p:nvGraphicFramePr>
+        <p:xfrm>
+          <a:off x="4387215" y="945515"/>
+          <a:ext cx="3185160" cy="4949825"/>
+        </p:xfrm>
+        <a:graphic>
+          <a:graphicData uri="http://schemas.openxmlformats.org/drawingml/2006/diagram">
+            <dgm:relIds xmlns:dgm="http://schemas.openxmlformats.org/drawingml/2006/diagram" xmlns:r="http://schemas.openxmlformats.org/officeDocument/2006/relationships" r:dm="rId3" r:lo="rId4" r:qs="rId5" r:cs="rId6"/>
+          </a:graphicData>
+        </a:graphic>
+      </p:graphicFrame>
+      <p:sp>
+        <p:nvSpPr>
+          <p:cNvPr id="6" name="Text Box 5"/>
+          <p:cNvSpPr txBox="true"/>
+          <p:nvPr/>
+        </p:nvSpPr>
+        <p:spPr>
+          <a:xfrm>
+            <a:off x="4902835" y="5893435"/>
+            <a:ext cx="2153920" cy="337185"/>
+          </a:xfrm>
+          <a:prstGeom prst="rect">
+            <a:avLst/>
+          </a:prstGeom>
+          <a:noFill/>
+        </p:spPr>
+        <p:txBody>
+          <a:bodyPr wrap="square" rtlCol="0">
+            <a:spAutoFit/>
+          </a:bodyPr>
+          <a:p>
+            <a:pPr algn="ctr" fontAlgn="auto"/>
+            <a:r>
+              <a:rPr lang="en-US" altLang="en-US" sz="1600">
+                <a:ln w="1270" cmpd="sng">
+                  <a:noFill/>
+                  <a:prstDash val="solid"/>
+                </a:ln>
+                <a:solidFill>
+                  <a:srgbClr val="47FF52"/>
+                </a:solidFill>
+                <a:latin typeface="OPTINational-Gothic" charset="0"/>
+                <a:cs typeface="OPTINational-Gothic" charset="0"/>
+              </a:rPr>
+              <a:t>- Metodo induttivo</a:t>
+            </a:r>
+            <a:endParaRPr lang="en-US" altLang="en-US" sz="1600">
+              <a:ln w="1270" cmpd="sng">
+                <a:noFill/>
+                <a:prstDash val="solid"/>
+              </a:ln>
+              <a:solidFill>
+                <a:srgbClr val="47FF52"/>
+              </a:solidFill>
+              <a:latin typeface="OPTINational-Gothic" charset="0"/>
+              <a:cs typeface="OPTINational-Gothic" charset="0"/>
+            </a:endParaRPr>
+          </a:p>
+        </p:txBody>
+      </p:sp>
+      <p:pic>
+        <p:nvPicPr>
+          <p:cNvPr id="9" name="Picture 8" descr="1024px-Cartesian-coordinate-system.svg"/>
+          <p:cNvPicPr>
+            <a:picLocks noChangeAspect="true"/>
+          </p:cNvPicPr>
+          <p:nvPr/>
+        </p:nvPicPr>
+        <p:blipFill>
+          <a:blip r:embed="rId8"/>
+          <a:stretch>
+            <a:fillRect/>
+          </a:stretch>
+        </p:blipFill>
+        <p:spPr>
+          <a:xfrm>
+            <a:off x="7271385" y="734060"/>
+            <a:ext cx="5061585" cy="5061585"/>
+          </a:xfrm>
+          <a:prstGeom prst="rect">
+            <a:avLst/>
+          </a:prstGeom>
+        </p:spPr>
+      </p:pic>
+      <p:sp>
+        <p:nvSpPr>
+          <p:cNvPr id="5" name="Text Box 4"/>
+          <p:cNvSpPr txBox="true"/>
+          <p:nvPr/>
+        </p:nvSpPr>
+        <p:spPr>
+          <a:xfrm>
+            <a:off x="3206115" y="140335"/>
+            <a:ext cx="5746115" cy="706755"/>
+          </a:xfrm>
+          <a:prstGeom prst="rect">
+            <a:avLst/>
+          </a:prstGeom>
+          <a:noFill/>
+        </p:spPr>
+        <p:txBody>
+          <a:bodyPr wrap="square" rtlCol="0">
+            <a:spAutoFit/>
+          </a:bodyPr>
+          <a:p>
+            <a:r>
+              <a:rPr lang="en-US" altLang="en-US" sz="4000">
+                <a:ln w="28575" cmpd="sng">
+                  <a:solidFill>
+                    <a:srgbClr val="47FF52"/>
+                  </a:solidFill>
+                  <a:prstDash val="solid"/>
+                </a:ln>
+                <a:solidFill>
+                  <a:srgbClr val="644647"/>
+                </a:solidFill>
+                <a:latin typeface="OPTINational-Gothic" charset="0"/>
+                <a:cs typeface="OPTINational-Gothic" charset="0"/>
+              </a:rPr>
+              <a:t>DA CARTESIO A PHILIP GLASS</a:t>
+            </a:r>
+            <a:endParaRPr lang="en-US" altLang="en-US" sz="4000">
+              <a:ln w="28575" cmpd="sng">
+                <a:solidFill>
+                  <a:srgbClr val="47FF52"/>
+                </a:solidFill>
+                <a:prstDash val="solid"/>
+              </a:ln>
+              <a:solidFill>
+                <a:srgbClr val="644647"/>
+              </a:solidFill>
+              <a:latin typeface="OPTINational-Gothic" charset="0"/>
+              <a:cs typeface="OPTINational-Gothic" charset="0"/>
+            </a:endParaRPr>
+          </a:p>
+        </p:txBody>
+      </p:sp>
+      <p:sp>
+        <p:nvSpPr>
+          <p:cNvPr id="10" name="Text Box 9"/>
+          <p:cNvSpPr txBox="true"/>
+          <p:nvPr/>
+        </p:nvSpPr>
+        <p:spPr>
+          <a:xfrm>
+            <a:off x="8622030" y="5661025"/>
+            <a:ext cx="2360930" cy="337185"/>
+          </a:xfrm>
+          <a:prstGeom prst="rect">
+            <a:avLst/>
+          </a:prstGeom>
+          <a:noFill/>
+        </p:spPr>
+        <p:txBody>
+          <a:bodyPr wrap="square" rtlCol="0">
+            <a:spAutoFit/>
+          </a:bodyPr>
+          <a:p>
+            <a:pPr fontAlgn="auto"/>
+            <a:r>
+              <a:rPr lang="en-US" altLang="en-US" sz="1600">
+                <a:ln w="1270" cmpd="sng">
+                  <a:noFill/>
+                  <a:prstDash val="solid"/>
+                </a:ln>
+                <a:solidFill>
+                  <a:srgbClr val="47FF52"/>
+                </a:solidFill>
+                <a:latin typeface="OPTINational-Gothic" charset="0"/>
+                <a:cs typeface="OPTINational-Gothic" charset="0"/>
+              </a:rPr>
+              <a:t>- Sistema di assi cartesiani</a:t>
+            </a:r>
+            <a:endParaRPr lang="en-US" altLang="en-US" sz="1600">
+              <a:ln w="1270" cmpd="sng">
+                <a:noFill/>
+                <a:prstDash val="solid"/>
+              </a:ln>
+              <a:solidFill>
+                <a:srgbClr val="47FF52"/>
+              </a:solidFill>
+              <a:latin typeface="OPTINational-Gothic" charset="0"/>
+              <a:cs typeface="OPTINational-Gothic" charset="0"/>
+            </a:endParaRPr>
+          </a:p>
+        </p:txBody>
+      </p:sp>
+    </p:spTree>
+  </p:cSld>
+  <p:clrMapOvr>
+    <a:masterClrMapping/>
+  </p:clrMapOvr>
+</p:sld>
+</file>
+
+<file path=ppt/slides/slide10.xml><?xml version="1.0" encoding="utf-8"?>
+<p:sld xmlns:a="http://schemas.openxmlformats.org/drawingml/2006/main" xmlns:r="http://schemas.openxmlformats.org/officeDocument/2006/relationships" xmlns:p="http://schemas.openxmlformats.org/presentationml/2006/main">
+  <p:cSld>
+    <p:bg>
+      <p:bgPr>
+        <a:pattFill prst="pct10">
+          <a:fgClr>
+            <a:srgbClr val="FF400D"/>
+          </a:fgClr>
+          <a:bgClr>
+            <a:schemeClr val="tx1">
+              <a:lumMod val="65000"/>
+              <a:lumOff val="35000"/>
             </a:schemeClr>
           </a:bgClr>
         </a:pattFill>
@@ -3577,8 +8428,8 @@
         </p:nvSpPr>
         <p:spPr>
           <a:xfrm>
-            <a:off x="2609850" y="473710"/>
-            <a:ext cx="6212205" cy="1845310"/>
+            <a:off x="3206115" y="140335"/>
+            <a:ext cx="5746115" cy="706755"/>
           </a:xfrm>
           <a:prstGeom prst="rect">
             <a:avLst/>
@@ -3591,7 +8442,7 @@
           </a:bodyPr>
           <a:p>
             <a:r>
-              <a:rPr lang="en-US" altLang="en-US" sz="4800">
+              <a:rPr lang="en-US" altLang="en-US" sz="4000">
                 <a:ln w="28575" cmpd="sng">
                   <a:solidFill>
                     <a:srgbClr val="47FF52"/>
@@ -3604,9 +8455,9 @@
                 <a:latin typeface="OPTINational-Gothic" charset="0"/>
                 <a:cs typeface="OPTINational-Gothic" charset="0"/>
               </a:rPr>
-              <a:t>ELABORATO TWIN PEAKS</a:t>
+              <a:t>DA CARTESIO A PHILIP GLASS</a:t>
             </a:r>
-            <a:endParaRPr lang="en-US" altLang="en-US" sz="6600">
+            <a:endParaRPr lang="en-US" altLang="en-US" sz="4000">
               <a:ln w="28575" cmpd="sng">
                 <a:solidFill>
                   <a:srgbClr val="47FF52"/>
@@ -3620,8 +8471,3952 @@
               <a:cs typeface="OPTINational-Gothic" charset="0"/>
             </a:endParaRPr>
           </a:p>
-          <a:p>
-            <a:endParaRPr lang="en-US" altLang="en-US" sz="6600">
+        </p:txBody>
+      </p:sp>
+    </p:spTree>
+  </p:cSld>
+  <p:clrMapOvr>
+    <a:masterClrMapping/>
+  </p:clrMapOvr>
+</p:sld>
+</file>
+
+<file path=ppt/slides/slide11.xml><?xml version="1.0" encoding="utf-8"?>
+<p:sld xmlns:a="http://schemas.openxmlformats.org/drawingml/2006/main" xmlns:r="http://schemas.openxmlformats.org/officeDocument/2006/relationships" xmlns:p="http://schemas.openxmlformats.org/presentationml/2006/main">
+  <p:cSld>
+    <p:bg>
+      <p:bgPr>
+        <a:pattFill prst="pct10">
+          <a:fgClr>
+            <a:srgbClr val="FF400D"/>
+          </a:fgClr>
+          <a:bgClr>
+            <a:schemeClr val="tx1">
+              <a:lumMod val="65000"/>
+              <a:lumOff val="35000"/>
+            </a:schemeClr>
+          </a:bgClr>
+        </a:pattFill>
+        <a:effectLst/>
+      </p:bgPr>
+    </p:bg>
+    <p:spTree>
+      <p:nvGrpSpPr>
+        <p:cNvPr id="1" name=""/>
+        <p:cNvGrpSpPr/>
+        <p:nvPr/>
+      </p:nvGrpSpPr>
+      <p:grpSpPr/>
+      <p:pic>
+        <p:nvPicPr>
+          <p:cNvPr id="7" name="Picture 6" descr="pavimento"/>
+          <p:cNvPicPr>
+            <a:picLocks noChangeAspect="true"/>
+          </p:cNvPicPr>
+          <p:nvPr/>
+        </p:nvPicPr>
+        <p:blipFill>
+          <a:blip r:embed="rId1"/>
+          <a:stretch>
+            <a:fillRect/>
+          </a:stretch>
+        </p:blipFill>
+        <p:spPr>
+          <a:xfrm>
+            <a:off x="-246380" y="6127750"/>
+            <a:ext cx="12650470" cy="974090"/>
+          </a:xfrm>
+          <a:prstGeom prst="rect">
+            <a:avLst/>
+          </a:prstGeom>
+        </p:spPr>
+      </p:pic>
+      <p:sp>
+        <p:nvSpPr>
+          <p:cNvPr id="5" name="Text Box 4"/>
+          <p:cNvSpPr txBox="true"/>
+          <p:nvPr/>
+        </p:nvSpPr>
+        <p:spPr>
+          <a:xfrm>
+            <a:off x="3206115" y="140335"/>
+            <a:ext cx="5746115" cy="706755"/>
+          </a:xfrm>
+          <a:prstGeom prst="rect">
+            <a:avLst/>
+          </a:prstGeom>
+          <a:noFill/>
+        </p:spPr>
+        <p:txBody>
+          <a:bodyPr wrap="square" rtlCol="0">
+            <a:spAutoFit/>
+          </a:bodyPr>
+          <a:p>
+            <a:r>
+              <a:rPr lang="en-US" altLang="en-US" sz="4000">
+                <a:ln w="28575" cmpd="sng">
+                  <a:solidFill>
+                    <a:srgbClr val="47FF52"/>
+                  </a:solidFill>
+                  <a:prstDash val="solid"/>
+                </a:ln>
+                <a:solidFill>
+                  <a:srgbClr val="644647"/>
+                </a:solidFill>
+                <a:latin typeface="OPTINational-Gothic" charset="0"/>
+                <a:cs typeface="OPTINational-Gothic" charset="0"/>
+              </a:rPr>
+              <a:t>DA CARTESIO A PHILIP GLASS</a:t>
+            </a:r>
+            <a:endParaRPr lang="en-US" altLang="en-US" sz="4000">
+              <a:ln w="28575" cmpd="sng">
+                <a:solidFill>
+                  <a:srgbClr val="47FF52"/>
+                </a:solidFill>
+                <a:prstDash val="solid"/>
+              </a:ln>
+              <a:solidFill>
+                <a:srgbClr val="644647"/>
+              </a:solidFill>
+              <a:latin typeface="OPTINational-Gothic" charset="0"/>
+              <a:cs typeface="OPTINational-Gothic" charset="0"/>
+            </a:endParaRPr>
+          </a:p>
+        </p:txBody>
+      </p:sp>
+    </p:spTree>
+  </p:cSld>
+  <p:clrMapOvr>
+    <a:masterClrMapping/>
+  </p:clrMapOvr>
+</p:sld>
+</file>
+
+<file path=ppt/slides/slide12.xml><?xml version="1.0" encoding="utf-8"?>
+<p:sld xmlns:a="http://schemas.openxmlformats.org/drawingml/2006/main" xmlns:r="http://schemas.openxmlformats.org/officeDocument/2006/relationships" xmlns:p="http://schemas.openxmlformats.org/presentationml/2006/main">
+  <p:cSld>
+    <p:bg>
+      <p:bgPr>
+        <a:pattFill prst="pct10">
+          <a:fgClr>
+            <a:srgbClr val="FF400D"/>
+          </a:fgClr>
+          <a:bgClr>
+            <a:schemeClr val="tx1">
+              <a:lumMod val="65000"/>
+              <a:lumOff val="35000"/>
+            </a:schemeClr>
+          </a:bgClr>
+        </a:pattFill>
+        <a:effectLst/>
+      </p:bgPr>
+    </p:bg>
+    <p:spTree>
+      <p:nvGrpSpPr>
+        <p:cNvPr id="1" name=""/>
+        <p:cNvGrpSpPr/>
+        <p:nvPr/>
+      </p:nvGrpSpPr>
+      <p:grpSpPr/>
+      <p:pic>
+        <p:nvPicPr>
+          <p:cNvPr id="7" name="Picture 6" descr="pavimento"/>
+          <p:cNvPicPr>
+            <a:picLocks noChangeAspect="true"/>
+          </p:cNvPicPr>
+          <p:nvPr/>
+        </p:nvPicPr>
+        <p:blipFill>
+          <a:blip r:embed="rId1"/>
+          <a:stretch>
+            <a:fillRect/>
+          </a:stretch>
+        </p:blipFill>
+        <p:spPr>
+          <a:xfrm>
+            <a:off x="-246380" y="6127750"/>
+            <a:ext cx="12650470" cy="974090"/>
+          </a:xfrm>
+          <a:prstGeom prst="rect">
+            <a:avLst/>
+          </a:prstGeom>
+        </p:spPr>
+      </p:pic>
+      <p:sp>
+        <p:nvSpPr>
+          <p:cNvPr id="5" name="Text Box 4"/>
+          <p:cNvSpPr txBox="true"/>
+          <p:nvPr/>
+        </p:nvSpPr>
+        <p:spPr>
+          <a:xfrm>
+            <a:off x="3206115" y="140335"/>
+            <a:ext cx="5746115" cy="706755"/>
+          </a:xfrm>
+          <a:prstGeom prst="rect">
+            <a:avLst/>
+          </a:prstGeom>
+          <a:noFill/>
+        </p:spPr>
+        <p:txBody>
+          <a:bodyPr wrap="square" rtlCol="0">
+            <a:spAutoFit/>
+          </a:bodyPr>
+          <a:p>
+            <a:r>
+              <a:rPr lang="en-US" altLang="en-US" sz="4000">
+                <a:ln w="28575" cmpd="sng">
+                  <a:solidFill>
+                    <a:srgbClr val="47FF52"/>
+                  </a:solidFill>
+                  <a:prstDash val="solid"/>
+                </a:ln>
+                <a:solidFill>
+                  <a:srgbClr val="644647"/>
+                </a:solidFill>
+                <a:latin typeface="OPTINational-Gothic" charset="0"/>
+                <a:cs typeface="OPTINational-Gothic" charset="0"/>
+              </a:rPr>
+              <a:t>DA CARTESIO A PHILIP GLASS</a:t>
+            </a:r>
+            <a:endParaRPr lang="en-US" altLang="en-US" sz="4000">
+              <a:ln w="28575" cmpd="sng">
+                <a:solidFill>
+                  <a:srgbClr val="47FF52"/>
+                </a:solidFill>
+                <a:prstDash val="solid"/>
+              </a:ln>
+              <a:solidFill>
+                <a:srgbClr val="644647"/>
+              </a:solidFill>
+              <a:latin typeface="OPTINational-Gothic" charset="0"/>
+              <a:cs typeface="OPTINational-Gothic" charset="0"/>
+            </a:endParaRPr>
+          </a:p>
+        </p:txBody>
+      </p:sp>
+    </p:spTree>
+  </p:cSld>
+  <p:clrMapOvr>
+    <a:masterClrMapping/>
+  </p:clrMapOvr>
+</p:sld>
+</file>
+
+<file path=ppt/slides/slide13.xml><?xml version="1.0" encoding="utf-8"?>
+<p:sld xmlns:a="http://schemas.openxmlformats.org/drawingml/2006/main" xmlns:r="http://schemas.openxmlformats.org/officeDocument/2006/relationships" xmlns:p="http://schemas.openxmlformats.org/presentationml/2006/main">
+  <p:cSld>
+    <p:bg>
+      <p:bgPr>
+        <a:pattFill prst="pct10">
+          <a:fgClr>
+            <a:srgbClr val="FF400D"/>
+          </a:fgClr>
+          <a:bgClr>
+            <a:schemeClr val="tx1">
+              <a:lumMod val="65000"/>
+              <a:lumOff val="35000"/>
+            </a:schemeClr>
+          </a:bgClr>
+        </a:pattFill>
+        <a:effectLst/>
+      </p:bgPr>
+    </p:bg>
+    <p:spTree>
+      <p:nvGrpSpPr>
+        <p:cNvPr id="1" name=""/>
+        <p:cNvGrpSpPr/>
+        <p:nvPr/>
+      </p:nvGrpSpPr>
+      <p:grpSpPr/>
+      <p:pic>
+        <p:nvPicPr>
+          <p:cNvPr id="7" name="Picture 6" descr="pavimento"/>
+          <p:cNvPicPr>
+            <a:picLocks noChangeAspect="true"/>
+          </p:cNvPicPr>
+          <p:nvPr/>
+        </p:nvPicPr>
+        <p:blipFill>
+          <a:blip r:embed="rId1"/>
+          <a:stretch>
+            <a:fillRect/>
+          </a:stretch>
+        </p:blipFill>
+        <p:spPr>
+          <a:xfrm>
+            <a:off x="-246380" y="6127750"/>
+            <a:ext cx="12650470" cy="974090"/>
+          </a:xfrm>
+          <a:prstGeom prst="rect">
+            <a:avLst/>
+          </a:prstGeom>
+        </p:spPr>
+      </p:pic>
+      <p:sp>
+        <p:nvSpPr>
+          <p:cNvPr id="5" name="Text Box 4"/>
+          <p:cNvSpPr txBox="true"/>
+          <p:nvPr/>
+        </p:nvSpPr>
+        <p:spPr>
+          <a:xfrm>
+            <a:off x="3206115" y="140335"/>
+            <a:ext cx="5746115" cy="706755"/>
+          </a:xfrm>
+          <a:prstGeom prst="rect">
+            <a:avLst/>
+          </a:prstGeom>
+          <a:noFill/>
+        </p:spPr>
+        <p:txBody>
+          <a:bodyPr wrap="square" rtlCol="0">
+            <a:spAutoFit/>
+          </a:bodyPr>
+          <a:p>
+            <a:r>
+              <a:rPr lang="en-US" altLang="en-US" sz="4000">
+                <a:ln w="28575" cmpd="sng">
+                  <a:solidFill>
+                    <a:srgbClr val="47FF52"/>
+                  </a:solidFill>
+                  <a:prstDash val="solid"/>
+                </a:ln>
+                <a:solidFill>
+                  <a:srgbClr val="644647"/>
+                </a:solidFill>
+                <a:latin typeface="OPTINational-Gothic" charset="0"/>
+                <a:cs typeface="OPTINational-Gothic" charset="0"/>
+              </a:rPr>
+              <a:t>DA CARTESIO A PHILIP GLASS</a:t>
+            </a:r>
+            <a:endParaRPr lang="en-US" altLang="en-US" sz="4000">
+              <a:ln w="28575" cmpd="sng">
+                <a:solidFill>
+                  <a:srgbClr val="47FF52"/>
+                </a:solidFill>
+                <a:prstDash val="solid"/>
+              </a:ln>
+              <a:solidFill>
+                <a:srgbClr val="644647"/>
+              </a:solidFill>
+              <a:latin typeface="OPTINational-Gothic" charset="0"/>
+              <a:cs typeface="OPTINational-Gothic" charset="0"/>
+            </a:endParaRPr>
+          </a:p>
+        </p:txBody>
+      </p:sp>
+    </p:spTree>
+  </p:cSld>
+  <p:clrMapOvr>
+    <a:masterClrMapping/>
+  </p:clrMapOvr>
+</p:sld>
+</file>
+
+<file path=ppt/slides/slide14.xml><?xml version="1.0" encoding="utf-8"?>
+<p:sld xmlns:a="http://schemas.openxmlformats.org/drawingml/2006/main" xmlns:r="http://schemas.openxmlformats.org/officeDocument/2006/relationships" xmlns:p="http://schemas.openxmlformats.org/presentationml/2006/main">
+  <p:cSld>
+    <p:bg>
+      <p:bgPr>
+        <a:pattFill prst="pct10">
+          <a:fgClr>
+            <a:srgbClr val="FF400D"/>
+          </a:fgClr>
+          <a:bgClr>
+            <a:schemeClr val="tx1">
+              <a:lumMod val="65000"/>
+              <a:lumOff val="35000"/>
+            </a:schemeClr>
+          </a:bgClr>
+        </a:pattFill>
+        <a:effectLst/>
+      </p:bgPr>
+    </p:bg>
+    <p:spTree>
+      <p:nvGrpSpPr>
+        <p:cNvPr id="1" name=""/>
+        <p:cNvGrpSpPr/>
+        <p:nvPr/>
+      </p:nvGrpSpPr>
+      <p:grpSpPr/>
+      <p:pic>
+        <p:nvPicPr>
+          <p:cNvPr id="7" name="Picture 6" descr="pavimento"/>
+          <p:cNvPicPr>
+            <a:picLocks noChangeAspect="true"/>
+          </p:cNvPicPr>
+          <p:nvPr/>
+        </p:nvPicPr>
+        <p:blipFill>
+          <a:blip r:embed="rId1"/>
+          <a:stretch>
+            <a:fillRect/>
+          </a:stretch>
+        </p:blipFill>
+        <p:spPr>
+          <a:xfrm>
+            <a:off x="-246380" y="6127750"/>
+            <a:ext cx="12650470" cy="974090"/>
+          </a:xfrm>
+          <a:prstGeom prst="rect">
+            <a:avLst/>
+          </a:prstGeom>
+        </p:spPr>
+      </p:pic>
+      <p:sp>
+        <p:nvSpPr>
+          <p:cNvPr id="5" name="Text Box 4"/>
+          <p:cNvSpPr txBox="true"/>
+          <p:nvPr/>
+        </p:nvSpPr>
+        <p:spPr>
+          <a:xfrm>
+            <a:off x="3206115" y="140335"/>
+            <a:ext cx="5746115" cy="706755"/>
+          </a:xfrm>
+          <a:prstGeom prst="rect">
+            <a:avLst/>
+          </a:prstGeom>
+          <a:noFill/>
+        </p:spPr>
+        <p:txBody>
+          <a:bodyPr wrap="square" rtlCol="0">
+            <a:spAutoFit/>
+          </a:bodyPr>
+          <a:p>
+            <a:r>
+              <a:rPr lang="en-US" altLang="en-US" sz="4000">
+                <a:ln w="28575" cmpd="sng">
+                  <a:solidFill>
+                    <a:srgbClr val="47FF52"/>
+                  </a:solidFill>
+                  <a:prstDash val="solid"/>
+                </a:ln>
+                <a:solidFill>
+                  <a:srgbClr val="644647"/>
+                </a:solidFill>
+                <a:latin typeface="OPTINational-Gothic" charset="0"/>
+                <a:cs typeface="OPTINational-Gothic" charset="0"/>
+              </a:rPr>
+              <a:t>DA CARTESIO A PHILIP GLASS</a:t>
+            </a:r>
+            <a:endParaRPr lang="en-US" altLang="en-US" sz="4000">
+              <a:ln w="28575" cmpd="sng">
+                <a:solidFill>
+                  <a:srgbClr val="47FF52"/>
+                </a:solidFill>
+                <a:prstDash val="solid"/>
+              </a:ln>
+              <a:solidFill>
+                <a:srgbClr val="644647"/>
+              </a:solidFill>
+              <a:latin typeface="OPTINational-Gothic" charset="0"/>
+              <a:cs typeface="OPTINational-Gothic" charset="0"/>
+            </a:endParaRPr>
+          </a:p>
+        </p:txBody>
+      </p:sp>
+    </p:spTree>
+  </p:cSld>
+  <p:clrMapOvr>
+    <a:masterClrMapping/>
+  </p:clrMapOvr>
+</p:sld>
+</file>
+
+<file path=ppt/slides/slide15.xml><?xml version="1.0" encoding="utf-8"?>
+<p:sld xmlns:a="http://schemas.openxmlformats.org/drawingml/2006/main" xmlns:r="http://schemas.openxmlformats.org/officeDocument/2006/relationships" xmlns:p="http://schemas.openxmlformats.org/presentationml/2006/main">
+  <p:cSld>
+    <p:bg>
+      <p:bgPr>
+        <a:pattFill prst="pct10">
+          <a:fgClr>
+            <a:srgbClr val="FF400D"/>
+          </a:fgClr>
+          <a:bgClr>
+            <a:schemeClr val="tx1">
+              <a:lumMod val="65000"/>
+              <a:lumOff val="35000"/>
+            </a:schemeClr>
+          </a:bgClr>
+        </a:pattFill>
+        <a:effectLst/>
+      </p:bgPr>
+    </p:bg>
+    <p:spTree>
+      <p:nvGrpSpPr>
+        <p:cNvPr id="1" name=""/>
+        <p:cNvGrpSpPr/>
+        <p:nvPr/>
+      </p:nvGrpSpPr>
+      <p:grpSpPr/>
+      <p:pic>
+        <p:nvPicPr>
+          <p:cNvPr id="7" name="Picture 6" descr="pavimento"/>
+          <p:cNvPicPr>
+            <a:picLocks noChangeAspect="true"/>
+          </p:cNvPicPr>
+          <p:nvPr/>
+        </p:nvPicPr>
+        <p:blipFill>
+          <a:blip r:embed="rId1"/>
+          <a:stretch>
+            <a:fillRect/>
+          </a:stretch>
+        </p:blipFill>
+        <p:spPr>
+          <a:xfrm>
+            <a:off x="-246380" y="6127750"/>
+            <a:ext cx="12650470" cy="974090"/>
+          </a:xfrm>
+          <a:prstGeom prst="rect">
+            <a:avLst/>
+          </a:prstGeom>
+        </p:spPr>
+      </p:pic>
+      <p:sp>
+        <p:nvSpPr>
+          <p:cNvPr id="5" name="Text Box 4"/>
+          <p:cNvSpPr txBox="true"/>
+          <p:nvPr/>
+        </p:nvSpPr>
+        <p:spPr>
+          <a:xfrm>
+            <a:off x="3206115" y="140335"/>
+            <a:ext cx="5746115" cy="706755"/>
+          </a:xfrm>
+          <a:prstGeom prst="rect">
+            <a:avLst/>
+          </a:prstGeom>
+          <a:noFill/>
+        </p:spPr>
+        <p:txBody>
+          <a:bodyPr wrap="square" rtlCol="0">
+            <a:spAutoFit/>
+          </a:bodyPr>
+          <a:p>
+            <a:r>
+              <a:rPr lang="en-US" altLang="en-US" sz="4000">
+                <a:ln w="28575" cmpd="sng">
+                  <a:solidFill>
+                    <a:srgbClr val="47FF52"/>
+                  </a:solidFill>
+                  <a:prstDash val="solid"/>
+                </a:ln>
+                <a:solidFill>
+                  <a:srgbClr val="644647"/>
+                </a:solidFill>
+                <a:latin typeface="OPTINational-Gothic" charset="0"/>
+                <a:cs typeface="OPTINational-Gothic" charset="0"/>
+              </a:rPr>
+              <a:t>DA CARTESIO A PHILIP GLASS</a:t>
+            </a:r>
+            <a:endParaRPr lang="en-US" altLang="en-US" sz="4000">
+              <a:ln w="28575" cmpd="sng">
+                <a:solidFill>
+                  <a:srgbClr val="47FF52"/>
+                </a:solidFill>
+                <a:prstDash val="solid"/>
+              </a:ln>
+              <a:solidFill>
+                <a:srgbClr val="644647"/>
+              </a:solidFill>
+              <a:latin typeface="OPTINational-Gothic" charset="0"/>
+              <a:cs typeface="OPTINational-Gothic" charset="0"/>
+            </a:endParaRPr>
+          </a:p>
+        </p:txBody>
+      </p:sp>
+    </p:spTree>
+  </p:cSld>
+  <p:clrMapOvr>
+    <a:masterClrMapping/>
+  </p:clrMapOvr>
+</p:sld>
+</file>
+
+<file path=ppt/slides/slide16.xml><?xml version="1.0" encoding="utf-8"?>
+<p:sld xmlns:a="http://schemas.openxmlformats.org/drawingml/2006/main" xmlns:r="http://schemas.openxmlformats.org/officeDocument/2006/relationships" xmlns:p="http://schemas.openxmlformats.org/presentationml/2006/main">
+  <p:cSld>
+    <p:bg>
+      <p:bgPr>
+        <a:pattFill prst="pct10">
+          <a:fgClr>
+            <a:srgbClr val="FF400D"/>
+          </a:fgClr>
+          <a:bgClr>
+            <a:schemeClr val="tx1">
+              <a:lumMod val="65000"/>
+              <a:lumOff val="35000"/>
+            </a:schemeClr>
+          </a:bgClr>
+        </a:pattFill>
+        <a:effectLst/>
+      </p:bgPr>
+    </p:bg>
+    <p:spTree>
+      <p:nvGrpSpPr>
+        <p:cNvPr id="1" name=""/>
+        <p:cNvGrpSpPr/>
+        <p:nvPr/>
+      </p:nvGrpSpPr>
+      <p:grpSpPr/>
+      <p:pic>
+        <p:nvPicPr>
+          <p:cNvPr id="7" name="Picture 6" descr="pavimento"/>
+          <p:cNvPicPr>
+            <a:picLocks noChangeAspect="true"/>
+          </p:cNvPicPr>
+          <p:nvPr/>
+        </p:nvPicPr>
+        <p:blipFill>
+          <a:blip r:embed="rId1"/>
+          <a:stretch>
+            <a:fillRect/>
+          </a:stretch>
+        </p:blipFill>
+        <p:spPr>
+          <a:xfrm>
+            <a:off x="-246380" y="6127750"/>
+            <a:ext cx="12650470" cy="974090"/>
+          </a:xfrm>
+          <a:prstGeom prst="rect">
+            <a:avLst/>
+          </a:prstGeom>
+        </p:spPr>
+      </p:pic>
+      <p:sp>
+        <p:nvSpPr>
+          <p:cNvPr id="5" name="Text Box 4"/>
+          <p:cNvSpPr txBox="true"/>
+          <p:nvPr/>
+        </p:nvSpPr>
+        <p:spPr>
+          <a:xfrm>
+            <a:off x="3206115" y="140335"/>
+            <a:ext cx="5746115" cy="706755"/>
+          </a:xfrm>
+          <a:prstGeom prst="rect">
+            <a:avLst/>
+          </a:prstGeom>
+          <a:noFill/>
+        </p:spPr>
+        <p:txBody>
+          <a:bodyPr wrap="square" rtlCol="0">
+            <a:spAutoFit/>
+          </a:bodyPr>
+          <a:p>
+            <a:r>
+              <a:rPr lang="en-US" altLang="en-US" sz="4000">
+                <a:ln w="28575" cmpd="sng">
+                  <a:solidFill>
+                    <a:srgbClr val="47FF52"/>
+                  </a:solidFill>
+                  <a:prstDash val="solid"/>
+                </a:ln>
+                <a:solidFill>
+                  <a:srgbClr val="644647"/>
+                </a:solidFill>
+                <a:latin typeface="OPTINational-Gothic" charset="0"/>
+                <a:cs typeface="OPTINational-Gothic" charset="0"/>
+              </a:rPr>
+              <a:t>DA CARTESIO A PHILIP GLASS</a:t>
+            </a:r>
+            <a:endParaRPr lang="en-US" altLang="en-US" sz="4000">
+              <a:ln w="28575" cmpd="sng">
+                <a:solidFill>
+                  <a:srgbClr val="47FF52"/>
+                </a:solidFill>
+                <a:prstDash val="solid"/>
+              </a:ln>
+              <a:solidFill>
+                <a:srgbClr val="644647"/>
+              </a:solidFill>
+              <a:latin typeface="OPTINational-Gothic" charset="0"/>
+              <a:cs typeface="OPTINational-Gothic" charset="0"/>
+            </a:endParaRPr>
+          </a:p>
+        </p:txBody>
+      </p:sp>
+    </p:spTree>
+  </p:cSld>
+  <p:clrMapOvr>
+    <a:masterClrMapping/>
+  </p:clrMapOvr>
+</p:sld>
+</file>
+
+<file path=ppt/slides/slide17.xml><?xml version="1.0" encoding="utf-8"?>
+<p:sld xmlns:a="http://schemas.openxmlformats.org/drawingml/2006/main" xmlns:r="http://schemas.openxmlformats.org/officeDocument/2006/relationships" xmlns:p="http://schemas.openxmlformats.org/presentationml/2006/main">
+  <p:cSld>
+    <p:bg>
+      <p:bgPr>
+        <a:pattFill prst="pct10">
+          <a:fgClr>
+            <a:srgbClr val="FF400D"/>
+          </a:fgClr>
+          <a:bgClr>
+            <a:schemeClr val="tx1">
+              <a:lumMod val="65000"/>
+              <a:lumOff val="35000"/>
+            </a:schemeClr>
+          </a:bgClr>
+        </a:pattFill>
+        <a:effectLst/>
+      </p:bgPr>
+    </p:bg>
+    <p:spTree>
+      <p:nvGrpSpPr>
+        <p:cNvPr id="1" name=""/>
+        <p:cNvGrpSpPr/>
+        <p:nvPr/>
+      </p:nvGrpSpPr>
+      <p:grpSpPr/>
+      <p:pic>
+        <p:nvPicPr>
+          <p:cNvPr id="7" name="Picture 6" descr="pavimento"/>
+          <p:cNvPicPr>
+            <a:picLocks noChangeAspect="true"/>
+          </p:cNvPicPr>
+          <p:nvPr/>
+        </p:nvPicPr>
+        <p:blipFill>
+          <a:blip r:embed="rId1"/>
+          <a:stretch>
+            <a:fillRect/>
+          </a:stretch>
+        </p:blipFill>
+        <p:spPr>
+          <a:xfrm>
+            <a:off x="-246380" y="6127750"/>
+            <a:ext cx="12650470" cy="974090"/>
+          </a:xfrm>
+          <a:prstGeom prst="rect">
+            <a:avLst/>
+          </a:prstGeom>
+        </p:spPr>
+      </p:pic>
+      <p:sp>
+        <p:nvSpPr>
+          <p:cNvPr id="5" name="Text Box 4"/>
+          <p:cNvSpPr txBox="true"/>
+          <p:nvPr/>
+        </p:nvSpPr>
+        <p:spPr>
+          <a:xfrm>
+            <a:off x="3206115" y="140335"/>
+            <a:ext cx="5746115" cy="706755"/>
+          </a:xfrm>
+          <a:prstGeom prst="rect">
+            <a:avLst/>
+          </a:prstGeom>
+          <a:noFill/>
+        </p:spPr>
+        <p:txBody>
+          <a:bodyPr wrap="square" rtlCol="0">
+            <a:spAutoFit/>
+          </a:bodyPr>
+          <a:p>
+            <a:r>
+              <a:rPr lang="en-US" altLang="en-US" sz="4000">
+                <a:ln w="28575" cmpd="sng">
+                  <a:solidFill>
+                    <a:srgbClr val="47FF52"/>
+                  </a:solidFill>
+                  <a:prstDash val="solid"/>
+                </a:ln>
+                <a:solidFill>
+                  <a:srgbClr val="644647"/>
+                </a:solidFill>
+                <a:latin typeface="OPTINational-Gothic" charset="0"/>
+                <a:cs typeface="OPTINational-Gothic" charset="0"/>
+              </a:rPr>
+              <a:t>DA CARTESIO A PHILIP GLASS</a:t>
+            </a:r>
+            <a:endParaRPr lang="en-US" altLang="en-US" sz="4000">
+              <a:ln w="28575" cmpd="sng">
+                <a:solidFill>
+                  <a:srgbClr val="47FF52"/>
+                </a:solidFill>
+                <a:prstDash val="solid"/>
+              </a:ln>
+              <a:solidFill>
+                <a:srgbClr val="644647"/>
+              </a:solidFill>
+              <a:latin typeface="OPTINational-Gothic" charset="0"/>
+              <a:cs typeface="OPTINational-Gothic" charset="0"/>
+            </a:endParaRPr>
+          </a:p>
+        </p:txBody>
+      </p:sp>
+    </p:spTree>
+  </p:cSld>
+  <p:clrMapOvr>
+    <a:masterClrMapping/>
+  </p:clrMapOvr>
+</p:sld>
+</file>
+
+<file path=ppt/slides/slide18.xml><?xml version="1.0" encoding="utf-8"?>
+<p:sld xmlns:a="http://schemas.openxmlformats.org/drawingml/2006/main" xmlns:r="http://schemas.openxmlformats.org/officeDocument/2006/relationships" xmlns:p="http://schemas.openxmlformats.org/presentationml/2006/main">
+  <p:cSld>
+    <p:bg>
+      <p:bgPr>
+        <a:pattFill prst="pct10">
+          <a:fgClr>
+            <a:srgbClr val="FF400D"/>
+          </a:fgClr>
+          <a:bgClr>
+            <a:schemeClr val="tx1">
+              <a:lumMod val="65000"/>
+              <a:lumOff val="35000"/>
+            </a:schemeClr>
+          </a:bgClr>
+        </a:pattFill>
+        <a:effectLst/>
+      </p:bgPr>
+    </p:bg>
+    <p:spTree>
+      <p:nvGrpSpPr>
+        <p:cNvPr id="1" name=""/>
+        <p:cNvGrpSpPr/>
+        <p:nvPr/>
+      </p:nvGrpSpPr>
+      <p:grpSpPr/>
+      <p:pic>
+        <p:nvPicPr>
+          <p:cNvPr id="7" name="Picture 6" descr="pavimento"/>
+          <p:cNvPicPr>
+            <a:picLocks noChangeAspect="true"/>
+          </p:cNvPicPr>
+          <p:nvPr/>
+        </p:nvPicPr>
+        <p:blipFill>
+          <a:blip r:embed="rId1"/>
+          <a:stretch>
+            <a:fillRect/>
+          </a:stretch>
+        </p:blipFill>
+        <p:spPr>
+          <a:xfrm>
+            <a:off x="-246380" y="6127750"/>
+            <a:ext cx="12650470" cy="974090"/>
+          </a:xfrm>
+          <a:prstGeom prst="rect">
+            <a:avLst/>
+          </a:prstGeom>
+        </p:spPr>
+      </p:pic>
+      <p:sp>
+        <p:nvSpPr>
+          <p:cNvPr id="5" name="Text Box 4"/>
+          <p:cNvSpPr txBox="true"/>
+          <p:nvPr/>
+        </p:nvSpPr>
+        <p:spPr>
+          <a:xfrm>
+            <a:off x="3206115" y="140335"/>
+            <a:ext cx="5746115" cy="706755"/>
+          </a:xfrm>
+          <a:prstGeom prst="rect">
+            <a:avLst/>
+          </a:prstGeom>
+          <a:noFill/>
+        </p:spPr>
+        <p:txBody>
+          <a:bodyPr wrap="square" rtlCol="0">
+            <a:spAutoFit/>
+          </a:bodyPr>
+          <a:p>
+            <a:r>
+              <a:rPr lang="en-US" altLang="en-US" sz="4000">
+                <a:ln w="28575" cmpd="sng">
+                  <a:solidFill>
+                    <a:srgbClr val="47FF52"/>
+                  </a:solidFill>
+                  <a:prstDash val="solid"/>
+                </a:ln>
+                <a:solidFill>
+                  <a:srgbClr val="644647"/>
+                </a:solidFill>
+                <a:latin typeface="OPTINational-Gothic" charset="0"/>
+                <a:cs typeface="OPTINational-Gothic" charset="0"/>
+              </a:rPr>
+              <a:t>DA CARTESIO A PHILIP GLASS</a:t>
+            </a:r>
+            <a:endParaRPr lang="en-US" altLang="en-US" sz="4000">
+              <a:ln w="28575" cmpd="sng">
+                <a:solidFill>
+                  <a:srgbClr val="47FF52"/>
+                </a:solidFill>
+                <a:prstDash val="solid"/>
+              </a:ln>
+              <a:solidFill>
+                <a:srgbClr val="644647"/>
+              </a:solidFill>
+              <a:latin typeface="OPTINational-Gothic" charset="0"/>
+              <a:cs typeface="OPTINational-Gothic" charset="0"/>
+            </a:endParaRPr>
+          </a:p>
+        </p:txBody>
+      </p:sp>
+    </p:spTree>
+  </p:cSld>
+  <p:clrMapOvr>
+    <a:masterClrMapping/>
+  </p:clrMapOvr>
+</p:sld>
+</file>
+
+<file path=ppt/slides/slide19.xml><?xml version="1.0" encoding="utf-8"?>
+<p:sld xmlns:a="http://schemas.openxmlformats.org/drawingml/2006/main" xmlns:r="http://schemas.openxmlformats.org/officeDocument/2006/relationships" xmlns:p="http://schemas.openxmlformats.org/presentationml/2006/main">
+  <p:cSld>
+    <p:bg>
+      <p:bgPr>
+        <a:pattFill prst="pct10">
+          <a:fgClr>
+            <a:srgbClr val="FF400D"/>
+          </a:fgClr>
+          <a:bgClr>
+            <a:schemeClr val="tx1">
+              <a:lumMod val="65000"/>
+              <a:lumOff val="35000"/>
+            </a:schemeClr>
+          </a:bgClr>
+        </a:pattFill>
+        <a:effectLst/>
+      </p:bgPr>
+    </p:bg>
+    <p:spTree>
+      <p:nvGrpSpPr>
+        <p:cNvPr id="1" name=""/>
+        <p:cNvGrpSpPr/>
+        <p:nvPr/>
+      </p:nvGrpSpPr>
+      <p:grpSpPr/>
+      <p:pic>
+        <p:nvPicPr>
+          <p:cNvPr id="7" name="Picture 6" descr="pavimento"/>
+          <p:cNvPicPr>
+            <a:picLocks noChangeAspect="true"/>
+          </p:cNvPicPr>
+          <p:nvPr/>
+        </p:nvPicPr>
+        <p:blipFill>
+          <a:blip r:embed="rId1"/>
+          <a:stretch>
+            <a:fillRect/>
+          </a:stretch>
+        </p:blipFill>
+        <p:spPr>
+          <a:xfrm>
+            <a:off x="-246380" y="6127750"/>
+            <a:ext cx="12650470" cy="974090"/>
+          </a:xfrm>
+          <a:prstGeom prst="rect">
+            <a:avLst/>
+          </a:prstGeom>
+        </p:spPr>
+      </p:pic>
+      <p:sp>
+        <p:nvSpPr>
+          <p:cNvPr id="5" name="Text Box 4"/>
+          <p:cNvSpPr txBox="true"/>
+          <p:nvPr/>
+        </p:nvSpPr>
+        <p:spPr>
+          <a:xfrm>
+            <a:off x="3206115" y="140335"/>
+            <a:ext cx="5746115" cy="706755"/>
+          </a:xfrm>
+          <a:prstGeom prst="rect">
+            <a:avLst/>
+          </a:prstGeom>
+          <a:noFill/>
+        </p:spPr>
+        <p:txBody>
+          <a:bodyPr wrap="square" rtlCol="0">
+            <a:spAutoFit/>
+          </a:bodyPr>
+          <a:p>
+            <a:r>
+              <a:rPr lang="en-US" altLang="en-US" sz="4000">
+                <a:ln w="28575" cmpd="sng">
+                  <a:solidFill>
+                    <a:srgbClr val="47FF52"/>
+                  </a:solidFill>
+                  <a:prstDash val="solid"/>
+                </a:ln>
+                <a:solidFill>
+                  <a:srgbClr val="644647"/>
+                </a:solidFill>
+                <a:latin typeface="OPTINational-Gothic" charset="0"/>
+                <a:cs typeface="OPTINational-Gothic" charset="0"/>
+              </a:rPr>
+              <a:t>DA CARTESIO A PHILIP GLASS</a:t>
+            </a:r>
+            <a:endParaRPr lang="en-US" altLang="en-US" sz="4000">
+              <a:ln w="28575" cmpd="sng">
+                <a:solidFill>
+                  <a:srgbClr val="47FF52"/>
+                </a:solidFill>
+                <a:prstDash val="solid"/>
+              </a:ln>
+              <a:solidFill>
+                <a:srgbClr val="644647"/>
+              </a:solidFill>
+              <a:latin typeface="OPTINational-Gothic" charset="0"/>
+              <a:cs typeface="OPTINational-Gothic" charset="0"/>
+            </a:endParaRPr>
+          </a:p>
+        </p:txBody>
+      </p:sp>
+    </p:spTree>
+  </p:cSld>
+  <p:clrMapOvr>
+    <a:masterClrMapping/>
+  </p:clrMapOvr>
+</p:sld>
+</file>
+
+<file path=ppt/slides/slide2.xml><?xml version="1.0" encoding="utf-8"?>
+<p:sld xmlns:a="http://schemas.openxmlformats.org/drawingml/2006/main" xmlns:r="http://schemas.openxmlformats.org/officeDocument/2006/relationships" xmlns:p="http://schemas.openxmlformats.org/presentationml/2006/main">
+  <p:cSld>
+    <p:bg>
+      <p:bgPr>
+        <a:pattFill prst="pct10">
+          <a:fgClr>
+            <a:srgbClr val="FF400D"/>
+          </a:fgClr>
+          <a:bgClr>
+            <a:schemeClr val="tx1">
+              <a:lumMod val="65000"/>
+              <a:lumOff val="35000"/>
+            </a:schemeClr>
+          </a:bgClr>
+        </a:pattFill>
+        <a:effectLst/>
+      </p:bgPr>
+    </p:bg>
+    <p:spTree>
+      <p:nvGrpSpPr>
+        <p:cNvPr id="1" name=""/>
+        <p:cNvGrpSpPr/>
+        <p:nvPr/>
+      </p:nvGrpSpPr>
+      <p:grpSpPr/>
+      <p:pic>
+        <p:nvPicPr>
+          <p:cNvPr id="7" name="Picture 6" descr="pavimento"/>
+          <p:cNvPicPr>
+            <a:picLocks noChangeAspect="true"/>
+          </p:cNvPicPr>
+          <p:nvPr/>
+        </p:nvPicPr>
+        <p:blipFill>
+          <a:blip r:embed="rId1"/>
+          <a:stretch>
+            <a:fillRect/>
+          </a:stretch>
+        </p:blipFill>
+        <p:spPr>
+          <a:xfrm>
+            <a:off x="-246380" y="6127750"/>
+            <a:ext cx="12650470" cy="974090"/>
+          </a:xfrm>
+          <a:prstGeom prst="rect">
+            <a:avLst/>
+          </a:prstGeom>
+        </p:spPr>
+      </p:pic>
+      <p:sp>
+        <p:nvSpPr>
+          <p:cNvPr id="5" name="Text Box 4"/>
+          <p:cNvSpPr txBox="true"/>
+          <p:nvPr/>
+        </p:nvSpPr>
+        <p:spPr>
+          <a:xfrm>
+            <a:off x="3720465" y="149860"/>
+            <a:ext cx="4751070" cy="706755"/>
+          </a:xfrm>
+          <a:prstGeom prst="rect">
+            <a:avLst/>
+          </a:prstGeom>
+          <a:noFill/>
+        </p:spPr>
+        <p:txBody>
+          <a:bodyPr wrap="square" rtlCol="0">
+            <a:spAutoFit/>
+          </a:bodyPr>
+          <a:p>
+            <a:r>
+              <a:rPr lang="en-US" altLang="en-US" sz="4000">
+                <a:ln w="28575" cmpd="sng">
+                  <a:solidFill>
+                    <a:srgbClr val="47FF52"/>
+                  </a:solidFill>
+                  <a:prstDash val="solid"/>
+                </a:ln>
+                <a:solidFill>
+                  <a:srgbClr val="644647"/>
+                </a:solidFill>
+                <a:latin typeface="OPTINational-Gothic" charset="0"/>
+                <a:cs typeface="OPTINational-Gothic" charset="0"/>
+              </a:rPr>
+              <a:t>ALGEBRA E GEOMETRIA</a:t>
+            </a:r>
+            <a:endParaRPr lang="en-US" altLang="en-US" sz="4000">
+              <a:ln w="28575" cmpd="sng">
+                <a:solidFill>
+                  <a:srgbClr val="47FF52"/>
+                </a:solidFill>
+                <a:prstDash val="solid"/>
+              </a:ln>
+              <a:solidFill>
+                <a:srgbClr val="644647"/>
+              </a:solidFill>
+              <a:latin typeface="OPTINational-Gothic" charset="0"/>
+              <a:cs typeface="OPTINational-Gothic" charset="0"/>
+            </a:endParaRPr>
+          </a:p>
+        </p:txBody>
+      </p:sp>
+      <p:pic>
+        <p:nvPicPr>
+          <p:cNvPr id="8" name="Picture 7" descr="Oresme-Nicole"/>
+          <p:cNvPicPr>
+            <a:picLocks noChangeAspect="true"/>
+          </p:cNvPicPr>
+          <p:nvPr/>
+        </p:nvPicPr>
+        <p:blipFill>
+          <a:blip r:embed="rId2"/>
+          <a:stretch>
+            <a:fillRect/>
+          </a:stretch>
+        </p:blipFill>
+        <p:spPr>
+          <a:xfrm>
+            <a:off x="358140" y="149860"/>
+            <a:ext cx="1783080" cy="3017520"/>
+          </a:xfrm>
+          <a:prstGeom prst="rect">
+            <a:avLst/>
+          </a:prstGeom>
+        </p:spPr>
+      </p:pic>
+      <p:pic>
+        <p:nvPicPr>
+          <p:cNvPr id="11" name="Picture 10" descr="Frans_Hals_-_Portret_van_René_Descartes"/>
+          <p:cNvPicPr>
+            <a:picLocks noChangeAspect="true"/>
+          </p:cNvPicPr>
+          <p:nvPr/>
+        </p:nvPicPr>
+        <p:blipFill>
+          <a:blip r:embed="rId3"/>
+          <a:stretch>
+            <a:fillRect/>
+          </a:stretch>
+        </p:blipFill>
+        <p:spPr>
+          <a:xfrm>
+            <a:off x="9355455" y="149860"/>
+            <a:ext cx="2464435" cy="3016885"/>
+          </a:xfrm>
+          <a:prstGeom prst="rect">
+            <a:avLst/>
+          </a:prstGeom>
+        </p:spPr>
+      </p:pic>
+      <p:sp>
+        <p:nvSpPr>
+          <p:cNvPr id="13" name="Text Box 12"/>
+          <p:cNvSpPr txBox="true"/>
+          <p:nvPr/>
+        </p:nvSpPr>
+        <p:spPr>
+          <a:xfrm>
+            <a:off x="358140" y="3353435"/>
+            <a:ext cx="2153920" cy="337185"/>
+          </a:xfrm>
+          <a:prstGeom prst="rect">
+            <a:avLst/>
+          </a:prstGeom>
+          <a:noFill/>
+        </p:spPr>
+        <p:txBody>
+          <a:bodyPr wrap="square" rtlCol="0">
+            <a:spAutoFit/>
+          </a:bodyPr>
+          <a:p>
+            <a:pPr fontAlgn="auto"/>
+            <a:r>
+              <a:rPr lang="en-US" altLang="en-US" sz="1600">
+                <a:ln w="6350" cmpd="sng">
+                  <a:noFill/>
+                  <a:prstDash val="solid"/>
+                </a:ln>
+                <a:solidFill>
+                  <a:srgbClr val="47FF52"/>
+                </a:solidFill>
+                <a:latin typeface="OPTINational-Gothic" charset="0"/>
+                <a:cs typeface="OPTINational-Gothic" charset="0"/>
+              </a:rPr>
+              <a:t>- Nicola d’Oresme</a:t>
+            </a:r>
+            <a:endParaRPr lang="en-US" altLang="en-US" sz="1600">
+              <a:ln w="6350" cmpd="sng">
+                <a:noFill/>
+                <a:prstDash val="solid"/>
+              </a:ln>
+              <a:solidFill>
+                <a:srgbClr val="47FF52"/>
+              </a:solidFill>
+              <a:latin typeface="OPTINational-Gothic" charset="0"/>
+              <a:cs typeface="OPTINational-Gothic" charset="0"/>
+            </a:endParaRPr>
+          </a:p>
+        </p:txBody>
+      </p:sp>
+      <p:sp>
+        <p:nvSpPr>
+          <p:cNvPr id="14" name="Text Box 13"/>
+          <p:cNvSpPr txBox="true"/>
+          <p:nvPr/>
+        </p:nvSpPr>
+        <p:spPr>
+          <a:xfrm>
+            <a:off x="9665970" y="3353435"/>
+            <a:ext cx="2153920" cy="337185"/>
+          </a:xfrm>
+          <a:prstGeom prst="rect">
+            <a:avLst/>
+          </a:prstGeom>
+          <a:noFill/>
+        </p:spPr>
+        <p:txBody>
+          <a:bodyPr wrap="square" rtlCol="0">
+            <a:spAutoFit/>
+          </a:bodyPr>
+          <a:p>
+            <a:pPr algn="r" fontAlgn="auto"/>
+            <a:r>
+              <a:rPr lang="en-US" altLang="en-US" sz="1600">
+                <a:ln w="6350" cmpd="sng">
+                  <a:noFill/>
+                  <a:prstDash val="solid"/>
+                </a:ln>
+                <a:solidFill>
+                  <a:srgbClr val="47FF52"/>
+                </a:solidFill>
+                <a:latin typeface="OPTINational-Gothic" charset="0"/>
+                <a:cs typeface="OPTINational-Gothic" charset="0"/>
+              </a:rPr>
+              <a:t>René Descartes - </a:t>
+            </a:r>
+            <a:endParaRPr lang="en-US" altLang="en-US" sz="1600">
+              <a:ln w="6350" cmpd="sng">
+                <a:noFill/>
+                <a:prstDash val="solid"/>
+              </a:ln>
+              <a:solidFill>
+                <a:srgbClr val="47FF52"/>
+              </a:solidFill>
+              <a:latin typeface="OPTINational-Gothic" charset="0"/>
+              <a:cs typeface="OPTINational-Gothic" charset="0"/>
+            </a:endParaRPr>
+          </a:p>
+        </p:txBody>
+      </p:sp>
+      <p:sp>
+        <p:nvSpPr>
+          <p:cNvPr id="15" name="Right Arrow 14"/>
+          <p:cNvSpPr/>
+          <p:nvPr/>
+        </p:nvSpPr>
+        <p:spPr>
+          <a:xfrm>
+            <a:off x="3977640" y="1324610"/>
+            <a:ext cx="3542030" cy="930275"/>
+          </a:xfrm>
+          <a:prstGeom prst="rightArrow">
+            <a:avLst/>
+          </a:prstGeom>
+        </p:spPr>
+        <p:style>
+          <a:lnRef idx="2">
+            <a:schemeClr val="accent6"/>
+          </a:lnRef>
+          <a:fillRef idx="1">
+            <a:schemeClr val="lt1"/>
+          </a:fillRef>
+          <a:effectRef idx="0">
+            <a:schemeClr val="accent6"/>
+          </a:effectRef>
+          <a:fontRef idx="minor">
+            <a:schemeClr val="dk1"/>
+          </a:fontRef>
+        </p:style>
+        <p:txBody>
+          <a:bodyPr rtlCol="0" anchor="ctr"/>
+          <a:p>
+            <a:pPr algn="ctr"/>
+            <a:r>
+              <a:rPr lang="en-US" altLang="en-US" sz="1500"/>
+              <a:t>Sistema di assi per rappresentare lo spazio</a:t>
+            </a:r>
+            <a:endParaRPr lang="en-US" altLang="en-US" sz="1500"/>
+          </a:p>
+        </p:txBody>
+      </p:sp>
+      <p:sp>
+        <p:nvSpPr>
+          <p:cNvPr id="18" name="Freeform 17"/>
+          <p:cNvSpPr/>
+          <p:nvPr/>
+        </p:nvSpPr>
+        <p:spPr>
+          <a:xfrm>
+            <a:off x="8471535" y="4145915"/>
+            <a:ext cx="2230755" cy="1527175"/>
+          </a:xfrm>
+          <a:custGeom>
+            <a:avLst/>
+            <a:gdLst>
+              <a:gd name="connsiteX0" fmla="*/ 0 w 2952"/>
+              <a:gd name="connsiteY0" fmla="*/ 1519 h 2273"/>
+              <a:gd name="connsiteX1" fmla="*/ 755 w 2952"/>
+              <a:gd name="connsiteY1" fmla="*/ 764 h 2273"/>
+              <a:gd name="connsiteX2" fmla="*/ 755 w 2952"/>
+              <a:gd name="connsiteY2" fmla="*/ 1141 h 2273"/>
+              <a:gd name="connsiteX3" fmla="*/ 2197 w 2952"/>
+              <a:gd name="connsiteY3" fmla="*/ 1141 h 2273"/>
+              <a:gd name="connsiteX4" fmla="*/ 2197 w 2952"/>
+              <a:gd name="connsiteY4" fmla="*/ 10 h 2273"/>
+              <a:gd name="connsiteX5" fmla="*/ 2382 w 2952"/>
+              <a:gd name="connsiteY5" fmla="*/ 15 h 2273"/>
+              <a:gd name="connsiteX6" fmla="*/ 2589 w 2952"/>
+              <a:gd name="connsiteY6" fmla="*/ 0 h 2273"/>
+              <a:gd name="connsiteX7" fmla="*/ 2752 w 2952"/>
+              <a:gd name="connsiteY7" fmla="*/ 0 h 2273"/>
+              <a:gd name="connsiteX8" fmla="*/ 2952 w 2952"/>
+              <a:gd name="connsiteY8" fmla="*/ 10 h 2273"/>
+              <a:gd name="connsiteX9" fmla="*/ 2952 w 2952"/>
+              <a:gd name="connsiteY9" fmla="*/ 1896 h 2273"/>
+              <a:gd name="connsiteX10" fmla="*/ 755 w 2952"/>
+              <a:gd name="connsiteY10" fmla="*/ 1896 h 2273"/>
+              <a:gd name="connsiteX11" fmla="*/ 755 w 2952"/>
+              <a:gd name="connsiteY11" fmla="*/ 2273 h 2273"/>
+              <a:gd name="connsiteX12" fmla="*/ 0 w 2952"/>
+              <a:gd name="connsiteY12" fmla="*/ 1519 h 2273"/>
+            </a:gdLst>
+            <a:ahLst/>
+            <a:cxnLst>
+              <a:cxn ang="0">
+                <a:pos x="connsiteX0" y="connsiteY0"/>
+              </a:cxn>
+              <a:cxn ang="0">
+                <a:pos x="connsiteX1" y="connsiteY1"/>
+              </a:cxn>
+              <a:cxn ang="0">
+                <a:pos x="connsiteX2" y="connsiteY2"/>
+              </a:cxn>
+              <a:cxn ang="0">
+                <a:pos x="connsiteX3" y="connsiteY3"/>
+              </a:cxn>
+              <a:cxn ang="0">
+                <a:pos x="connsiteX4" y="connsiteY4"/>
+              </a:cxn>
+              <a:cxn ang="0">
+                <a:pos x="connsiteX5" y="connsiteY5"/>
+              </a:cxn>
+              <a:cxn ang="0">
+                <a:pos x="connsiteX6" y="connsiteY6"/>
+              </a:cxn>
+              <a:cxn ang="0">
+                <a:pos x="connsiteX7" y="connsiteY7"/>
+              </a:cxn>
+              <a:cxn ang="0">
+                <a:pos x="connsiteX8" y="connsiteY8"/>
+              </a:cxn>
+              <a:cxn ang="0">
+                <a:pos x="connsiteX9" y="connsiteY9"/>
+              </a:cxn>
+              <a:cxn ang="0">
+                <a:pos x="connsiteX10" y="connsiteY10"/>
+              </a:cxn>
+              <a:cxn ang="0">
+                <a:pos x="connsiteX11" y="connsiteY11"/>
+              </a:cxn>
+              <a:cxn ang="0">
+                <a:pos x="connsiteX12" y="connsiteY12"/>
+              </a:cxn>
+            </a:cxnLst>
+            <a:rect l="l" t="t" r="r" b="b"/>
+            <a:pathLst>
+              <a:path w="2952" h="2273">
+                <a:moveTo>
+                  <a:pt x="0" y="1519"/>
+                </a:moveTo>
+                <a:lnTo>
+                  <a:pt x="755" y="764"/>
+                </a:lnTo>
+                <a:lnTo>
+                  <a:pt x="755" y="1141"/>
+                </a:lnTo>
+                <a:lnTo>
+                  <a:pt x="2197" y="1141"/>
+                </a:lnTo>
+                <a:lnTo>
+                  <a:pt x="2197" y="10"/>
+                </a:lnTo>
+                <a:lnTo>
+                  <a:pt x="2382" y="15"/>
+                </a:lnTo>
+                <a:lnTo>
+                  <a:pt x="2589" y="0"/>
+                </a:lnTo>
+                <a:lnTo>
+                  <a:pt x="2752" y="0"/>
+                </a:lnTo>
+                <a:lnTo>
+                  <a:pt x="2952" y="10"/>
+                </a:lnTo>
+                <a:lnTo>
+                  <a:pt x="2952" y="1896"/>
+                </a:lnTo>
+                <a:lnTo>
+                  <a:pt x="755" y="1896"/>
+                </a:lnTo>
+                <a:lnTo>
+                  <a:pt x="755" y="2273"/>
+                </a:lnTo>
+                <a:lnTo>
+                  <a:pt x="0" y="1519"/>
+                </a:lnTo>
+                <a:close/>
+              </a:path>
+            </a:pathLst>
+          </a:custGeom>
+        </p:spPr>
+        <p:style>
+          <a:lnRef idx="2">
+            <a:schemeClr val="accent6"/>
+          </a:lnRef>
+          <a:fillRef idx="1">
+            <a:schemeClr val="lt1"/>
+          </a:fillRef>
+          <a:effectRef idx="0">
+            <a:schemeClr val="accent6"/>
+          </a:effectRef>
+          <a:fontRef idx="minor">
+            <a:schemeClr val="dk1"/>
+          </a:fontRef>
+        </p:style>
+        <p:txBody>
+          <a:bodyPr rtlCol="0" anchor="ctr"/>
+          <a:p>
+            <a:pPr algn="ctr"/>
+            <a:r>
+              <a:rPr lang="en-US" altLang="en-US" sz="1600"/>
+              <a:t>    </a:t>
+            </a:r>
+            <a:endParaRPr lang="en-US" altLang="en-US" sz="1600"/>
+          </a:p>
+          <a:p>
+            <a:pPr algn="ctr"/>
+            <a:endParaRPr lang="en-US" altLang="en-US" sz="1600"/>
+          </a:p>
+          <a:p>
+            <a:pPr algn="ctr"/>
+            <a:r>
+              <a:rPr lang="en-US" altLang="en-US" sz="1600"/>
+              <a:t>      </a:t>
+            </a:r>
+            <a:r>
+              <a:rPr lang="en-US" altLang="en-US" sz="1500"/>
+              <a:t>Mathesis Universalis </a:t>
+            </a:r>
+            <a:endParaRPr lang="en-US" altLang="en-US" sz="1500"/>
+          </a:p>
+        </p:txBody>
+      </p:sp>
+      <p:pic>
+        <p:nvPicPr>
+          <p:cNvPr id="21" name="Picture 20" descr="circonferenza"/>
+          <p:cNvPicPr>
+            <a:picLocks noChangeAspect="true"/>
+          </p:cNvPicPr>
+          <p:nvPr/>
+        </p:nvPicPr>
+        <p:blipFill>
+          <a:blip r:embed="rId4"/>
+          <a:stretch>
+            <a:fillRect/>
+          </a:stretch>
+        </p:blipFill>
+        <p:spPr>
+          <a:xfrm>
+            <a:off x="3849370" y="2600325"/>
+            <a:ext cx="3799205" cy="3587115"/>
+          </a:xfrm>
+          <a:prstGeom prst="rect">
+            <a:avLst/>
+          </a:prstGeom>
+        </p:spPr>
+      </p:pic>
+      <p:sp>
+        <p:nvSpPr>
+          <p:cNvPr id="2" name="Text Box 1"/>
+          <p:cNvSpPr txBox="true"/>
+          <p:nvPr/>
+        </p:nvSpPr>
+        <p:spPr>
+          <a:xfrm>
+            <a:off x="1566545" y="4617720"/>
+            <a:ext cx="2153920" cy="583565"/>
+          </a:xfrm>
+          <a:prstGeom prst="rect">
+            <a:avLst/>
+          </a:prstGeom>
+          <a:noFill/>
+        </p:spPr>
+        <p:txBody>
+          <a:bodyPr wrap="square" rtlCol="0">
+            <a:spAutoFit/>
+          </a:bodyPr>
+          <a:p>
+            <a:pPr fontAlgn="auto"/>
+            <a:r>
+              <a:rPr lang="" altLang="en-US" sz="1600">
+                <a:ln w="6350" cmpd="sng">
+                  <a:noFill/>
+                  <a:prstDash val="solid"/>
+                </a:ln>
+                <a:solidFill>
+                  <a:srgbClr val="47FF52"/>
+                </a:solidFill>
+                <a:latin typeface="OPTINational-Gothic" charset="0"/>
+                <a:cs typeface="OPTINational-Gothic" charset="0"/>
+              </a:rPr>
+              <a:t>Rappresentazione grafica dell’ equazione:</a:t>
+            </a:r>
+            <a:endParaRPr lang="" altLang="en-US" sz="1600">
+              <a:ln w="6350" cmpd="sng">
+                <a:noFill/>
+                <a:prstDash val="solid"/>
+              </a:ln>
+              <a:solidFill>
+                <a:srgbClr val="47FF52"/>
+              </a:solidFill>
+              <a:latin typeface="OPTINational-Gothic" charset="0"/>
+              <a:cs typeface="OPTINational-Gothic" charset="0"/>
+            </a:endParaRPr>
+          </a:p>
+        </p:txBody>
+      </p:sp>
+      <p:pic>
+        <p:nvPicPr>
+          <p:cNvPr id="3" name="Picture 2" descr="equazione"/>
+          <p:cNvPicPr>
+            <a:picLocks noChangeAspect="true"/>
+          </p:cNvPicPr>
+          <p:nvPr/>
+        </p:nvPicPr>
+        <p:blipFill>
+          <a:blip r:embed="rId5"/>
+          <a:stretch>
+            <a:fillRect/>
+          </a:stretch>
+        </p:blipFill>
+        <p:spPr>
+          <a:xfrm>
+            <a:off x="1842770" y="5457825"/>
+            <a:ext cx="1442720" cy="414020"/>
+          </a:xfrm>
+          <a:prstGeom prst="rect">
+            <a:avLst/>
+          </a:prstGeom>
+        </p:spPr>
+      </p:pic>
+    </p:spTree>
+  </p:cSld>
+  <p:clrMapOvr>
+    <a:masterClrMapping/>
+  </p:clrMapOvr>
+</p:sld>
+</file>
+
+<file path=ppt/slides/slide20.xml><?xml version="1.0" encoding="utf-8"?>
+<p:sld xmlns:a="http://schemas.openxmlformats.org/drawingml/2006/main" xmlns:r="http://schemas.openxmlformats.org/officeDocument/2006/relationships" xmlns:p="http://schemas.openxmlformats.org/presentationml/2006/main">
+  <p:cSld>
+    <p:bg>
+      <p:bgPr>
+        <a:pattFill prst="pct10">
+          <a:fgClr>
+            <a:srgbClr val="FF400D"/>
+          </a:fgClr>
+          <a:bgClr>
+            <a:schemeClr val="tx1">
+              <a:lumMod val="65000"/>
+              <a:lumOff val="35000"/>
+            </a:schemeClr>
+          </a:bgClr>
+        </a:pattFill>
+        <a:effectLst/>
+      </p:bgPr>
+    </p:bg>
+    <p:spTree>
+      <p:nvGrpSpPr>
+        <p:cNvPr id="1" name=""/>
+        <p:cNvGrpSpPr/>
+        <p:nvPr/>
+      </p:nvGrpSpPr>
+      <p:grpSpPr/>
+      <p:pic>
+        <p:nvPicPr>
+          <p:cNvPr id="7" name="Picture 6" descr="pavimento"/>
+          <p:cNvPicPr>
+            <a:picLocks noChangeAspect="true"/>
+          </p:cNvPicPr>
+          <p:nvPr/>
+        </p:nvPicPr>
+        <p:blipFill>
+          <a:blip r:embed="rId1"/>
+          <a:stretch>
+            <a:fillRect/>
+          </a:stretch>
+        </p:blipFill>
+        <p:spPr>
+          <a:xfrm>
+            <a:off x="-246380" y="6127750"/>
+            <a:ext cx="12650470" cy="974090"/>
+          </a:xfrm>
+          <a:prstGeom prst="rect">
+            <a:avLst/>
+          </a:prstGeom>
+        </p:spPr>
+      </p:pic>
+      <p:sp>
+        <p:nvSpPr>
+          <p:cNvPr id="5" name="Text Box 4"/>
+          <p:cNvSpPr txBox="true"/>
+          <p:nvPr/>
+        </p:nvSpPr>
+        <p:spPr>
+          <a:xfrm>
+            <a:off x="3206115" y="140335"/>
+            <a:ext cx="5746115" cy="706755"/>
+          </a:xfrm>
+          <a:prstGeom prst="rect">
+            <a:avLst/>
+          </a:prstGeom>
+          <a:noFill/>
+        </p:spPr>
+        <p:txBody>
+          <a:bodyPr wrap="square" rtlCol="0">
+            <a:spAutoFit/>
+          </a:bodyPr>
+          <a:p>
+            <a:r>
+              <a:rPr lang="en-US" altLang="en-US" sz="4000">
+                <a:ln w="28575" cmpd="sng">
+                  <a:solidFill>
+                    <a:srgbClr val="47FF52"/>
+                  </a:solidFill>
+                  <a:prstDash val="solid"/>
+                </a:ln>
+                <a:solidFill>
+                  <a:srgbClr val="644647"/>
+                </a:solidFill>
+                <a:latin typeface="OPTINational-Gothic" charset="0"/>
+                <a:cs typeface="OPTINational-Gothic" charset="0"/>
+              </a:rPr>
+              <a:t>DA CARTESIO A PHILIP GLASS</a:t>
+            </a:r>
+            <a:endParaRPr lang="en-US" altLang="en-US" sz="4000">
+              <a:ln w="28575" cmpd="sng">
+                <a:solidFill>
+                  <a:srgbClr val="47FF52"/>
+                </a:solidFill>
+                <a:prstDash val="solid"/>
+              </a:ln>
+              <a:solidFill>
+                <a:srgbClr val="644647"/>
+              </a:solidFill>
+              <a:latin typeface="OPTINational-Gothic" charset="0"/>
+              <a:cs typeface="OPTINational-Gothic" charset="0"/>
+            </a:endParaRPr>
+          </a:p>
+        </p:txBody>
+      </p:sp>
+    </p:spTree>
+  </p:cSld>
+  <p:clrMapOvr>
+    <a:masterClrMapping/>
+  </p:clrMapOvr>
+</p:sld>
+</file>
+
+<file path=ppt/slides/slide21.xml><?xml version="1.0" encoding="utf-8"?>
+<p:sld xmlns:a="http://schemas.openxmlformats.org/drawingml/2006/main" xmlns:r="http://schemas.openxmlformats.org/officeDocument/2006/relationships" xmlns:p="http://schemas.openxmlformats.org/presentationml/2006/main">
+  <p:cSld>
+    <p:bg>
+      <p:bgPr>
+        <a:pattFill prst="pct10">
+          <a:fgClr>
+            <a:srgbClr val="FF400D"/>
+          </a:fgClr>
+          <a:bgClr>
+            <a:schemeClr val="tx1">
+              <a:lumMod val="65000"/>
+              <a:lumOff val="35000"/>
+            </a:schemeClr>
+          </a:bgClr>
+        </a:pattFill>
+        <a:effectLst/>
+      </p:bgPr>
+    </p:bg>
+    <p:spTree>
+      <p:nvGrpSpPr>
+        <p:cNvPr id="1" name=""/>
+        <p:cNvGrpSpPr/>
+        <p:nvPr/>
+      </p:nvGrpSpPr>
+      <p:grpSpPr/>
+      <p:pic>
+        <p:nvPicPr>
+          <p:cNvPr id="7" name="Picture 6" descr="pavimento"/>
+          <p:cNvPicPr>
+            <a:picLocks noChangeAspect="true"/>
+          </p:cNvPicPr>
+          <p:nvPr/>
+        </p:nvPicPr>
+        <p:blipFill>
+          <a:blip r:embed="rId1"/>
+          <a:stretch>
+            <a:fillRect/>
+          </a:stretch>
+        </p:blipFill>
+        <p:spPr>
+          <a:xfrm>
+            <a:off x="-246380" y="6127750"/>
+            <a:ext cx="12650470" cy="974090"/>
+          </a:xfrm>
+          <a:prstGeom prst="rect">
+            <a:avLst/>
+          </a:prstGeom>
+        </p:spPr>
+      </p:pic>
+      <p:sp>
+        <p:nvSpPr>
+          <p:cNvPr id="5" name="Text Box 4"/>
+          <p:cNvSpPr txBox="true"/>
+          <p:nvPr/>
+        </p:nvSpPr>
+        <p:spPr>
+          <a:xfrm>
+            <a:off x="3206115" y="140335"/>
+            <a:ext cx="5746115" cy="706755"/>
+          </a:xfrm>
+          <a:prstGeom prst="rect">
+            <a:avLst/>
+          </a:prstGeom>
+          <a:noFill/>
+        </p:spPr>
+        <p:txBody>
+          <a:bodyPr wrap="square" rtlCol="0">
+            <a:spAutoFit/>
+          </a:bodyPr>
+          <a:p>
+            <a:r>
+              <a:rPr lang="en-US" altLang="en-US" sz="4000">
+                <a:ln w="28575" cmpd="sng">
+                  <a:solidFill>
+                    <a:srgbClr val="47FF52"/>
+                  </a:solidFill>
+                  <a:prstDash val="solid"/>
+                </a:ln>
+                <a:solidFill>
+                  <a:srgbClr val="644647"/>
+                </a:solidFill>
+                <a:latin typeface="OPTINational-Gothic" charset="0"/>
+                <a:cs typeface="OPTINational-Gothic" charset="0"/>
+              </a:rPr>
+              <a:t>DA CARTESIO A PHILIP GLASS</a:t>
+            </a:r>
+            <a:endParaRPr lang="en-US" altLang="en-US" sz="4000">
+              <a:ln w="28575" cmpd="sng">
+                <a:solidFill>
+                  <a:srgbClr val="47FF52"/>
+                </a:solidFill>
+                <a:prstDash val="solid"/>
+              </a:ln>
+              <a:solidFill>
+                <a:srgbClr val="644647"/>
+              </a:solidFill>
+              <a:latin typeface="OPTINational-Gothic" charset="0"/>
+              <a:cs typeface="OPTINational-Gothic" charset="0"/>
+            </a:endParaRPr>
+          </a:p>
+        </p:txBody>
+      </p:sp>
+    </p:spTree>
+  </p:cSld>
+  <p:clrMapOvr>
+    <a:masterClrMapping/>
+  </p:clrMapOvr>
+</p:sld>
+</file>
+
+<file path=ppt/slides/slide3.xml><?xml version="1.0" encoding="utf-8"?>
+<p:sld xmlns:a="http://schemas.openxmlformats.org/drawingml/2006/main" xmlns:r="http://schemas.openxmlformats.org/officeDocument/2006/relationships" xmlns:p="http://schemas.openxmlformats.org/presentationml/2006/main">
+  <p:cSld>
+    <p:bg>
+      <p:bgPr>
+        <a:pattFill prst="pct10">
+          <a:fgClr>
+            <a:srgbClr val="FF400D"/>
+          </a:fgClr>
+          <a:bgClr>
+            <a:schemeClr val="tx1">
+              <a:lumMod val="65000"/>
+              <a:lumOff val="35000"/>
+            </a:schemeClr>
+          </a:bgClr>
+        </a:pattFill>
+        <a:effectLst/>
+      </p:bgPr>
+    </p:bg>
+    <p:spTree>
+      <p:nvGrpSpPr>
+        <p:cNvPr id="1" name=""/>
+        <p:cNvGrpSpPr/>
+        <p:nvPr/>
+      </p:nvGrpSpPr>
+      <p:grpSpPr/>
+      <p:pic>
+        <p:nvPicPr>
+          <p:cNvPr id="7" name="Picture 6" descr="pavimento"/>
+          <p:cNvPicPr>
+            <a:picLocks noChangeAspect="true"/>
+          </p:cNvPicPr>
+          <p:nvPr/>
+        </p:nvPicPr>
+        <p:blipFill>
+          <a:blip r:embed="rId1"/>
+          <a:stretch>
+            <a:fillRect/>
+          </a:stretch>
+        </p:blipFill>
+        <p:spPr>
+          <a:xfrm>
+            <a:off x="-246380" y="6127750"/>
+            <a:ext cx="12650470" cy="974090"/>
+          </a:xfrm>
+          <a:prstGeom prst="rect">
+            <a:avLst/>
+          </a:prstGeom>
+        </p:spPr>
+      </p:pic>
+      <p:sp>
+        <p:nvSpPr>
+          <p:cNvPr id="5" name="Text Box 4"/>
+          <p:cNvSpPr txBox="true"/>
+          <p:nvPr/>
+        </p:nvSpPr>
+        <p:spPr>
+          <a:xfrm>
+            <a:off x="4947285" y="149860"/>
+            <a:ext cx="2297430" cy="706755"/>
+          </a:xfrm>
+          <a:prstGeom prst="rect">
+            <a:avLst/>
+          </a:prstGeom>
+          <a:noFill/>
+        </p:spPr>
+        <p:txBody>
+          <a:bodyPr wrap="square" rtlCol="0">
+            <a:spAutoFit/>
+          </a:bodyPr>
+          <a:p>
+            <a:r>
+              <a:rPr lang="" altLang="en-US" sz="4000">
+                <a:ln w="28575" cmpd="sng">
+                  <a:solidFill>
+                    <a:srgbClr val="47FF52"/>
+                  </a:solidFill>
+                  <a:prstDash val="solid"/>
+                </a:ln>
+                <a:solidFill>
+                  <a:srgbClr val="644647"/>
+                </a:solidFill>
+                <a:latin typeface="OPTINational-Gothic" charset="0"/>
+                <a:cs typeface="OPTINational-Gothic" charset="0"/>
+              </a:rPr>
+              <a:t>FUNZIONE</a:t>
+            </a:r>
+            <a:endParaRPr lang="" altLang="en-US" sz="4000">
+              <a:ln w="28575" cmpd="sng">
+                <a:solidFill>
+                  <a:srgbClr val="47FF52"/>
+                </a:solidFill>
+                <a:prstDash val="solid"/>
+              </a:ln>
+              <a:solidFill>
+                <a:srgbClr val="644647"/>
+              </a:solidFill>
+              <a:latin typeface="OPTINational-Gothic" charset="0"/>
+              <a:cs typeface="OPTINational-Gothic" charset="0"/>
+            </a:endParaRPr>
+          </a:p>
+        </p:txBody>
+      </p:sp>
+      <p:pic>
+        <p:nvPicPr>
+          <p:cNvPr id="2" name="Picture 1" descr="funzione"/>
+          <p:cNvPicPr>
+            <a:picLocks noChangeAspect="true"/>
+          </p:cNvPicPr>
+          <p:nvPr/>
+        </p:nvPicPr>
+        <p:blipFill>
+          <a:blip r:embed="rId2"/>
+          <a:stretch>
+            <a:fillRect/>
+          </a:stretch>
+        </p:blipFill>
+        <p:spPr>
+          <a:xfrm>
+            <a:off x="2931795" y="923925"/>
+            <a:ext cx="6293485" cy="3539490"/>
+          </a:xfrm>
+          <a:prstGeom prst="rect">
+            <a:avLst/>
+          </a:prstGeom>
+        </p:spPr>
+      </p:pic>
+      <p:sp>
+        <p:nvSpPr>
+          <p:cNvPr id="13" name="Text Box 12"/>
+          <p:cNvSpPr txBox="true"/>
+          <p:nvPr/>
+        </p:nvSpPr>
+        <p:spPr>
+          <a:xfrm>
+            <a:off x="5669915" y="4585335"/>
+            <a:ext cx="852805" cy="337185"/>
+          </a:xfrm>
+          <a:prstGeom prst="rect">
+            <a:avLst/>
+          </a:prstGeom>
+          <a:noFill/>
+        </p:spPr>
+        <p:txBody>
+          <a:bodyPr wrap="square" rtlCol="0">
+            <a:spAutoFit/>
+          </a:bodyPr>
+          <a:p>
+            <a:pPr fontAlgn="auto"/>
+            <a:r>
+              <a:rPr lang="" altLang="en-US" sz="1600">
+                <a:ln w="6350" cmpd="sng">
+                  <a:noFill/>
+                  <a:prstDash val="solid"/>
+                </a:ln>
+                <a:solidFill>
+                  <a:srgbClr val="47FF52"/>
+                </a:solidFill>
+                <a:latin typeface="OPTINational-Gothic" charset="0"/>
+                <a:cs typeface="OPTINational-Gothic" charset="0"/>
+              </a:rPr>
+              <a:t>f(a) = b</a:t>
+            </a:r>
+            <a:endParaRPr lang="" altLang="en-US" sz="1600">
+              <a:ln w="6350" cmpd="sng">
+                <a:noFill/>
+                <a:prstDash val="solid"/>
+              </a:ln>
+              <a:solidFill>
+                <a:srgbClr val="47FF52"/>
+              </a:solidFill>
+              <a:latin typeface="OPTINational-Gothic" charset="0"/>
+              <a:cs typeface="OPTINational-Gothic" charset="0"/>
+            </a:endParaRPr>
+          </a:p>
+        </p:txBody>
+      </p:sp>
+      <p:sp>
+        <p:nvSpPr>
+          <p:cNvPr id="4" name="Text Box 3"/>
+          <p:cNvSpPr txBox="true"/>
+          <p:nvPr/>
+        </p:nvSpPr>
+        <p:spPr>
+          <a:xfrm>
+            <a:off x="4170045" y="5233035"/>
+            <a:ext cx="3852545" cy="583565"/>
+          </a:xfrm>
+          <a:prstGeom prst="rect">
+            <a:avLst/>
+          </a:prstGeom>
+          <a:noFill/>
+        </p:spPr>
+        <p:txBody>
+          <a:bodyPr wrap="square" rtlCol="0">
+            <a:spAutoFit/>
+          </a:bodyPr>
+          <a:p>
+            <a:pPr marL="285750" indent="-285750" fontAlgn="auto">
+              <a:buFont typeface="Arial" panose="02080604020202020204" pitchFamily="34" charset="0"/>
+              <a:buChar char="•"/>
+            </a:pPr>
+            <a:r>
+              <a:rPr lang="" altLang="en-US" sz="1600">
+                <a:ln w="6350" cmpd="sng">
+                  <a:noFill/>
+                  <a:prstDash val="solid"/>
+                </a:ln>
+                <a:solidFill>
+                  <a:srgbClr val="47FF52"/>
+                </a:solidFill>
+                <a:latin typeface="OPTINational-Gothic" charset="0"/>
+                <a:cs typeface="OPTINational-Gothic" charset="0"/>
+              </a:rPr>
+              <a:t>b è l’immagine di a mediante la funzione f</a:t>
+            </a:r>
+            <a:endParaRPr lang="" altLang="en-US" sz="1600">
+              <a:ln w="6350" cmpd="sng">
+                <a:noFill/>
+                <a:prstDash val="solid"/>
+              </a:ln>
+              <a:solidFill>
+                <a:srgbClr val="47FF52"/>
+              </a:solidFill>
+              <a:latin typeface="OPTINational-Gothic" charset="0"/>
+              <a:cs typeface="OPTINational-Gothic" charset="0"/>
+            </a:endParaRPr>
+          </a:p>
+          <a:p>
+            <a:pPr marL="285750" indent="-285750" fontAlgn="auto">
+              <a:buFont typeface="Arial" panose="02080604020202020204" pitchFamily="34" charset="0"/>
+              <a:buChar char="•"/>
+            </a:pPr>
+            <a:r>
+              <a:rPr lang="" altLang="en-US" sz="1600">
+                <a:ln w="6350" cmpd="sng">
+                  <a:noFill/>
+                  <a:prstDash val="solid"/>
+                </a:ln>
+                <a:solidFill>
+                  <a:srgbClr val="47FF52"/>
+                </a:solidFill>
+                <a:latin typeface="OPTINational-Gothic" charset="0"/>
+                <a:cs typeface="OPTINational-Gothic" charset="0"/>
+              </a:rPr>
+              <a:t>a la controimmagine di b mediante f</a:t>
+            </a:r>
+            <a:endParaRPr lang="" altLang="en-US" sz="1600">
+              <a:ln w="6350" cmpd="sng">
+                <a:noFill/>
+                <a:prstDash val="solid"/>
+              </a:ln>
+              <a:solidFill>
+                <a:srgbClr val="47FF52"/>
+              </a:solidFill>
+              <a:latin typeface="OPTINational-Gothic" charset="0"/>
+              <a:cs typeface="OPTINational-Gothic" charset="0"/>
+            </a:endParaRPr>
+          </a:p>
+        </p:txBody>
+      </p:sp>
+      <p:sp>
+        <p:nvSpPr>
+          <p:cNvPr id="6" name="Text Box 5"/>
+          <p:cNvSpPr txBox="true"/>
+          <p:nvPr/>
+        </p:nvSpPr>
+        <p:spPr>
+          <a:xfrm>
+            <a:off x="487045" y="2401570"/>
+            <a:ext cx="2153920" cy="583565"/>
+          </a:xfrm>
+          <a:prstGeom prst="rect">
+            <a:avLst/>
+          </a:prstGeom>
+          <a:noFill/>
+        </p:spPr>
+        <p:txBody>
+          <a:bodyPr wrap="square" rtlCol="0">
+            <a:spAutoFit/>
+          </a:bodyPr>
+          <a:p>
+            <a:pPr fontAlgn="auto"/>
+            <a:r>
+              <a:rPr lang="" altLang="en-US" sz="1600">
+                <a:ln w="6350" cmpd="sng">
+                  <a:noFill/>
+                  <a:prstDash val="solid"/>
+                </a:ln>
+                <a:solidFill>
+                  <a:srgbClr val="47FF52"/>
+                </a:solidFill>
+                <a:latin typeface="OPTINational-Gothic" charset="0"/>
+                <a:cs typeface="OPTINational-Gothic" charset="0"/>
+              </a:rPr>
+              <a:t>Gruppo A: Dominio</a:t>
+            </a:r>
+            <a:endParaRPr lang="" altLang="en-US" sz="1600">
+              <a:ln w="6350" cmpd="sng">
+                <a:noFill/>
+                <a:prstDash val="solid"/>
+              </a:ln>
+              <a:solidFill>
+                <a:srgbClr val="47FF52"/>
+              </a:solidFill>
+              <a:latin typeface="OPTINational-Gothic" charset="0"/>
+              <a:cs typeface="OPTINational-Gothic" charset="0"/>
+            </a:endParaRPr>
+          </a:p>
+          <a:p>
+            <a:pPr fontAlgn="auto"/>
+            <a:r>
+              <a:rPr lang="" altLang="en-US" sz="1600">
+                <a:ln w="6350" cmpd="sng">
+                  <a:noFill/>
+                  <a:prstDash val="solid"/>
+                </a:ln>
+                <a:solidFill>
+                  <a:srgbClr val="47FF52"/>
+                </a:solidFill>
+                <a:latin typeface="OPTINational-Gothic" charset="0"/>
+                <a:cs typeface="OPTINational-Gothic" charset="0"/>
+              </a:rPr>
+              <a:t>Gruppo B: Codominio</a:t>
+            </a:r>
+            <a:endParaRPr lang="" altLang="en-US" sz="1600">
+              <a:ln w="6350" cmpd="sng">
+                <a:noFill/>
+                <a:prstDash val="solid"/>
+              </a:ln>
+              <a:solidFill>
+                <a:srgbClr val="47FF52"/>
+              </a:solidFill>
+              <a:latin typeface="OPTINational-Gothic" charset="0"/>
+              <a:cs typeface="OPTINational-Gothic" charset="0"/>
+            </a:endParaRPr>
+          </a:p>
+        </p:txBody>
+      </p:sp>
+    </p:spTree>
+  </p:cSld>
+  <p:clrMapOvr>
+    <a:masterClrMapping/>
+  </p:clrMapOvr>
+</p:sld>
+</file>
+
+<file path=ppt/slides/slide4.xml><?xml version="1.0" encoding="utf-8"?>
+<p:sld xmlns:a="http://schemas.openxmlformats.org/drawingml/2006/main" xmlns:r="http://schemas.openxmlformats.org/officeDocument/2006/relationships" xmlns:p="http://schemas.openxmlformats.org/presentationml/2006/main">
+  <p:cSld>
+    <p:bg>
+      <p:bgPr>
+        <a:pattFill prst="pct10">
+          <a:fgClr>
+            <a:srgbClr val="FF400D"/>
+          </a:fgClr>
+          <a:bgClr>
+            <a:schemeClr val="tx1">
+              <a:lumMod val="65000"/>
+              <a:lumOff val="35000"/>
+            </a:schemeClr>
+          </a:bgClr>
+        </a:pattFill>
+        <a:effectLst/>
+      </p:bgPr>
+    </p:bg>
+    <p:spTree>
+      <p:nvGrpSpPr>
+        <p:cNvPr id="1" name=""/>
+        <p:cNvGrpSpPr/>
+        <p:nvPr/>
+      </p:nvGrpSpPr>
+      <p:grpSpPr/>
+      <p:pic>
+        <p:nvPicPr>
+          <p:cNvPr id="7" name="Picture 6" descr="pavimento"/>
+          <p:cNvPicPr>
+            <a:picLocks noChangeAspect="true"/>
+          </p:cNvPicPr>
+          <p:nvPr/>
+        </p:nvPicPr>
+        <p:blipFill>
+          <a:blip r:embed="rId1"/>
+          <a:stretch>
+            <a:fillRect/>
+          </a:stretch>
+        </p:blipFill>
+        <p:spPr>
+          <a:xfrm>
+            <a:off x="-246380" y="6127750"/>
+            <a:ext cx="12650470" cy="974090"/>
+          </a:xfrm>
+          <a:prstGeom prst="rect">
+            <a:avLst/>
+          </a:prstGeom>
+        </p:spPr>
+      </p:pic>
+      <p:sp>
+        <p:nvSpPr>
+          <p:cNvPr id="5" name="Text Box 4"/>
+          <p:cNvSpPr txBox="true"/>
+          <p:nvPr/>
+        </p:nvSpPr>
+        <p:spPr>
+          <a:xfrm>
+            <a:off x="3983355" y="140335"/>
+            <a:ext cx="4225290" cy="706755"/>
+          </a:xfrm>
+          <a:prstGeom prst="rect">
+            <a:avLst/>
+          </a:prstGeom>
+          <a:noFill/>
+        </p:spPr>
+        <p:txBody>
+          <a:bodyPr wrap="square" rtlCol="0">
+            <a:spAutoFit/>
+          </a:bodyPr>
+          <a:p>
+            <a:r>
+              <a:rPr lang="" altLang="en-US" sz="4000">
+                <a:ln w="28575" cmpd="sng">
+                  <a:solidFill>
+                    <a:srgbClr val="47FF52"/>
+                  </a:solidFill>
+                  <a:prstDash val="solid"/>
+                </a:ln>
+                <a:solidFill>
+                  <a:srgbClr val="644647"/>
+                </a:solidFill>
+                <a:latin typeface="OPTINational-Gothic" charset="0"/>
+                <a:cs typeface="OPTINational-Gothic" charset="0"/>
+              </a:rPr>
+              <a:t>STUDIO DI FUNZIONE</a:t>
+            </a:r>
+            <a:endParaRPr lang="" altLang="en-US" sz="4000">
+              <a:ln w="28575" cmpd="sng">
+                <a:solidFill>
+                  <a:srgbClr val="47FF52"/>
+                </a:solidFill>
+                <a:prstDash val="solid"/>
+              </a:ln>
+              <a:solidFill>
+                <a:srgbClr val="644647"/>
+              </a:solidFill>
+              <a:latin typeface="OPTINational-Gothic" charset="0"/>
+              <a:cs typeface="OPTINational-Gothic" charset="0"/>
+            </a:endParaRPr>
+          </a:p>
+        </p:txBody>
+      </p:sp>
+      <p:pic>
+        <p:nvPicPr>
+          <p:cNvPr id="4" name="Picture 3" descr="funzionedastudio"/>
+          <p:cNvPicPr>
+            <a:picLocks noChangeAspect="true"/>
+          </p:cNvPicPr>
+          <p:nvPr/>
+        </p:nvPicPr>
+        <p:blipFill>
+          <a:blip r:embed="rId2"/>
+          <a:stretch>
+            <a:fillRect/>
+          </a:stretch>
+        </p:blipFill>
+        <p:spPr>
+          <a:xfrm>
+            <a:off x="121285" y="1139825"/>
+            <a:ext cx="3134360" cy="492760"/>
+          </a:xfrm>
+          <a:prstGeom prst="rect">
+            <a:avLst/>
+          </a:prstGeom>
+        </p:spPr>
+      </p:pic>
+      <p:sp>
+        <p:nvSpPr>
+          <p:cNvPr id="6" name="Text Box 5"/>
+          <p:cNvSpPr txBox="true"/>
+          <p:nvPr/>
+        </p:nvSpPr>
+        <p:spPr>
+          <a:xfrm>
+            <a:off x="121285" y="1839595"/>
+            <a:ext cx="1944370" cy="337185"/>
+          </a:xfrm>
+          <a:prstGeom prst="rect">
+            <a:avLst/>
+          </a:prstGeom>
+          <a:noFill/>
+        </p:spPr>
+        <p:txBody>
+          <a:bodyPr wrap="square" rtlCol="0">
+            <a:spAutoFit/>
+          </a:bodyPr>
+          <a:p>
+            <a:pPr marL="285750" indent="-285750" fontAlgn="auto">
+              <a:buFont typeface="Arial" panose="02080604020202020204" pitchFamily="34" charset="0"/>
+              <a:buChar char="•"/>
+            </a:pPr>
+            <a:r>
+              <a:rPr lang="" altLang="en-US" sz="1600">
+                <a:ln w="6350" cmpd="sng">
+                  <a:noFill/>
+                  <a:prstDash val="solid"/>
+                </a:ln>
+                <a:solidFill>
+                  <a:srgbClr val="47FF52"/>
+                </a:solidFill>
+                <a:latin typeface="OPTINational-Gothic" charset="0"/>
+                <a:cs typeface="OPTINational-Gothic" charset="0"/>
+              </a:rPr>
+              <a:t>Studio il dominio:</a:t>
+            </a:r>
+            <a:endParaRPr lang="" altLang="en-US" sz="1600">
+              <a:ln w="6350" cmpd="sng">
+                <a:noFill/>
+                <a:prstDash val="solid"/>
+              </a:ln>
+              <a:solidFill>
+                <a:srgbClr val="47FF52"/>
+              </a:solidFill>
+              <a:latin typeface="OPTINational-Gothic" charset="0"/>
+              <a:cs typeface="OPTINational-Gothic" charset="0"/>
+            </a:endParaRPr>
+          </a:p>
+        </p:txBody>
+      </p:sp>
+      <p:pic>
+        <p:nvPicPr>
+          <p:cNvPr id="9" name="Picture 8" descr="Dominio"/>
+          <p:cNvPicPr>
+            <a:picLocks noChangeAspect="true"/>
+          </p:cNvPicPr>
+          <p:nvPr/>
+        </p:nvPicPr>
+        <p:blipFill>
+          <a:blip r:embed="rId3"/>
+          <a:stretch>
+            <a:fillRect/>
+          </a:stretch>
+        </p:blipFill>
+        <p:spPr>
+          <a:xfrm>
+            <a:off x="121285" y="2176780"/>
+            <a:ext cx="3366770" cy="465455"/>
+          </a:xfrm>
+          <a:prstGeom prst="rect">
+            <a:avLst/>
+          </a:prstGeom>
+        </p:spPr>
+      </p:pic>
+      <p:sp>
+        <p:nvSpPr>
+          <p:cNvPr id="10" name="Text Box 9"/>
+          <p:cNvSpPr txBox="true"/>
+          <p:nvPr/>
+        </p:nvSpPr>
+        <p:spPr>
+          <a:xfrm>
+            <a:off x="121285" y="2835275"/>
+            <a:ext cx="2520315" cy="337185"/>
+          </a:xfrm>
+          <a:prstGeom prst="rect">
+            <a:avLst/>
+          </a:prstGeom>
+          <a:noFill/>
+        </p:spPr>
+        <p:txBody>
+          <a:bodyPr wrap="square" rtlCol="0">
+            <a:spAutoFit/>
+          </a:bodyPr>
+          <a:p>
+            <a:pPr marL="285750" indent="-285750" fontAlgn="auto">
+              <a:buFont typeface="Arial" panose="02080604020202020204" pitchFamily="34" charset="0"/>
+              <a:buChar char="•"/>
+            </a:pPr>
+            <a:r>
+              <a:rPr lang="" altLang="en-US" sz="1600">
+                <a:ln w="6350" cmpd="sng">
+                  <a:noFill/>
+                  <a:prstDash val="solid"/>
+                </a:ln>
+                <a:solidFill>
+                  <a:srgbClr val="47FF52"/>
+                </a:solidFill>
+                <a:latin typeface="OPTINational-Gothic" charset="0"/>
+                <a:cs typeface="OPTINational-Gothic" charset="0"/>
+              </a:rPr>
+              <a:t>Valuto la positività:</a:t>
+            </a:r>
+            <a:endParaRPr lang="" altLang="en-US" sz="1600">
+              <a:ln w="6350" cmpd="sng">
+                <a:noFill/>
+                <a:prstDash val="solid"/>
+              </a:ln>
+              <a:solidFill>
+                <a:srgbClr val="47FF52"/>
+              </a:solidFill>
+              <a:latin typeface="OPTINational-Gothic" charset="0"/>
+              <a:cs typeface="OPTINational-Gothic" charset="0"/>
+            </a:endParaRPr>
+          </a:p>
+        </p:txBody>
+      </p:sp>
+      <p:pic>
+        <p:nvPicPr>
+          <p:cNvPr id="11" name="Picture 10" descr="positività"/>
+          <p:cNvPicPr>
+            <a:picLocks noChangeAspect="true"/>
+          </p:cNvPicPr>
+          <p:nvPr/>
+        </p:nvPicPr>
+        <p:blipFill>
+          <a:blip r:embed="rId4"/>
+          <a:stretch>
+            <a:fillRect/>
+          </a:stretch>
+        </p:blipFill>
+        <p:spPr>
+          <a:xfrm>
+            <a:off x="121285" y="3172460"/>
+            <a:ext cx="2590165" cy="608330"/>
+          </a:xfrm>
+          <a:prstGeom prst="rect">
+            <a:avLst/>
+          </a:prstGeom>
+        </p:spPr>
+      </p:pic>
+      <p:sp>
+        <p:nvSpPr>
+          <p:cNvPr id="12" name="Text Box 11"/>
+          <p:cNvSpPr txBox="true"/>
+          <p:nvPr/>
+        </p:nvSpPr>
+        <p:spPr>
+          <a:xfrm>
+            <a:off x="121285" y="3994785"/>
+            <a:ext cx="2520315" cy="583565"/>
+          </a:xfrm>
+          <a:prstGeom prst="rect">
+            <a:avLst/>
+          </a:prstGeom>
+          <a:noFill/>
+        </p:spPr>
+        <p:txBody>
+          <a:bodyPr wrap="square" rtlCol="0">
+            <a:spAutoFit/>
+          </a:bodyPr>
+          <a:p>
+            <a:pPr marL="285750" indent="-285750" fontAlgn="auto">
+              <a:buFont typeface="Arial" panose="02080604020202020204" pitchFamily="34" charset="0"/>
+              <a:buChar char="•"/>
+            </a:pPr>
+            <a:r>
+              <a:rPr lang="" altLang="en-US" sz="1600">
+                <a:ln w="6350" cmpd="sng">
+                  <a:noFill/>
+                  <a:prstDash val="solid"/>
+                </a:ln>
+                <a:solidFill>
+                  <a:srgbClr val="47FF52"/>
+                </a:solidFill>
+                <a:latin typeface="OPTINational-Gothic" charset="0"/>
+                <a:cs typeface="OPTINational-Gothic" charset="0"/>
+              </a:rPr>
+              <a:t>Eventuali limiti: </a:t>
+            </a:r>
+            <a:endParaRPr lang="" altLang="en-US" sz="1600">
+              <a:ln w="6350" cmpd="sng">
+                <a:noFill/>
+                <a:prstDash val="solid"/>
+              </a:ln>
+              <a:solidFill>
+                <a:srgbClr val="47FF52"/>
+              </a:solidFill>
+              <a:latin typeface="OPTINational-Gothic" charset="0"/>
+              <a:cs typeface="OPTINational-Gothic" charset="0"/>
+            </a:endParaRPr>
+          </a:p>
+          <a:p>
+            <a:pPr indent="0" fontAlgn="auto">
+              <a:buFont typeface="Arial" panose="02080604020202020204" pitchFamily="34" charset="0"/>
+              <a:buNone/>
+            </a:pPr>
+            <a:r>
+              <a:rPr lang="" altLang="en-US" sz="1600">
+                <a:ln w="6350" cmpd="sng">
+                  <a:noFill/>
+                  <a:prstDash val="solid"/>
+                </a:ln>
+                <a:solidFill>
+                  <a:srgbClr val="47FF52"/>
+                </a:solidFill>
+                <a:latin typeface="OPTINational-Gothic" charset="0"/>
+                <a:cs typeface="OPTINational-Gothic" charset="0"/>
+              </a:rPr>
+              <a:t>Non ci sono limiti da calcolare</a:t>
+            </a:r>
+            <a:endParaRPr lang="" altLang="en-US" sz="1600">
+              <a:ln w="6350" cmpd="sng">
+                <a:noFill/>
+                <a:prstDash val="solid"/>
+              </a:ln>
+              <a:solidFill>
+                <a:srgbClr val="47FF52"/>
+              </a:solidFill>
+              <a:latin typeface="OPTINational-Gothic" charset="0"/>
+              <a:cs typeface="OPTINational-Gothic" charset="0"/>
+            </a:endParaRPr>
+          </a:p>
+        </p:txBody>
+      </p:sp>
+      <p:sp>
+        <p:nvSpPr>
+          <p:cNvPr id="13" name="Text Box 12"/>
+          <p:cNvSpPr txBox="true"/>
+          <p:nvPr/>
+        </p:nvSpPr>
+        <p:spPr>
+          <a:xfrm>
+            <a:off x="121285" y="4792345"/>
+            <a:ext cx="2520315" cy="337185"/>
+          </a:xfrm>
+          <a:prstGeom prst="rect">
+            <a:avLst/>
+          </a:prstGeom>
+          <a:noFill/>
+        </p:spPr>
+        <p:txBody>
+          <a:bodyPr wrap="square" rtlCol="0">
+            <a:spAutoFit/>
+          </a:bodyPr>
+          <a:p>
+            <a:pPr marL="285750" indent="-285750" fontAlgn="auto">
+              <a:buFont typeface="Arial" panose="02080604020202020204" pitchFamily="34" charset="0"/>
+              <a:buChar char="•"/>
+            </a:pPr>
+            <a:r>
+              <a:rPr lang="" altLang="en-US" sz="1600">
+                <a:ln w="6350" cmpd="sng">
+                  <a:noFill/>
+                  <a:prstDash val="solid"/>
+                </a:ln>
+                <a:solidFill>
+                  <a:srgbClr val="47FF52"/>
+                </a:solidFill>
+                <a:latin typeface="OPTINational-Gothic" charset="0"/>
+                <a:cs typeface="OPTINational-Gothic" charset="0"/>
+              </a:rPr>
+              <a:t>Calcolo la derivata prima:</a:t>
+            </a:r>
+            <a:endParaRPr lang="" altLang="en-US" sz="1600">
+              <a:ln w="6350" cmpd="sng">
+                <a:noFill/>
+                <a:prstDash val="solid"/>
+              </a:ln>
+              <a:solidFill>
+                <a:srgbClr val="47FF52"/>
+              </a:solidFill>
+              <a:latin typeface="OPTINational-Gothic" charset="0"/>
+              <a:cs typeface="OPTINational-Gothic" charset="0"/>
+            </a:endParaRPr>
+          </a:p>
+        </p:txBody>
+      </p:sp>
+    </p:spTree>
+  </p:cSld>
+  <p:clrMapOvr>
+    <a:masterClrMapping/>
+  </p:clrMapOvr>
+</p:sld>
+</file>
+
+<file path=ppt/slides/slide5.xml><?xml version="1.0" encoding="utf-8"?>
+<p:sld xmlns:a="http://schemas.openxmlformats.org/drawingml/2006/main" xmlns:r="http://schemas.openxmlformats.org/officeDocument/2006/relationships" xmlns:p="http://schemas.openxmlformats.org/presentationml/2006/main">
+  <p:cSld>
+    <p:bg>
+      <p:bgPr>
+        <a:pattFill prst="pct10">
+          <a:fgClr>
+            <a:srgbClr val="FF400D"/>
+          </a:fgClr>
+          <a:bgClr>
+            <a:schemeClr val="tx1">
+              <a:lumMod val="65000"/>
+              <a:lumOff val="35000"/>
+            </a:schemeClr>
+          </a:bgClr>
+        </a:pattFill>
+        <a:effectLst/>
+      </p:bgPr>
+    </p:bg>
+    <p:spTree>
+      <p:nvGrpSpPr>
+        <p:cNvPr id="1" name=""/>
+        <p:cNvGrpSpPr/>
+        <p:nvPr/>
+      </p:nvGrpSpPr>
+      <p:grpSpPr/>
+      <p:pic>
+        <p:nvPicPr>
+          <p:cNvPr id="7" name="Picture 6" descr="pavimento"/>
+          <p:cNvPicPr>
+            <a:picLocks noChangeAspect="true"/>
+          </p:cNvPicPr>
+          <p:nvPr/>
+        </p:nvPicPr>
+        <p:blipFill>
+          <a:blip r:embed="rId1"/>
+          <a:stretch>
+            <a:fillRect/>
+          </a:stretch>
+        </p:blipFill>
+        <p:spPr>
+          <a:xfrm>
+            <a:off x="-246380" y="6127750"/>
+            <a:ext cx="12650470" cy="974090"/>
+          </a:xfrm>
+          <a:prstGeom prst="rect">
+            <a:avLst/>
+          </a:prstGeom>
+        </p:spPr>
+      </p:pic>
+      <p:sp>
+        <p:nvSpPr>
+          <p:cNvPr id="5" name="Text Box 4"/>
+          <p:cNvSpPr txBox="true"/>
+          <p:nvPr/>
+        </p:nvSpPr>
+        <p:spPr>
+          <a:xfrm>
+            <a:off x="2458085" y="135255"/>
+            <a:ext cx="7276465" cy="706755"/>
+          </a:xfrm>
+          <a:prstGeom prst="rect">
+            <a:avLst/>
+          </a:prstGeom>
+          <a:noFill/>
+        </p:spPr>
+        <p:txBody>
+          <a:bodyPr wrap="square" rtlCol="0">
+            <a:spAutoFit/>
+          </a:bodyPr>
+          <a:p>
+            <a:r>
+              <a:rPr lang="" altLang="en-US" sz="4000">
+                <a:ln w="28575" cmpd="sng">
+                  <a:solidFill>
+                    <a:srgbClr val="47FF52"/>
+                  </a:solidFill>
+                  <a:prstDash val="solid"/>
+                </a:ln>
+                <a:solidFill>
+                  <a:srgbClr val="644647"/>
+                </a:solidFill>
+                <a:latin typeface="OPTINational-Gothic" charset="0"/>
+                <a:cs typeface="OPTINational-Gothic" charset="0"/>
+              </a:rPr>
+              <a:t>Derivata e punti di non derivabilità</a:t>
+            </a:r>
+            <a:endParaRPr lang="" altLang="en-US" sz="4000">
+              <a:ln w="28575" cmpd="sng">
+                <a:solidFill>
+                  <a:srgbClr val="47FF52"/>
+                </a:solidFill>
+                <a:prstDash val="solid"/>
+              </a:ln>
+              <a:solidFill>
+                <a:srgbClr val="644647"/>
+              </a:solidFill>
+              <a:latin typeface="OPTINational-Gothic" charset="0"/>
+              <a:cs typeface="OPTINational-Gothic" charset="0"/>
+            </a:endParaRPr>
+          </a:p>
+        </p:txBody>
+      </p:sp>
+      <p:pic>
+        <p:nvPicPr>
+          <p:cNvPr id="2" name="Picture 1" descr="disegno_PQR"/>
+          <p:cNvPicPr>
+            <a:picLocks noChangeAspect="true"/>
+          </p:cNvPicPr>
+          <p:nvPr/>
+        </p:nvPicPr>
+        <p:blipFill>
+          <a:blip r:embed="rId2"/>
+          <a:stretch>
+            <a:fillRect/>
+          </a:stretch>
+        </p:blipFill>
+        <p:spPr>
+          <a:xfrm>
+            <a:off x="4159250" y="1366520"/>
+            <a:ext cx="3838575" cy="2252980"/>
+          </a:xfrm>
+          <a:prstGeom prst="rect">
+            <a:avLst/>
+          </a:prstGeom>
+        </p:spPr>
+      </p:pic>
+      <p:pic>
+        <p:nvPicPr>
+          <p:cNvPr id="3" name="Picture 2" descr="puntond1"/>
+          <p:cNvPicPr>
+            <a:picLocks noChangeAspect="true"/>
+          </p:cNvPicPr>
+          <p:nvPr/>
+        </p:nvPicPr>
+        <p:blipFill>
+          <a:blip r:embed="rId3"/>
+          <a:stretch>
+            <a:fillRect/>
+          </a:stretch>
+        </p:blipFill>
+        <p:spPr>
+          <a:xfrm>
+            <a:off x="424815" y="753110"/>
+            <a:ext cx="3307715" cy="2866390"/>
+          </a:xfrm>
+          <a:prstGeom prst="rect">
+            <a:avLst/>
+          </a:prstGeom>
+        </p:spPr>
+      </p:pic>
+      <p:pic>
+        <p:nvPicPr>
+          <p:cNvPr id="4" name="Picture 3" descr="puntond2"/>
+          <p:cNvPicPr>
+            <a:picLocks noChangeAspect="true"/>
+          </p:cNvPicPr>
+          <p:nvPr/>
+        </p:nvPicPr>
+        <p:blipFill>
+          <a:blip r:embed="rId4"/>
+          <a:stretch>
+            <a:fillRect/>
+          </a:stretch>
+        </p:blipFill>
+        <p:spPr>
+          <a:xfrm>
+            <a:off x="8587105" y="753110"/>
+            <a:ext cx="3326130" cy="3043555"/>
+          </a:xfrm>
+          <a:prstGeom prst="rect">
+            <a:avLst/>
+          </a:prstGeom>
+        </p:spPr>
+      </p:pic>
+      <p:pic>
+        <p:nvPicPr>
+          <p:cNvPr id="6" name="Picture 5" descr="puntond3"/>
+          <p:cNvPicPr>
+            <a:picLocks noChangeAspect="true"/>
+          </p:cNvPicPr>
+          <p:nvPr/>
+        </p:nvPicPr>
+        <p:blipFill>
+          <a:blip r:embed="rId5"/>
+          <a:stretch>
+            <a:fillRect/>
+          </a:stretch>
+        </p:blipFill>
+        <p:spPr>
+          <a:xfrm>
+            <a:off x="567690" y="3726815"/>
+            <a:ext cx="3021965" cy="2557145"/>
+          </a:xfrm>
+          <a:prstGeom prst="rect">
+            <a:avLst/>
+          </a:prstGeom>
+        </p:spPr>
+      </p:pic>
+      <p:pic>
+        <p:nvPicPr>
+          <p:cNvPr id="8" name="Picture 7" descr="puntond4"/>
+          <p:cNvPicPr>
+            <a:picLocks noChangeAspect="true"/>
+          </p:cNvPicPr>
+          <p:nvPr/>
+        </p:nvPicPr>
+        <p:blipFill>
+          <a:blip r:embed="rId6"/>
+          <a:stretch>
+            <a:fillRect/>
+          </a:stretch>
+        </p:blipFill>
+        <p:spPr>
+          <a:xfrm>
+            <a:off x="4514215" y="3619500"/>
+            <a:ext cx="2865120" cy="2679700"/>
+          </a:xfrm>
+          <a:prstGeom prst="rect">
+            <a:avLst/>
+          </a:prstGeom>
+        </p:spPr>
+      </p:pic>
+      <p:pic>
+        <p:nvPicPr>
+          <p:cNvPr id="9" name="Picture 8" descr="puntond5"/>
+          <p:cNvPicPr>
+            <a:picLocks noChangeAspect="true"/>
+          </p:cNvPicPr>
+          <p:nvPr/>
+        </p:nvPicPr>
+        <p:blipFill>
+          <a:blip r:embed="rId7"/>
+          <a:stretch>
+            <a:fillRect/>
+          </a:stretch>
+        </p:blipFill>
+        <p:spPr>
+          <a:xfrm>
+            <a:off x="9058275" y="3895090"/>
+            <a:ext cx="2383155" cy="2547620"/>
+          </a:xfrm>
+          <a:prstGeom prst="rect">
+            <a:avLst/>
+          </a:prstGeom>
+        </p:spPr>
+      </p:pic>
+    </p:spTree>
+  </p:cSld>
+  <p:clrMapOvr>
+    <a:masterClrMapping/>
+  </p:clrMapOvr>
+</p:sld>
+</file>
+
+<file path=ppt/slides/slide6.xml><?xml version="1.0" encoding="utf-8"?>
+<p:sld xmlns:a="http://schemas.openxmlformats.org/drawingml/2006/main" xmlns:r="http://schemas.openxmlformats.org/officeDocument/2006/relationships" xmlns:p="http://schemas.openxmlformats.org/presentationml/2006/main">
+  <p:cSld>
+    <p:bg>
+      <p:bgPr>
+        <a:pattFill prst="pct10">
+          <a:fgClr>
+            <a:srgbClr val="FF400D"/>
+          </a:fgClr>
+          <a:bgClr>
+            <a:schemeClr val="tx1">
+              <a:lumMod val="65000"/>
+              <a:lumOff val="35000"/>
+            </a:schemeClr>
+          </a:bgClr>
+        </a:pattFill>
+        <a:effectLst/>
+      </p:bgPr>
+    </p:bg>
+    <p:spTree>
+      <p:nvGrpSpPr>
+        <p:cNvPr id="1" name=""/>
+        <p:cNvGrpSpPr/>
+        <p:nvPr/>
+      </p:nvGrpSpPr>
+      <p:grpSpPr/>
+      <p:pic>
+        <p:nvPicPr>
+          <p:cNvPr id="7" name="Picture 6" descr="pavimento"/>
+          <p:cNvPicPr>
+            <a:picLocks noChangeAspect="true"/>
+          </p:cNvPicPr>
+          <p:nvPr/>
+        </p:nvPicPr>
+        <p:blipFill>
+          <a:blip r:embed="rId1"/>
+          <a:stretch>
+            <a:fillRect/>
+          </a:stretch>
+        </p:blipFill>
+        <p:spPr>
+          <a:xfrm>
+            <a:off x="-246380" y="6127750"/>
+            <a:ext cx="12650470" cy="974090"/>
+          </a:xfrm>
+          <a:prstGeom prst="rect">
+            <a:avLst/>
+          </a:prstGeom>
+        </p:spPr>
+      </p:pic>
+      <p:sp>
+        <p:nvSpPr>
+          <p:cNvPr id="5" name="Text Box 4"/>
+          <p:cNvSpPr txBox="true"/>
+          <p:nvPr/>
+        </p:nvSpPr>
+        <p:spPr>
+          <a:xfrm>
+            <a:off x="3983355" y="140335"/>
+            <a:ext cx="4225290" cy="706755"/>
+          </a:xfrm>
+          <a:prstGeom prst="rect">
+            <a:avLst/>
+          </a:prstGeom>
+          <a:noFill/>
+        </p:spPr>
+        <p:txBody>
+          <a:bodyPr wrap="square" rtlCol="0">
+            <a:spAutoFit/>
+          </a:bodyPr>
+          <a:p>
+            <a:r>
+              <a:rPr lang="en-US" altLang="en-US" sz="4000">
+                <a:ln w="28575" cmpd="sng">
+                  <a:solidFill>
+                    <a:srgbClr val="47FF52"/>
+                  </a:solidFill>
+                  <a:prstDash val="solid"/>
+                </a:ln>
+                <a:solidFill>
+                  <a:srgbClr val="644647"/>
+                </a:solidFill>
+                <a:latin typeface="OPTINational-Gothic" charset="0"/>
+                <a:cs typeface="OPTINational-Gothic" charset="0"/>
+              </a:rPr>
+              <a:t>STUDIO DI FUNZIONE</a:t>
+            </a:r>
+            <a:endParaRPr lang="en-US" altLang="en-US" sz="4000">
+              <a:ln w="28575" cmpd="sng">
+                <a:solidFill>
+                  <a:srgbClr val="47FF52"/>
+                </a:solidFill>
+                <a:prstDash val="solid"/>
+              </a:ln>
+              <a:solidFill>
+                <a:srgbClr val="644647"/>
+              </a:solidFill>
+              <a:latin typeface="OPTINational-Gothic" charset="0"/>
+              <a:cs typeface="OPTINational-Gothic" charset="0"/>
+            </a:endParaRPr>
+          </a:p>
+        </p:txBody>
+      </p:sp>
+      <p:pic>
+        <p:nvPicPr>
+          <p:cNvPr id="3" name="Picture 2" descr="graficofunzione1"/>
+          <p:cNvPicPr>
+            <a:picLocks noChangeAspect="true"/>
+          </p:cNvPicPr>
+          <p:nvPr/>
+        </p:nvPicPr>
+        <p:blipFill>
+          <a:blip r:embed="rId2"/>
+          <a:stretch>
+            <a:fillRect/>
+          </a:stretch>
+        </p:blipFill>
+        <p:spPr>
+          <a:xfrm>
+            <a:off x="3625215" y="1139825"/>
+            <a:ext cx="4906645" cy="4577715"/>
+          </a:xfrm>
+          <a:prstGeom prst="rect">
+            <a:avLst/>
+          </a:prstGeom>
+        </p:spPr>
+      </p:pic>
+      <p:pic>
+        <p:nvPicPr>
+          <p:cNvPr id="4" name="Picture 3" descr="funzionedastudio"/>
+          <p:cNvPicPr>
+            <a:picLocks noChangeAspect="true"/>
+          </p:cNvPicPr>
+          <p:nvPr/>
+        </p:nvPicPr>
+        <p:blipFill>
+          <a:blip r:embed="rId3"/>
+          <a:stretch>
+            <a:fillRect/>
+          </a:stretch>
+        </p:blipFill>
+        <p:spPr>
+          <a:xfrm>
+            <a:off x="121285" y="1139825"/>
+            <a:ext cx="3134360" cy="492760"/>
+          </a:xfrm>
+          <a:prstGeom prst="rect">
+            <a:avLst/>
+          </a:prstGeom>
+        </p:spPr>
+      </p:pic>
+      <p:sp>
+        <p:nvSpPr>
+          <p:cNvPr id="6" name="Text Box 5"/>
+          <p:cNvSpPr txBox="true"/>
+          <p:nvPr/>
+        </p:nvSpPr>
+        <p:spPr>
+          <a:xfrm>
+            <a:off x="121285" y="1839595"/>
+            <a:ext cx="1944370" cy="337185"/>
+          </a:xfrm>
+          <a:prstGeom prst="rect">
+            <a:avLst/>
+          </a:prstGeom>
+          <a:noFill/>
+        </p:spPr>
+        <p:txBody>
+          <a:bodyPr wrap="square" rtlCol="0">
+            <a:spAutoFit/>
+          </a:bodyPr>
+          <a:p>
+            <a:pPr marL="285750" indent="-285750" fontAlgn="auto">
+              <a:buFont typeface="Arial" panose="02080604020202020204" pitchFamily="34" charset="0"/>
+              <a:buChar char="•"/>
+            </a:pPr>
+            <a:r>
+              <a:rPr lang="en-US" altLang="en-US" sz="1600">
+                <a:ln w="6350" cmpd="sng">
+                  <a:noFill/>
+                  <a:prstDash val="solid"/>
+                </a:ln>
+                <a:solidFill>
+                  <a:srgbClr val="47FF52"/>
+                </a:solidFill>
+                <a:latin typeface="OPTINational-Gothic" charset="0"/>
+                <a:cs typeface="OPTINational-Gothic" charset="0"/>
+              </a:rPr>
+              <a:t>Studio il dominio:</a:t>
+            </a:r>
+            <a:endParaRPr lang="en-US" altLang="en-US" sz="1600">
+              <a:ln w="6350" cmpd="sng">
+                <a:noFill/>
+                <a:prstDash val="solid"/>
+              </a:ln>
+              <a:solidFill>
+                <a:srgbClr val="47FF52"/>
+              </a:solidFill>
+              <a:latin typeface="OPTINational-Gothic" charset="0"/>
+              <a:cs typeface="OPTINational-Gothic" charset="0"/>
+            </a:endParaRPr>
+          </a:p>
+        </p:txBody>
+      </p:sp>
+      <p:pic>
+        <p:nvPicPr>
+          <p:cNvPr id="9" name="Picture 8" descr="Dominio"/>
+          <p:cNvPicPr>
+            <a:picLocks noChangeAspect="true"/>
+          </p:cNvPicPr>
+          <p:nvPr/>
+        </p:nvPicPr>
+        <p:blipFill>
+          <a:blip r:embed="rId4"/>
+          <a:stretch>
+            <a:fillRect/>
+          </a:stretch>
+        </p:blipFill>
+        <p:spPr>
+          <a:xfrm>
+            <a:off x="121285" y="2176780"/>
+            <a:ext cx="3366770" cy="465455"/>
+          </a:xfrm>
+          <a:prstGeom prst="rect">
+            <a:avLst/>
+          </a:prstGeom>
+        </p:spPr>
+      </p:pic>
+      <p:sp>
+        <p:nvSpPr>
+          <p:cNvPr id="10" name="Text Box 9"/>
+          <p:cNvSpPr txBox="true"/>
+          <p:nvPr/>
+        </p:nvSpPr>
+        <p:spPr>
+          <a:xfrm>
+            <a:off x="121285" y="2835275"/>
+            <a:ext cx="2520315" cy="337185"/>
+          </a:xfrm>
+          <a:prstGeom prst="rect">
+            <a:avLst/>
+          </a:prstGeom>
+          <a:noFill/>
+        </p:spPr>
+        <p:txBody>
+          <a:bodyPr wrap="square" rtlCol="0">
+            <a:spAutoFit/>
+          </a:bodyPr>
+          <a:p>
+            <a:pPr marL="285750" indent="-285750" fontAlgn="auto">
+              <a:buFont typeface="Arial" panose="02080604020202020204" pitchFamily="34" charset="0"/>
+              <a:buChar char="•"/>
+            </a:pPr>
+            <a:r>
+              <a:rPr lang="en-US" altLang="en-US" sz="1600">
+                <a:ln w="6350" cmpd="sng">
+                  <a:noFill/>
+                  <a:prstDash val="solid"/>
+                </a:ln>
+                <a:solidFill>
+                  <a:srgbClr val="47FF52"/>
+                </a:solidFill>
+                <a:latin typeface="OPTINational-Gothic" charset="0"/>
+                <a:cs typeface="OPTINational-Gothic" charset="0"/>
+              </a:rPr>
+              <a:t>Valuto la positività:</a:t>
+            </a:r>
+            <a:endParaRPr lang="en-US" altLang="en-US" sz="1600">
+              <a:ln w="6350" cmpd="sng">
+                <a:noFill/>
+                <a:prstDash val="solid"/>
+              </a:ln>
+              <a:solidFill>
+                <a:srgbClr val="47FF52"/>
+              </a:solidFill>
+              <a:latin typeface="OPTINational-Gothic" charset="0"/>
+              <a:cs typeface="OPTINational-Gothic" charset="0"/>
+            </a:endParaRPr>
+          </a:p>
+        </p:txBody>
+      </p:sp>
+      <p:pic>
+        <p:nvPicPr>
+          <p:cNvPr id="11" name="Picture 10" descr="positività"/>
+          <p:cNvPicPr>
+            <a:picLocks noChangeAspect="true"/>
+          </p:cNvPicPr>
+          <p:nvPr/>
+        </p:nvPicPr>
+        <p:blipFill>
+          <a:blip r:embed="rId5"/>
+          <a:stretch>
+            <a:fillRect/>
+          </a:stretch>
+        </p:blipFill>
+        <p:spPr>
+          <a:xfrm>
+            <a:off x="121285" y="3172460"/>
+            <a:ext cx="2590165" cy="608330"/>
+          </a:xfrm>
+          <a:prstGeom prst="rect">
+            <a:avLst/>
+          </a:prstGeom>
+        </p:spPr>
+      </p:pic>
+      <p:sp>
+        <p:nvSpPr>
+          <p:cNvPr id="12" name="Text Box 11"/>
+          <p:cNvSpPr txBox="true"/>
+          <p:nvPr/>
+        </p:nvSpPr>
+        <p:spPr>
+          <a:xfrm>
+            <a:off x="121285" y="3994785"/>
+            <a:ext cx="2520315" cy="583565"/>
+          </a:xfrm>
+          <a:prstGeom prst="rect">
+            <a:avLst/>
+          </a:prstGeom>
+          <a:noFill/>
+        </p:spPr>
+        <p:txBody>
+          <a:bodyPr wrap="square" rtlCol="0">
+            <a:spAutoFit/>
+          </a:bodyPr>
+          <a:p>
+            <a:pPr marL="285750" indent="-285750" fontAlgn="auto">
+              <a:buFont typeface="Arial" panose="02080604020202020204" pitchFamily="34" charset="0"/>
+              <a:buChar char="•"/>
+            </a:pPr>
+            <a:r>
+              <a:rPr lang="en-US" altLang="en-US" sz="1600">
+                <a:ln w="6350" cmpd="sng">
+                  <a:noFill/>
+                  <a:prstDash val="solid"/>
+                </a:ln>
+                <a:solidFill>
+                  <a:srgbClr val="47FF52"/>
+                </a:solidFill>
+                <a:latin typeface="OPTINational-Gothic" charset="0"/>
+                <a:cs typeface="OPTINational-Gothic" charset="0"/>
+              </a:rPr>
+              <a:t>Eventuali limiti: </a:t>
+            </a:r>
+            <a:endParaRPr lang="en-US" altLang="en-US" sz="1600">
+              <a:ln w="6350" cmpd="sng">
+                <a:noFill/>
+                <a:prstDash val="solid"/>
+              </a:ln>
+              <a:solidFill>
+                <a:srgbClr val="47FF52"/>
+              </a:solidFill>
+              <a:latin typeface="OPTINational-Gothic" charset="0"/>
+              <a:cs typeface="OPTINational-Gothic" charset="0"/>
+            </a:endParaRPr>
+          </a:p>
+          <a:p>
+            <a:pPr indent="0" fontAlgn="auto">
+              <a:buFont typeface="Arial" panose="02080604020202020204" pitchFamily="34" charset="0"/>
+              <a:buNone/>
+            </a:pPr>
+            <a:r>
+              <a:rPr lang="en-US" altLang="en-US" sz="1600">
+                <a:ln w="6350" cmpd="sng">
+                  <a:noFill/>
+                  <a:prstDash val="solid"/>
+                </a:ln>
+                <a:solidFill>
+                  <a:srgbClr val="47FF52"/>
+                </a:solidFill>
+                <a:latin typeface="OPTINational-Gothic" charset="0"/>
+                <a:cs typeface="OPTINational-Gothic" charset="0"/>
+              </a:rPr>
+              <a:t>Non ci sono limiti da calcolare</a:t>
+            </a:r>
+            <a:endParaRPr lang="en-US" altLang="en-US" sz="1600">
+              <a:ln w="6350" cmpd="sng">
+                <a:noFill/>
+                <a:prstDash val="solid"/>
+              </a:ln>
+              <a:solidFill>
+                <a:srgbClr val="47FF52"/>
+              </a:solidFill>
+              <a:latin typeface="OPTINational-Gothic" charset="0"/>
+              <a:cs typeface="OPTINational-Gothic" charset="0"/>
+            </a:endParaRPr>
+          </a:p>
+        </p:txBody>
+      </p:sp>
+      <p:sp>
+        <p:nvSpPr>
+          <p:cNvPr id="13" name="Text Box 12"/>
+          <p:cNvSpPr txBox="true"/>
+          <p:nvPr/>
+        </p:nvSpPr>
+        <p:spPr>
+          <a:xfrm>
+            <a:off x="121285" y="4792345"/>
+            <a:ext cx="2520315" cy="337185"/>
+          </a:xfrm>
+          <a:prstGeom prst="rect">
+            <a:avLst/>
+          </a:prstGeom>
+          <a:noFill/>
+        </p:spPr>
+        <p:txBody>
+          <a:bodyPr wrap="square" rtlCol="0">
+            <a:spAutoFit/>
+          </a:bodyPr>
+          <a:p>
+            <a:pPr marL="285750" indent="-285750" fontAlgn="auto">
+              <a:buFont typeface="Arial" panose="02080604020202020204" pitchFamily="34" charset="0"/>
+              <a:buChar char="•"/>
+            </a:pPr>
+            <a:r>
+              <a:rPr lang="en-US" altLang="en-US" sz="1600">
+                <a:ln w="6350" cmpd="sng">
+                  <a:noFill/>
+                  <a:prstDash val="solid"/>
+                </a:ln>
+                <a:solidFill>
+                  <a:srgbClr val="47FF52"/>
+                </a:solidFill>
+                <a:latin typeface="OPTINational-Gothic" charset="0"/>
+                <a:cs typeface="OPTINational-Gothic" charset="0"/>
+              </a:rPr>
+              <a:t>Calcolo la derivata prima:</a:t>
+            </a:r>
+            <a:endParaRPr lang="en-US" altLang="en-US" sz="1600">
+              <a:ln w="6350" cmpd="sng">
+                <a:noFill/>
+                <a:prstDash val="solid"/>
+              </a:ln>
+              <a:solidFill>
+                <a:srgbClr val="47FF52"/>
+              </a:solidFill>
+              <a:latin typeface="OPTINational-Gothic" charset="0"/>
+              <a:cs typeface="OPTINational-Gothic" charset="0"/>
+            </a:endParaRPr>
+          </a:p>
+        </p:txBody>
+      </p:sp>
+      <p:pic>
+        <p:nvPicPr>
+          <p:cNvPr id="14" name="Picture 13" descr="derivataprima"/>
+          <p:cNvPicPr>
+            <a:picLocks noChangeAspect="true"/>
+          </p:cNvPicPr>
+          <p:nvPr/>
+        </p:nvPicPr>
+        <p:blipFill>
+          <a:blip r:embed="rId6"/>
+          <a:stretch>
+            <a:fillRect/>
+          </a:stretch>
+        </p:blipFill>
+        <p:spPr>
+          <a:xfrm>
+            <a:off x="121285" y="5129530"/>
+            <a:ext cx="5194935" cy="584835"/>
+          </a:xfrm>
+          <a:prstGeom prst="rect">
+            <a:avLst/>
+          </a:prstGeom>
+        </p:spPr>
+      </p:pic>
+      <p:sp>
+        <p:nvSpPr>
+          <p:cNvPr id="15" name="Text Box 14"/>
+          <p:cNvSpPr txBox="true"/>
+          <p:nvPr/>
+        </p:nvSpPr>
+        <p:spPr>
+          <a:xfrm>
+            <a:off x="8658860" y="1839595"/>
+            <a:ext cx="2977515" cy="337185"/>
+          </a:xfrm>
+          <a:prstGeom prst="rect">
+            <a:avLst/>
+          </a:prstGeom>
+          <a:noFill/>
+        </p:spPr>
+        <p:txBody>
+          <a:bodyPr wrap="square" rtlCol="0">
+            <a:spAutoFit/>
+          </a:bodyPr>
+          <a:p>
+            <a:pPr marL="285750" indent="-285750" fontAlgn="auto">
+              <a:buFont typeface="Arial" panose="02080604020202020204" pitchFamily="34" charset="0"/>
+              <a:buChar char="•"/>
+            </a:pPr>
+            <a:r>
+              <a:rPr lang="en-US" altLang="en-US" sz="1600">
+                <a:ln w="6350" cmpd="sng">
+                  <a:noFill/>
+                  <a:prstDash val="solid"/>
+                </a:ln>
+                <a:solidFill>
+                  <a:srgbClr val="47FF52"/>
+                </a:solidFill>
+                <a:latin typeface="OPTINational-Gothic" charset="0"/>
+                <a:cs typeface="OPTINational-Gothic" charset="0"/>
+              </a:rPr>
+              <a:t>Calcolo la derivata seconda:</a:t>
+            </a:r>
+            <a:endParaRPr lang="en-US" altLang="en-US" sz="1600">
+              <a:ln w="6350" cmpd="sng">
+                <a:noFill/>
+                <a:prstDash val="solid"/>
+              </a:ln>
+              <a:solidFill>
+                <a:srgbClr val="47FF52"/>
+              </a:solidFill>
+              <a:latin typeface="OPTINational-Gothic" charset="0"/>
+              <a:cs typeface="OPTINational-Gothic" charset="0"/>
+            </a:endParaRPr>
+          </a:p>
+        </p:txBody>
+      </p:sp>
+      <p:pic>
+        <p:nvPicPr>
+          <p:cNvPr id="16" name="Picture 15" descr="derivataseconda1"/>
+          <p:cNvPicPr>
+            <a:picLocks noChangeAspect="true"/>
+          </p:cNvPicPr>
+          <p:nvPr/>
+        </p:nvPicPr>
+        <p:blipFill>
+          <a:blip r:embed="rId7"/>
+          <a:stretch>
+            <a:fillRect/>
+          </a:stretch>
+        </p:blipFill>
+        <p:spPr>
+          <a:xfrm>
+            <a:off x="7586345" y="2148205"/>
+            <a:ext cx="4547235" cy="1300480"/>
+          </a:xfrm>
+          <a:prstGeom prst="rect">
+            <a:avLst/>
+          </a:prstGeom>
+        </p:spPr>
+      </p:pic>
+      <p:pic>
+        <p:nvPicPr>
+          <p:cNvPr id="17" name="Picture 16" descr="derivataseconda2"/>
+          <p:cNvPicPr>
+            <a:picLocks noChangeAspect="true"/>
+          </p:cNvPicPr>
+          <p:nvPr/>
+        </p:nvPicPr>
+        <p:blipFill>
+          <a:blip r:embed="rId8"/>
+          <a:stretch>
+            <a:fillRect/>
+          </a:stretch>
+        </p:blipFill>
+        <p:spPr>
+          <a:xfrm>
+            <a:off x="8658860" y="4344035"/>
+            <a:ext cx="3445510" cy="889000"/>
+          </a:xfrm>
+          <a:prstGeom prst="rect">
+            <a:avLst/>
+          </a:prstGeom>
+        </p:spPr>
+      </p:pic>
+    </p:spTree>
+  </p:cSld>
+  <p:clrMapOvr>
+    <a:masterClrMapping/>
+  </p:clrMapOvr>
+</p:sld>
+</file>
+
+<file path=ppt/slides/slide7.xml><?xml version="1.0" encoding="utf-8"?>
+<p:sld xmlns:a="http://schemas.openxmlformats.org/drawingml/2006/main" xmlns:r="http://schemas.openxmlformats.org/officeDocument/2006/relationships" xmlns:p="http://schemas.openxmlformats.org/presentationml/2006/main">
+  <p:cSld>
+    <p:bg>
+      <p:bgPr>
+        <a:pattFill prst="pct10">
+          <a:fgClr>
+            <a:srgbClr val="FF400D"/>
+          </a:fgClr>
+          <a:bgClr>
+            <a:schemeClr val="tx1">
+              <a:lumMod val="65000"/>
+              <a:lumOff val="35000"/>
+            </a:schemeClr>
+          </a:bgClr>
+        </a:pattFill>
+        <a:effectLst/>
+      </p:bgPr>
+    </p:bg>
+    <p:spTree>
+      <p:nvGrpSpPr>
+        <p:cNvPr id="1" name=""/>
+        <p:cNvGrpSpPr/>
+        <p:nvPr/>
+      </p:nvGrpSpPr>
+      <p:grpSpPr/>
+      <p:pic>
+        <p:nvPicPr>
+          <p:cNvPr id="7" name="Picture 6" descr="pavimento"/>
+          <p:cNvPicPr>
+            <a:picLocks noChangeAspect="true"/>
+          </p:cNvPicPr>
+          <p:nvPr/>
+        </p:nvPicPr>
+        <p:blipFill>
+          <a:blip r:embed="rId1"/>
+          <a:stretch>
+            <a:fillRect/>
+          </a:stretch>
+        </p:blipFill>
+        <p:spPr>
+          <a:xfrm>
+            <a:off x="-246380" y="6127750"/>
+            <a:ext cx="12650470" cy="974090"/>
+          </a:xfrm>
+          <a:prstGeom prst="rect">
+            <a:avLst/>
+          </a:prstGeom>
+        </p:spPr>
+      </p:pic>
+      <p:sp>
+        <p:nvSpPr>
+          <p:cNvPr id="5" name="Text Box 4"/>
+          <p:cNvSpPr txBox="true"/>
+          <p:nvPr/>
+        </p:nvSpPr>
+        <p:spPr>
+          <a:xfrm>
+            <a:off x="2239645" y="144780"/>
+            <a:ext cx="7713345" cy="706755"/>
+          </a:xfrm>
+          <a:prstGeom prst="rect">
+            <a:avLst/>
+          </a:prstGeom>
+          <a:noFill/>
+        </p:spPr>
+        <p:txBody>
+          <a:bodyPr wrap="square" rtlCol="0">
+            <a:spAutoFit/>
+          </a:bodyPr>
+          <a:p>
+            <a:r>
+              <a:rPr lang="" altLang="en-US" sz="4000">
+                <a:ln w="28575" cmpd="sng">
+                  <a:solidFill>
+                    <a:srgbClr val="47FF52"/>
+                  </a:solidFill>
+                  <a:prstDash val="solid"/>
+                </a:ln>
+                <a:solidFill>
+                  <a:srgbClr val="644647"/>
+                </a:solidFill>
+                <a:latin typeface="OPTINational-Gothic" charset="0"/>
+                <a:cs typeface="OPTINational-Gothic" charset="0"/>
+              </a:rPr>
+              <a:t>GRAFICO DELLA FUNZIONE RECIPROCA</a:t>
+            </a:r>
+            <a:endParaRPr lang="" altLang="en-US" sz="4000">
+              <a:ln w="28575" cmpd="sng">
+                <a:solidFill>
+                  <a:srgbClr val="47FF52"/>
+                </a:solidFill>
+                <a:prstDash val="solid"/>
+              </a:ln>
+              <a:solidFill>
+                <a:srgbClr val="644647"/>
+              </a:solidFill>
+              <a:latin typeface="OPTINational-Gothic" charset="0"/>
+              <a:cs typeface="OPTINational-Gothic" charset="0"/>
+            </a:endParaRPr>
+          </a:p>
+        </p:txBody>
+      </p:sp>
+      <p:pic>
+        <p:nvPicPr>
+          <p:cNvPr id="2" name="Picture 1" descr="graficofunzione2"/>
+          <p:cNvPicPr>
+            <a:picLocks noChangeAspect="true"/>
+          </p:cNvPicPr>
+          <p:nvPr/>
+        </p:nvPicPr>
+        <p:blipFill>
+          <a:blip r:embed="rId2"/>
+          <a:stretch>
+            <a:fillRect/>
+          </a:stretch>
+        </p:blipFill>
+        <p:spPr>
+          <a:xfrm>
+            <a:off x="3435985" y="920750"/>
+            <a:ext cx="5285740" cy="5017135"/>
+          </a:xfrm>
+          <a:prstGeom prst="rect">
+            <a:avLst/>
+          </a:prstGeom>
+        </p:spPr>
+      </p:pic>
+      <p:sp>
+        <p:nvSpPr>
+          <p:cNvPr id="6" name="Text Box 5"/>
+          <p:cNvSpPr txBox="true"/>
+          <p:nvPr/>
+        </p:nvSpPr>
+        <p:spPr>
+          <a:xfrm>
+            <a:off x="121285" y="1839595"/>
+            <a:ext cx="2728595" cy="583565"/>
+          </a:xfrm>
+          <a:prstGeom prst="rect">
+            <a:avLst/>
+          </a:prstGeom>
+          <a:noFill/>
+        </p:spPr>
+        <p:txBody>
+          <a:bodyPr wrap="square" rtlCol="0">
+            <a:spAutoFit/>
+          </a:bodyPr>
+          <a:p>
+            <a:pPr marL="285750" indent="-285750" fontAlgn="auto">
+              <a:buFont typeface="Arial" panose="02080604020202020204" pitchFamily="34" charset="0"/>
+              <a:buChar char="•"/>
+            </a:pPr>
+            <a:r>
+              <a:rPr lang="" altLang="en-US" sz="1600">
+                <a:ln w="6350" cmpd="sng">
+                  <a:noFill/>
+                  <a:prstDash val="solid"/>
+                </a:ln>
+                <a:solidFill>
+                  <a:srgbClr val="47FF52"/>
+                </a:solidFill>
+                <a:latin typeface="OPTINational-Gothic" charset="0"/>
+                <a:cs typeface="OPTINational-Gothic" charset="0"/>
+              </a:rPr>
+              <a:t>Una funzione è integrabile in senso improprio se: </a:t>
+            </a:r>
+            <a:endParaRPr lang="" altLang="en-US" sz="1600">
+              <a:ln w="6350" cmpd="sng">
+                <a:noFill/>
+                <a:prstDash val="solid"/>
+              </a:ln>
+              <a:solidFill>
+                <a:srgbClr val="47FF52"/>
+              </a:solidFill>
+              <a:latin typeface="OPTINational-Gothic" charset="0"/>
+              <a:cs typeface="OPTINational-Gothic" charset="0"/>
+            </a:endParaRPr>
+          </a:p>
+        </p:txBody>
+      </p:sp>
+      <p:pic>
+        <p:nvPicPr>
+          <p:cNvPr id="3" name="Picture 2" descr="improprio"/>
+          <p:cNvPicPr>
+            <a:picLocks noChangeAspect="true"/>
+          </p:cNvPicPr>
+          <p:nvPr/>
+        </p:nvPicPr>
+        <p:blipFill>
+          <a:blip r:embed="rId3"/>
+          <a:stretch>
+            <a:fillRect/>
+          </a:stretch>
+        </p:blipFill>
+        <p:spPr>
+          <a:xfrm>
+            <a:off x="121285" y="2584450"/>
+            <a:ext cx="3270250" cy="657225"/>
+          </a:xfrm>
+          <a:prstGeom prst="rect">
+            <a:avLst/>
+          </a:prstGeom>
+        </p:spPr>
+      </p:pic>
+      <p:sp>
+        <p:nvSpPr>
+          <p:cNvPr id="4" name="Text Box 3"/>
+          <p:cNvSpPr txBox="true"/>
+          <p:nvPr/>
+        </p:nvSpPr>
+        <p:spPr>
+          <a:xfrm>
+            <a:off x="8905240" y="1839595"/>
+            <a:ext cx="2728595" cy="337185"/>
+          </a:xfrm>
+          <a:prstGeom prst="rect">
+            <a:avLst/>
+          </a:prstGeom>
+          <a:noFill/>
+        </p:spPr>
+        <p:txBody>
+          <a:bodyPr wrap="square" rtlCol="0">
+            <a:spAutoFit/>
+          </a:bodyPr>
+          <a:p>
+            <a:pPr marL="285750" indent="-285750" fontAlgn="auto">
+              <a:buFont typeface="Arial" panose="02080604020202020204" pitchFamily="34" charset="0"/>
+              <a:buChar char="•"/>
+            </a:pPr>
+            <a:r>
+              <a:rPr lang="" altLang="en-US" sz="1600">
+                <a:ln w="6350" cmpd="sng">
+                  <a:noFill/>
+                  <a:prstDash val="solid"/>
+                </a:ln>
+                <a:solidFill>
+                  <a:srgbClr val="47FF52"/>
+                </a:solidFill>
+                <a:latin typeface="OPTINational-Gothic" charset="0"/>
+                <a:cs typeface="OPTINational-Gothic" charset="0"/>
+              </a:rPr>
+              <a:t>Nel nostro caso: </a:t>
+            </a:r>
+            <a:endParaRPr lang="" altLang="en-US" sz="1600">
+              <a:ln w="6350" cmpd="sng">
+                <a:noFill/>
+                <a:prstDash val="solid"/>
+              </a:ln>
+              <a:solidFill>
+                <a:srgbClr val="47FF52"/>
+              </a:solidFill>
+              <a:latin typeface="OPTINational-Gothic" charset="0"/>
+              <a:cs typeface="OPTINational-Gothic" charset="0"/>
+            </a:endParaRPr>
+          </a:p>
+        </p:txBody>
+      </p:sp>
+      <p:pic>
+        <p:nvPicPr>
+          <p:cNvPr id="8" name="Picture 7" descr="integraleimproprioreciproca"/>
+          <p:cNvPicPr>
+            <a:picLocks noChangeAspect="true"/>
+          </p:cNvPicPr>
+          <p:nvPr/>
+        </p:nvPicPr>
+        <p:blipFill>
+          <a:blip r:embed="rId4"/>
+          <a:stretch>
+            <a:fillRect/>
+          </a:stretch>
+        </p:blipFill>
+        <p:spPr>
+          <a:xfrm>
+            <a:off x="8454390" y="2923540"/>
+            <a:ext cx="3649345" cy="3023870"/>
+          </a:xfrm>
+          <a:prstGeom prst="rect">
+            <a:avLst/>
+          </a:prstGeom>
+        </p:spPr>
+      </p:pic>
+      <p:sp>
+        <p:nvSpPr>
+          <p:cNvPr id="11" name="Oval 10"/>
+          <p:cNvSpPr/>
+          <p:nvPr/>
+        </p:nvSpPr>
+        <p:spPr>
+          <a:xfrm>
+            <a:off x="9615805" y="5424805"/>
+            <a:ext cx="1073785" cy="615950"/>
+          </a:xfrm>
+          <a:prstGeom prst="ellipse">
+            <a:avLst/>
+          </a:prstGeom>
+          <a:noFill/>
+          <a:ln>
+            <a:solidFill>
+              <a:srgbClr val="47FF52"/>
+            </a:solidFill>
+          </a:ln>
+          <a:extLst>
+            <a:ext uri="{909E8E84-426E-40DD-AFC4-6F175D3DCCD1}">
+              <a14:hiddenFill xmlns:a14="http://schemas.microsoft.com/office/drawing/2010/main">
+                <a:solidFill>
+                  <a:schemeClr val="accent2"/>
+                </a:solidFill>
+              </a14:hiddenFill>
+            </a:ext>
+          </a:extLst>
+        </p:spPr>
+        <p:style>
+          <a:lnRef idx="2">
+            <a:schemeClr val="accent1">
+              <a:shade val="50000"/>
+            </a:schemeClr>
+          </a:lnRef>
+          <a:fillRef idx="1">
+            <a:schemeClr val="accent1"/>
+          </a:fillRef>
+          <a:effectRef idx="0">
+            <a:schemeClr val="accent1"/>
+          </a:effectRef>
+          <a:fontRef idx="minor">
+            <a:schemeClr val="lt1"/>
+          </a:fontRef>
+        </p:style>
+        <p:txBody>
+          <a:bodyPr rtlCol="0" anchor="ctr"/>
+          <a:p>
+            <a:pPr algn="ctr"/>
+            <a:endParaRPr lang="en-US"/>
+          </a:p>
+        </p:txBody>
+      </p:sp>
+    </p:spTree>
+  </p:cSld>
+  <p:clrMapOvr>
+    <a:masterClrMapping/>
+  </p:clrMapOvr>
+</p:sld>
+</file>
+
+<file path=ppt/slides/slide8.xml><?xml version="1.0" encoding="utf-8"?>
+<p:sld xmlns:a="http://schemas.openxmlformats.org/drawingml/2006/main" xmlns:r="http://schemas.openxmlformats.org/officeDocument/2006/relationships" xmlns:p="http://schemas.openxmlformats.org/presentationml/2006/main">
+  <p:cSld>
+    <p:bg>
+      <p:bgPr>
+        <a:pattFill prst="pct10">
+          <a:fgClr>
+            <a:srgbClr val="FF400D"/>
+          </a:fgClr>
+          <a:bgClr>
+            <a:schemeClr val="tx1">
+              <a:lumMod val="65000"/>
+              <a:lumOff val="35000"/>
+            </a:schemeClr>
+          </a:bgClr>
+        </a:pattFill>
+        <a:effectLst/>
+      </p:bgPr>
+    </p:bg>
+    <p:spTree>
+      <p:nvGrpSpPr>
+        <p:cNvPr id="1" name=""/>
+        <p:cNvGrpSpPr/>
+        <p:nvPr/>
+      </p:nvGrpSpPr>
+      <p:grpSpPr/>
+      <p:pic>
+        <p:nvPicPr>
+          <p:cNvPr id="7" name="Picture 6" descr="pavimento"/>
+          <p:cNvPicPr>
+            <a:picLocks noChangeAspect="true"/>
+          </p:cNvPicPr>
+          <p:nvPr/>
+        </p:nvPicPr>
+        <p:blipFill>
+          <a:blip r:embed="rId1"/>
+          <a:stretch>
+            <a:fillRect/>
+          </a:stretch>
+        </p:blipFill>
+        <p:spPr>
+          <a:xfrm>
+            <a:off x="-246380" y="6127750"/>
+            <a:ext cx="12650470" cy="974090"/>
+          </a:xfrm>
+          <a:prstGeom prst="rect">
+            <a:avLst/>
+          </a:prstGeom>
+        </p:spPr>
+      </p:pic>
+      <p:sp>
+        <p:nvSpPr>
+          <p:cNvPr id="5" name="Text Box 4"/>
+          <p:cNvSpPr txBox="true"/>
+          <p:nvPr/>
+        </p:nvSpPr>
+        <p:spPr>
+          <a:xfrm>
+            <a:off x="3206115" y="140335"/>
+            <a:ext cx="5746115" cy="706755"/>
+          </a:xfrm>
+          <a:prstGeom prst="rect">
+            <a:avLst/>
+          </a:prstGeom>
+          <a:noFill/>
+        </p:spPr>
+        <p:txBody>
+          <a:bodyPr wrap="square" rtlCol="0">
+            <a:spAutoFit/>
+          </a:bodyPr>
+          <a:p>
+            <a:r>
+              <a:rPr lang="en-US" altLang="en-US" sz="4000">
+                <a:ln w="28575" cmpd="sng">
+                  <a:solidFill>
+                    <a:srgbClr val="47FF52"/>
+                  </a:solidFill>
+                  <a:prstDash val="solid"/>
+                </a:ln>
+                <a:solidFill>
+                  <a:srgbClr val="644647"/>
+                </a:solidFill>
+                <a:latin typeface="OPTINational-Gothic" charset="0"/>
+                <a:cs typeface="OPTINational-Gothic" charset="0"/>
+              </a:rPr>
+              <a:t>DA CARTESIO A PHILIP GLASS</a:t>
+            </a:r>
+            <a:endParaRPr lang="en-US" altLang="en-US" sz="4000">
+              <a:ln w="28575" cmpd="sng">
+                <a:solidFill>
+                  <a:srgbClr val="47FF52"/>
+                </a:solidFill>
+                <a:prstDash val="solid"/>
+              </a:ln>
+              <a:solidFill>
+                <a:srgbClr val="644647"/>
+              </a:solidFill>
+              <a:latin typeface="OPTINational-Gothic" charset="0"/>
+              <a:cs typeface="OPTINational-Gothic" charset="0"/>
+            </a:endParaRPr>
+          </a:p>
+        </p:txBody>
+      </p:sp>
+    </p:spTree>
+  </p:cSld>
+  <p:clrMapOvr>
+    <a:masterClrMapping/>
+  </p:clrMapOvr>
+</p:sld>
+</file>
+
+<file path=ppt/slides/slide9.xml><?xml version="1.0" encoding="utf-8"?>
+<p:sld xmlns:a="http://schemas.openxmlformats.org/drawingml/2006/main" xmlns:r="http://schemas.openxmlformats.org/officeDocument/2006/relationships" xmlns:p="http://schemas.openxmlformats.org/presentationml/2006/main">
+  <p:cSld>
+    <p:bg>
+      <p:bgPr>
+        <a:pattFill prst="pct10">
+          <a:fgClr>
+            <a:srgbClr val="FF400D"/>
+          </a:fgClr>
+          <a:bgClr>
+            <a:schemeClr val="tx1">
+              <a:lumMod val="65000"/>
+              <a:lumOff val="35000"/>
+            </a:schemeClr>
+          </a:bgClr>
+        </a:pattFill>
+        <a:effectLst/>
+      </p:bgPr>
+    </p:bg>
+    <p:spTree>
+      <p:nvGrpSpPr>
+        <p:cNvPr id="1" name=""/>
+        <p:cNvGrpSpPr/>
+        <p:nvPr/>
+      </p:nvGrpSpPr>
+      <p:grpSpPr/>
+      <p:pic>
+        <p:nvPicPr>
+          <p:cNvPr id="7" name="Picture 6" descr="pavimento"/>
+          <p:cNvPicPr>
+            <a:picLocks noChangeAspect="true"/>
+          </p:cNvPicPr>
+          <p:nvPr/>
+        </p:nvPicPr>
+        <p:blipFill>
+          <a:blip r:embed="rId1"/>
+          <a:stretch>
+            <a:fillRect/>
+          </a:stretch>
+        </p:blipFill>
+        <p:spPr>
+          <a:xfrm>
+            <a:off x="-246380" y="6127750"/>
+            <a:ext cx="12650470" cy="974090"/>
+          </a:xfrm>
+          <a:prstGeom prst="rect">
+            <a:avLst/>
+          </a:prstGeom>
+        </p:spPr>
+      </p:pic>
+      <p:sp>
+        <p:nvSpPr>
+          <p:cNvPr id="5" name="Text Box 4"/>
+          <p:cNvSpPr txBox="true"/>
+          <p:nvPr/>
+        </p:nvSpPr>
+        <p:spPr>
+          <a:xfrm>
+            <a:off x="3206115" y="140335"/>
+            <a:ext cx="5746115" cy="706755"/>
+          </a:xfrm>
+          <a:prstGeom prst="rect">
+            <a:avLst/>
+          </a:prstGeom>
+          <a:noFill/>
+        </p:spPr>
+        <p:txBody>
+          <a:bodyPr wrap="square" rtlCol="0">
+            <a:spAutoFit/>
+          </a:bodyPr>
+          <a:p>
+            <a:r>
+              <a:rPr lang="en-US" altLang="en-US" sz="4000">
+                <a:ln w="28575" cmpd="sng">
+                  <a:solidFill>
+                    <a:srgbClr val="47FF52"/>
+                  </a:solidFill>
+                  <a:prstDash val="solid"/>
+                </a:ln>
+                <a:solidFill>
+                  <a:srgbClr val="644647"/>
+                </a:solidFill>
+                <a:latin typeface="OPTINational-Gothic" charset="0"/>
+                <a:cs typeface="OPTINational-Gothic" charset="0"/>
+              </a:rPr>
+              <a:t>DA CARTESIO A PHILIP GLASS</a:t>
+            </a:r>
+            <a:endParaRPr lang="en-US" altLang="en-US" sz="4000">
               <a:ln w="28575" cmpd="sng">
                 <a:solidFill>
                   <a:srgbClr val="47FF52"/>

--- a/presentazione-elaborato.pptx
+++ b/presentazione-elaborato.pptx
@@ -134,6 +134,813 @@
 </file>
 
 <file path=ppt/diagrams/colors1.xml><?xml version="1.0" encoding="utf-8"?>
+<dgm:colorsDef xmlns:dgm="http://schemas.openxmlformats.org/drawingml/2006/diagram" xmlns:a="http://schemas.openxmlformats.org/drawingml/2006/main" uniqueId="urn:microsoft.com/office/officeart/2005/8/colors/accent6_1">
+  <dgm:title val=""/>
+  <dgm:desc val=""/>
+  <dgm:catLst>
+    <dgm:cat type="accent6" pri="11100"/>
+  </dgm:catLst>
+  <dgm:styleLbl name="alignAcc1">
+    <dgm:fillClrLst meth="repeat">
+      <a:schemeClr val="accent6">
+        <a:alpha val="90000"/>
+        <a:tint val="40000"/>
+      </a:schemeClr>
+    </dgm:fillClrLst>
+    <dgm:linClrLst meth="repeat">
+      <a:schemeClr val="accent6"/>
+    </dgm:linClrLst>
+    <dgm:effectClrLst/>
+    <dgm:txLinClrLst/>
+    <dgm:txFillClrLst meth="repeat">
+      <a:schemeClr val="dk1"/>
+    </dgm:txFillClrLst>
+    <dgm:txEffectClrLst/>
+  </dgm:styleLbl>
+  <dgm:styleLbl name="alignAccFollowNode1">
+    <dgm:fillClrLst meth="repeat">
+      <a:schemeClr val="lt1">
+        <a:alpha val="90000"/>
+        <a:tint val="40000"/>
+      </a:schemeClr>
+    </dgm:fillClrLst>
+    <dgm:linClrLst meth="repeat">
+      <a:schemeClr val="accent6">
+        <a:alpha val="90000"/>
+      </a:schemeClr>
+    </dgm:linClrLst>
+    <dgm:effectClrLst/>
+    <dgm:txLinClrLst/>
+    <dgm:txFillClrLst meth="repeat">
+      <a:schemeClr val="dk1"/>
+    </dgm:txFillClrLst>
+    <dgm:txEffectClrLst/>
+  </dgm:styleLbl>
+  <dgm:styleLbl name="alignImgPlace1">
+    <dgm:fillClrLst meth="repeat">
+      <a:schemeClr val="accent6">
+        <a:tint val="40000"/>
+      </a:schemeClr>
+    </dgm:fillClrLst>
+    <dgm:linClrLst meth="repeat">
+      <a:schemeClr val="accent6">
+        <a:shade val="80000"/>
+      </a:schemeClr>
+    </dgm:linClrLst>
+    <dgm:effectClrLst/>
+    <dgm:txLinClrLst/>
+    <dgm:txFillClrLst meth="repeat">
+      <a:schemeClr val="lt1"/>
+    </dgm:txFillClrLst>
+    <dgm:txEffectClrLst/>
+  </dgm:styleLbl>
+  <dgm:styleLbl name="alignNode1">
+    <dgm:fillClrLst meth="repeat">
+      <a:schemeClr val="lt1"/>
+    </dgm:fillClrLst>
+    <dgm:linClrLst meth="repeat">
+      <a:schemeClr val="accent6">
+        <a:shade val="80000"/>
+      </a:schemeClr>
+    </dgm:linClrLst>
+    <dgm:effectClrLst/>
+    <dgm:txLinClrLst/>
+    <dgm:txFillClrLst meth="repeat">
+      <a:schemeClr val="dk1"/>
+    </dgm:txFillClrLst>
+    <dgm:txEffectClrLst/>
+  </dgm:styleLbl>
+  <dgm:styleLbl name="asst0">
+    <dgm:fillClrLst meth="repeat">
+      <a:schemeClr val="lt1"/>
+    </dgm:fillClrLst>
+    <dgm:linClrLst meth="repeat">
+      <a:schemeClr val="accent6">
+        <a:shade val="80000"/>
+      </a:schemeClr>
+    </dgm:linClrLst>
+    <dgm:effectClrLst/>
+    <dgm:txLinClrLst/>
+    <dgm:txFillClrLst meth="repeat">
+      <a:schemeClr val="dk1"/>
+    </dgm:txFillClrLst>
+    <dgm:txEffectClrLst/>
+  </dgm:styleLbl>
+  <dgm:styleLbl name="asst1">
+    <dgm:fillClrLst meth="repeat">
+      <a:schemeClr val="lt1"/>
+    </dgm:fillClrLst>
+    <dgm:linClrLst meth="repeat">
+      <a:schemeClr val="accent6">
+        <a:shade val="80000"/>
+      </a:schemeClr>
+    </dgm:linClrLst>
+    <dgm:effectClrLst/>
+    <dgm:txLinClrLst/>
+    <dgm:txFillClrLst meth="repeat">
+      <a:schemeClr val="dk1"/>
+    </dgm:txFillClrLst>
+    <dgm:txEffectClrLst/>
+  </dgm:styleLbl>
+  <dgm:styleLbl name="asst2">
+    <dgm:fillClrLst meth="repeat">
+      <a:schemeClr val="lt1"/>
+    </dgm:fillClrLst>
+    <dgm:linClrLst meth="repeat">
+      <a:schemeClr val="accent6">
+        <a:shade val="80000"/>
+      </a:schemeClr>
+    </dgm:linClrLst>
+    <dgm:effectClrLst/>
+    <dgm:txLinClrLst/>
+    <dgm:txFillClrLst meth="repeat">
+      <a:schemeClr val="dk1"/>
+    </dgm:txFillClrLst>
+    <dgm:txEffectClrLst/>
+  </dgm:styleLbl>
+  <dgm:styleLbl name="asst3">
+    <dgm:fillClrLst meth="repeat">
+      <a:schemeClr val="lt1"/>
+    </dgm:fillClrLst>
+    <dgm:linClrLst meth="repeat">
+      <a:schemeClr val="accent6">
+        <a:shade val="80000"/>
+      </a:schemeClr>
+    </dgm:linClrLst>
+    <dgm:effectClrLst/>
+    <dgm:txLinClrLst/>
+    <dgm:txFillClrLst meth="repeat">
+      <a:schemeClr val="dk1"/>
+    </dgm:txFillClrLst>
+    <dgm:txEffectClrLst/>
+  </dgm:styleLbl>
+  <dgm:styleLbl name="asst4">
+    <dgm:fillClrLst meth="repeat">
+      <a:schemeClr val="lt1"/>
+    </dgm:fillClrLst>
+    <dgm:linClrLst meth="repeat">
+      <a:schemeClr val="accent6">
+        <a:shade val="80000"/>
+      </a:schemeClr>
+    </dgm:linClrLst>
+    <dgm:effectClrLst/>
+    <dgm:txLinClrLst/>
+    <dgm:txFillClrLst meth="repeat">
+      <a:schemeClr val="dk1"/>
+    </dgm:txFillClrLst>
+    <dgm:txEffectClrLst/>
+  </dgm:styleLbl>
+  <dgm:styleLbl name="bgAcc1">
+    <dgm:fillClrLst meth="repeat">
+      <a:schemeClr val="accent6">
+        <a:alpha val="90000"/>
+        <a:tint val="40000"/>
+      </a:schemeClr>
+    </dgm:fillClrLst>
+    <dgm:linClrLst meth="repeat">
+      <a:schemeClr val="accent6"/>
+    </dgm:linClrLst>
+    <dgm:effectClrLst/>
+    <dgm:txLinClrLst/>
+    <dgm:txFillClrLst meth="repeat">
+      <a:schemeClr val="dk1"/>
+    </dgm:txFillClrLst>
+    <dgm:txEffectClrLst/>
+  </dgm:styleLbl>
+  <dgm:styleLbl name="bgAccFollowNode1">
+    <dgm:fillClrLst meth="repeat">
+      <a:schemeClr val="lt1">
+        <a:alpha val="90000"/>
+        <a:tint val="40000"/>
+      </a:schemeClr>
+    </dgm:fillClrLst>
+    <dgm:linClrLst meth="repeat">
+      <a:schemeClr val="accent6">
+        <a:alpha val="90000"/>
+      </a:schemeClr>
+    </dgm:linClrLst>
+    <dgm:effectClrLst/>
+    <dgm:txLinClrLst/>
+    <dgm:txFillClrLst meth="repeat">
+      <a:schemeClr val="dk1"/>
+    </dgm:txFillClrLst>
+    <dgm:txEffectClrLst/>
+  </dgm:styleLbl>
+  <dgm:styleLbl name="bgImgPlace1">
+    <dgm:fillClrLst meth="repeat">
+      <a:schemeClr val="accent6">
+        <a:tint val="40000"/>
+      </a:schemeClr>
+    </dgm:fillClrLst>
+    <dgm:linClrLst meth="repeat">
+      <a:schemeClr val="accent6">
+        <a:shade val="80000"/>
+      </a:schemeClr>
+    </dgm:linClrLst>
+    <dgm:effectClrLst/>
+    <dgm:txLinClrLst/>
+    <dgm:txFillClrLst meth="repeat">
+      <a:schemeClr val="lt1"/>
+    </dgm:txFillClrLst>
+    <dgm:txEffectClrLst/>
+  </dgm:styleLbl>
+  <dgm:styleLbl name="bgShp">
+    <dgm:fillClrLst meth="repeat">
+      <a:schemeClr val="accent6">
+        <a:tint val="40000"/>
+      </a:schemeClr>
+    </dgm:fillClrLst>
+    <dgm:linClrLst meth="repeat">
+      <a:schemeClr val="accent6"/>
+    </dgm:linClrLst>
+    <dgm:effectClrLst/>
+    <dgm:txLinClrLst/>
+    <dgm:txFillClrLst meth="repeat">
+      <a:schemeClr val="dk1"/>
+    </dgm:txFillClrLst>
+    <dgm:txEffectClrLst/>
+  </dgm:styleLbl>
+  <dgm:styleLbl name="bgSibTrans2D1">
+    <dgm:fillClrLst meth="repeat">
+      <a:schemeClr val="accent6">
+        <a:tint val="60000"/>
+      </a:schemeClr>
+    </dgm:fillClrLst>
+    <dgm:linClrLst meth="repeat">
+      <a:schemeClr val="accent6">
+        <a:tint val="60000"/>
+      </a:schemeClr>
+    </dgm:linClrLst>
+    <dgm:effectClrLst/>
+    <dgm:txLinClrLst/>
+    <dgm:txFillClrLst meth="repeat">
+      <a:schemeClr val="dk1"/>
+    </dgm:txFillClrLst>
+    <dgm:txEffectClrLst/>
+  </dgm:styleLbl>
+  <dgm:styleLbl name="callout">
+    <dgm:fillClrLst meth="repeat">
+      <a:schemeClr val="accent6"/>
+    </dgm:fillClrLst>
+    <dgm:linClrLst meth="repeat">
+      <a:schemeClr val="accent6"/>
+    </dgm:linClrLst>
+    <dgm:effectClrLst/>
+    <dgm:txLinClrLst/>
+    <dgm:txFillClrLst meth="repeat">
+      <a:schemeClr val="tx1"/>
+    </dgm:txFillClrLst>
+    <dgm:txEffectClrLst/>
+  </dgm:styleLbl>
+  <dgm:styleLbl name="conFgAcc1">
+    <dgm:fillClrLst meth="repeat">
+      <a:schemeClr val="accent6">
+        <a:alpha val="90000"/>
+        <a:tint val="40000"/>
+      </a:schemeClr>
+    </dgm:fillClrLst>
+    <dgm:linClrLst meth="repeat">
+      <a:schemeClr val="accent6"/>
+    </dgm:linClrLst>
+    <dgm:effectClrLst/>
+    <dgm:txLinClrLst/>
+    <dgm:txFillClrLst meth="repeat">
+      <a:schemeClr val="dk1"/>
+    </dgm:txFillClrLst>
+    <dgm:txEffectClrLst/>
+  </dgm:styleLbl>
+  <dgm:styleLbl name="dkBgShp">
+    <dgm:fillClrLst meth="repeat">
+      <a:schemeClr val="accent6">
+        <a:shade val="80000"/>
+      </a:schemeClr>
+    </dgm:fillClrLst>
+    <dgm:linClrLst meth="repeat">
+      <a:schemeClr val="accent6"/>
+    </dgm:linClrLst>
+    <dgm:effectClrLst/>
+    <dgm:txLinClrLst/>
+    <dgm:txFillClrLst meth="repeat">
+      <a:schemeClr val="lt1"/>
+    </dgm:txFillClrLst>
+    <dgm:txEffectClrLst/>
+  </dgm:styleLbl>
+  <dgm:styleLbl name="fgAcc0">
+    <dgm:fillClrLst meth="repeat">
+      <a:schemeClr val="accent6">
+        <a:alpha val="90000"/>
+        <a:tint val="40000"/>
+      </a:schemeClr>
+    </dgm:fillClrLst>
+    <dgm:linClrLst meth="repeat">
+      <a:schemeClr val="accent6"/>
+    </dgm:linClrLst>
+    <dgm:effectClrLst/>
+    <dgm:txLinClrLst/>
+    <dgm:txFillClrLst meth="repeat">
+      <a:schemeClr val="dk1"/>
+    </dgm:txFillClrLst>
+    <dgm:txEffectClrLst/>
+  </dgm:styleLbl>
+  <dgm:styleLbl name="fgAcc1">
+    <dgm:fillClrLst meth="repeat">
+      <a:schemeClr val="accent6">
+        <a:alpha val="90000"/>
+        <a:tint val="40000"/>
+      </a:schemeClr>
+    </dgm:fillClrLst>
+    <dgm:linClrLst meth="repeat">
+      <a:schemeClr val="accent6"/>
+    </dgm:linClrLst>
+    <dgm:effectClrLst/>
+    <dgm:txLinClrLst/>
+    <dgm:txFillClrLst meth="repeat">
+      <a:schemeClr val="dk1"/>
+    </dgm:txFillClrLst>
+    <dgm:txEffectClrLst/>
+  </dgm:styleLbl>
+  <dgm:styleLbl name="fgAcc2">
+    <dgm:fillClrLst meth="repeat">
+      <a:schemeClr val="accent6">
+        <a:alpha val="90000"/>
+        <a:tint val="40000"/>
+      </a:schemeClr>
+    </dgm:fillClrLst>
+    <dgm:linClrLst meth="repeat">
+      <a:schemeClr val="accent6"/>
+    </dgm:linClrLst>
+    <dgm:effectClrLst/>
+    <dgm:txLinClrLst/>
+    <dgm:txFillClrLst meth="repeat">
+      <a:schemeClr val="dk1"/>
+    </dgm:txFillClrLst>
+    <dgm:txEffectClrLst/>
+  </dgm:styleLbl>
+  <dgm:styleLbl name="fgAcc3">
+    <dgm:fillClrLst meth="repeat">
+      <a:schemeClr val="accent6">
+        <a:alpha val="90000"/>
+        <a:tint val="40000"/>
+      </a:schemeClr>
+    </dgm:fillClrLst>
+    <dgm:linClrLst meth="repeat">
+      <a:schemeClr val="accent6"/>
+    </dgm:linClrLst>
+    <dgm:effectClrLst/>
+    <dgm:txLinClrLst/>
+    <dgm:txFillClrLst meth="repeat">
+      <a:schemeClr val="dk1"/>
+    </dgm:txFillClrLst>
+    <dgm:txEffectClrLst/>
+  </dgm:styleLbl>
+  <dgm:styleLbl name="fgAcc4">
+    <dgm:fillClrLst meth="repeat">
+      <a:schemeClr val="accent6">
+        <a:alpha val="90000"/>
+        <a:tint val="40000"/>
+      </a:schemeClr>
+    </dgm:fillClrLst>
+    <dgm:linClrLst meth="repeat">
+      <a:schemeClr val="accent6"/>
+    </dgm:linClrLst>
+    <dgm:effectClrLst/>
+    <dgm:txLinClrLst/>
+    <dgm:txFillClrLst meth="repeat">
+      <a:schemeClr val="dk1"/>
+    </dgm:txFillClrLst>
+    <dgm:txEffectClrLst/>
+  </dgm:styleLbl>
+  <dgm:styleLbl name="fgAccFollowNode1">
+    <dgm:fillClrLst meth="repeat">
+      <a:schemeClr val="lt1">
+        <a:alpha val="90000"/>
+        <a:tint val="40000"/>
+      </a:schemeClr>
+    </dgm:fillClrLst>
+    <dgm:linClrLst meth="repeat">
+      <a:schemeClr val="accent6">
+        <a:alpha val="90000"/>
+      </a:schemeClr>
+    </dgm:linClrLst>
+    <dgm:effectClrLst/>
+    <dgm:txLinClrLst/>
+    <dgm:txFillClrLst meth="repeat">
+      <a:schemeClr val="dk1"/>
+    </dgm:txFillClrLst>
+    <dgm:txEffectClrLst/>
+  </dgm:styleLbl>
+  <dgm:styleLbl name="fgImgPlace1">
+    <dgm:fillClrLst meth="repeat">
+      <a:schemeClr val="accent6">
+        <a:tint val="40000"/>
+      </a:schemeClr>
+    </dgm:fillClrLst>
+    <dgm:linClrLst meth="repeat">
+      <a:schemeClr val="accent6">
+        <a:shade val="80000"/>
+      </a:schemeClr>
+    </dgm:linClrLst>
+    <dgm:effectClrLst/>
+    <dgm:txLinClrLst/>
+    <dgm:txFillClrLst meth="repeat">
+      <a:schemeClr val="lt1"/>
+    </dgm:txFillClrLst>
+    <dgm:txEffectClrLst/>
+  </dgm:styleLbl>
+  <dgm:styleLbl name="fgShp">
+    <dgm:fillClrLst meth="repeat">
+      <a:schemeClr val="accent6">
+        <a:tint val="60000"/>
+      </a:schemeClr>
+    </dgm:fillClrLst>
+    <dgm:linClrLst meth="repeat">
+      <a:schemeClr val="lt1"/>
+    </dgm:linClrLst>
+    <dgm:effectClrLst/>
+    <dgm:txLinClrLst/>
+    <dgm:txFillClrLst meth="repeat">
+      <a:schemeClr val="dk1"/>
+    </dgm:txFillClrLst>
+    <dgm:txEffectClrLst/>
+  </dgm:styleLbl>
+  <dgm:styleLbl name="fgSibTrans2D1">
+    <dgm:fillClrLst meth="repeat">
+      <a:schemeClr val="accent6">
+        <a:tint val="60000"/>
+      </a:schemeClr>
+    </dgm:fillClrLst>
+    <dgm:linClrLst meth="repeat">
+      <a:schemeClr val="accent6">
+        <a:tint val="60000"/>
+      </a:schemeClr>
+    </dgm:linClrLst>
+    <dgm:effectClrLst/>
+    <dgm:txLinClrLst/>
+    <dgm:txFillClrLst meth="repeat">
+      <a:schemeClr val="dk1"/>
+    </dgm:txFillClrLst>
+    <dgm:txEffectClrLst/>
+  </dgm:styleLbl>
+  <dgm:styleLbl name="lnNode1">
+    <dgm:fillClrLst meth="repeat">
+      <a:schemeClr val="lt1"/>
+    </dgm:fillClrLst>
+    <dgm:linClrLst meth="repeat">
+      <a:schemeClr val="accent6">
+        <a:shade val="80000"/>
+      </a:schemeClr>
+    </dgm:linClrLst>
+    <dgm:effectClrLst/>
+    <dgm:txLinClrLst/>
+    <dgm:txFillClrLst meth="repeat">
+      <a:schemeClr val="dk1"/>
+    </dgm:txFillClrLst>
+    <dgm:txEffectClrLst/>
+  </dgm:styleLbl>
+  <dgm:styleLbl name="node0">
+    <dgm:fillClrLst meth="repeat">
+      <a:schemeClr val="lt1"/>
+    </dgm:fillClrLst>
+    <dgm:linClrLst meth="repeat">
+      <a:schemeClr val="accent6">
+        <a:shade val="80000"/>
+      </a:schemeClr>
+    </dgm:linClrLst>
+    <dgm:effectClrLst/>
+    <dgm:txLinClrLst/>
+    <dgm:txFillClrLst meth="repeat">
+      <a:schemeClr val="dk1"/>
+    </dgm:txFillClrLst>
+    <dgm:txEffectClrLst/>
+  </dgm:styleLbl>
+  <dgm:styleLbl name="node1">
+    <dgm:fillClrLst meth="repeat">
+      <a:schemeClr val="lt1"/>
+    </dgm:fillClrLst>
+    <dgm:linClrLst meth="repeat">
+      <a:schemeClr val="accent6">
+        <a:shade val="80000"/>
+      </a:schemeClr>
+    </dgm:linClrLst>
+    <dgm:effectClrLst/>
+    <dgm:txLinClrLst/>
+    <dgm:txFillClrLst meth="repeat">
+      <a:schemeClr val="dk1"/>
+    </dgm:txFillClrLst>
+    <dgm:txEffectClrLst/>
+  </dgm:styleLbl>
+  <dgm:styleLbl name="node2">
+    <dgm:fillClrLst meth="repeat">
+      <a:schemeClr val="lt1"/>
+    </dgm:fillClrLst>
+    <dgm:linClrLst meth="repeat">
+      <a:schemeClr val="accent6">
+        <a:shade val="80000"/>
+      </a:schemeClr>
+    </dgm:linClrLst>
+    <dgm:effectClrLst/>
+    <dgm:txLinClrLst/>
+    <dgm:txFillClrLst meth="repeat">
+      <a:schemeClr val="dk1"/>
+    </dgm:txFillClrLst>
+    <dgm:txEffectClrLst/>
+  </dgm:styleLbl>
+  <dgm:styleLbl name="node3">
+    <dgm:fillClrLst meth="repeat">
+      <a:schemeClr val="lt1"/>
+    </dgm:fillClrLst>
+    <dgm:linClrLst meth="repeat">
+      <a:schemeClr val="accent6">
+        <a:shade val="80000"/>
+      </a:schemeClr>
+    </dgm:linClrLst>
+    <dgm:effectClrLst/>
+    <dgm:txLinClrLst/>
+    <dgm:txFillClrLst meth="repeat">
+      <a:schemeClr val="dk1"/>
+    </dgm:txFillClrLst>
+    <dgm:txEffectClrLst/>
+  </dgm:styleLbl>
+  <dgm:styleLbl name="node4">
+    <dgm:fillClrLst meth="repeat">
+      <a:schemeClr val="lt1"/>
+    </dgm:fillClrLst>
+    <dgm:linClrLst meth="repeat">
+      <a:schemeClr val="accent6">
+        <a:shade val="80000"/>
+      </a:schemeClr>
+    </dgm:linClrLst>
+    <dgm:effectClrLst/>
+    <dgm:txLinClrLst/>
+    <dgm:txFillClrLst meth="repeat">
+      <a:schemeClr val="dk1"/>
+    </dgm:txFillClrLst>
+    <dgm:txEffectClrLst/>
+  </dgm:styleLbl>
+  <dgm:styleLbl name="parChTrans1D1">
+    <dgm:fillClrLst meth="repeat">
+      <a:schemeClr val="accent6"/>
+    </dgm:fillClrLst>
+    <dgm:linClrLst meth="repeat">
+      <a:schemeClr val="accent6">
+        <a:shade val="60000"/>
+      </a:schemeClr>
+    </dgm:linClrLst>
+    <dgm:effectClrLst/>
+    <dgm:txLinClrLst/>
+    <dgm:txFillClrLst meth="repeat">
+      <a:schemeClr val="tx1"/>
+    </dgm:txFillClrLst>
+    <dgm:txEffectClrLst/>
+  </dgm:styleLbl>
+  <dgm:styleLbl name="parChTrans1D2">
+    <dgm:fillClrLst meth="repeat">
+      <a:schemeClr val="accent6"/>
+    </dgm:fillClrLst>
+    <dgm:linClrLst meth="repeat">
+      <a:schemeClr val="accent6">
+        <a:shade val="60000"/>
+      </a:schemeClr>
+    </dgm:linClrLst>
+    <dgm:effectClrLst/>
+    <dgm:txLinClrLst/>
+    <dgm:txFillClrLst meth="repeat">
+      <a:schemeClr val="tx1"/>
+    </dgm:txFillClrLst>
+    <dgm:txEffectClrLst/>
+  </dgm:styleLbl>
+  <dgm:styleLbl name="parChTrans1D3">
+    <dgm:fillClrLst meth="repeat">
+      <a:schemeClr val="accent6"/>
+    </dgm:fillClrLst>
+    <dgm:linClrLst meth="repeat">
+      <a:schemeClr val="accent6">
+        <a:shade val="80000"/>
+      </a:schemeClr>
+    </dgm:linClrLst>
+    <dgm:effectClrLst/>
+    <dgm:txLinClrLst/>
+    <dgm:txFillClrLst meth="repeat">
+      <a:schemeClr val="tx1"/>
+    </dgm:txFillClrLst>
+    <dgm:txEffectClrLst/>
+  </dgm:styleLbl>
+  <dgm:styleLbl name="parChTrans1D4">
+    <dgm:fillClrLst meth="repeat">
+      <a:schemeClr val="accent6"/>
+    </dgm:fillClrLst>
+    <dgm:linClrLst meth="repeat">
+      <a:schemeClr val="accent6">
+        <a:shade val="80000"/>
+      </a:schemeClr>
+    </dgm:linClrLst>
+    <dgm:effectClrLst/>
+    <dgm:txLinClrLst/>
+    <dgm:txFillClrLst meth="repeat">
+      <a:schemeClr val="tx1"/>
+    </dgm:txFillClrLst>
+    <dgm:txEffectClrLst/>
+  </dgm:styleLbl>
+  <dgm:styleLbl name="parChTrans2D1">
+    <dgm:fillClrLst meth="repeat">
+      <a:schemeClr val="accent6">
+        <a:tint val="60000"/>
+      </a:schemeClr>
+    </dgm:fillClrLst>
+    <dgm:linClrLst meth="repeat">
+      <a:schemeClr val="accent6">
+        <a:tint val="60000"/>
+      </a:schemeClr>
+    </dgm:linClrLst>
+    <dgm:effectClrLst/>
+    <dgm:txLinClrLst/>
+    <dgm:txFillClrLst/>
+    <dgm:txEffectClrLst/>
+  </dgm:styleLbl>
+  <dgm:styleLbl name="parChTrans2D2">
+    <dgm:fillClrLst meth="repeat">
+      <a:schemeClr val="accent6"/>
+    </dgm:fillClrLst>
+    <dgm:linClrLst meth="repeat">
+      <a:schemeClr val="accent6"/>
+    </dgm:linClrLst>
+    <dgm:effectClrLst/>
+    <dgm:txLinClrLst/>
+    <dgm:txFillClrLst/>
+    <dgm:txEffectClrLst/>
+  </dgm:styleLbl>
+  <dgm:styleLbl name="parChTrans2D3">
+    <dgm:fillClrLst meth="repeat">
+      <a:schemeClr val="accent6"/>
+    </dgm:fillClrLst>
+    <dgm:linClrLst meth="repeat">
+      <a:schemeClr val="accent6"/>
+    </dgm:linClrLst>
+    <dgm:effectClrLst/>
+    <dgm:txLinClrLst/>
+    <dgm:txFillClrLst/>
+    <dgm:txEffectClrLst/>
+  </dgm:styleLbl>
+  <dgm:styleLbl name="parChTrans2D4">
+    <dgm:fillClrLst meth="repeat">
+      <a:schemeClr val="accent6"/>
+    </dgm:fillClrLst>
+    <dgm:linClrLst meth="repeat">
+      <a:schemeClr val="accent6"/>
+    </dgm:linClrLst>
+    <dgm:effectClrLst/>
+    <dgm:txLinClrLst/>
+    <dgm:txFillClrLst meth="repeat">
+      <a:schemeClr val="lt1"/>
+    </dgm:txFillClrLst>
+    <dgm:txEffectClrLst/>
+  </dgm:styleLbl>
+  <dgm:styleLbl name="revTx">
+    <dgm:fillClrLst meth="repeat">
+      <a:schemeClr val="lt1">
+        <a:alpha val="0"/>
+      </a:schemeClr>
+    </dgm:fillClrLst>
+    <dgm:linClrLst meth="repeat">
+      <a:schemeClr val="dk1">
+        <a:alpha val="0"/>
+      </a:schemeClr>
+    </dgm:linClrLst>
+    <dgm:effectClrLst/>
+    <dgm:txLinClrLst/>
+    <dgm:txFillClrLst meth="repeat">
+      <a:schemeClr val="tx1"/>
+    </dgm:txFillClrLst>
+    <dgm:txEffectClrLst/>
+  </dgm:styleLbl>
+  <dgm:styleLbl name="sibTrans1D1">
+    <dgm:fillClrLst meth="repeat">
+      <a:schemeClr val="accent6"/>
+    </dgm:fillClrLst>
+    <dgm:linClrLst meth="repeat">
+      <a:schemeClr val="accent6"/>
+    </dgm:linClrLst>
+    <dgm:effectClrLst/>
+    <dgm:txLinClrLst/>
+    <dgm:txFillClrLst meth="repeat">
+      <a:schemeClr val="tx1"/>
+    </dgm:txFillClrLst>
+    <dgm:txEffectClrLst/>
+  </dgm:styleLbl>
+  <dgm:styleLbl name="sibTrans2D1">
+    <dgm:fillClrLst meth="repeat">
+      <a:schemeClr val="accent6">
+        <a:tint val="60000"/>
+      </a:schemeClr>
+    </dgm:fillClrLst>
+    <dgm:linClrLst meth="repeat">
+      <a:schemeClr val="accent6">
+        <a:tint val="60000"/>
+      </a:schemeClr>
+    </dgm:linClrLst>
+    <dgm:effectClrLst/>
+    <dgm:txLinClrLst/>
+    <dgm:txFillClrLst meth="repeat">
+      <a:schemeClr val="dk1"/>
+    </dgm:txFillClrLst>
+    <dgm:txEffectClrLst/>
+  </dgm:styleLbl>
+  <dgm:styleLbl name="solidAlignAcc1">
+    <dgm:fillClrLst meth="repeat">
+      <a:schemeClr val="lt1"/>
+    </dgm:fillClrLst>
+    <dgm:linClrLst meth="repeat">
+      <a:schemeClr val="accent6"/>
+    </dgm:linClrLst>
+    <dgm:effectClrLst/>
+    <dgm:txLinClrLst/>
+    <dgm:txFillClrLst meth="repeat">
+      <a:schemeClr val="dk1"/>
+    </dgm:txFillClrLst>
+    <dgm:txEffectClrLst/>
+  </dgm:styleLbl>
+  <dgm:styleLbl name="solidBgAcc1">
+    <dgm:fillClrLst meth="repeat">
+      <a:schemeClr val="lt1"/>
+    </dgm:fillClrLst>
+    <dgm:linClrLst meth="repeat">
+      <a:schemeClr val="accent6"/>
+    </dgm:linClrLst>
+    <dgm:effectClrLst/>
+    <dgm:txLinClrLst/>
+    <dgm:txFillClrLst meth="repeat">
+      <a:schemeClr val="dk1"/>
+    </dgm:txFillClrLst>
+    <dgm:txEffectClrLst/>
+  </dgm:styleLbl>
+  <dgm:styleLbl name="solidFgAcc1">
+    <dgm:fillClrLst meth="repeat">
+      <a:schemeClr val="lt1"/>
+    </dgm:fillClrLst>
+    <dgm:linClrLst meth="repeat">
+      <a:schemeClr val="accent6"/>
+    </dgm:linClrLst>
+    <dgm:effectClrLst/>
+    <dgm:txLinClrLst/>
+    <dgm:txFillClrLst meth="repeat">
+      <a:schemeClr val="dk1"/>
+    </dgm:txFillClrLst>
+    <dgm:txEffectClrLst/>
+  </dgm:styleLbl>
+  <dgm:styleLbl name="trAlignAcc1">
+    <dgm:fillClrLst meth="repeat">
+      <a:schemeClr val="accent6">
+        <a:alpha val="40000"/>
+        <a:tint val="40000"/>
+      </a:schemeClr>
+    </dgm:fillClrLst>
+    <dgm:linClrLst meth="repeat">
+      <a:schemeClr val="accent6"/>
+    </dgm:linClrLst>
+    <dgm:effectClrLst/>
+    <dgm:txLinClrLst/>
+    <dgm:txFillClrLst meth="repeat">
+      <a:schemeClr val="dk1"/>
+    </dgm:txFillClrLst>
+    <dgm:txEffectClrLst/>
+  </dgm:styleLbl>
+  <dgm:styleLbl name="trBgShp">
+    <dgm:fillClrLst meth="repeat">
+      <a:schemeClr val="accent6">
+        <a:tint val="50000"/>
+        <a:alpha val="40000"/>
+      </a:schemeClr>
+    </dgm:fillClrLst>
+    <dgm:linClrLst meth="repeat">
+      <a:schemeClr val="accent6"/>
+    </dgm:linClrLst>
+    <dgm:effectClrLst/>
+    <dgm:txLinClrLst/>
+    <dgm:txFillClrLst meth="repeat">
+      <a:schemeClr val="lt1"/>
+    </dgm:txFillClrLst>
+    <dgm:txEffectClrLst/>
+  </dgm:styleLbl>
+  <dgm:styleLbl name="vennNode1">
+    <dgm:fillClrLst meth="repeat">
+      <a:schemeClr val="lt1">
+        <a:alpha val="50000"/>
+      </a:schemeClr>
+    </dgm:fillClrLst>
+    <dgm:linClrLst meth="repeat">
+      <a:schemeClr val="accent6">
+        <a:shade val="80000"/>
+      </a:schemeClr>
+    </dgm:linClrLst>
+    <dgm:effectClrLst/>
+    <dgm:txLinClrLst/>
+    <dgm:txFillClrLst/>
+    <dgm:txEffectClrLst/>
+  </dgm:styleLbl>
+</dgm:colorsDef>
+</file>
+
+<file path=ppt/diagrams/colors2.xml><?xml version="1.0" encoding="utf-8"?>
 <dgm:colorsDef xmlns:dgm="http://schemas.openxmlformats.org/drawingml/2006/diagram" xmlns:a="http://schemas.openxmlformats.org/drawingml/2006/main" uniqueId="urn:microsoft.com/office/officeart/2005/8/colors/accent6_1">
   <dgm:title val=""/>
   <dgm:desc val=""/>
@@ -1601,6 +2408,238 @@
     <dgm:cxn modelId="{24EE8900-F7E1-4CE0-A046-2A1173857C81}" type="presOf" srcId="{7D58E61C-4C21-4EF8-A4A6-CE9F1EA7F074}" destId="{3C6AC5CE-4067-41EE-8E93-71E8FDCD9B41}" srcOrd="1" destOrd="0" presId="urn:microsoft.com/office/officeart/2005/8/layout/bProcess3"/>
     <dgm:cxn modelId="{D75DEAB8-4EB5-40E6-98BA-6E4D947D7433}" type="presParOf" srcId="{1623B4C5-2499-4637-B07C-6AE8AE2BD718}" destId="{657023FC-9007-4B07-A54B-73FC1F99DD9A}" srcOrd="18" destOrd="0" presId="urn:microsoft.com/office/officeart/2005/8/layout/bProcess3"/>
     <dgm:cxn modelId="{EC9C81CA-22D3-4FD6-8DA6-B864F4194BBD}" type="presOf" srcId="{528A2CAA-AD05-47AF-9747-E266F390039B}" destId="{657023FC-9007-4B07-A54B-73FC1F99DD9A}" srcOrd="0" destOrd="0" presId="urn:microsoft.com/office/officeart/2005/8/layout/bProcess3"/>
+  </dgm:cxnLst>
+  <dgm:bg/>
+  <dgm:whole/>
+  <dgm:extLst>
+    <a:ext uri="http://schemas.microsoft.com/office/drawing/2008/diagram">
+      <dsp:dataModelExt xmlns:dsp="http://schemas.microsoft.com/office/drawing/2008/diagram" relId="rId7" minVer="http://schemas.openxmlformats.org/drawingml/2006/diagram"/>
+    </a:ext>
+  </dgm:extLst>
+</dgm:dataModel>
+</file>
+
+<file path=ppt/diagrams/data2.xml><?xml version="1.0" encoding="utf-8"?>
+<dgm:dataModel xmlns:dgm="http://schemas.openxmlformats.org/drawingml/2006/diagram" xmlns:a="http://schemas.openxmlformats.org/drawingml/2006/main">
+  <dgm:ptLst>
+    <dgm:pt modelId="{4BE40EF7-4FDB-46DC-AD5C-7AA9927BCDC4}" type="doc">
+      <dgm:prSet loTypeId="urn:microsoft.com/office/officeart/2005/8/layout/bProcess3" loCatId="process" qsTypeId="urn:microsoft.com/office/officeart/2005/8/quickstyle/simple1" qsCatId="simple" csTypeId="urn:microsoft.com/office/officeart/2005/8/colors/accent6_1" csCatId="accent1" phldr="false"/>
+      <dgm:spPr/>
+      <dgm:t>
+        <a:bodyPr/>
+        <a:p>
+          <a:endParaRPr lang="en-US"/>
+        </a:p>
+      </dgm:t>
+    </dgm:pt>
+    <dgm:pt modelId="{79A907BE-6A57-46F9-949B-2F83975E5013}">
+      <dgm:prSet phldrT="[Text]" phldr="false" custT="false"/>
+      <dgm:spPr/>
+      <dgm:t>
+        <a:bodyPr vert="horz" wrap="square"/>
+        <a:p>
+          <a:pPr>
+            <a:lnSpc>
+              <a:spcPct val="100000"/>
+            </a:lnSpc>
+            <a:spcBef>
+              <a:spcPct val="0"/>
+            </a:spcBef>
+            <a:spcAft>
+              <a:spcPct val="35000"/>
+            </a:spcAft>
+          </a:pPr>
+          <a:r>
+            <a:rPr lang="" altLang="en-US"/>
+            <a:t>Equazioni di Maxwell</a:t>
+          </a:r>
+          <a:r>
+            <a:rPr lang="" altLang="en-US"/>
+            <a:t/>
+          </a:r>
+          <a:endParaRPr lang="" altLang="en-US"/>
+        </a:p>
+      </dgm:t>
+    </dgm:pt>
+    <dgm:pt modelId="{27508ADE-09B9-4692-B3B1-997C0A038367}" cxnId="{3E04517F-4CCA-45B4-BA26-C64F2A5217E2}" type="parTrans">
+      <dgm:prSet/>
+      <dgm:spPr/>
+      <dgm:t>
+        <a:bodyPr/>
+        <a:p>
+          <a:endParaRPr lang="en-US"/>
+        </a:p>
+      </dgm:t>
+    </dgm:pt>
+    <dgm:pt modelId="{6E764295-1C97-4A8A-BB23-8F6587B65D20}" cxnId="{3E04517F-4CCA-45B4-BA26-C64F2A5217E2}" type="sibTrans">
+      <dgm:prSet/>
+      <dgm:spPr/>
+      <dgm:t>
+        <a:bodyPr/>
+        <a:p>
+          <a:endParaRPr lang="en-US"/>
+        </a:p>
+      </dgm:t>
+    </dgm:pt>
+    <dgm:pt modelId="{047E9EF6-99D9-47D4-8421-7851F36A512F}">
+      <dgm:prSet phldrT="[Text]" phldr="false" custT="false"/>
+      <dgm:spPr/>
+      <dgm:t>
+        <a:bodyPr vert="horz" wrap="square"/>
+        <a:p>
+          <a:pPr>
+            <a:lnSpc>
+              <a:spcPct val="100000"/>
+            </a:lnSpc>
+            <a:spcBef>
+              <a:spcPct val="0"/>
+            </a:spcBef>
+            <a:spcAft>
+              <a:spcPct val="35000"/>
+            </a:spcAft>
+          </a:pPr>
+          <a:r>
+            <a:rPr lang="" altLang="en-US"/>
+            <a:t>Luce come un’onda elettromagnetica</a:t>
+          </a:r>
+          <a:endParaRPr lang="" altLang="en-US"/>
+        </a:p>
+      </dgm:t>
+    </dgm:pt>
+    <dgm:pt modelId="{2AC7BC3F-1829-4928-9FDD-1BD085861192}" cxnId="{A869E654-08BE-4467-852D-D78FD200EE8A}" type="parTrans">
+      <dgm:prSet/>
+      <dgm:spPr/>
+      <dgm:t>
+        <a:bodyPr/>
+        <a:p>
+          <a:endParaRPr lang="en-US"/>
+        </a:p>
+      </dgm:t>
+    </dgm:pt>
+    <dgm:pt modelId="{B3A60D08-4CF1-4AD3-A554-8DA1472F6362}" cxnId="{A869E654-08BE-4467-852D-D78FD200EE8A}" type="sibTrans">
+      <dgm:prSet/>
+      <dgm:spPr/>
+      <dgm:t>
+        <a:bodyPr/>
+        <a:p>
+          <a:endParaRPr lang="en-US"/>
+        </a:p>
+      </dgm:t>
+    </dgm:pt>
+    <dgm:pt modelId="{9B99C3CE-0550-4254-B164-BB9424E18E56}">
+      <dgm:prSet phldrT="[Text]" phldr="false" custT="false"/>
+      <dgm:spPr/>
+      <dgm:t>
+        <a:bodyPr vert="horz" wrap="square"/>
+        <a:p>
+          <a:pPr>
+            <a:lnSpc>
+              <a:spcPct val="100000"/>
+            </a:lnSpc>
+            <a:spcBef>
+              <a:spcPct val="0"/>
+            </a:spcBef>
+            <a:spcAft>
+              <a:spcPct val="35000"/>
+            </a:spcAft>
+          </a:pPr>
+          <a:r>
+            <a:rPr lang="" altLang="en-US"/>
+            <a:t>La luce si progaga nel vuoto con una velocità costante</a:t>
+          </a:r>
+          <a:endParaRPr lang="" altLang="en-US"/>
+        </a:p>
+      </dgm:t>
+    </dgm:pt>
+    <dgm:pt modelId="{CF18C7ED-262E-47EB-A8BC-BC18A4B2756C}" cxnId="{339D1938-DD80-4606-A117-C70749A903AE}" type="parTrans">
+      <dgm:prSet/>
+      <dgm:spPr/>
+      <dgm:t>
+        <a:bodyPr/>
+        <a:p>
+          <a:endParaRPr lang="en-US"/>
+        </a:p>
+      </dgm:t>
+    </dgm:pt>
+    <dgm:pt modelId="{C20DFEDB-A5DA-48B1-860C-C64E9FB9889D}" cxnId="{339D1938-DD80-4606-A117-C70749A903AE}" type="sibTrans">
+      <dgm:prSet/>
+      <dgm:spPr/>
+      <dgm:t>
+        <a:bodyPr/>
+        <a:p>
+          <a:endParaRPr lang="en-US"/>
+        </a:p>
+      </dgm:t>
+    </dgm:pt>
+    <dgm:pt modelId="{1623B4C5-2499-4637-B07C-6AE8AE2BD718}" type="pres">
+      <dgm:prSet presAssocID="{4BE40EF7-4FDB-46DC-AD5C-7AA9927BCDC4}" presName="Name0" presStyleCnt="0">
+        <dgm:presLayoutVars>
+          <dgm:dir/>
+          <dgm:resizeHandles val="exact"/>
+        </dgm:presLayoutVars>
+      </dgm:prSet>
+      <dgm:spPr/>
+    </dgm:pt>
+    <dgm:pt modelId="{2FBE2C1E-1D94-400F-A227-985D4DA10085}" type="pres">
+      <dgm:prSet presAssocID="{79A907BE-6A57-46F9-949B-2F83975E5013}" presName="node" presStyleLbl="node1" presStyleIdx="0" presStyleCnt="3">
+        <dgm:presLayoutVars>
+          <dgm:bulletEnabled val="true"/>
+        </dgm:presLayoutVars>
+      </dgm:prSet>
+      <dgm:spPr/>
+    </dgm:pt>
+    <dgm:pt modelId="{9F73252C-5345-45F1-A6FA-69E44781CCB0}" type="pres">
+      <dgm:prSet presAssocID="{6E764295-1C97-4A8A-BB23-8F6587B65D20}" presName="sibTrans" presStyleLbl="sibTrans1D1" presStyleIdx="0" presStyleCnt="2"/>
+      <dgm:spPr/>
+    </dgm:pt>
+    <dgm:pt modelId="{0A91809B-8299-4CB8-B3C9-28D901126CE1}" type="pres">
+      <dgm:prSet presAssocID="{6E764295-1C97-4A8A-BB23-8F6587B65D20}" presName="connectorText" presStyleCnt="0"/>
+      <dgm:spPr/>
+    </dgm:pt>
+    <dgm:pt modelId="{0482690C-586E-41D6-8B40-4CA7581A9CE9}" type="pres">
+      <dgm:prSet presAssocID="{047E9EF6-99D9-47D4-8421-7851F36A512F}" presName="node" presStyleLbl="node1" presStyleIdx="1" presStyleCnt="3">
+        <dgm:presLayoutVars>
+          <dgm:bulletEnabled val="true"/>
+        </dgm:presLayoutVars>
+      </dgm:prSet>
+      <dgm:spPr/>
+    </dgm:pt>
+    <dgm:pt modelId="{EBB69596-36AB-40F1-91C5-FC3350A00067}" type="pres">
+      <dgm:prSet presAssocID="{B3A60D08-4CF1-4AD3-A554-8DA1472F6362}" presName="sibTrans" presStyleLbl="sibTrans1D1" presStyleIdx="1" presStyleCnt="2"/>
+      <dgm:spPr/>
+    </dgm:pt>
+    <dgm:pt modelId="{9F0FF7A9-40E9-4C02-BFFF-6F0641C2389B}" type="pres">
+      <dgm:prSet presAssocID="{B3A60D08-4CF1-4AD3-A554-8DA1472F6362}" presName="connectorText" presStyleCnt="0"/>
+      <dgm:spPr/>
+    </dgm:pt>
+    <dgm:pt modelId="{E5145E43-B450-47CE-B1E5-1482BCF4071D}" type="pres">
+      <dgm:prSet presAssocID="{9B99C3CE-0550-4254-B164-BB9424E18E56}" presName="node" presStyleLbl="node1" presStyleIdx="2" presStyleCnt="3">
+        <dgm:presLayoutVars>
+          <dgm:bulletEnabled val="true"/>
+        </dgm:presLayoutVars>
+      </dgm:prSet>
+      <dgm:spPr/>
+    </dgm:pt>
+  </dgm:ptLst>
+  <dgm:cxnLst>
+    <dgm:cxn modelId="{3E04517F-4CCA-45B4-BA26-C64F2A5217E2}" srcId="{4BE40EF7-4FDB-46DC-AD5C-7AA9927BCDC4}" destId="{79A907BE-6A57-46F9-949B-2F83975E5013}" srcOrd="0" destOrd="0" parTransId="{27508ADE-09B9-4692-B3B1-997C0A038367}" sibTransId="{6E764295-1C97-4A8A-BB23-8F6587B65D20}"/>
+    <dgm:cxn modelId="{A869E654-08BE-4467-852D-D78FD200EE8A}" srcId="{4BE40EF7-4FDB-46DC-AD5C-7AA9927BCDC4}" destId="{047E9EF6-99D9-47D4-8421-7851F36A512F}" srcOrd="1" destOrd="0" parTransId="{2AC7BC3F-1829-4928-9FDD-1BD085861192}" sibTransId="{B3A60D08-4CF1-4AD3-A554-8DA1472F6362}"/>
+    <dgm:cxn modelId="{339D1938-DD80-4606-A117-C70749A903AE}" srcId="{4BE40EF7-4FDB-46DC-AD5C-7AA9927BCDC4}" destId="{9B99C3CE-0550-4254-B164-BB9424E18E56}" srcOrd="2" destOrd="0" parTransId="{CF18C7ED-262E-47EB-A8BC-BC18A4B2756C}" sibTransId="{C20DFEDB-A5DA-48B1-860C-C64E9FB9889D}"/>
+    <dgm:cxn modelId="{2E736A9B-C190-414B-97ED-612E4F7387B8}" type="presOf" srcId="{4BE40EF7-4FDB-46DC-AD5C-7AA9927BCDC4}" destId="{1623B4C5-2499-4637-B07C-6AE8AE2BD718}" srcOrd="0" destOrd="0" presId="urn:microsoft.com/office/officeart/2005/8/layout/bProcess3"/>
+    <dgm:cxn modelId="{EED53480-30FF-4392-91ED-713B816CEEEF}" type="presParOf" srcId="{1623B4C5-2499-4637-B07C-6AE8AE2BD718}" destId="{2FBE2C1E-1D94-400F-A227-985D4DA10085}" srcOrd="0" destOrd="0" presId="urn:microsoft.com/office/officeart/2005/8/layout/bProcess3"/>
+    <dgm:cxn modelId="{E25B4E4E-FFA6-47B4-8CAE-F5B42A494C6F}" type="presOf" srcId="{79A907BE-6A57-46F9-949B-2F83975E5013}" destId="{2FBE2C1E-1D94-400F-A227-985D4DA10085}" srcOrd="0" destOrd="0" presId="urn:microsoft.com/office/officeart/2005/8/layout/bProcess3"/>
+    <dgm:cxn modelId="{C7D117B1-71D6-48F3-8DB0-6DEC247DDE14}" type="presParOf" srcId="{1623B4C5-2499-4637-B07C-6AE8AE2BD718}" destId="{9F73252C-5345-45F1-A6FA-69E44781CCB0}" srcOrd="1" destOrd="0" presId="urn:microsoft.com/office/officeart/2005/8/layout/bProcess3"/>
+    <dgm:cxn modelId="{9651A537-ACD1-4B91-8663-E01EB6810350}" type="presOf" srcId="{6E764295-1C97-4A8A-BB23-8F6587B65D20}" destId="{9F73252C-5345-45F1-A6FA-69E44781CCB0}" srcOrd="0" destOrd="0" presId="urn:microsoft.com/office/officeart/2005/8/layout/bProcess3"/>
+    <dgm:cxn modelId="{88897796-C938-4006-92C0-1839746CB780}" type="presParOf" srcId="{9F73252C-5345-45F1-A6FA-69E44781CCB0}" destId="{0A91809B-8299-4CB8-B3C9-28D901126CE1}" srcOrd="0" destOrd="1" presId="urn:microsoft.com/office/officeart/2005/8/layout/bProcess3"/>
+    <dgm:cxn modelId="{8A1BCE22-4079-4894-A854-4302E23FE7A6}" type="presOf" srcId="{6E764295-1C97-4A8A-BB23-8F6587B65D20}" destId="{0A91809B-8299-4CB8-B3C9-28D901126CE1}" srcOrd="1" destOrd="0" presId="urn:microsoft.com/office/officeart/2005/8/layout/bProcess3"/>
+    <dgm:cxn modelId="{1EBE7C85-2067-4AAC-8ED6-92FD4C25D6C8}" type="presParOf" srcId="{1623B4C5-2499-4637-B07C-6AE8AE2BD718}" destId="{0482690C-586E-41D6-8B40-4CA7581A9CE9}" srcOrd="2" destOrd="0" presId="urn:microsoft.com/office/officeart/2005/8/layout/bProcess3"/>
+    <dgm:cxn modelId="{B5B802B5-7837-4A57-81BD-300F61066D03}" type="presOf" srcId="{047E9EF6-99D9-47D4-8421-7851F36A512F}" destId="{0482690C-586E-41D6-8B40-4CA7581A9CE9}" srcOrd="0" destOrd="0" presId="urn:microsoft.com/office/officeart/2005/8/layout/bProcess3"/>
+    <dgm:cxn modelId="{C6163C38-039D-48CA-BB82-0DC6CA032768}" type="presParOf" srcId="{1623B4C5-2499-4637-B07C-6AE8AE2BD718}" destId="{EBB69596-36AB-40F1-91C5-FC3350A00067}" srcOrd="3" destOrd="0" presId="urn:microsoft.com/office/officeart/2005/8/layout/bProcess3"/>
+    <dgm:cxn modelId="{42BD93D2-FED3-46F8-BE1B-3B708B404322}" type="presOf" srcId="{B3A60D08-4CF1-4AD3-A554-8DA1472F6362}" destId="{EBB69596-36AB-40F1-91C5-FC3350A00067}" srcOrd="0" destOrd="0" presId="urn:microsoft.com/office/officeart/2005/8/layout/bProcess3"/>
+    <dgm:cxn modelId="{9EAA4AA2-4B10-4B68-AA0D-CCA60CD84833}" type="presParOf" srcId="{EBB69596-36AB-40F1-91C5-FC3350A00067}" destId="{9F0FF7A9-40E9-4C02-BFFF-6F0641C2389B}" srcOrd="0" destOrd="3" presId="urn:microsoft.com/office/officeart/2005/8/layout/bProcess3"/>
+    <dgm:cxn modelId="{CF50E1B8-0FFA-4878-8C20-28962448E2C1}" type="presOf" srcId="{B3A60D08-4CF1-4AD3-A554-8DA1472F6362}" destId="{9F0FF7A9-40E9-4C02-BFFF-6F0641C2389B}" srcOrd="1" destOrd="0" presId="urn:microsoft.com/office/officeart/2005/8/layout/bProcess3"/>
+    <dgm:cxn modelId="{C4303A23-76CE-4514-A095-0F3182181C91}" type="presParOf" srcId="{1623B4C5-2499-4637-B07C-6AE8AE2BD718}" destId="{E5145E43-B450-47CE-B1E5-1482BCF4071D}" srcOrd="4" destOrd="0" presId="urn:microsoft.com/office/officeart/2005/8/layout/bProcess3"/>
+    <dgm:cxn modelId="{786567B4-6EDB-4791-A4A4-05339D0CF3D3}" type="presOf" srcId="{9B99C3CE-0550-4254-B164-BB9424E18E56}" destId="{E5145E43-B450-47CE-B1E5-1482BCF4071D}" srcOrd="0" destOrd="0" presId="urn:microsoft.com/office/officeart/2005/8/layout/bProcess3"/>
   </dgm:cxnLst>
   <dgm:bg/>
   <dgm:whole/>
@@ -3462,7 +4501,691 @@
 </dsp:drawing>
 </file>
 
+<file path=ppt/diagrams/drawing2.xml><?xml version="1.0" encoding="utf-8"?>
+<dsp:drawing xmlns:dgm="http://schemas.openxmlformats.org/drawingml/2006/diagram" xmlns:dsp="http://schemas.microsoft.com/office/drawing/2008/diagram" xmlns:a="http://schemas.openxmlformats.org/drawingml/2006/main" xmlns:r="http://schemas.openxmlformats.org/officeDocument/2006/relationships">
+  <dsp:spTree>
+    <dsp:nvGrpSpPr>
+      <dsp:cNvPr id="2" name="Group 1"/>
+      <dsp:cNvGrpSpPr/>
+    </dsp:nvGrpSpPr>
+    <dsp:grpSpPr>
+      <a:xfrm>
+        <a:off x="0" y="0"/>
+        <a:ext cx="7853680" cy="1842135"/>
+        <a:chOff x="0" y="0"/>
+        <a:chExt cx="7853680" cy="1842135"/>
+      </a:xfrm>
+    </dsp:grpSpPr>
+    <dsp:sp modelId="{9F73252C-5345-45F1-A6FA-69E44781CCB0}">
+      <dsp:nvSpPr>
+        <dsp:cNvPr id="4" name="Freeform 3"/>
+        <dsp:cNvSpPr/>
+      </dsp:nvSpPr>
+      <dsp:spPr bwMode="white">
+        <a:xfrm>
+          <a:off x="2279024" y="921068"/>
+          <a:ext cx="521265" cy="0"/>
+        </a:xfrm>
+        <a:custGeom>
+          <a:avLst/>
+          <a:gdLst/>
+          <a:ahLst/>
+          <a:cxnLst/>
+          <a:pathLst>
+            <a:path w="821">
+              <a:moveTo>
+                <a:pt x="0" y="0"/>
+              </a:moveTo>
+              <a:lnTo>
+                <a:pt x="821" y="0"/>
+              </a:lnTo>
+            </a:path>
+          </a:pathLst>
+        </a:custGeom>
+        <a:ln>
+          <a:tailEnd type="arrow" w="lg" len="med"/>
+        </a:ln>
+      </dsp:spPr>
+      <dsp:style>
+        <a:lnRef idx="1">
+          <a:schemeClr val="accent6"/>
+        </a:lnRef>
+        <a:fillRef idx="0">
+          <a:schemeClr val="accent6"/>
+        </a:fillRef>
+        <a:effectRef idx="0">
+          <a:scrgbClr r="0" g="0" b="0"/>
+        </a:effectRef>
+        <a:fontRef idx="minor"/>
+      </dsp:style>
+      <dsp:txBody>
+        <a:bodyPr lIns="12700" tIns="0" rIns="12700" bIns="0" anchor="ctr"/>
+        <a:lstStyle>
+          <a:lvl1pPr algn="ctr">
+            <a:defRPr sz="5500"/>
+          </a:lvl1pPr>
+          <a:lvl2pPr marL="285750" indent="-285750" algn="ctr">
+            <a:defRPr sz="4200"/>
+          </a:lvl2pPr>
+          <a:lvl3pPr marL="571500" indent="-285750" algn="ctr">
+            <a:defRPr sz="4200"/>
+          </a:lvl3pPr>
+          <a:lvl4pPr marL="857250" indent="-285750" algn="ctr">
+            <a:defRPr sz="4200"/>
+          </a:lvl4pPr>
+          <a:lvl5pPr marL="1143000" indent="-285750" algn="ctr">
+            <a:defRPr sz="4200"/>
+          </a:lvl5pPr>
+          <a:lvl6pPr marL="1428750" indent="-285750" algn="ctr">
+            <a:defRPr sz="4200"/>
+          </a:lvl6pPr>
+          <a:lvl7pPr marL="1714500" indent="-285750" algn="ctr">
+            <a:defRPr sz="4200"/>
+          </a:lvl7pPr>
+          <a:lvl8pPr marL="2000250" indent="-285750" algn="ctr">
+            <a:defRPr sz="4200"/>
+          </a:lvl8pPr>
+          <a:lvl9pPr marL="2286000" indent="-285750" algn="ctr">
+            <a:defRPr sz="4200"/>
+          </a:lvl9pPr>
+        </a:lstStyle>
+        <a:p>
+          <a:pPr lvl="0">
+            <a:lnSpc>
+              <a:spcPct val="100000"/>
+            </a:lnSpc>
+            <a:spcBef>
+              <a:spcPct val="0"/>
+            </a:spcBef>
+            <a:spcAft>
+              <a:spcPct val="35000"/>
+            </a:spcAft>
+          </a:pPr>
+          <a:endParaRPr lang="en-US">
+            <a:solidFill>
+              <a:schemeClr val="dk1"/>
+            </a:solidFill>
+          </a:endParaRPr>
+        </a:p>
+      </dsp:txBody>
+      <dsp:txXfrm>
+        <a:off x="2279024" y="921068"/>
+        <a:ext cx="521265" cy="0"/>
+      </dsp:txXfrm>
+    </dsp:sp>
+    <dsp:sp modelId="{2FBE2C1E-1D94-400F-A227-985D4DA10085}">
+      <dsp:nvSpPr>
+        <dsp:cNvPr id="3" name="Rectangle 2"/>
+        <dsp:cNvSpPr/>
+      </dsp:nvSpPr>
+      <dsp:spPr bwMode="white">
+        <a:xfrm>
+          <a:off x="12655" y="241157"/>
+          <a:ext cx="2266370" cy="1359822"/>
+        </a:xfrm>
+        <a:prstGeom prst="rect">
+          <a:avLst/>
+        </a:prstGeom>
+      </dsp:spPr>
+      <dsp:style>
+        <a:lnRef idx="2">
+          <a:schemeClr val="accent6">
+            <a:shade val="80000"/>
+          </a:schemeClr>
+        </a:lnRef>
+        <a:fillRef idx="1">
+          <a:schemeClr val="lt1"/>
+        </a:fillRef>
+        <a:effectRef idx="0">
+          <a:scrgbClr r="0" g="0" b="0"/>
+        </a:effectRef>
+        <a:fontRef idx="minor">
+          <a:schemeClr val="lt1"/>
+        </a:fontRef>
+      </dsp:style>
+      <dsp:txBody>
+        <a:bodyPr vert="horz" wrap="square" lIns="149352" tIns="149352" rIns="149352" bIns="149352" anchor="ctr"/>
+        <a:lstStyle>
+          <a:lvl1pPr algn="ctr">
+            <a:defRPr sz="2100"/>
+          </a:lvl1pPr>
+          <a:lvl2pPr marL="171450" indent="-171450" algn="ctr">
+            <a:defRPr sz="1600"/>
+          </a:lvl2pPr>
+          <a:lvl3pPr marL="342900" indent="-171450" algn="ctr">
+            <a:defRPr sz="1600"/>
+          </a:lvl3pPr>
+          <a:lvl4pPr marL="514350" indent="-171450" algn="ctr">
+            <a:defRPr sz="1600"/>
+          </a:lvl4pPr>
+          <a:lvl5pPr marL="685800" indent="-171450" algn="ctr">
+            <a:defRPr sz="1600"/>
+          </a:lvl5pPr>
+          <a:lvl6pPr marL="857250" indent="-171450" algn="ctr">
+            <a:defRPr sz="1600"/>
+          </a:lvl6pPr>
+          <a:lvl7pPr marL="1028700" indent="-171450" algn="ctr">
+            <a:defRPr sz="1600"/>
+          </a:lvl7pPr>
+          <a:lvl8pPr marL="1200150" indent="-171450" algn="ctr">
+            <a:defRPr sz="1600"/>
+          </a:lvl8pPr>
+          <a:lvl9pPr marL="1371600" indent="-171450" algn="ctr">
+            <a:defRPr sz="1600"/>
+          </a:lvl9pPr>
+        </a:lstStyle>
+        <a:p>
+          <a:pPr lvl="0">
+            <a:lnSpc>
+              <a:spcPct val="100000"/>
+            </a:lnSpc>
+            <a:spcBef>
+              <a:spcPct val="0"/>
+            </a:spcBef>
+            <a:spcAft>
+              <a:spcPct val="35000"/>
+            </a:spcAft>
+          </a:pPr>
+          <a:r>
+            <a:rPr lang="" altLang="en-US">
+              <a:solidFill>
+                <a:schemeClr val="dk1"/>
+              </a:solidFill>
+            </a:rPr>
+            <a:t>Equazioni di Maxwell</a:t>
+          </a:r>
+          <a:endParaRPr lang="" altLang="en-US">
+            <a:solidFill>
+              <a:schemeClr val="dk1"/>
+            </a:solidFill>
+          </a:endParaRPr>
+        </a:p>
+      </dsp:txBody>
+      <dsp:txXfrm>
+        <a:off x="12655" y="241157"/>
+        <a:ext cx="2266370" cy="1359822"/>
+      </dsp:txXfrm>
+    </dsp:sp>
+    <dsp:sp modelId="{EBB69596-36AB-40F1-91C5-FC3350A00067}">
+      <dsp:nvSpPr>
+        <dsp:cNvPr id="6" name="Freeform 5"/>
+        <dsp:cNvSpPr/>
+      </dsp:nvSpPr>
+      <dsp:spPr bwMode="white">
+        <a:xfrm>
+          <a:off x="5066659" y="921068"/>
+          <a:ext cx="521265" cy="0"/>
+        </a:xfrm>
+        <a:custGeom>
+          <a:avLst/>
+          <a:gdLst/>
+          <a:ahLst/>
+          <a:cxnLst/>
+          <a:pathLst>
+            <a:path w="821">
+              <a:moveTo>
+                <a:pt x="0" y="0"/>
+              </a:moveTo>
+              <a:lnTo>
+                <a:pt x="821" y="0"/>
+              </a:lnTo>
+            </a:path>
+          </a:pathLst>
+        </a:custGeom>
+        <a:ln>
+          <a:tailEnd type="arrow" w="lg" len="med"/>
+        </a:ln>
+      </dsp:spPr>
+      <dsp:style>
+        <a:lnRef idx="1">
+          <a:schemeClr val="accent6"/>
+        </a:lnRef>
+        <a:fillRef idx="0">
+          <a:schemeClr val="accent6"/>
+        </a:fillRef>
+        <a:effectRef idx="0">
+          <a:scrgbClr r="0" g="0" b="0"/>
+        </a:effectRef>
+        <a:fontRef idx="minor"/>
+      </dsp:style>
+      <dsp:txBody>
+        <a:bodyPr lIns="12700" tIns="0" rIns="12700" bIns="0" anchor="ctr"/>
+        <a:lstStyle>
+          <a:lvl1pPr algn="ctr">
+            <a:defRPr sz="5500"/>
+          </a:lvl1pPr>
+          <a:lvl2pPr marL="285750" indent="-285750" algn="ctr">
+            <a:defRPr sz="4200"/>
+          </a:lvl2pPr>
+          <a:lvl3pPr marL="571500" indent="-285750" algn="ctr">
+            <a:defRPr sz="4200"/>
+          </a:lvl3pPr>
+          <a:lvl4pPr marL="857250" indent="-285750" algn="ctr">
+            <a:defRPr sz="4200"/>
+          </a:lvl4pPr>
+          <a:lvl5pPr marL="1143000" indent="-285750" algn="ctr">
+            <a:defRPr sz="4200"/>
+          </a:lvl5pPr>
+          <a:lvl6pPr marL="1428750" indent="-285750" algn="ctr">
+            <a:defRPr sz="4200"/>
+          </a:lvl6pPr>
+          <a:lvl7pPr marL="1714500" indent="-285750" algn="ctr">
+            <a:defRPr sz="4200"/>
+          </a:lvl7pPr>
+          <a:lvl8pPr marL="2000250" indent="-285750" algn="ctr">
+            <a:defRPr sz="4200"/>
+          </a:lvl8pPr>
+          <a:lvl9pPr marL="2286000" indent="-285750" algn="ctr">
+            <a:defRPr sz="4200"/>
+          </a:lvl9pPr>
+        </a:lstStyle>
+        <a:p>
+          <a:pPr lvl="0">
+            <a:lnSpc>
+              <a:spcPct val="100000"/>
+            </a:lnSpc>
+            <a:spcBef>
+              <a:spcPct val="0"/>
+            </a:spcBef>
+            <a:spcAft>
+              <a:spcPct val="35000"/>
+            </a:spcAft>
+          </a:pPr>
+          <a:endParaRPr lang="en-US">
+            <a:solidFill>
+              <a:schemeClr val="dk1"/>
+            </a:solidFill>
+          </a:endParaRPr>
+        </a:p>
+      </dsp:txBody>
+      <dsp:txXfrm>
+        <a:off x="5066659" y="921068"/>
+        <a:ext cx="521265" cy="0"/>
+      </dsp:txXfrm>
+    </dsp:sp>
+    <dsp:sp modelId="{0482690C-586E-41D6-8B40-4CA7581A9CE9}">
+      <dsp:nvSpPr>
+        <dsp:cNvPr id="5" name="Rectangle 4"/>
+        <dsp:cNvSpPr/>
+      </dsp:nvSpPr>
+      <dsp:spPr bwMode="white">
+        <a:xfrm>
+          <a:off x="2800289" y="241157"/>
+          <a:ext cx="2266370" cy="1359822"/>
+        </a:xfrm>
+        <a:prstGeom prst="rect">
+          <a:avLst/>
+        </a:prstGeom>
+      </dsp:spPr>
+      <dsp:style>
+        <a:lnRef idx="2">
+          <a:schemeClr val="accent6">
+            <a:shade val="80000"/>
+          </a:schemeClr>
+        </a:lnRef>
+        <a:fillRef idx="1">
+          <a:schemeClr val="lt1"/>
+        </a:fillRef>
+        <a:effectRef idx="0">
+          <a:scrgbClr r="0" g="0" b="0"/>
+        </a:effectRef>
+        <a:fontRef idx="minor">
+          <a:schemeClr val="lt1"/>
+        </a:fontRef>
+      </dsp:style>
+      <dsp:txBody>
+        <a:bodyPr vert="horz" wrap="square" lIns="149352" tIns="149352" rIns="149352" bIns="149352" anchor="ctr"/>
+        <a:lstStyle>
+          <a:lvl1pPr algn="ctr">
+            <a:defRPr sz="2100"/>
+          </a:lvl1pPr>
+          <a:lvl2pPr marL="171450" indent="-171450" algn="ctr">
+            <a:defRPr sz="1600"/>
+          </a:lvl2pPr>
+          <a:lvl3pPr marL="342900" indent="-171450" algn="ctr">
+            <a:defRPr sz="1600"/>
+          </a:lvl3pPr>
+          <a:lvl4pPr marL="514350" indent="-171450" algn="ctr">
+            <a:defRPr sz="1600"/>
+          </a:lvl4pPr>
+          <a:lvl5pPr marL="685800" indent="-171450" algn="ctr">
+            <a:defRPr sz="1600"/>
+          </a:lvl5pPr>
+          <a:lvl6pPr marL="857250" indent="-171450" algn="ctr">
+            <a:defRPr sz="1600"/>
+          </a:lvl6pPr>
+          <a:lvl7pPr marL="1028700" indent="-171450" algn="ctr">
+            <a:defRPr sz="1600"/>
+          </a:lvl7pPr>
+          <a:lvl8pPr marL="1200150" indent="-171450" algn="ctr">
+            <a:defRPr sz="1600"/>
+          </a:lvl8pPr>
+          <a:lvl9pPr marL="1371600" indent="-171450" algn="ctr">
+            <a:defRPr sz="1600"/>
+          </a:lvl9pPr>
+        </a:lstStyle>
+        <a:p>
+          <a:pPr lvl="0">
+            <a:lnSpc>
+              <a:spcPct val="100000"/>
+            </a:lnSpc>
+            <a:spcBef>
+              <a:spcPct val="0"/>
+            </a:spcBef>
+            <a:spcAft>
+              <a:spcPct val="35000"/>
+            </a:spcAft>
+          </a:pPr>
+          <a:r>
+            <a:rPr lang="" altLang="en-US">
+              <a:solidFill>
+                <a:schemeClr val="dk1"/>
+              </a:solidFill>
+            </a:rPr>
+            <a:t>Luce come un’onda elettromagnetica</a:t>
+          </a:r>
+          <a:endParaRPr lang="" altLang="en-US">
+            <a:solidFill>
+              <a:schemeClr val="dk1"/>
+            </a:solidFill>
+          </a:endParaRPr>
+        </a:p>
+      </dsp:txBody>
+      <dsp:txXfrm>
+        <a:off x="2800289" y="241157"/>
+        <a:ext cx="2266370" cy="1359822"/>
+      </dsp:txXfrm>
+    </dsp:sp>
+    <dsp:sp modelId="{E5145E43-B450-47CE-B1E5-1482BCF4071D}">
+      <dsp:nvSpPr>
+        <dsp:cNvPr id="7" name="Rectangle 6"/>
+        <dsp:cNvSpPr/>
+      </dsp:nvSpPr>
+      <dsp:spPr bwMode="white">
+        <a:xfrm>
+          <a:off x="5587924" y="241157"/>
+          <a:ext cx="2266370" cy="1359822"/>
+        </a:xfrm>
+        <a:prstGeom prst="rect">
+          <a:avLst/>
+        </a:prstGeom>
+      </dsp:spPr>
+      <dsp:style>
+        <a:lnRef idx="2">
+          <a:schemeClr val="accent6">
+            <a:shade val="80000"/>
+          </a:schemeClr>
+        </a:lnRef>
+        <a:fillRef idx="1">
+          <a:schemeClr val="lt1"/>
+        </a:fillRef>
+        <a:effectRef idx="0">
+          <a:scrgbClr r="0" g="0" b="0"/>
+        </a:effectRef>
+        <a:fontRef idx="minor">
+          <a:schemeClr val="lt1"/>
+        </a:fontRef>
+      </dsp:style>
+      <dsp:txBody>
+        <a:bodyPr vert="horz" wrap="square" lIns="149352" tIns="149352" rIns="149352" bIns="149352" anchor="ctr"/>
+        <a:lstStyle>
+          <a:lvl1pPr algn="ctr">
+            <a:defRPr sz="2100"/>
+          </a:lvl1pPr>
+          <a:lvl2pPr marL="171450" indent="-171450" algn="ctr">
+            <a:defRPr sz="1600"/>
+          </a:lvl2pPr>
+          <a:lvl3pPr marL="342900" indent="-171450" algn="ctr">
+            <a:defRPr sz="1600"/>
+          </a:lvl3pPr>
+          <a:lvl4pPr marL="514350" indent="-171450" algn="ctr">
+            <a:defRPr sz="1600"/>
+          </a:lvl4pPr>
+          <a:lvl5pPr marL="685800" indent="-171450" algn="ctr">
+            <a:defRPr sz="1600"/>
+          </a:lvl5pPr>
+          <a:lvl6pPr marL="857250" indent="-171450" algn="ctr">
+            <a:defRPr sz="1600"/>
+          </a:lvl6pPr>
+          <a:lvl7pPr marL="1028700" indent="-171450" algn="ctr">
+            <a:defRPr sz="1600"/>
+          </a:lvl7pPr>
+          <a:lvl8pPr marL="1200150" indent="-171450" algn="ctr">
+            <a:defRPr sz="1600"/>
+          </a:lvl8pPr>
+          <a:lvl9pPr marL="1371600" indent="-171450" algn="ctr">
+            <a:defRPr sz="1600"/>
+          </a:lvl9pPr>
+        </a:lstStyle>
+        <a:p>
+          <a:pPr lvl="0">
+            <a:lnSpc>
+              <a:spcPct val="100000"/>
+            </a:lnSpc>
+            <a:spcBef>
+              <a:spcPct val="0"/>
+            </a:spcBef>
+            <a:spcAft>
+              <a:spcPct val="35000"/>
+            </a:spcAft>
+          </a:pPr>
+          <a:r>
+            <a:rPr lang="" altLang="en-US">
+              <a:solidFill>
+                <a:schemeClr val="dk1"/>
+              </a:solidFill>
+            </a:rPr>
+            <a:t>La luce si progaga nel vuoto con una velocità costante</a:t>
+          </a:r>
+          <a:endParaRPr lang="" altLang="en-US">
+            <a:solidFill>
+              <a:schemeClr val="dk1"/>
+            </a:solidFill>
+          </a:endParaRPr>
+        </a:p>
+      </dsp:txBody>
+      <dsp:txXfrm>
+        <a:off x="5587924" y="241157"/>
+        <a:ext cx="2266370" cy="1359822"/>
+      </dsp:txXfrm>
+    </dsp:sp>
+  </dsp:spTree>
+</dsp:drawing>
+</file>
+
 <file path=ppt/diagrams/layout1.xml><?xml version="1.0" encoding="utf-8"?>
+<dgm:layoutDef xmlns:dgm="http://schemas.openxmlformats.org/drawingml/2006/diagram" xmlns:a="http://schemas.openxmlformats.org/drawingml/2006/main" uniqueId="urn:microsoft.com/office/officeart/2005/8/layout/bProcess3">
+  <dgm:title val=""/>
+  <dgm:desc val=""/>
+  <dgm:catLst>
+    <dgm:cat type="process" pri="18000"/>
+  </dgm:catLst>
+  <dgm:sampData>
+    <dgm:dataModel>
+      <dgm:ptLst>
+        <dgm:pt modelId="0" type="doc"/>
+        <dgm:pt modelId="1">
+          <dgm:prSet phldr="true"/>
+        </dgm:pt>
+        <dgm:pt modelId="2">
+          <dgm:prSet phldr="true"/>
+        </dgm:pt>
+        <dgm:pt modelId="3">
+          <dgm:prSet phldr="true"/>
+        </dgm:pt>
+        <dgm:pt modelId="4">
+          <dgm:prSet phldr="true"/>
+        </dgm:pt>
+        <dgm:pt modelId="5">
+          <dgm:prSet phldr="true"/>
+        </dgm:pt>
+      </dgm:ptLst>
+      <dgm:cxnLst>
+        <dgm:cxn modelId="7" srcId="0" destId="1" srcOrd="0" destOrd="0"/>
+        <dgm:cxn modelId="8" srcId="0" destId="2" srcOrd="1" destOrd="0"/>
+        <dgm:cxn modelId="9" srcId="0" destId="3" srcOrd="2" destOrd="0"/>
+        <dgm:cxn modelId="10" srcId="0" destId="4" srcOrd="3" destOrd="0"/>
+        <dgm:cxn modelId="11" srcId="0" destId="5" srcOrd="4" destOrd="0"/>
+      </dgm:cxnLst>
+      <dgm:bg/>
+      <dgm:whole/>
+    </dgm:dataModel>
+  </dgm:sampData>
+  <dgm:styleData>
+    <dgm:dataModel>
+      <dgm:ptLst>
+        <dgm:pt modelId="0" type="doc">
+          <dgm:prSet qsTypeId="urn:microsoft.com/office/officeart/2005/8/quickstyle/simple5"/>
+        </dgm:pt>
+        <dgm:pt modelId="1"/>
+        <dgm:pt modelId="2"/>
+      </dgm:ptLst>
+      <dgm:cxnLst>
+        <dgm:cxn modelId="3" srcId="0" destId="1" srcOrd="0" destOrd="0"/>
+        <dgm:cxn modelId="4" srcId="0" destId="2" srcOrd="1" destOrd="0"/>
+      </dgm:cxnLst>
+      <dgm:bg/>
+      <dgm:whole/>
+    </dgm:dataModel>
+  </dgm:styleData>
+  <dgm:clrData>
+    <dgm:dataModel>
+      <dgm:ptLst>
+        <dgm:pt modelId="0" type="doc">
+          <dgm:prSet csTypeId="urn:microsoft.com/office/officeart/2005/8/colors/accent6_5"/>
+        </dgm:pt>
+        <dgm:pt modelId="1"/>
+        <dgm:pt modelId="2"/>
+        <dgm:pt modelId="3"/>
+        <dgm:pt modelId="4"/>
+      </dgm:ptLst>
+      <dgm:cxnLst>
+        <dgm:cxn modelId="5" srcId="0" destId="1" srcOrd="0" destOrd="0"/>
+        <dgm:cxn modelId="6" srcId="0" destId="2" srcOrd="1" destOrd="0"/>
+        <dgm:cxn modelId="7" srcId="0" destId="3" srcOrd="2" destOrd="0"/>
+        <dgm:cxn modelId="8" srcId="0" destId="4" srcOrd="3" destOrd="0"/>
+      </dgm:cxnLst>
+      <dgm:bg/>
+      <dgm:whole/>
+    </dgm:dataModel>
+  </dgm:clrData>
+  <dgm:layoutNode name="Name0">
+    <dgm:varLst>
+      <dgm:dir/>
+      <dgm:resizeHandles val="exact"/>
+    </dgm:varLst>
+    <dgm:choose name="Name1">
+      <dgm:if name="Name2" axis="self" func="var" arg="dir" op="equ" val="norm">
+        <dgm:alg type="snake">
+          <dgm:param type="bkpt" val="endCnv"/>
+          <dgm:param type="contDir" val="sameDir"/>
+          <dgm:param type="grDir" val="tL"/>
+          <dgm:param type="flowDir" val="row"/>
+        </dgm:alg>
+      </dgm:if>
+      <dgm:else name="Name3">
+        <dgm:alg type="snake">
+          <dgm:param type="bkpt" val="endCnv"/>
+          <dgm:param type="contDir" val="sameDir"/>
+          <dgm:param type="grDir" val="tR"/>
+          <dgm:param type="flowDir" val="row"/>
+        </dgm:alg>
+      </dgm:else>
+    </dgm:choose>
+    <dgm:shape xmlns:r="http://schemas.openxmlformats.org/officeDocument/2006/relationships" r:blip="">
+      <dgm:adjLst/>
+    </dgm:shape>
+    <dgm:presOf/>
+    <dgm:constrLst>
+      <dgm:constr type="w" for="ch" ptType="node" refType="w"/>
+      <dgm:constr type="w" for="ch" forName="sibTrans" refType="w" refFor="ch" refPtType="node" op="equ" fact="0.23"/>
+      <dgm:constr type="sp" refType="w" refFor="ch" refForName="sibTrans" op="equ"/>
+      <dgm:constr type="userB" for="des" forName="connectorText" refType="sp"/>
+      <dgm:constr type="primFontSz" for="ch" ptType="node" op="equ" val="65"/>
+      <dgm:constr type="h" for="ch" ptType="sibTrans" op="equ"/>
+      <dgm:constr type="primFontSz" for="des" forName="connectorText" op="equ" val="55"/>
+      <dgm:constr type="primFontSz" for="des" forName="connectorText" refType="primFontSz" refFor="ch" refPtType="node" op="lte" fact="0.8"/>
+    </dgm:constrLst>
+    <dgm:ruleLst/>
+    <dgm:forEach name="nodesForEach" axis="ch" ptType="node">
+      <dgm:layoutNode name="node">
+        <dgm:varLst>
+          <dgm:bulletEnabled val="true"/>
+        </dgm:varLst>
+        <dgm:alg type="tx"/>
+        <dgm:shape xmlns:r="http://schemas.openxmlformats.org/officeDocument/2006/relationships" type="rect" r:blip="">
+          <dgm:adjLst/>
+        </dgm:shape>
+        <dgm:presOf axis="desOrSelf" ptType="node"/>
+        <dgm:constrLst>
+          <dgm:constr type="h" refType="w" fact="0.6"/>
+        </dgm:constrLst>
+        <dgm:ruleLst>
+          <dgm:rule type="primFontSz" val="5" fact="NaN" max="NaN"/>
+        </dgm:ruleLst>
+      </dgm:layoutNode>
+      <dgm:forEach name="sibTransForEach" axis="followSib" ptType="sibTrans" cnt="1">
+        <dgm:layoutNode name="sibTrans">
+          <dgm:choose name="Name4">
+            <dgm:if name="Name5" axis="self" func="var" arg="dir" op="equ" val="norm">
+              <dgm:alg type="conn">
+                <dgm:param type="dim" val="1D"/>
+                <dgm:param type="connRout" val="bend"/>
+                <dgm:param type="begPts" val="midR bCtr"/>
+                <dgm:param type="endPts" val="midL tCtr"/>
+              </dgm:alg>
+            </dgm:if>
+            <dgm:else name="Name6">
+              <dgm:alg type="conn">
+                <dgm:param type="dim" val="1D"/>
+                <dgm:param type="connRout" val="bend"/>
+                <dgm:param type="begPts" val="midL bCtr"/>
+                <dgm:param type="endPts" val="midR tCtr"/>
+              </dgm:alg>
+            </dgm:else>
+          </dgm:choose>
+          <dgm:shape xmlns:r="http://schemas.openxmlformats.org/officeDocument/2006/relationships" type="conn" r:blip="" zOrderOff="-2">
+            <dgm:adjLst/>
+          </dgm:shape>
+          <dgm:presOf axis="self"/>
+          <dgm:constrLst>
+            <dgm:constr type="begPad" val="-0.05"/>
+            <dgm:constr type="endPad" val="0.9"/>
+            <dgm:constr type="userA" for="ch" refType="connDist"/>
+          </dgm:constrLst>
+          <dgm:ruleLst/>
+          <dgm:layoutNode name="connectorText">
+            <dgm:alg type="tx">
+              <dgm:param type="autoTxRot" val="upr"/>
+            </dgm:alg>
+            <dgm:shape xmlns:r="http://schemas.openxmlformats.org/officeDocument/2006/relationships" type="rect" r:blip="" hideGeom="true">
+              <dgm:adjLst/>
+            </dgm:shape>
+            <dgm:presOf axis="self"/>
+            <dgm:constrLst>
+              <dgm:constr type="userA"/>
+              <dgm:constr type="userB"/>
+              <dgm:constr type="w" refType="userA" fact="0.05"/>
+              <dgm:constr type="h" refType="userB" fact="0.01"/>
+              <dgm:constr type="lMarg" val="1"/>
+              <dgm:constr type="rMarg" val="1"/>
+              <dgm:constr type="tMarg"/>
+              <dgm:constr type="bMarg"/>
+            </dgm:constrLst>
+            <dgm:ruleLst>
+              <dgm:rule type="w" val="NaN" fact="0.6" max="NaN"/>
+              <dgm:rule type="h" val="NaN" fact="0.6" max="NaN"/>
+              <dgm:rule type="primFontSz" val="5" fact="NaN" max="NaN"/>
+            </dgm:ruleLst>
+          </dgm:layoutNode>
+        </dgm:layoutNode>
+      </dgm:forEach>
+    </dgm:forEach>
+  </dgm:layoutNode>
+</dgm:layoutDef>
+</file>
+
+<file path=ppt/diagrams/layout2.xml><?xml version="1.0" encoding="utf-8"?>
 <dgm:layoutDef xmlns:dgm="http://schemas.openxmlformats.org/drawingml/2006/diagram" xmlns:a="http://schemas.openxmlformats.org/drawingml/2006/main" uniqueId="urn:microsoft.com/office/officeart/2005/8/layout/bProcess3">
   <dgm:title val=""/>
   <dgm:desc val=""/>
@@ -4623,6 +6346,991 @@
     <dgm:txPr/>
     <dgm:style>
       <a:lnRef idx="3">
+        <a:scrgbClr r="0" g="0" b="0"/>
+      </a:lnRef>
+      <a:fillRef idx="1">
+        <a:scrgbClr r="0" g="0" b="0"/>
+      </a:fillRef>
+      <a:effectRef idx="0">
+        <a:scrgbClr r="0" g="0" b="0"/>
+      </a:effectRef>
+      <a:fontRef idx="minor">
+        <a:schemeClr val="tx1"/>
+      </a:fontRef>
+    </dgm:style>
+  </dgm:styleLbl>
+</dgm:styleDef>
+</file>
+
+<file path=ppt/diagrams/quickStyle2.xml><?xml version="1.0" encoding="utf-8"?>
+<dgm:styleDef xmlns:dgm="http://schemas.openxmlformats.org/drawingml/2006/diagram" xmlns:a="http://schemas.openxmlformats.org/drawingml/2006/main" uniqueId="urn:microsoft.com/office/officeart/2005/8/quickstyle/simple1">
+  <dgm:title val=""/>
+  <dgm:desc val=""/>
+  <dgm:catLst>
+    <dgm:cat type="simple" pri="10100"/>
+  </dgm:catLst>
+  <dgm:scene3d>
+    <a:camera prst="orthographicFront"/>
+    <a:lightRig rig="threePt" dir="t"/>
+  </dgm:scene3d>
+  <dgm:styleLbl name="alignAcc1">
+    <dgm:scene3d>
+      <a:camera prst="orthographicFront"/>
+      <a:lightRig rig="threePt" dir="t"/>
+    </dgm:scene3d>
+    <dgm:txPr/>
+    <dgm:style>
+      <a:lnRef idx="2">
+        <a:scrgbClr r="0" g="0" b="0"/>
+      </a:lnRef>
+      <a:fillRef idx="1">
+        <a:scrgbClr r="0" g="0" b="0"/>
+      </a:fillRef>
+      <a:effectRef idx="0">
+        <a:scrgbClr r="0" g="0" b="0"/>
+      </a:effectRef>
+      <a:fontRef idx="minor"/>
+    </dgm:style>
+  </dgm:styleLbl>
+  <dgm:styleLbl name="alignAccFollowNode1">
+    <dgm:scene3d>
+      <a:camera prst="orthographicFront"/>
+      <a:lightRig rig="threePt" dir="t"/>
+    </dgm:scene3d>
+    <dgm:txPr/>
+    <dgm:style>
+      <a:lnRef idx="2">
+        <a:scrgbClr r="0" g="0" b="0"/>
+      </a:lnRef>
+      <a:fillRef idx="1">
+        <a:scrgbClr r="0" g="0" b="0"/>
+      </a:fillRef>
+      <a:effectRef idx="0">
+        <a:scrgbClr r="0" g="0" b="0"/>
+      </a:effectRef>
+      <a:fontRef idx="minor"/>
+    </dgm:style>
+  </dgm:styleLbl>
+  <dgm:styleLbl name="alignImgPlace1">
+    <dgm:scene3d>
+      <a:camera prst="orthographicFront"/>
+      <a:lightRig rig="threePt" dir="t"/>
+    </dgm:scene3d>
+    <dgm:txPr/>
+    <dgm:style>
+      <a:lnRef idx="2">
+        <a:scrgbClr r="0" g="0" b="0"/>
+      </a:lnRef>
+      <a:fillRef idx="1">
+        <a:scrgbClr r="0" g="0" b="0"/>
+      </a:fillRef>
+      <a:effectRef idx="0">
+        <a:scrgbClr r="0" g="0" b="0"/>
+      </a:effectRef>
+      <a:fontRef idx="minor"/>
+    </dgm:style>
+  </dgm:styleLbl>
+  <dgm:styleLbl name="alignNode1">
+    <dgm:scene3d>
+      <a:camera prst="orthographicFront"/>
+      <a:lightRig rig="threePt" dir="t"/>
+    </dgm:scene3d>
+    <dgm:txPr/>
+    <dgm:style>
+      <a:lnRef idx="2">
+        <a:scrgbClr r="0" g="0" b="0"/>
+      </a:lnRef>
+      <a:fillRef idx="1">
+        <a:scrgbClr r="0" g="0" b="0"/>
+      </a:fillRef>
+      <a:effectRef idx="0">
+        <a:scrgbClr r="0" g="0" b="0"/>
+      </a:effectRef>
+      <a:fontRef idx="minor">
+        <a:schemeClr val="lt1"/>
+      </a:fontRef>
+    </dgm:style>
+  </dgm:styleLbl>
+  <dgm:styleLbl name="asst0">
+    <dgm:scene3d>
+      <a:camera prst="orthographicFront"/>
+      <a:lightRig rig="threePt" dir="t"/>
+    </dgm:scene3d>
+    <dgm:txPr/>
+    <dgm:style>
+      <a:lnRef idx="2">
+        <a:scrgbClr r="0" g="0" b="0"/>
+      </a:lnRef>
+      <a:fillRef idx="1">
+        <a:scrgbClr r="0" g="0" b="0"/>
+      </a:fillRef>
+      <a:effectRef idx="0">
+        <a:scrgbClr r="0" g="0" b="0"/>
+      </a:effectRef>
+      <a:fontRef idx="minor">
+        <a:schemeClr val="lt1"/>
+      </a:fontRef>
+    </dgm:style>
+  </dgm:styleLbl>
+  <dgm:styleLbl name="asst1">
+    <dgm:scene3d>
+      <a:camera prst="orthographicFront"/>
+      <a:lightRig rig="threePt" dir="t"/>
+    </dgm:scene3d>
+    <dgm:txPr/>
+    <dgm:style>
+      <a:lnRef idx="2">
+        <a:scrgbClr r="0" g="0" b="0"/>
+      </a:lnRef>
+      <a:fillRef idx="1">
+        <a:scrgbClr r="0" g="0" b="0"/>
+      </a:fillRef>
+      <a:effectRef idx="0">
+        <a:scrgbClr r="0" g="0" b="0"/>
+      </a:effectRef>
+      <a:fontRef idx="minor">
+        <a:schemeClr val="lt1"/>
+      </a:fontRef>
+    </dgm:style>
+  </dgm:styleLbl>
+  <dgm:styleLbl name="asst2">
+    <dgm:scene3d>
+      <a:camera prst="orthographicFront"/>
+      <a:lightRig rig="threePt" dir="t"/>
+    </dgm:scene3d>
+    <dgm:txPr/>
+    <dgm:style>
+      <a:lnRef idx="2">
+        <a:scrgbClr r="0" g="0" b="0"/>
+      </a:lnRef>
+      <a:fillRef idx="1">
+        <a:scrgbClr r="0" g="0" b="0"/>
+      </a:fillRef>
+      <a:effectRef idx="0">
+        <a:scrgbClr r="0" g="0" b="0"/>
+      </a:effectRef>
+      <a:fontRef idx="minor">
+        <a:schemeClr val="lt1"/>
+      </a:fontRef>
+    </dgm:style>
+  </dgm:styleLbl>
+  <dgm:styleLbl name="asst3">
+    <dgm:scene3d>
+      <a:camera prst="orthographicFront"/>
+      <a:lightRig rig="threePt" dir="t"/>
+    </dgm:scene3d>
+    <dgm:txPr/>
+    <dgm:style>
+      <a:lnRef idx="2">
+        <a:scrgbClr r="0" g="0" b="0"/>
+      </a:lnRef>
+      <a:fillRef idx="1">
+        <a:scrgbClr r="0" g="0" b="0"/>
+      </a:fillRef>
+      <a:effectRef idx="0">
+        <a:scrgbClr r="0" g="0" b="0"/>
+      </a:effectRef>
+      <a:fontRef idx="minor">
+        <a:schemeClr val="lt1"/>
+      </a:fontRef>
+    </dgm:style>
+  </dgm:styleLbl>
+  <dgm:styleLbl name="asst4">
+    <dgm:scene3d>
+      <a:camera prst="orthographicFront"/>
+      <a:lightRig rig="threePt" dir="t"/>
+    </dgm:scene3d>
+    <dgm:txPr/>
+    <dgm:style>
+      <a:lnRef idx="2">
+        <a:scrgbClr r="0" g="0" b="0"/>
+      </a:lnRef>
+      <a:fillRef idx="1">
+        <a:scrgbClr r="0" g="0" b="0"/>
+      </a:fillRef>
+      <a:effectRef idx="0">
+        <a:scrgbClr r="0" g="0" b="0"/>
+      </a:effectRef>
+      <a:fontRef idx="minor">
+        <a:schemeClr val="lt1"/>
+      </a:fontRef>
+    </dgm:style>
+  </dgm:styleLbl>
+  <dgm:styleLbl name="bgAcc1">
+    <dgm:scene3d>
+      <a:camera prst="orthographicFront"/>
+      <a:lightRig rig="threePt" dir="t"/>
+    </dgm:scene3d>
+    <dgm:txPr/>
+    <dgm:style>
+      <a:lnRef idx="2">
+        <a:scrgbClr r="0" g="0" b="0"/>
+      </a:lnRef>
+      <a:fillRef idx="1">
+        <a:scrgbClr r="0" g="0" b="0"/>
+      </a:fillRef>
+      <a:effectRef idx="0">
+        <a:scrgbClr r="0" g="0" b="0"/>
+      </a:effectRef>
+      <a:fontRef idx="minor"/>
+    </dgm:style>
+  </dgm:styleLbl>
+  <dgm:styleLbl name="bgAccFollowNode1">
+    <dgm:scene3d>
+      <a:camera prst="orthographicFront"/>
+      <a:lightRig rig="threePt" dir="t"/>
+    </dgm:scene3d>
+    <dgm:txPr/>
+    <dgm:style>
+      <a:lnRef idx="2">
+        <a:scrgbClr r="0" g="0" b="0"/>
+      </a:lnRef>
+      <a:fillRef idx="1">
+        <a:scrgbClr r="0" g="0" b="0"/>
+      </a:fillRef>
+      <a:effectRef idx="0">
+        <a:scrgbClr r="0" g="0" b="0"/>
+      </a:effectRef>
+      <a:fontRef idx="minor"/>
+    </dgm:style>
+  </dgm:styleLbl>
+  <dgm:styleLbl name="bgImgPlace1">
+    <dgm:scene3d>
+      <a:camera prst="orthographicFront"/>
+      <a:lightRig rig="threePt" dir="t"/>
+    </dgm:scene3d>
+    <dgm:txPr/>
+    <dgm:style>
+      <a:lnRef idx="2">
+        <a:scrgbClr r="0" g="0" b="0"/>
+      </a:lnRef>
+      <a:fillRef idx="1">
+        <a:scrgbClr r="0" g="0" b="0"/>
+      </a:fillRef>
+      <a:effectRef idx="0">
+        <a:scrgbClr r="0" g="0" b="0"/>
+      </a:effectRef>
+      <a:fontRef idx="minor"/>
+    </dgm:style>
+  </dgm:styleLbl>
+  <dgm:styleLbl name="bgShp">
+    <dgm:scene3d>
+      <a:camera prst="orthographicFront"/>
+      <a:lightRig rig="threePt" dir="t"/>
+    </dgm:scene3d>
+    <dgm:txPr/>
+    <dgm:style>
+      <a:lnRef idx="0">
+        <a:scrgbClr r="0" g="0" b="0"/>
+      </a:lnRef>
+      <a:fillRef idx="1">
+        <a:scrgbClr r="0" g="0" b="0"/>
+      </a:fillRef>
+      <a:effectRef idx="0">
+        <a:scrgbClr r="0" g="0" b="0"/>
+      </a:effectRef>
+      <a:fontRef idx="minor"/>
+    </dgm:style>
+  </dgm:styleLbl>
+  <dgm:styleLbl name="bgSibTrans2D1">
+    <dgm:scene3d>
+      <a:camera prst="orthographicFront"/>
+      <a:lightRig rig="threePt" dir="t"/>
+    </dgm:scene3d>
+    <dgm:txPr/>
+    <dgm:style>
+      <a:lnRef idx="0">
+        <a:scrgbClr r="0" g="0" b="0"/>
+      </a:lnRef>
+      <a:fillRef idx="1">
+        <a:scrgbClr r="0" g="0" b="0"/>
+      </a:fillRef>
+      <a:effectRef idx="0">
+        <a:scrgbClr r="0" g="0" b="0"/>
+      </a:effectRef>
+      <a:fontRef idx="minor">
+        <a:schemeClr val="lt1"/>
+      </a:fontRef>
+    </dgm:style>
+  </dgm:styleLbl>
+  <dgm:styleLbl name="callout">
+    <dgm:scene3d>
+      <a:camera prst="orthographicFront"/>
+      <a:lightRig rig="threePt" dir="t"/>
+    </dgm:scene3d>
+    <dgm:txPr/>
+    <dgm:style>
+      <a:lnRef idx="2">
+        <a:scrgbClr r="0" g="0" b="0"/>
+      </a:lnRef>
+      <a:fillRef idx="1">
+        <a:scrgbClr r="0" g="0" b="0"/>
+      </a:fillRef>
+      <a:effectRef idx="0">
+        <a:scrgbClr r="0" g="0" b="0"/>
+      </a:effectRef>
+      <a:fontRef idx="minor"/>
+    </dgm:style>
+  </dgm:styleLbl>
+  <dgm:styleLbl name="conFgAcc1">
+    <dgm:scene3d>
+      <a:camera prst="orthographicFront"/>
+      <a:lightRig rig="threePt" dir="t"/>
+    </dgm:scene3d>
+    <dgm:txPr/>
+    <dgm:style>
+      <a:lnRef idx="2">
+        <a:scrgbClr r="0" g="0" b="0"/>
+      </a:lnRef>
+      <a:fillRef idx="1">
+        <a:scrgbClr r="0" g="0" b="0"/>
+      </a:fillRef>
+      <a:effectRef idx="0">
+        <a:scrgbClr r="0" g="0" b="0"/>
+      </a:effectRef>
+      <a:fontRef idx="minor"/>
+    </dgm:style>
+  </dgm:styleLbl>
+  <dgm:styleLbl name="dkBgShp">
+    <dgm:scene3d>
+      <a:camera prst="orthographicFront"/>
+      <a:lightRig rig="threePt" dir="t"/>
+    </dgm:scene3d>
+    <dgm:txPr/>
+    <dgm:style>
+      <a:lnRef idx="0">
+        <a:scrgbClr r="0" g="0" b="0"/>
+      </a:lnRef>
+      <a:fillRef idx="1">
+        <a:scrgbClr r="0" g="0" b="0"/>
+      </a:fillRef>
+      <a:effectRef idx="0">
+        <a:scrgbClr r="0" g="0" b="0"/>
+      </a:effectRef>
+      <a:fontRef idx="minor"/>
+    </dgm:style>
+  </dgm:styleLbl>
+  <dgm:styleLbl name="fgAcc0">
+    <dgm:scene3d>
+      <a:camera prst="orthographicFront"/>
+      <a:lightRig rig="threePt" dir="t"/>
+    </dgm:scene3d>
+    <dgm:txPr/>
+    <dgm:style>
+      <a:lnRef idx="2">
+        <a:scrgbClr r="0" g="0" b="0"/>
+      </a:lnRef>
+      <a:fillRef idx="1">
+        <a:scrgbClr r="0" g="0" b="0"/>
+      </a:fillRef>
+      <a:effectRef idx="0">
+        <a:scrgbClr r="0" g="0" b="0"/>
+      </a:effectRef>
+      <a:fontRef idx="minor"/>
+    </dgm:style>
+  </dgm:styleLbl>
+  <dgm:styleLbl name="fgAcc1">
+    <dgm:scene3d>
+      <a:camera prst="orthographicFront"/>
+      <a:lightRig rig="threePt" dir="t"/>
+    </dgm:scene3d>
+    <dgm:txPr/>
+    <dgm:style>
+      <a:lnRef idx="2">
+        <a:scrgbClr r="0" g="0" b="0"/>
+      </a:lnRef>
+      <a:fillRef idx="1">
+        <a:scrgbClr r="0" g="0" b="0"/>
+      </a:fillRef>
+      <a:effectRef idx="0">
+        <a:scrgbClr r="0" g="0" b="0"/>
+      </a:effectRef>
+      <a:fontRef idx="minor"/>
+    </dgm:style>
+  </dgm:styleLbl>
+  <dgm:styleLbl name="fgAcc2">
+    <dgm:scene3d>
+      <a:camera prst="orthographicFront"/>
+      <a:lightRig rig="threePt" dir="t"/>
+    </dgm:scene3d>
+    <dgm:txPr/>
+    <dgm:style>
+      <a:lnRef idx="2">
+        <a:scrgbClr r="0" g="0" b="0"/>
+      </a:lnRef>
+      <a:fillRef idx="1">
+        <a:scrgbClr r="0" g="0" b="0"/>
+      </a:fillRef>
+      <a:effectRef idx="0">
+        <a:scrgbClr r="0" g="0" b="0"/>
+      </a:effectRef>
+      <a:fontRef idx="minor"/>
+    </dgm:style>
+  </dgm:styleLbl>
+  <dgm:styleLbl name="fgAcc3">
+    <dgm:scene3d>
+      <a:camera prst="orthographicFront"/>
+      <a:lightRig rig="threePt" dir="t"/>
+    </dgm:scene3d>
+    <dgm:txPr/>
+    <dgm:style>
+      <a:lnRef idx="2">
+        <a:scrgbClr r="0" g="0" b="0"/>
+      </a:lnRef>
+      <a:fillRef idx="1">
+        <a:scrgbClr r="0" g="0" b="0"/>
+      </a:fillRef>
+      <a:effectRef idx="0">
+        <a:scrgbClr r="0" g="0" b="0"/>
+      </a:effectRef>
+      <a:fontRef idx="minor"/>
+    </dgm:style>
+  </dgm:styleLbl>
+  <dgm:styleLbl name="fgAcc4">
+    <dgm:scene3d>
+      <a:camera prst="orthographicFront"/>
+      <a:lightRig rig="threePt" dir="t"/>
+    </dgm:scene3d>
+    <dgm:txPr/>
+    <dgm:style>
+      <a:lnRef idx="2">
+        <a:scrgbClr r="0" g="0" b="0"/>
+      </a:lnRef>
+      <a:fillRef idx="1">
+        <a:scrgbClr r="0" g="0" b="0"/>
+      </a:fillRef>
+      <a:effectRef idx="0">
+        <a:scrgbClr r="0" g="0" b="0"/>
+      </a:effectRef>
+      <a:fontRef idx="minor"/>
+    </dgm:style>
+  </dgm:styleLbl>
+  <dgm:styleLbl name="fgAccFollowNode1">
+    <dgm:scene3d>
+      <a:camera prst="orthographicFront"/>
+      <a:lightRig rig="threePt" dir="t"/>
+    </dgm:scene3d>
+    <dgm:txPr/>
+    <dgm:style>
+      <a:lnRef idx="2">
+        <a:scrgbClr r="0" g="0" b="0"/>
+      </a:lnRef>
+      <a:fillRef idx="1">
+        <a:scrgbClr r="0" g="0" b="0"/>
+      </a:fillRef>
+      <a:effectRef idx="0">
+        <a:scrgbClr r="0" g="0" b="0"/>
+      </a:effectRef>
+      <a:fontRef idx="minor"/>
+    </dgm:style>
+  </dgm:styleLbl>
+  <dgm:styleLbl name="fgImgPlace1">
+    <dgm:scene3d>
+      <a:camera prst="orthographicFront"/>
+      <a:lightRig rig="threePt" dir="t"/>
+    </dgm:scene3d>
+    <dgm:txPr/>
+    <dgm:style>
+      <a:lnRef idx="2">
+        <a:scrgbClr r="0" g="0" b="0"/>
+      </a:lnRef>
+      <a:fillRef idx="1">
+        <a:scrgbClr r="0" g="0" b="0"/>
+      </a:fillRef>
+      <a:effectRef idx="0">
+        <a:scrgbClr r="0" g="0" b="0"/>
+      </a:effectRef>
+      <a:fontRef idx="minor"/>
+    </dgm:style>
+  </dgm:styleLbl>
+  <dgm:styleLbl name="fgShp">
+    <dgm:scene3d>
+      <a:camera prst="orthographicFront"/>
+      <a:lightRig rig="threePt" dir="t"/>
+    </dgm:scene3d>
+    <dgm:txPr/>
+    <dgm:style>
+      <a:lnRef idx="2">
+        <a:scrgbClr r="0" g="0" b="0"/>
+      </a:lnRef>
+      <a:fillRef idx="1">
+        <a:scrgbClr r="0" g="0" b="0"/>
+      </a:fillRef>
+      <a:effectRef idx="0">
+        <a:scrgbClr r="0" g="0" b="0"/>
+      </a:effectRef>
+      <a:fontRef idx="minor"/>
+    </dgm:style>
+  </dgm:styleLbl>
+  <dgm:styleLbl name="fgSibTrans2D1">
+    <dgm:scene3d>
+      <a:camera prst="orthographicFront"/>
+      <a:lightRig rig="threePt" dir="t"/>
+    </dgm:scene3d>
+    <dgm:txPr/>
+    <dgm:style>
+      <a:lnRef idx="0">
+        <a:scrgbClr r="0" g="0" b="0"/>
+      </a:lnRef>
+      <a:fillRef idx="1">
+        <a:scrgbClr r="0" g="0" b="0"/>
+      </a:fillRef>
+      <a:effectRef idx="0">
+        <a:scrgbClr r="0" g="0" b="0"/>
+      </a:effectRef>
+      <a:fontRef idx="minor">
+        <a:schemeClr val="lt1"/>
+      </a:fontRef>
+    </dgm:style>
+  </dgm:styleLbl>
+  <dgm:styleLbl name="lnNode1">
+    <dgm:scene3d>
+      <a:camera prst="orthographicFront"/>
+      <a:lightRig rig="threePt" dir="t"/>
+    </dgm:scene3d>
+    <dgm:txPr/>
+    <dgm:style>
+      <a:lnRef idx="2">
+        <a:scrgbClr r="0" g="0" b="0"/>
+      </a:lnRef>
+      <a:fillRef idx="1">
+        <a:scrgbClr r="0" g="0" b="0"/>
+      </a:fillRef>
+      <a:effectRef idx="0">
+        <a:scrgbClr r="0" g="0" b="0"/>
+      </a:effectRef>
+      <a:fontRef idx="minor">
+        <a:schemeClr val="lt1"/>
+      </a:fontRef>
+    </dgm:style>
+  </dgm:styleLbl>
+  <dgm:styleLbl name="node0">
+    <dgm:scene3d>
+      <a:camera prst="orthographicFront"/>
+      <a:lightRig rig="threePt" dir="t"/>
+    </dgm:scene3d>
+    <dgm:txPr/>
+    <dgm:style>
+      <a:lnRef idx="2">
+        <a:scrgbClr r="0" g="0" b="0"/>
+      </a:lnRef>
+      <a:fillRef idx="1">
+        <a:scrgbClr r="0" g="0" b="0"/>
+      </a:fillRef>
+      <a:effectRef idx="0">
+        <a:scrgbClr r="0" g="0" b="0"/>
+      </a:effectRef>
+      <a:fontRef idx="minor">
+        <a:schemeClr val="lt1"/>
+      </a:fontRef>
+    </dgm:style>
+  </dgm:styleLbl>
+  <dgm:styleLbl name="node1">
+    <dgm:scene3d>
+      <a:camera prst="orthographicFront"/>
+      <a:lightRig rig="threePt" dir="t"/>
+    </dgm:scene3d>
+    <dgm:txPr/>
+    <dgm:style>
+      <a:lnRef idx="2">
+        <a:scrgbClr r="0" g="0" b="0"/>
+      </a:lnRef>
+      <a:fillRef idx="1">
+        <a:scrgbClr r="0" g="0" b="0"/>
+      </a:fillRef>
+      <a:effectRef idx="0">
+        <a:scrgbClr r="0" g="0" b="0"/>
+      </a:effectRef>
+      <a:fontRef idx="minor">
+        <a:schemeClr val="lt1"/>
+      </a:fontRef>
+    </dgm:style>
+  </dgm:styleLbl>
+  <dgm:styleLbl name="node2">
+    <dgm:scene3d>
+      <a:camera prst="orthographicFront"/>
+      <a:lightRig rig="threePt" dir="t"/>
+    </dgm:scene3d>
+    <dgm:txPr/>
+    <dgm:style>
+      <a:lnRef idx="2">
+        <a:scrgbClr r="0" g="0" b="0"/>
+      </a:lnRef>
+      <a:fillRef idx="1">
+        <a:scrgbClr r="0" g="0" b="0"/>
+      </a:fillRef>
+      <a:effectRef idx="0">
+        <a:scrgbClr r="0" g="0" b="0"/>
+      </a:effectRef>
+      <a:fontRef idx="minor">
+        <a:schemeClr val="lt1"/>
+      </a:fontRef>
+    </dgm:style>
+  </dgm:styleLbl>
+  <dgm:styleLbl name="node3">
+    <dgm:scene3d>
+      <a:camera prst="orthographicFront"/>
+      <a:lightRig rig="threePt" dir="t"/>
+    </dgm:scene3d>
+    <dgm:txPr/>
+    <dgm:style>
+      <a:lnRef idx="2">
+        <a:scrgbClr r="0" g="0" b="0"/>
+      </a:lnRef>
+      <a:fillRef idx="1">
+        <a:scrgbClr r="0" g="0" b="0"/>
+      </a:fillRef>
+      <a:effectRef idx="0">
+        <a:scrgbClr r="0" g="0" b="0"/>
+      </a:effectRef>
+      <a:fontRef idx="minor">
+        <a:schemeClr val="lt1"/>
+      </a:fontRef>
+    </dgm:style>
+  </dgm:styleLbl>
+  <dgm:styleLbl name="node4">
+    <dgm:scene3d>
+      <a:camera prst="orthographicFront"/>
+      <a:lightRig rig="threePt" dir="t"/>
+    </dgm:scene3d>
+    <dgm:txPr/>
+    <dgm:style>
+      <a:lnRef idx="2">
+        <a:scrgbClr r="0" g="0" b="0"/>
+      </a:lnRef>
+      <a:fillRef idx="1">
+        <a:scrgbClr r="0" g="0" b="0"/>
+      </a:fillRef>
+      <a:effectRef idx="0">
+        <a:scrgbClr r="0" g="0" b="0"/>
+      </a:effectRef>
+      <a:fontRef idx="minor">
+        <a:schemeClr val="lt1"/>
+      </a:fontRef>
+    </dgm:style>
+  </dgm:styleLbl>
+  <dgm:styleLbl name="parChTrans1D1">
+    <dgm:scene3d>
+      <a:camera prst="orthographicFront"/>
+      <a:lightRig rig="threePt" dir="t"/>
+    </dgm:scene3d>
+    <dgm:txPr/>
+    <dgm:style>
+      <a:lnRef idx="2">
+        <a:scrgbClr r="0" g="0" b="0"/>
+      </a:lnRef>
+      <a:fillRef idx="0">
+        <a:scrgbClr r="0" g="0" b="0"/>
+      </a:fillRef>
+      <a:effectRef idx="0">
+        <a:scrgbClr r="0" g="0" b="0"/>
+      </a:effectRef>
+      <a:fontRef idx="minor"/>
+    </dgm:style>
+  </dgm:styleLbl>
+  <dgm:styleLbl name="parChTrans1D2">
+    <dgm:scene3d>
+      <a:camera prst="orthographicFront"/>
+      <a:lightRig rig="threePt" dir="t"/>
+    </dgm:scene3d>
+    <dgm:txPr/>
+    <dgm:style>
+      <a:lnRef idx="2">
+        <a:scrgbClr r="0" g="0" b="0"/>
+      </a:lnRef>
+      <a:fillRef idx="0">
+        <a:scrgbClr r="0" g="0" b="0"/>
+      </a:fillRef>
+      <a:effectRef idx="0">
+        <a:scrgbClr r="0" g="0" b="0"/>
+      </a:effectRef>
+      <a:fontRef idx="minor"/>
+    </dgm:style>
+  </dgm:styleLbl>
+  <dgm:styleLbl name="parChTrans1D3">
+    <dgm:scene3d>
+      <a:camera prst="orthographicFront"/>
+      <a:lightRig rig="threePt" dir="t"/>
+    </dgm:scene3d>
+    <dgm:txPr/>
+    <dgm:style>
+      <a:lnRef idx="2">
+        <a:scrgbClr r="0" g="0" b="0"/>
+      </a:lnRef>
+      <a:fillRef idx="0">
+        <a:scrgbClr r="0" g="0" b="0"/>
+      </a:fillRef>
+      <a:effectRef idx="0">
+        <a:scrgbClr r="0" g="0" b="0"/>
+      </a:effectRef>
+      <a:fontRef idx="minor"/>
+    </dgm:style>
+  </dgm:styleLbl>
+  <dgm:styleLbl name="parChTrans1D4">
+    <dgm:scene3d>
+      <a:camera prst="orthographicFront"/>
+      <a:lightRig rig="threePt" dir="t"/>
+    </dgm:scene3d>
+    <dgm:txPr/>
+    <dgm:style>
+      <a:lnRef idx="2">
+        <a:scrgbClr r="0" g="0" b="0"/>
+      </a:lnRef>
+      <a:fillRef idx="0">
+        <a:scrgbClr r="0" g="0" b="0"/>
+      </a:fillRef>
+      <a:effectRef idx="0">
+        <a:scrgbClr r="0" g="0" b="0"/>
+      </a:effectRef>
+      <a:fontRef idx="minor"/>
+    </dgm:style>
+  </dgm:styleLbl>
+  <dgm:styleLbl name="parChTrans2D1">
+    <dgm:scene3d>
+      <a:camera prst="orthographicFront"/>
+      <a:lightRig rig="threePt" dir="t"/>
+    </dgm:scene3d>
+    <dgm:txPr/>
+    <dgm:style>
+      <a:lnRef idx="2">
+        <a:scrgbClr r="0" g="0" b="0"/>
+      </a:lnRef>
+      <a:fillRef idx="1">
+        <a:scrgbClr r="0" g="0" b="0"/>
+      </a:fillRef>
+      <a:effectRef idx="0">
+        <a:scrgbClr r="0" g="0" b="0"/>
+      </a:effectRef>
+      <a:fontRef idx="minor">
+        <a:schemeClr val="lt1"/>
+      </a:fontRef>
+    </dgm:style>
+  </dgm:styleLbl>
+  <dgm:styleLbl name="parChTrans2D2">
+    <dgm:scene3d>
+      <a:camera prst="orthographicFront"/>
+      <a:lightRig rig="threePt" dir="t"/>
+    </dgm:scene3d>
+    <dgm:txPr/>
+    <dgm:style>
+      <a:lnRef idx="2">
+        <a:scrgbClr r="0" g="0" b="0"/>
+      </a:lnRef>
+      <a:fillRef idx="1">
+        <a:scrgbClr r="0" g="0" b="0"/>
+      </a:fillRef>
+      <a:effectRef idx="0">
+        <a:scrgbClr r="0" g="0" b="0"/>
+      </a:effectRef>
+      <a:fontRef idx="minor">
+        <a:schemeClr val="lt1"/>
+      </a:fontRef>
+    </dgm:style>
+  </dgm:styleLbl>
+  <dgm:styleLbl name="parChTrans2D3">
+    <dgm:scene3d>
+      <a:camera prst="orthographicFront"/>
+      <a:lightRig rig="threePt" dir="t"/>
+    </dgm:scene3d>
+    <dgm:txPr/>
+    <dgm:style>
+      <a:lnRef idx="2">
+        <a:scrgbClr r="0" g="0" b="0"/>
+      </a:lnRef>
+      <a:fillRef idx="1">
+        <a:scrgbClr r="0" g="0" b="0"/>
+      </a:fillRef>
+      <a:effectRef idx="0">
+        <a:scrgbClr r="0" g="0" b="0"/>
+      </a:effectRef>
+      <a:fontRef idx="minor">
+        <a:schemeClr val="lt1"/>
+      </a:fontRef>
+    </dgm:style>
+  </dgm:styleLbl>
+  <dgm:styleLbl name="parChTrans2D4">
+    <dgm:scene3d>
+      <a:camera prst="orthographicFront"/>
+      <a:lightRig rig="threePt" dir="t"/>
+    </dgm:scene3d>
+    <dgm:txPr/>
+    <dgm:style>
+      <a:lnRef idx="2">
+        <a:scrgbClr r="0" g="0" b="0"/>
+      </a:lnRef>
+      <a:fillRef idx="1">
+        <a:scrgbClr r="0" g="0" b="0"/>
+      </a:fillRef>
+      <a:effectRef idx="0">
+        <a:scrgbClr r="0" g="0" b="0"/>
+      </a:effectRef>
+      <a:fontRef idx="minor">
+        <a:schemeClr val="lt1"/>
+      </a:fontRef>
+    </dgm:style>
+  </dgm:styleLbl>
+  <dgm:styleLbl name="revTx">
+    <dgm:scene3d>
+      <a:camera prst="orthographicFront"/>
+      <a:lightRig rig="threePt" dir="t"/>
+    </dgm:scene3d>
+    <dgm:txPr/>
+    <dgm:style>
+      <a:lnRef idx="0">
+        <a:scrgbClr r="0" g="0" b="0"/>
+      </a:lnRef>
+      <a:fillRef idx="0">
+        <a:scrgbClr r="0" g="0" b="0"/>
+      </a:fillRef>
+      <a:effectRef idx="0">
+        <a:scrgbClr r="0" g="0" b="0"/>
+      </a:effectRef>
+      <a:fontRef idx="minor"/>
+    </dgm:style>
+  </dgm:styleLbl>
+  <dgm:styleLbl name="sibTrans1D1">
+    <dgm:scene3d>
+      <a:camera prst="orthographicFront"/>
+      <a:lightRig rig="threePt" dir="t"/>
+    </dgm:scene3d>
+    <dgm:txPr/>
+    <dgm:style>
+      <a:lnRef idx="1">
+        <a:scrgbClr r="0" g="0" b="0"/>
+      </a:lnRef>
+      <a:fillRef idx="0">
+        <a:scrgbClr r="0" g="0" b="0"/>
+      </a:fillRef>
+      <a:effectRef idx="0">
+        <a:scrgbClr r="0" g="0" b="0"/>
+      </a:effectRef>
+      <a:fontRef idx="minor"/>
+    </dgm:style>
+  </dgm:styleLbl>
+  <dgm:styleLbl name="sibTrans2D1">
+    <dgm:scene3d>
+      <a:camera prst="orthographicFront"/>
+      <a:lightRig rig="threePt" dir="t"/>
+    </dgm:scene3d>
+    <dgm:txPr/>
+    <dgm:style>
+      <a:lnRef idx="0">
+        <a:scrgbClr r="0" g="0" b="0"/>
+      </a:lnRef>
+      <a:fillRef idx="1">
+        <a:scrgbClr r="0" g="0" b="0"/>
+      </a:fillRef>
+      <a:effectRef idx="0">
+        <a:scrgbClr r="0" g="0" b="0"/>
+      </a:effectRef>
+      <a:fontRef idx="minor">
+        <a:schemeClr val="lt1"/>
+      </a:fontRef>
+    </dgm:style>
+  </dgm:styleLbl>
+  <dgm:styleLbl name="solidAlignAcc1">
+    <dgm:scene3d>
+      <a:camera prst="orthographicFront"/>
+      <a:lightRig rig="threePt" dir="t"/>
+    </dgm:scene3d>
+    <dgm:txPr/>
+    <dgm:style>
+      <a:lnRef idx="2">
+        <a:scrgbClr r="0" g="0" b="0"/>
+      </a:lnRef>
+      <a:fillRef idx="1">
+        <a:scrgbClr r="0" g="0" b="0"/>
+      </a:fillRef>
+      <a:effectRef idx="0">
+        <a:scrgbClr r="0" g="0" b="0"/>
+      </a:effectRef>
+      <a:fontRef idx="minor"/>
+    </dgm:style>
+  </dgm:styleLbl>
+  <dgm:styleLbl name="solidBgAcc1">
+    <dgm:scene3d>
+      <a:camera prst="orthographicFront"/>
+      <a:lightRig rig="threePt" dir="t"/>
+    </dgm:scene3d>
+    <dgm:txPr/>
+    <dgm:style>
+      <a:lnRef idx="2">
+        <a:scrgbClr r="0" g="0" b="0"/>
+      </a:lnRef>
+      <a:fillRef idx="1">
+        <a:scrgbClr r="0" g="0" b="0"/>
+      </a:fillRef>
+      <a:effectRef idx="0">
+        <a:scrgbClr r="0" g="0" b="0"/>
+      </a:effectRef>
+      <a:fontRef idx="minor"/>
+    </dgm:style>
+  </dgm:styleLbl>
+  <dgm:styleLbl name="solidFgAcc1">
+    <dgm:scene3d>
+      <a:camera prst="orthographicFront"/>
+      <a:lightRig rig="threePt" dir="t"/>
+    </dgm:scene3d>
+    <dgm:txPr/>
+    <dgm:style>
+      <a:lnRef idx="2">
+        <a:scrgbClr r="0" g="0" b="0"/>
+      </a:lnRef>
+      <a:fillRef idx="1">
+        <a:scrgbClr r="0" g="0" b="0"/>
+      </a:fillRef>
+      <a:effectRef idx="0">
+        <a:scrgbClr r="0" g="0" b="0"/>
+      </a:effectRef>
+      <a:fontRef idx="minor"/>
+    </dgm:style>
+  </dgm:styleLbl>
+  <dgm:styleLbl name="trAlignAcc1">
+    <dgm:scene3d>
+      <a:camera prst="orthographicFront"/>
+      <a:lightRig rig="threePt" dir="t"/>
+    </dgm:scene3d>
+    <dgm:txPr/>
+    <dgm:style>
+      <a:lnRef idx="1">
+        <a:scrgbClr r="0" g="0" b="0"/>
+      </a:lnRef>
+      <a:fillRef idx="1">
+        <a:scrgbClr r="0" g="0" b="0"/>
+      </a:fillRef>
+      <a:effectRef idx="0">
+        <a:scrgbClr r="0" g="0" b="0"/>
+      </a:effectRef>
+      <a:fontRef idx="minor"/>
+    </dgm:style>
+  </dgm:styleLbl>
+  <dgm:styleLbl name="trBgShp">
+    <dgm:scene3d>
+      <a:camera prst="orthographicFront"/>
+      <a:lightRig rig="threePt" dir="t"/>
+    </dgm:scene3d>
+    <dgm:txPr/>
+    <dgm:style>
+      <a:lnRef idx="0">
+        <a:scrgbClr r="0" g="0" b="0"/>
+      </a:lnRef>
+      <a:fillRef idx="1">
+        <a:scrgbClr r="0" g="0" b="0"/>
+      </a:fillRef>
+      <a:effectRef idx="0">
+        <a:scrgbClr r="0" g="0" b="0"/>
+      </a:effectRef>
+      <a:fontRef idx="minor"/>
+    </dgm:style>
+  </dgm:styleLbl>
+  <dgm:styleLbl name="vennNode1">
+    <dgm:scene3d>
+      <a:camera prst="orthographicFront"/>
+      <a:lightRig rig="threePt" dir="t"/>
+    </dgm:scene3d>
+    <dgm:txPr/>
+    <dgm:style>
+      <a:lnRef idx="2">
         <a:scrgbClr r="0" g="0" b="0"/>
       </a:lnRef>
       <a:fillRef idx="1">
@@ -8428,8 +11136,8 @@
         </p:nvSpPr>
         <p:spPr>
           <a:xfrm>
-            <a:off x="3206115" y="140335"/>
-            <a:ext cx="5746115" cy="706755"/>
+            <a:off x="3453765" y="130810"/>
+            <a:ext cx="5249545" cy="706755"/>
           </a:xfrm>
           <a:prstGeom prst="rect">
             <a:avLst/>
@@ -8442,7 +11150,7 @@
           </a:bodyPr>
           <a:p>
             <a:r>
-              <a:rPr lang="en-US" altLang="en-US" sz="4000">
+              <a:rPr lang="" altLang="en-US" sz="4000">
                 <a:ln w="28575" cmpd="sng">
                   <a:solidFill>
                     <a:srgbClr val="47FF52"/>
@@ -8455,9 +11163,9 @@
                 <a:latin typeface="OPTINational-Gothic" charset="0"/>
                 <a:cs typeface="OPTINational-Gothic" charset="0"/>
               </a:rPr>
-              <a:t>DA CARTESIO A PHILIP GLASS</a:t>
+              <a:t>ALLA RICERCA DELL’ETERE</a:t>
             </a:r>
-            <a:endParaRPr lang="en-US" altLang="en-US" sz="4000">
+            <a:endParaRPr lang="" altLang="en-US" sz="4000">
               <a:ln w="28575" cmpd="sng">
                 <a:solidFill>
                   <a:srgbClr val="47FF52"/>
@@ -8466,6 +11174,178 @@
               </a:ln>
               <a:solidFill>
                 <a:srgbClr val="644647"/>
+              </a:solidFill>
+              <a:latin typeface="OPTINational-Gothic" charset="0"/>
+              <a:cs typeface="OPTINational-Gothic" charset="0"/>
+            </a:endParaRPr>
+          </a:p>
+        </p:txBody>
+      </p:sp>
+      <p:pic>
+        <p:nvPicPr>
+          <p:cNvPr id="2" name="Picture 1" descr="etere"/>
+          <p:cNvPicPr>
+            <a:picLocks noChangeAspect="true"/>
+          </p:cNvPicPr>
+          <p:nvPr/>
+        </p:nvPicPr>
+        <p:blipFill>
+          <a:blip r:embed="rId2"/>
+          <a:stretch>
+            <a:fillRect/>
+          </a:stretch>
+        </p:blipFill>
+        <p:spPr>
+          <a:xfrm>
+            <a:off x="106680" y="837565"/>
+            <a:ext cx="3407410" cy="4393565"/>
+          </a:xfrm>
+          <a:prstGeom prst="rect">
+            <a:avLst/>
+          </a:prstGeom>
+        </p:spPr>
+      </p:pic>
+      <p:sp>
+        <p:nvSpPr>
+          <p:cNvPr id="13" name="Text Box 12"/>
+          <p:cNvSpPr txBox="true"/>
+          <p:nvPr/>
+        </p:nvSpPr>
+        <p:spPr>
+          <a:xfrm>
+            <a:off x="-39370" y="5297805"/>
+            <a:ext cx="4180840" cy="829945"/>
+          </a:xfrm>
+          <a:prstGeom prst="rect">
+            <a:avLst/>
+          </a:prstGeom>
+          <a:noFill/>
+        </p:spPr>
+        <p:txBody>
+          <a:bodyPr wrap="square" rtlCol="0">
+            <a:spAutoFit/>
+          </a:bodyPr>
+          <a:p>
+            <a:pPr fontAlgn="auto"/>
+            <a:r>
+              <a:rPr lang="" altLang="en-US" sz="1600">
+                <a:ln w="6350" cmpd="sng">
+                  <a:noFill/>
+                  <a:prstDash val="solid"/>
+                </a:ln>
+                <a:solidFill>
+                  <a:srgbClr val="47FF52"/>
+                </a:solidFill>
+                <a:latin typeface="OPTINational-Gothic" charset="0"/>
+                <a:cs typeface="OPTINational-Gothic" charset="0"/>
+              </a:rPr>
+              <a:t>Già Aristotele aveva ipotizzato l’esistenza dell’etere, come quinto elemento dopo Terra, Acqua, Aria e Fuoco.</a:t>
+            </a:r>
+            <a:endParaRPr lang="" altLang="en-US" sz="1600">
+              <a:ln w="6350" cmpd="sng">
+                <a:noFill/>
+                <a:prstDash val="solid"/>
+              </a:ln>
+              <a:solidFill>
+                <a:srgbClr val="47FF52"/>
+              </a:solidFill>
+              <a:latin typeface="OPTINational-Gothic" charset="0"/>
+              <a:cs typeface="OPTINational-Gothic" charset="0"/>
+            </a:endParaRPr>
+          </a:p>
+        </p:txBody>
+      </p:sp>
+      <p:pic>
+        <p:nvPicPr>
+          <p:cNvPr id="3" name="Picture 2" descr="etere1"/>
+          <p:cNvPicPr>
+            <a:picLocks noChangeAspect="true"/>
+          </p:cNvPicPr>
+          <p:nvPr/>
+        </p:nvPicPr>
+        <p:blipFill>
+          <a:blip r:embed="rId3"/>
+          <a:stretch>
+            <a:fillRect/>
+          </a:stretch>
+        </p:blipFill>
+        <p:spPr>
+          <a:xfrm>
+            <a:off x="8609330" y="130810"/>
+            <a:ext cx="3430905" cy="2574290"/>
+          </a:xfrm>
+          <a:prstGeom prst="rect">
+            <a:avLst/>
+          </a:prstGeom>
+        </p:spPr>
+      </p:pic>
+      <p:pic>
+        <p:nvPicPr>
+          <p:cNvPr id="4" name="Picture 3" descr="michmorley"/>
+          <p:cNvPicPr>
+            <a:picLocks noChangeAspect="true"/>
+          </p:cNvPicPr>
+          <p:nvPr/>
+        </p:nvPicPr>
+        <p:blipFill>
+          <a:blip r:embed="rId4"/>
+          <a:stretch>
+            <a:fillRect/>
+          </a:stretch>
+        </p:blipFill>
+        <p:spPr>
+          <a:xfrm>
+            <a:off x="4141470" y="2949575"/>
+            <a:ext cx="4901565" cy="2933700"/>
+          </a:xfrm>
+          <a:prstGeom prst="rect">
+            <a:avLst/>
+          </a:prstGeom>
+        </p:spPr>
+      </p:pic>
+      <p:sp>
+        <p:nvSpPr>
+          <p:cNvPr id="6" name="Text Box 5"/>
+          <p:cNvSpPr txBox="true"/>
+          <p:nvPr/>
+        </p:nvSpPr>
+        <p:spPr>
+          <a:xfrm>
+            <a:off x="9409430" y="4154805"/>
+            <a:ext cx="2105660" cy="1076325"/>
+          </a:xfrm>
+          <a:prstGeom prst="rect">
+            <a:avLst/>
+          </a:prstGeom>
+          <a:noFill/>
+        </p:spPr>
+        <p:txBody>
+          <a:bodyPr wrap="square" rtlCol="0">
+            <a:spAutoFit/>
+          </a:bodyPr>
+          <a:p>
+            <a:pPr fontAlgn="auto"/>
+            <a:r>
+              <a:rPr lang="" altLang="en-US" sz="1600">
+                <a:ln w="6350" cmpd="sng">
+                  <a:noFill/>
+                  <a:prstDash val="solid"/>
+                </a:ln>
+                <a:solidFill>
+                  <a:srgbClr val="47FF52"/>
+                </a:solidFill>
+                <a:latin typeface="OPTINational-Gothic" charset="0"/>
+                <a:cs typeface="OPTINational-Gothic" charset="0"/>
+              </a:rPr>
+              <a:t>L’esperimento di Michelson-Morley non riuscì a dimostrare l’esistenza dell’etere.</a:t>
+            </a:r>
+            <a:endParaRPr lang="" altLang="en-US" sz="1600">
+              <a:ln w="6350" cmpd="sng">
+                <a:noFill/>
+                <a:prstDash val="solid"/>
+              </a:ln>
+              <a:solidFill>
+                <a:srgbClr val="47FF52"/>
               </a:solidFill>
               <a:latin typeface="OPTINational-Gothic" charset="0"/>
               <a:cs typeface="OPTINational-Gothic" charset="0"/>
@@ -8539,8 +11419,8 @@
         </p:nvSpPr>
         <p:spPr>
           <a:xfrm>
-            <a:off x="3206115" y="140335"/>
-            <a:ext cx="5746115" cy="706755"/>
+            <a:off x="2390775" y="191135"/>
+            <a:ext cx="7375525" cy="706755"/>
           </a:xfrm>
           <a:prstGeom prst="rect">
             <a:avLst/>
@@ -8553,7 +11433,7 @@
           </a:bodyPr>
           <a:p>
             <a:r>
-              <a:rPr lang="en-US" altLang="en-US" sz="4000">
+              <a:rPr lang="" altLang="en-US" sz="4000">
                 <a:ln w="28575" cmpd="sng">
                   <a:solidFill>
                     <a:srgbClr val="47FF52"/>
@@ -8566,9 +11446,9 @@
                 <a:latin typeface="OPTINational-Gothic" charset="0"/>
                 <a:cs typeface="OPTINational-Gothic" charset="0"/>
               </a:rPr>
-              <a:t>DA CARTESIO A PHILIP GLASS</a:t>
+              <a:t>LA FRAGILITÀ DELLA FISICA CLASSICA</a:t>
             </a:r>
-            <a:endParaRPr lang="en-US" altLang="en-US" sz="4000">
+            <a:endParaRPr lang="" altLang="en-US" sz="4000">
               <a:ln w="28575" cmpd="sng">
                 <a:solidFill>
                   <a:srgbClr val="47FF52"/>
@@ -8577,6 +11457,282 @@
               </a:ln>
               <a:solidFill>
                 <a:srgbClr val="644647"/>
+              </a:solidFill>
+              <a:latin typeface="OPTINational-Gothic" charset="0"/>
+              <a:cs typeface="OPTINational-Gothic" charset="0"/>
+            </a:endParaRPr>
+          </a:p>
+        </p:txBody>
+      </p:sp>
+      <p:pic>
+        <p:nvPicPr>
+          <p:cNvPr id="3" name="Picture 2" descr="ominoinmovimento"/>
+          <p:cNvPicPr>
+            <a:picLocks noChangeAspect="true"/>
+          </p:cNvPicPr>
+          <p:nvPr/>
+        </p:nvPicPr>
+        <p:blipFill>
+          <a:blip r:embed="rId2"/>
+          <a:stretch>
+            <a:fillRect/>
+          </a:stretch>
+        </p:blipFill>
+        <p:spPr>
+          <a:xfrm>
+            <a:off x="8173720" y="1762125"/>
+            <a:ext cx="1592580" cy="2781300"/>
+          </a:xfrm>
+          <a:prstGeom prst="rect">
+            <a:avLst/>
+          </a:prstGeom>
+        </p:spPr>
+      </p:pic>
+      <p:pic>
+        <p:nvPicPr>
+          <p:cNvPr id="4" name="Picture 3" descr="ominofermo"/>
+          <p:cNvPicPr>
+            <a:picLocks noChangeAspect="true"/>
+          </p:cNvPicPr>
+          <p:nvPr/>
+        </p:nvPicPr>
+        <p:blipFill>
+          <a:blip r:embed="rId3"/>
+          <a:stretch>
+            <a:fillRect/>
+          </a:stretch>
+        </p:blipFill>
+        <p:spPr>
+          <a:xfrm>
+            <a:off x="2390775" y="1762125"/>
+            <a:ext cx="1485265" cy="2781300"/>
+          </a:xfrm>
+          <a:prstGeom prst="rect">
+            <a:avLst/>
+          </a:prstGeom>
+        </p:spPr>
+      </p:pic>
+      <p:sp>
+        <p:nvSpPr>
+          <p:cNvPr id="6" name="Text Box 5"/>
+          <p:cNvSpPr txBox="true"/>
+          <p:nvPr/>
+        </p:nvSpPr>
+        <p:spPr>
+          <a:xfrm>
+            <a:off x="7526655" y="4559300"/>
+            <a:ext cx="3721735" cy="1568450"/>
+          </a:xfrm>
+          <a:prstGeom prst="rect">
+            <a:avLst/>
+          </a:prstGeom>
+          <a:noFill/>
+        </p:spPr>
+        <p:txBody>
+          <a:bodyPr wrap="square" rtlCol="0">
+            <a:spAutoFit/>
+          </a:bodyPr>
+          <a:p>
+            <a:pPr algn="r" fontAlgn="auto"/>
+            <a:r>
+              <a:rPr lang="" altLang="en-US" sz="1600">
+                <a:ln w="6350" cmpd="sng">
+                  <a:noFill/>
+                  <a:prstDash val="solid"/>
+                </a:ln>
+                <a:solidFill>
+                  <a:srgbClr val="47FF52"/>
+                </a:solidFill>
+                <a:latin typeface="OPTINational-Gothic" charset="0"/>
+                <a:cs typeface="OPTINational-Gothic" charset="0"/>
+              </a:rPr>
+              <a:t>Quando invece l’osservatore è in movimento con velocità u = c, secondo le trasformazioni di Galileo, non potrebbe riflettere la propria immagine in quanto si muove alla stessa velocità da lui emanata in un certo istante di tempo. E infatti v’ = c - u .</a:t>
+            </a:r>
+            <a:endParaRPr lang="" altLang="en-US" sz="1600">
+              <a:ln w="6350" cmpd="sng">
+                <a:noFill/>
+                <a:prstDash val="solid"/>
+              </a:ln>
+              <a:solidFill>
+                <a:srgbClr val="47FF52"/>
+              </a:solidFill>
+              <a:latin typeface="OPTINational-Gothic" charset="0"/>
+              <a:cs typeface="OPTINational-Gothic" charset="0"/>
+            </a:endParaRPr>
+          </a:p>
+        </p:txBody>
+      </p:sp>
+      <p:sp>
+        <p:nvSpPr>
+          <p:cNvPr id="8" name="Text Box 7"/>
+          <p:cNvSpPr txBox="true"/>
+          <p:nvPr/>
+        </p:nvSpPr>
+        <p:spPr>
+          <a:xfrm>
+            <a:off x="1616710" y="4797425"/>
+            <a:ext cx="2105660" cy="1076325"/>
+          </a:xfrm>
+          <a:prstGeom prst="rect">
+            <a:avLst/>
+          </a:prstGeom>
+          <a:noFill/>
+        </p:spPr>
+        <p:txBody>
+          <a:bodyPr wrap="square" rtlCol="0">
+            <a:spAutoFit/>
+          </a:bodyPr>
+          <a:p>
+            <a:pPr fontAlgn="auto"/>
+            <a:r>
+              <a:rPr lang="" altLang="en-US" sz="1600">
+                <a:ln w="6350" cmpd="sng">
+                  <a:noFill/>
+                  <a:prstDash val="solid"/>
+                </a:ln>
+                <a:solidFill>
+                  <a:srgbClr val="47FF52"/>
+                </a:solidFill>
+                <a:latin typeface="OPTINational-Gothic" charset="0"/>
+                <a:cs typeface="OPTINational-Gothic" charset="0"/>
+              </a:rPr>
+              <a:t>Quando l’osservatore è fermo l’immagine viene normalmente riflessa sullo specchio.</a:t>
+            </a:r>
+            <a:endParaRPr lang="" altLang="en-US" sz="1600">
+              <a:ln w="6350" cmpd="sng">
+                <a:noFill/>
+                <a:prstDash val="solid"/>
+              </a:ln>
+              <a:solidFill>
+                <a:srgbClr val="47FF52"/>
+              </a:solidFill>
+              <a:latin typeface="OPTINational-Gothic" charset="0"/>
+              <a:cs typeface="OPTINational-Gothic" charset="0"/>
+            </a:endParaRPr>
+          </a:p>
+        </p:txBody>
+      </p:sp>
+      <p:sp>
+        <p:nvSpPr>
+          <p:cNvPr id="9" name="Text Box 8"/>
+          <p:cNvSpPr txBox="true"/>
+          <p:nvPr/>
+        </p:nvSpPr>
+        <p:spPr>
+          <a:xfrm>
+            <a:off x="5026025" y="2297430"/>
+            <a:ext cx="1997710" cy="768350"/>
+          </a:xfrm>
+          <a:prstGeom prst="rect">
+            <a:avLst/>
+          </a:prstGeom>
+          <a:noFill/>
+        </p:spPr>
+        <p:txBody>
+          <a:bodyPr wrap="square" rtlCol="0">
+            <a:spAutoFit/>
+          </a:bodyPr>
+          <a:p>
+            <a:pPr fontAlgn="auto"/>
+            <a:r>
+              <a:rPr lang="" altLang="en-US" sz="2800">
+                <a:ln w="6350" cmpd="sng">
+                  <a:noFill/>
+                  <a:prstDash val="solid"/>
+                </a:ln>
+                <a:solidFill>
+                  <a:srgbClr val="47FF52"/>
+                </a:solidFill>
+                <a:latin typeface="OPTINational-Gothic" charset="0"/>
+                <a:cs typeface="OPTINational-Gothic" charset="0"/>
+              </a:rPr>
+              <a:t>RISULTATO:</a:t>
+            </a:r>
+            <a:r>
+              <a:rPr lang="" altLang="en-US" sz="1600">
+                <a:ln w="6350" cmpd="sng">
+                  <a:noFill/>
+                  <a:prstDash val="solid"/>
+                </a:ln>
+                <a:solidFill>
+                  <a:srgbClr val="47FF52"/>
+                </a:solidFill>
+                <a:latin typeface="OPTINational-Gothic" charset="0"/>
+                <a:cs typeface="OPTINational-Gothic" charset="0"/>
+              </a:rPr>
+              <a:t> </a:t>
+            </a:r>
+            <a:endParaRPr lang="" altLang="en-US" sz="1600">
+              <a:ln w="6350" cmpd="sng">
+                <a:noFill/>
+                <a:prstDash val="solid"/>
+              </a:ln>
+              <a:solidFill>
+                <a:srgbClr val="47FF52"/>
+              </a:solidFill>
+              <a:latin typeface="OPTINational-Gothic" charset="0"/>
+              <a:cs typeface="OPTINational-Gothic" charset="0"/>
+            </a:endParaRPr>
+          </a:p>
+          <a:p>
+            <a:pPr fontAlgn="auto"/>
+            <a:endParaRPr lang="" altLang="en-US" sz="1600">
+              <a:ln w="6350" cmpd="sng">
+                <a:noFill/>
+                <a:prstDash val="solid"/>
+              </a:ln>
+              <a:solidFill>
+                <a:srgbClr val="47FF52"/>
+              </a:solidFill>
+              <a:latin typeface="OPTINational-Gothic" charset="0"/>
+              <a:cs typeface="OPTINational-Gothic" charset="0"/>
+            </a:endParaRPr>
+          </a:p>
+        </p:txBody>
+      </p:sp>
+      <p:sp>
+        <p:nvSpPr>
+          <p:cNvPr id="10" name="Text Box 9"/>
+          <p:cNvSpPr txBox="true"/>
+          <p:nvPr/>
+        </p:nvSpPr>
+        <p:spPr>
+          <a:xfrm>
+            <a:off x="4558030" y="3065780"/>
+            <a:ext cx="2933700" cy="1938020"/>
+          </a:xfrm>
+          <a:prstGeom prst="rect">
+            <a:avLst/>
+          </a:prstGeom>
+          <a:noFill/>
+        </p:spPr>
+        <p:txBody>
+          <a:bodyPr wrap="square" rtlCol="0">
+            <a:spAutoFit/>
+          </a:bodyPr>
+          <a:p>
+            <a:pPr fontAlgn="auto"/>
+            <a:r>
+              <a:rPr lang="" altLang="en-US" sz="2000">
+                <a:ln w="6350" cmpd="sng">
+                  <a:noFill/>
+                  <a:prstDash val="solid"/>
+                </a:ln>
+                <a:solidFill>
+                  <a:srgbClr val="47FF52"/>
+                </a:solidFill>
+                <a:latin typeface="OPTINational-Gothic" charset="0"/>
+                <a:cs typeface="OPTINational-Gothic" charset="0"/>
+              </a:rPr>
+              <a:t>POSSIAMO RENDERCI CONTO DI ESSERE FERMI O IN MOVIMENTO DI MOTO RETTILINEO UNIFORME, GUARDANDO UNO SPECCHIO!!!</a:t>
+            </a:r>
+            <a:endParaRPr lang="" altLang="en-US" sz="2000">
+              <a:ln w="6350" cmpd="sng">
+                <a:noFill/>
+                <a:prstDash val="solid"/>
+              </a:ln>
+              <a:solidFill>
+                <a:srgbClr val="47FF52"/>
               </a:solidFill>
               <a:latin typeface="OPTINational-Gothic" charset="0"/>
               <a:cs typeface="OPTINational-Gothic" charset="0"/>
@@ -8650,8 +11806,8 @@
         </p:nvSpPr>
         <p:spPr>
           <a:xfrm>
-            <a:off x="3206115" y="140335"/>
-            <a:ext cx="5746115" cy="706755"/>
+            <a:off x="3692525" y="162560"/>
+            <a:ext cx="4773295" cy="706755"/>
           </a:xfrm>
           <a:prstGeom prst="rect">
             <a:avLst/>
@@ -8664,7 +11820,7 @@
           </a:bodyPr>
           <a:p>
             <a:r>
-              <a:rPr lang="en-US" altLang="en-US" sz="4000">
+              <a:rPr lang="" altLang="en-US" sz="4000">
                 <a:ln w="28575" cmpd="sng">
                   <a:solidFill>
                     <a:srgbClr val="47FF52"/>
@@ -8677,9 +11833,9 @@
                 <a:latin typeface="OPTINational-Gothic" charset="0"/>
                 <a:cs typeface="OPTINational-Gothic" charset="0"/>
               </a:rPr>
-              <a:t>DA CARTESIO A PHILIP GLASS</a:t>
+              <a:t>TRE POSSIBILI SCENARI</a:t>
             </a:r>
-            <a:endParaRPr lang="en-US" altLang="en-US" sz="4000">
+            <a:endParaRPr lang="" altLang="en-US" sz="4000">
               <a:ln w="28575" cmpd="sng">
                 <a:solidFill>
                   <a:srgbClr val="47FF52"/>
@@ -8692,6 +11848,263 @@
               <a:latin typeface="OPTINational-Gothic" charset="0"/>
               <a:cs typeface="OPTINational-Gothic" charset="0"/>
             </a:endParaRPr>
+          </a:p>
+        </p:txBody>
+      </p:sp>
+      <p:sp>
+        <p:nvSpPr>
+          <p:cNvPr id="8" name="Text Box 7"/>
+          <p:cNvSpPr txBox="true"/>
+          <p:nvPr/>
+        </p:nvSpPr>
+        <p:spPr>
+          <a:xfrm>
+            <a:off x="2002155" y="1444625"/>
+            <a:ext cx="8187690" cy="3969385"/>
+          </a:xfrm>
+          <a:prstGeom prst="rect">
+            <a:avLst/>
+          </a:prstGeom>
+          <a:noFill/>
+        </p:spPr>
+        <p:txBody>
+          <a:bodyPr wrap="square" rtlCol="0">
+            <a:spAutoFit/>
+          </a:bodyPr>
+          <a:p>
+            <a:pPr marL="342900" indent="-342900" fontAlgn="auto">
+              <a:buFont typeface="+mj-lt"/>
+              <a:buAutoNum type="arabicPeriod"/>
+            </a:pPr>
+            <a:r>
+              <a:rPr lang="en-US" altLang="en-US" sz="2800">
+                <a:ln w="6350" cmpd="sng">
+                  <a:noFill/>
+                  <a:prstDash val="solid"/>
+                </a:ln>
+                <a:solidFill>
+                  <a:srgbClr val="47FF52"/>
+                </a:solidFill>
+                <a:latin typeface="OPTINational-Gothic" charset="0"/>
+                <a:cs typeface="OPTINational-Gothic" charset="0"/>
+              </a:rPr>
+              <a:t>Il principio della relativa di Galileo è falso e quindi esiste un modo per</a:t>
+            </a:r>
+            <a:r>
+              <a:rPr lang="" altLang="en-US" sz="2800">
+                <a:ln w="6350" cmpd="sng">
+                  <a:noFill/>
+                  <a:prstDash val="solid"/>
+                </a:ln>
+                <a:solidFill>
+                  <a:srgbClr val="47FF52"/>
+                </a:solidFill>
+                <a:latin typeface="OPTINational-Gothic" charset="0"/>
+                <a:cs typeface="OPTINational-Gothic" charset="0"/>
+              </a:rPr>
+              <a:t> </a:t>
+            </a:r>
+            <a:r>
+              <a:rPr lang="en-US" altLang="en-US" sz="2800">
+                <a:ln w="6350" cmpd="sng">
+                  <a:noFill/>
+                  <a:prstDash val="solid"/>
+                </a:ln>
+                <a:solidFill>
+                  <a:srgbClr val="47FF52"/>
+                </a:solidFill>
+                <a:latin typeface="OPTINational-Gothic" charset="0"/>
+                <a:cs typeface="OPTINational-Gothic" charset="0"/>
+              </a:rPr>
+              <a:t>rendersi conto se si è fermi o in moto rettilineo uniforme.</a:t>
+            </a:r>
+            <a:endParaRPr lang="en-US" altLang="en-US" sz="2800">
+              <a:ln w="6350" cmpd="sng">
+                <a:noFill/>
+                <a:prstDash val="solid"/>
+              </a:ln>
+              <a:solidFill>
+                <a:srgbClr val="47FF52"/>
+              </a:solidFill>
+              <a:latin typeface="OPTINational-Gothic" charset="0"/>
+              <a:cs typeface="OPTINational-Gothic" charset="0"/>
+            </a:endParaRPr>
+          </a:p>
+          <a:p>
+            <a:pPr marL="342900" indent="-342900" fontAlgn="auto">
+              <a:buFont typeface="+mj-lt"/>
+              <a:buAutoNum type="arabicPeriod"/>
+            </a:pPr>
+            <a:endParaRPr lang="en-US" altLang="en-US" sz="2800">
+              <a:ln w="6350" cmpd="sng">
+                <a:noFill/>
+                <a:prstDash val="solid"/>
+              </a:ln>
+              <a:solidFill>
+                <a:srgbClr val="47FF52"/>
+              </a:solidFill>
+              <a:latin typeface="OPTINational-Gothic" charset="0"/>
+              <a:cs typeface="OPTINational-Gothic" charset="0"/>
+            </a:endParaRPr>
+          </a:p>
+          <a:p>
+            <a:pPr marL="342900" indent="-342900" fontAlgn="auto">
+              <a:buFont typeface="+mj-lt"/>
+              <a:buAutoNum type="arabicPeriod"/>
+            </a:pPr>
+            <a:r>
+              <a:rPr lang="en-US" altLang="en-US" sz="2800">
+                <a:ln w="6350" cmpd="sng">
+                  <a:noFill/>
+                  <a:prstDash val="solid"/>
+                </a:ln>
+                <a:solidFill>
+                  <a:srgbClr val="47FF52"/>
+                </a:solidFill>
+                <a:latin typeface="OPTINational-Gothic" charset="0"/>
+                <a:cs typeface="OPTINational-Gothic" charset="0"/>
+              </a:rPr>
+              <a:t>Le leggi elaborate da Maxwell sono errate e quindi non esiste alcuna costante</a:t>
+            </a:r>
+            <a:r>
+              <a:rPr lang="" altLang="en-US" sz="2800">
+                <a:ln w="6350" cmpd="sng">
+                  <a:noFill/>
+                  <a:prstDash val="solid"/>
+                </a:ln>
+                <a:solidFill>
+                  <a:srgbClr val="47FF52"/>
+                </a:solidFill>
+                <a:latin typeface="OPTINational-Gothic" charset="0"/>
+                <a:cs typeface="OPTINational-Gothic" charset="0"/>
+              </a:rPr>
+              <a:t> </a:t>
+            </a:r>
+            <a:r>
+              <a:rPr lang="en-US" altLang="en-US" sz="2800">
+                <a:ln w="6350" cmpd="sng">
+                  <a:noFill/>
+                  <a:prstDash val="solid"/>
+                </a:ln>
+                <a:solidFill>
+                  <a:srgbClr val="47FF52"/>
+                </a:solidFill>
+                <a:latin typeface="OPTINational-Gothic" charset="0"/>
+                <a:cs typeface="OPTINational-Gothic" charset="0"/>
+              </a:rPr>
+              <a:t>c.</a:t>
+            </a:r>
+            <a:endParaRPr lang="en-US" altLang="en-US" sz="2800">
+              <a:ln w="6350" cmpd="sng">
+                <a:noFill/>
+                <a:prstDash val="solid"/>
+              </a:ln>
+              <a:solidFill>
+                <a:srgbClr val="47FF52"/>
+              </a:solidFill>
+              <a:latin typeface="OPTINational-Gothic" charset="0"/>
+              <a:cs typeface="OPTINational-Gothic" charset="0"/>
+            </a:endParaRPr>
+          </a:p>
+          <a:p>
+            <a:pPr marL="342900" indent="-342900" fontAlgn="auto">
+              <a:buFont typeface="+mj-lt"/>
+              <a:buAutoNum type="arabicPeriod"/>
+            </a:pPr>
+            <a:endParaRPr lang="en-US" altLang="en-US" sz="2800">
+              <a:ln w="6350" cmpd="sng">
+                <a:noFill/>
+                <a:prstDash val="solid"/>
+              </a:ln>
+              <a:solidFill>
+                <a:srgbClr val="47FF52"/>
+              </a:solidFill>
+              <a:latin typeface="OPTINational-Gothic" charset="0"/>
+              <a:cs typeface="OPTINational-Gothic" charset="0"/>
+            </a:endParaRPr>
+          </a:p>
+          <a:p>
+            <a:pPr marL="342900" indent="-342900" fontAlgn="auto">
+              <a:buFont typeface="+mj-lt"/>
+              <a:buAutoNum type="arabicPeriod"/>
+            </a:pPr>
+            <a:r>
+              <a:rPr lang="en-US" altLang="en-US" sz="2800">
+                <a:ln w="6350" cmpd="sng">
+                  <a:noFill/>
+                  <a:prstDash val="solid"/>
+                </a:ln>
+                <a:solidFill>
+                  <a:srgbClr val="47FF52"/>
+                </a:solidFill>
+                <a:latin typeface="OPTINational-Gothic" charset="0"/>
+                <a:cs typeface="OPTINational-Gothic" charset="0"/>
+              </a:rPr>
+              <a:t>Le trasformazioni di Galileo e la meccanica conseguente sono errate.</a:t>
+            </a:r>
+            <a:endParaRPr lang="en-US" altLang="en-US" sz="2800">
+              <a:ln w="6350" cmpd="sng">
+                <a:noFill/>
+                <a:prstDash val="solid"/>
+              </a:ln>
+              <a:solidFill>
+                <a:srgbClr val="47FF52"/>
+              </a:solidFill>
+              <a:latin typeface="OPTINational-Gothic" charset="0"/>
+              <a:cs typeface="OPTINational-Gothic" charset="0"/>
+            </a:endParaRPr>
+          </a:p>
+        </p:txBody>
+      </p:sp>
+      <p:sp>
+        <p:nvSpPr>
+          <p:cNvPr id="2" name="Oval 1"/>
+          <p:cNvSpPr/>
+          <p:nvPr/>
+        </p:nvSpPr>
+        <p:spPr>
+          <a:xfrm>
+            <a:off x="1457325" y="4178300"/>
+            <a:ext cx="9171940" cy="1462405"/>
+          </a:xfrm>
+          <a:prstGeom prst="ellipse">
+            <a:avLst/>
+          </a:prstGeom>
+          <a:noFill/>
+          <a:ln>
+            <a:solidFill>
+              <a:srgbClr val="FF400D"/>
+            </a:solidFill>
+          </a:ln>
+          <a:extLst>
+            <a:ext uri="{909E8E84-426E-40DD-AFC4-6F175D3DCCD1}">
+              <a14:hiddenFill xmlns:a14="http://schemas.microsoft.com/office/drawing/2010/main">
+                <a:solidFill>
+                  <a:schemeClr val="accent2"/>
+                </a:solidFill>
+              </a14:hiddenFill>
+            </a:ext>
+          </a:extLst>
+        </p:spPr>
+        <p:style>
+          <a:lnRef idx="2">
+            <a:schemeClr val="accent6"/>
+          </a:lnRef>
+          <a:fillRef idx="1">
+            <a:schemeClr val="lt1"/>
+          </a:fillRef>
+          <a:effectRef idx="0">
+            <a:schemeClr val="accent6"/>
+          </a:effectRef>
+          <a:fontRef idx="minor">
+            <a:schemeClr val="dk1"/>
+          </a:fontRef>
+        </p:style>
+        <p:txBody>
+          <a:bodyPr rtlCol="0" anchor="ctr"/>
+          <a:p>
+            <a:pPr algn="ctr"/>
+            <a:endParaRPr lang="en-US"/>
           </a:p>
         </p:txBody>
       </p:sp>
@@ -8761,8 +12174,8 @@
         </p:nvSpPr>
         <p:spPr>
           <a:xfrm>
-            <a:off x="3206115" y="140335"/>
-            <a:ext cx="5746115" cy="706755"/>
+            <a:off x="3423920" y="154940"/>
+            <a:ext cx="5309870" cy="706755"/>
           </a:xfrm>
           <a:prstGeom prst="rect">
             <a:avLst/>
@@ -8775,7 +12188,7 @@
           </a:bodyPr>
           <a:p>
             <a:r>
-              <a:rPr lang="en-US" altLang="en-US" sz="4000">
+              <a:rPr lang="" altLang="en-US" sz="4000">
                 <a:ln w="28575" cmpd="sng">
                   <a:solidFill>
                     <a:srgbClr val="47FF52"/>
@@ -8788,9 +12201,9 @@
                 <a:latin typeface="OPTINational-Gothic" charset="0"/>
                 <a:cs typeface="OPTINational-Gothic" charset="0"/>
               </a:rPr>
-              <a:t>DA CARTESIO A PHILIP GLASS</a:t>
+              <a:t>LA RELATIVITÀ RISTRETTA</a:t>
             </a:r>
-            <a:endParaRPr lang="en-US" altLang="en-US" sz="4000">
+            <a:endParaRPr lang="" altLang="en-US" sz="4000">
               <a:ln w="28575" cmpd="sng">
                 <a:solidFill>
                   <a:srgbClr val="47FF52"/>
@@ -9991,7 +13404,7 @@
           <a:p>
             <a:pPr fontAlgn="auto"/>
             <a:r>
-              <a:rPr lang="" altLang="en-US" sz="1600">
+              <a:rPr lang="en-US" altLang="en-US" sz="1600">
                 <a:ln w="6350" cmpd="sng">
                   <a:noFill/>
                   <a:prstDash val="solid"/>
@@ -10004,7 +13417,7 @@
               </a:rPr>
               <a:t>Rappresentazione grafica dell’ equazione:</a:t>
             </a:r>
-            <a:endParaRPr lang="" altLang="en-US" sz="1600">
+            <a:endParaRPr lang="en-US" altLang="en-US" sz="1600">
               <a:ln w="6350" cmpd="sng">
                 <a:noFill/>
                 <a:prstDash val="solid"/>
@@ -10344,7 +13757,7 @@
           </a:bodyPr>
           <a:p>
             <a:r>
-              <a:rPr lang="" altLang="en-US" sz="4000">
+              <a:rPr lang="en-US" altLang="en-US" sz="4000">
                 <a:ln w="28575" cmpd="sng">
                   <a:solidFill>
                     <a:srgbClr val="47FF52"/>
@@ -10359,7 +13772,7 @@
               </a:rPr>
               <a:t>FUNZIONE</a:t>
             </a:r>
-            <a:endParaRPr lang="" altLang="en-US" sz="4000">
+            <a:endParaRPr lang="en-US" altLang="en-US" sz="4000">
               <a:ln w="28575" cmpd="sng">
                 <a:solidFill>
                   <a:srgbClr val="47FF52"/>
@@ -10422,7 +13835,7 @@
           <a:p>
             <a:pPr fontAlgn="auto"/>
             <a:r>
-              <a:rPr lang="" altLang="en-US" sz="1600">
+              <a:rPr lang="en-US" altLang="en-US" sz="1600">
                 <a:ln w="6350" cmpd="sng">
                   <a:noFill/>
                   <a:prstDash val="solid"/>
@@ -10435,7 +13848,7 @@
               </a:rPr>
               <a:t>f(a) = b</a:t>
             </a:r>
-            <a:endParaRPr lang="" altLang="en-US" sz="1600">
+            <a:endParaRPr lang="en-US" altLang="en-US" sz="1600">
               <a:ln w="6350" cmpd="sng">
                 <a:noFill/>
                 <a:prstDash val="solid"/>
@@ -10475,7 +13888,7 @@
               <a:buChar char="•"/>
             </a:pPr>
             <a:r>
-              <a:rPr lang="" altLang="en-US" sz="1600">
+              <a:rPr lang="en-US" altLang="en-US" sz="1600">
                 <a:ln w="6350" cmpd="sng">
                   <a:noFill/>
                   <a:prstDash val="solid"/>
@@ -10488,7 +13901,7 @@
               </a:rPr>
               <a:t>b è l’immagine di a mediante la funzione f</a:t>
             </a:r>
-            <a:endParaRPr lang="" altLang="en-US" sz="1600">
+            <a:endParaRPr lang="en-US" altLang="en-US" sz="1600">
               <a:ln w="6350" cmpd="sng">
                 <a:noFill/>
                 <a:prstDash val="solid"/>
@@ -10506,7 +13919,7 @@
               <a:buChar char="•"/>
             </a:pPr>
             <a:r>
-              <a:rPr lang="" altLang="en-US" sz="1600">
+              <a:rPr lang="en-US" altLang="en-US" sz="1600">
                 <a:ln w="6350" cmpd="sng">
                   <a:noFill/>
                   <a:prstDash val="solid"/>
@@ -10519,7 +13932,7 @@
               </a:rPr>
               <a:t>a la controimmagine di b mediante f</a:t>
             </a:r>
-            <a:endParaRPr lang="" altLang="en-US" sz="1600">
+            <a:endParaRPr lang="en-US" altLang="en-US" sz="1600">
               <a:ln w="6350" cmpd="sng">
                 <a:noFill/>
                 <a:prstDash val="solid"/>
@@ -10556,7 +13969,7 @@
           <a:p>
             <a:pPr fontAlgn="auto"/>
             <a:r>
-              <a:rPr lang="" altLang="en-US" sz="1600">
+              <a:rPr lang="en-US" altLang="en-US" sz="1600">
                 <a:ln w="6350" cmpd="sng">
                   <a:noFill/>
                   <a:prstDash val="solid"/>
@@ -10569,7 +13982,7 @@
               </a:rPr>
               <a:t>Gruppo A: Dominio</a:t>
             </a:r>
-            <a:endParaRPr lang="" altLang="en-US" sz="1600">
+            <a:endParaRPr lang="en-US" altLang="en-US" sz="1600">
               <a:ln w="6350" cmpd="sng">
                 <a:noFill/>
                 <a:prstDash val="solid"/>
@@ -10584,7 +13997,7 @@
           <a:p>
             <a:pPr fontAlgn="auto"/>
             <a:r>
-              <a:rPr lang="" altLang="en-US" sz="1600">
+              <a:rPr lang="en-US" altLang="en-US" sz="1600">
                 <a:ln w="6350" cmpd="sng">
                   <a:noFill/>
                   <a:prstDash val="solid"/>
@@ -10597,7 +14010,7 @@
               </a:rPr>
               <a:t>Gruppo B: Codominio</a:t>
             </a:r>
-            <a:endParaRPr lang="" altLang="en-US" sz="1600">
+            <a:endParaRPr lang="en-US" altLang="en-US" sz="1600">
               <a:ln w="6350" cmpd="sng">
                 <a:noFill/>
                 <a:prstDash val="solid"/>
@@ -10691,7 +14104,7 @@
           </a:bodyPr>
           <a:p>
             <a:r>
-              <a:rPr lang="" altLang="en-US" sz="4000">
+              <a:rPr lang="en-US" altLang="en-US" sz="4000">
                 <a:ln w="28575" cmpd="sng">
                   <a:solidFill>
                     <a:srgbClr val="47FF52"/>
@@ -10706,7 +14119,7 @@
               </a:rPr>
               <a:t>STUDIO DI FUNZIONE</a:t>
             </a:r>
-            <a:endParaRPr lang="" altLang="en-US" sz="4000">
+            <a:endParaRPr lang="en-US" altLang="en-US" sz="4000">
               <a:ln w="28575" cmpd="sng">
                 <a:solidFill>
                   <a:srgbClr val="47FF52"/>
@@ -10772,7 +14185,7 @@
               <a:buChar char="•"/>
             </a:pPr>
             <a:r>
-              <a:rPr lang="" altLang="en-US" sz="1600">
+              <a:rPr lang="en-US" altLang="en-US" sz="1600">
                 <a:ln w="6350" cmpd="sng">
                   <a:noFill/>
                   <a:prstDash val="solid"/>
@@ -10785,7 +14198,7 @@
               </a:rPr>
               <a:t>Studio il dominio:</a:t>
             </a:r>
-            <a:endParaRPr lang="" altLang="en-US" sz="1600">
+            <a:endParaRPr lang="en-US" altLang="en-US" sz="1600">
               <a:ln w="6350" cmpd="sng">
                 <a:noFill/>
                 <a:prstDash val="solid"/>
@@ -10849,7 +14262,7 @@
               <a:buChar char="•"/>
             </a:pPr>
             <a:r>
-              <a:rPr lang="" altLang="en-US" sz="1600">
+              <a:rPr lang="en-US" altLang="en-US" sz="1600">
                 <a:ln w="6350" cmpd="sng">
                   <a:noFill/>
                   <a:prstDash val="solid"/>
@@ -10862,7 +14275,7 @@
               </a:rPr>
               <a:t>Valuto la positività:</a:t>
             </a:r>
-            <a:endParaRPr lang="" altLang="en-US" sz="1600">
+            <a:endParaRPr lang="en-US" altLang="en-US" sz="1600">
               <a:ln w="6350" cmpd="sng">
                 <a:noFill/>
                 <a:prstDash val="solid"/>
@@ -10926,7 +14339,7 @@
               <a:buChar char="•"/>
             </a:pPr>
             <a:r>
-              <a:rPr lang="" altLang="en-US" sz="1600">
+              <a:rPr lang="en-US" altLang="en-US" sz="1600">
                 <a:ln w="6350" cmpd="sng">
                   <a:noFill/>
                   <a:prstDash val="solid"/>
@@ -10939,7 +14352,7 @@
               </a:rPr>
               <a:t>Eventuali limiti: </a:t>
             </a:r>
-            <a:endParaRPr lang="" altLang="en-US" sz="1600">
+            <a:endParaRPr lang="en-US" altLang="en-US" sz="1600">
               <a:ln w="6350" cmpd="sng">
                 <a:noFill/>
                 <a:prstDash val="solid"/>
@@ -10957,7 +14370,7 @@
               <a:buNone/>
             </a:pPr>
             <a:r>
-              <a:rPr lang="" altLang="en-US" sz="1600">
+              <a:rPr lang="en-US" altLang="en-US" sz="1600">
                 <a:ln w="6350" cmpd="sng">
                   <a:noFill/>
                   <a:prstDash val="solid"/>
@@ -10970,7 +14383,7 @@
               </a:rPr>
               <a:t>Non ci sono limiti da calcolare</a:t>
             </a:r>
-            <a:endParaRPr lang="" altLang="en-US" sz="1600">
+            <a:endParaRPr lang="en-US" altLang="en-US" sz="1600">
               <a:ln w="6350" cmpd="sng">
                 <a:noFill/>
                 <a:prstDash val="solid"/>
@@ -11010,7 +14423,7 @@
               <a:buChar char="•"/>
             </a:pPr>
             <a:r>
-              <a:rPr lang="" altLang="en-US" sz="1600">
+              <a:rPr lang="en-US" altLang="en-US" sz="1600">
                 <a:ln w="6350" cmpd="sng">
                   <a:noFill/>
                   <a:prstDash val="solid"/>
@@ -11023,7 +14436,7 @@
               </a:rPr>
               <a:t>Calcolo la derivata prima:</a:t>
             </a:r>
-            <a:endParaRPr lang="" altLang="en-US" sz="1600">
+            <a:endParaRPr lang="en-US" altLang="en-US" sz="1600">
               <a:ln w="6350" cmpd="sng">
                 <a:noFill/>
                 <a:prstDash val="solid"/>
@@ -11117,7 +14530,7 @@
           </a:bodyPr>
           <a:p>
             <a:r>
-              <a:rPr lang="" altLang="en-US" sz="4000">
+              <a:rPr lang="en-US" altLang="en-US" sz="4000">
                 <a:ln w="28575" cmpd="sng">
                   <a:solidFill>
                     <a:srgbClr val="47FF52"/>
@@ -11132,7 +14545,7 @@
               </a:rPr>
               <a:t>Derivata e punti di non derivabilità</a:t>
             </a:r>
-            <a:endParaRPr lang="" altLang="en-US" sz="4000">
+            <a:endParaRPr lang="en-US" altLang="en-US" sz="4000">
               <a:ln w="28575" cmpd="sng">
                 <a:solidFill>
                   <a:srgbClr val="47FF52"/>
@@ -11947,7 +15360,7 @@
           </a:bodyPr>
           <a:p>
             <a:r>
-              <a:rPr lang="" altLang="en-US" sz="4000">
+              <a:rPr lang="en-US" altLang="en-US" sz="4000">
                 <a:ln w="28575" cmpd="sng">
                   <a:solidFill>
                     <a:srgbClr val="47FF52"/>
@@ -11962,7 +15375,7 @@
               </a:rPr>
               <a:t>GRAFICO DELLA FUNZIONE RECIPROCA</a:t>
             </a:r>
-            <a:endParaRPr lang="" altLang="en-US" sz="4000">
+            <a:endParaRPr lang="en-US" altLang="en-US" sz="4000">
               <a:ln w="28575" cmpd="sng">
                 <a:solidFill>
                   <a:srgbClr val="47FF52"/>
@@ -12028,7 +15441,7 @@
               <a:buChar char="•"/>
             </a:pPr>
             <a:r>
-              <a:rPr lang="" altLang="en-US" sz="1600">
+              <a:rPr lang="en-US" altLang="en-US" sz="1600">
                 <a:ln w="6350" cmpd="sng">
                   <a:noFill/>
                   <a:prstDash val="solid"/>
@@ -12041,7 +15454,7 @@
               </a:rPr>
               <a:t>Una funzione è integrabile in senso improprio se: </a:t>
             </a:r>
-            <a:endParaRPr lang="" altLang="en-US" sz="1600">
+            <a:endParaRPr lang="en-US" altLang="en-US" sz="1600">
               <a:ln w="6350" cmpd="sng">
                 <a:noFill/>
                 <a:prstDash val="solid"/>
@@ -12105,7 +15518,7 @@
               <a:buChar char="•"/>
             </a:pPr>
             <a:r>
-              <a:rPr lang="" altLang="en-US" sz="1600">
+              <a:rPr lang="en-US" altLang="en-US" sz="1600">
                 <a:ln w="6350" cmpd="sng">
                   <a:noFill/>
                   <a:prstDash val="solid"/>
@@ -12118,7 +15531,7 @@
               </a:rPr>
               <a:t>Nel nostro caso: </a:t>
             </a:r>
-            <a:endParaRPr lang="" altLang="en-US" sz="1600">
+            <a:endParaRPr lang="en-US" altLang="en-US" sz="1600">
               <a:ln w="6350" cmpd="sng">
                 <a:noFill/>
                 <a:prstDash val="solid"/>
@@ -12246,6 +15659,54 @@
       <p:grpSpPr/>
       <p:pic>
         <p:nvPicPr>
+          <p:cNvPr id="12" name="Picture 11" descr="lordkelvin"/>
+          <p:cNvPicPr>
+            <a:picLocks noChangeAspect="true"/>
+          </p:cNvPicPr>
+          <p:nvPr/>
+        </p:nvPicPr>
+        <p:blipFill>
+          <a:blip r:embed="rId1"/>
+          <a:stretch>
+            <a:fillRect/>
+          </a:stretch>
+        </p:blipFill>
+        <p:spPr>
+          <a:xfrm>
+            <a:off x="5502910" y="847090"/>
+            <a:ext cx="2442210" cy="2442210"/>
+          </a:xfrm>
+          <a:prstGeom prst="rect">
+            <a:avLst/>
+          </a:prstGeom>
+        </p:spPr>
+      </p:pic>
+      <p:pic>
+        <p:nvPicPr>
+          <p:cNvPr id="4" name="Picture 3" descr="immanuel-kant-orig"/>
+          <p:cNvPicPr>
+            <a:picLocks noChangeAspect="true"/>
+          </p:cNvPicPr>
+          <p:nvPr/>
+        </p:nvPicPr>
+        <p:blipFill>
+          <a:blip r:embed="rId2"/>
+          <a:stretch>
+            <a:fillRect/>
+          </a:stretch>
+        </p:blipFill>
+        <p:spPr>
+          <a:xfrm>
+            <a:off x="12700" y="1467485"/>
+            <a:ext cx="2068195" cy="2742565"/>
+          </a:xfrm>
+          <a:prstGeom prst="rect">
+            <a:avLst/>
+          </a:prstGeom>
+        </p:spPr>
+      </p:pic>
+      <p:pic>
+        <p:nvPicPr>
           <p:cNvPr id="7" name="Picture 6" descr="pavimento"/>
           <p:cNvPicPr>
             <a:picLocks noChangeAspect="true"/>
@@ -12253,7 +15714,7 @@
           <p:nvPr/>
         </p:nvPicPr>
         <p:blipFill>
-          <a:blip r:embed="rId1"/>
+          <a:blip r:embed="rId3"/>
           <a:stretch>
             <a:fillRect/>
           </a:stretch>
@@ -12276,8 +15737,8 @@
         </p:nvSpPr>
         <p:spPr>
           <a:xfrm>
-            <a:off x="3206115" y="140335"/>
-            <a:ext cx="5746115" cy="706755"/>
+            <a:off x="4246880" y="140335"/>
+            <a:ext cx="3698240" cy="706755"/>
           </a:xfrm>
           <a:prstGeom prst="rect">
             <a:avLst/>
@@ -12290,7 +15751,7 @@
           </a:bodyPr>
           <a:p>
             <a:r>
-              <a:rPr lang="en-US" altLang="en-US" sz="4000">
+              <a:rPr lang="" altLang="en-US" sz="4000">
                 <a:ln w="28575" cmpd="sng">
                   <a:solidFill>
                     <a:srgbClr val="47FF52"/>
@@ -12303,9 +15764,9 @@
                 <a:latin typeface="OPTINational-Gothic" charset="0"/>
                 <a:cs typeface="OPTINational-Gothic" charset="0"/>
               </a:rPr>
-              <a:t>DA CARTESIO A PHILIP GLASS</a:t>
+              <a:t>DALL’ 800 AL 900</a:t>
             </a:r>
-            <a:endParaRPr lang="en-US" altLang="en-US" sz="4000">
+            <a:endParaRPr lang="" altLang="en-US" sz="4000">
               <a:ln w="28575" cmpd="sng">
                 <a:solidFill>
                   <a:srgbClr val="47FF52"/>
@@ -12314,6 +15775,603 @@
               </a:ln>
               <a:solidFill>
                 <a:srgbClr val="644647"/>
+              </a:solidFill>
+              <a:latin typeface="OPTINational-Gothic" charset="0"/>
+              <a:cs typeface="OPTINational-Gothic" charset="0"/>
+            </a:endParaRPr>
+          </a:p>
+        </p:txBody>
+      </p:sp>
+      <p:sp>
+        <p:nvSpPr>
+          <p:cNvPr id="6" name="Text Box 5"/>
+          <p:cNvSpPr txBox="true"/>
+          <p:nvPr/>
+        </p:nvSpPr>
+        <p:spPr>
+          <a:xfrm>
+            <a:off x="581025" y="1007110"/>
+            <a:ext cx="4254500" cy="460375"/>
+          </a:xfrm>
+          <a:prstGeom prst="rect">
+            <a:avLst/>
+          </a:prstGeom>
+          <a:noFill/>
+        </p:spPr>
+        <p:txBody>
+          <a:bodyPr wrap="square" rtlCol="0">
+            <a:spAutoFit/>
+          </a:bodyPr>
+          <a:p>
+            <a:pPr indent="0" fontAlgn="auto">
+              <a:buFont typeface="Arial" panose="02080604020202020204" pitchFamily="34" charset="0"/>
+              <a:buNone/>
+            </a:pPr>
+            <a:r>
+              <a:rPr lang="" altLang="en-US" sz="2400" i="1">
+                <a:ln w="6350" cmpd="sng">
+                  <a:noFill/>
+                  <a:prstDash val="solid"/>
+                </a:ln>
+                <a:solidFill>
+                  <a:srgbClr val="47FF52"/>
+                </a:solidFill>
+                <a:latin typeface="OPTINational-Gothic" charset="0"/>
+                <a:cs typeface="OPTINational-Gothic" charset="0"/>
+              </a:rPr>
+              <a:t>“Uomo legislatore della natura”</a:t>
+            </a:r>
+            <a:endParaRPr lang="" altLang="en-US" sz="2400" i="1">
+              <a:ln w="6350" cmpd="sng">
+                <a:noFill/>
+                <a:prstDash val="solid"/>
+              </a:ln>
+              <a:solidFill>
+                <a:srgbClr val="47FF52"/>
+              </a:solidFill>
+              <a:latin typeface="OPTINational-Gothic" charset="0"/>
+              <a:cs typeface="OPTINational-Gothic" charset="0"/>
+            </a:endParaRPr>
+          </a:p>
+        </p:txBody>
+      </p:sp>
+      <p:sp>
+        <p:nvSpPr>
+          <p:cNvPr id="3" name="Text Box 2"/>
+          <p:cNvSpPr txBox="true"/>
+          <p:nvPr/>
+        </p:nvSpPr>
+        <p:spPr>
+          <a:xfrm>
+            <a:off x="2445385" y="1467485"/>
+            <a:ext cx="1801495" cy="337185"/>
+          </a:xfrm>
+          <a:prstGeom prst="rect">
+            <a:avLst/>
+          </a:prstGeom>
+          <a:noFill/>
+        </p:spPr>
+        <p:txBody>
+          <a:bodyPr wrap="square" rtlCol="0">
+            <a:spAutoFit/>
+          </a:bodyPr>
+          <a:p>
+            <a:pPr indent="0" algn="r" fontAlgn="auto">
+              <a:buFont typeface="Arial" panose="02080604020202020204" pitchFamily="34" charset="0"/>
+              <a:buNone/>
+            </a:pPr>
+            <a:r>
+              <a:rPr lang="" altLang="en-US" sz="1600">
+                <a:ln w="6350" cmpd="sng">
+                  <a:noFill/>
+                  <a:prstDash val="solid"/>
+                </a:ln>
+                <a:solidFill>
+                  <a:srgbClr val="47FF52"/>
+                </a:solidFill>
+                <a:latin typeface="OPTINational-Gothic" charset="0"/>
+                <a:cs typeface="OPTINational-Gothic" charset="0"/>
+              </a:rPr>
+              <a:t>Immanuel Kant</a:t>
+            </a:r>
+            <a:endParaRPr lang="" altLang="en-US" sz="1600">
+              <a:ln w="6350" cmpd="sng">
+                <a:noFill/>
+                <a:prstDash val="solid"/>
+              </a:ln>
+              <a:solidFill>
+                <a:srgbClr val="47FF52"/>
+              </a:solidFill>
+              <a:latin typeface="OPTINational-Gothic" charset="0"/>
+              <a:cs typeface="OPTINational-Gothic" charset="0"/>
+            </a:endParaRPr>
+          </a:p>
+        </p:txBody>
+      </p:sp>
+      <p:sp>
+        <p:nvSpPr>
+          <p:cNvPr id="8" name="Text Box 7"/>
+          <p:cNvSpPr txBox="true"/>
+          <p:nvPr/>
+        </p:nvSpPr>
+        <p:spPr>
+          <a:xfrm>
+            <a:off x="1973580" y="2354580"/>
+            <a:ext cx="4254500" cy="460375"/>
+          </a:xfrm>
+          <a:prstGeom prst="rect">
+            <a:avLst/>
+          </a:prstGeom>
+          <a:noFill/>
+        </p:spPr>
+        <p:txBody>
+          <a:bodyPr wrap="square" rtlCol="0">
+            <a:spAutoFit/>
+          </a:bodyPr>
+          <a:p>
+            <a:pPr indent="0" fontAlgn="auto">
+              <a:buFont typeface="Arial" panose="02080604020202020204" pitchFamily="34" charset="0"/>
+              <a:buNone/>
+            </a:pPr>
+            <a:r>
+              <a:rPr lang="en-US" altLang="en-US" sz="2400" i="1">
+                <a:ln w="6350" cmpd="sng">
+                  <a:noFill/>
+                  <a:prstDash val="solid"/>
+                </a:ln>
+                <a:solidFill>
+                  <a:srgbClr val="47FF52"/>
+                </a:solidFill>
+                <a:latin typeface="OPTINational-Gothic" charset="0"/>
+                <a:cs typeface="OPTINational-Gothic" charset="0"/>
+              </a:rPr>
+              <a:t>“</a:t>
+            </a:r>
+            <a:r>
+              <a:rPr lang="" altLang="en-US" sz="2400" i="1">
+                <a:ln w="6350" cmpd="sng">
+                  <a:noFill/>
+                  <a:prstDash val="solid"/>
+                </a:ln>
+                <a:solidFill>
+                  <a:srgbClr val="47FF52"/>
+                </a:solidFill>
+                <a:latin typeface="OPTINational-Gothic" charset="0"/>
+                <a:cs typeface="OPTINational-Gothic" charset="0"/>
+              </a:rPr>
+              <a:t>A priori di tempo e spazio...”</a:t>
+            </a:r>
+            <a:endParaRPr lang="" altLang="en-US" sz="2400" i="1">
+              <a:ln w="6350" cmpd="sng">
+                <a:noFill/>
+                <a:prstDash val="solid"/>
+              </a:ln>
+              <a:solidFill>
+                <a:srgbClr val="47FF52"/>
+              </a:solidFill>
+              <a:latin typeface="OPTINational-Gothic" charset="0"/>
+              <a:cs typeface="OPTINational-Gothic" charset="0"/>
+            </a:endParaRPr>
+          </a:p>
+        </p:txBody>
+      </p:sp>
+      <p:pic>
+        <p:nvPicPr>
+          <p:cNvPr id="9" name="Picture 8" descr="senzaapriori"/>
+          <p:cNvPicPr>
+            <a:picLocks noChangeAspect="true"/>
+          </p:cNvPicPr>
+          <p:nvPr/>
+        </p:nvPicPr>
+        <p:blipFill>
+          <a:blip r:embed="rId4"/>
+          <a:stretch>
+            <a:fillRect/>
+          </a:stretch>
+        </p:blipFill>
+        <p:spPr>
+          <a:xfrm>
+            <a:off x="2599690" y="3199765"/>
+            <a:ext cx="5683250" cy="1746885"/>
+          </a:xfrm>
+          <a:prstGeom prst="rect">
+            <a:avLst/>
+          </a:prstGeom>
+        </p:spPr>
+      </p:pic>
+      <p:pic>
+        <p:nvPicPr>
+          <p:cNvPr id="10" name="Picture 9" descr="conapriori"/>
+          <p:cNvPicPr>
+            <a:picLocks noChangeAspect="true"/>
+          </p:cNvPicPr>
+          <p:nvPr/>
+        </p:nvPicPr>
+        <p:blipFill>
+          <a:blip r:embed="rId5"/>
+          <a:stretch>
+            <a:fillRect/>
+          </a:stretch>
+        </p:blipFill>
+        <p:spPr>
+          <a:xfrm>
+            <a:off x="2513330" y="4166870"/>
+            <a:ext cx="5610860" cy="2320290"/>
+          </a:xfrm>
+          <a:prstGeom prst="rect">
+            <a:avLst/>
+          </a:prstGeom>
+        </p:spPr>
+      </p:pic>
+      <p:sp>
+        <p:nvSpPr>
+          <p:cNvPr id="11" name="Text Box 10"/>
+          <p:cNvSpPr txBox="true"/>
+          <p:nvPr/>
+        </p:nvSpPr>
+        <p:spPr>
+          <a:xfrm>
+            <a:off x="7945120" y="461645"/>
+            <a:ext cx="4243070" cy="4246245"/>
+          </a:xfrm>
+          <a:prstGeom prst="rect">
+            <a:avLst/>
+          </a:prstGeom>
+          <a:noFill/>
+        </p:spPr>
+        <p:txBody>
+          <a:bodyPr wrap="square" rtlCol="0">
+            <a:spAutoFit/>
+          </a:bodyPr>
+          <a:p>
+            <a:pPr indent="0" algn="r" fontAlgn="auto">
+              <a:buFont typeface="Arial" panose="02080604020202020204" pitchFamily="34" charset="0"/>
+              <a:buNone/>
+            </a:pPr>
+            <a:r>
+              <a:rPr lang="" altLang="en-US">
+                <a:ln w="6350" cmpd="sng">
+                  <a:noFill/>
+                  <a:prstDash val="solid"/>
+                </a:ln>
+                <a:solidFill>
+                  <a:srgbClr val="47FF52"/>
+                </a:solidFill>
+                <a:latin typeface="OPTINational-Gothic" charset="0"/>
+                <a:cs typeface="OPTINational-Gothic" charset="0"/>
+              </a:rPr>
+              <a:t>“</a:t>
+            </a:r>
+            <a:r>
+              <a:rPr lang="en-US" altLang="en-US">
+                <a:ln w="6350" cmpd="sng">
+                  <a:noFill/>
+                  <a:prstDash val="solid"/>
+                </a:ln>
+                <a:solidFill>
+                  <a:srgbClr val="47FF52"/>
+                </a:solidFill>
+                <a:latin typeface="OPTINational-Gothic" charset="0"/>
+                <a:cs typeface="OPTINational-Gothic" charset="0"/>
+              </a:rPr>
+              <a:t>Signori vi annuncio </a:t>
+            </a:r>
+            <a:r>
+              <a:rPr lang="en-US" altLang="en-US" u="sng">
+                <a:ln w="6350" cmpd="sng">
+                  <a:noFill/>
+                  <a:prstDash val="solid"/>
+                </a:ln>
+                <a:solidFill>
+                  <a:srgbClr val="47FF52"/>
+                </a:solidFill>
+                <a:latin typeface="OPTINational-Gothic" charset="0"/>
+                <a:cs typeface="OPTINational-Gothic" charset="0"/>
+              </a:rPr>
+              <a:t>la fine</a:t>
+            </a:r>
+            <a:endParaRPr lang="en-US" altLang="en-US" u="sng">
+              <a:ln w="6350" cmpd="sng">
+                <a:noFill/>
+                <a:prstDash val="solid"/>
+              </a:ln>
+              <a:solidFill>
+                <a:srgbClr val="47FF52"/>
+              </a:solidFill>
+              <a:latin typeface="OPTINational-Gothic" charset="0"/>
+              <a:cs typeface="OPTINational-Gothic" charset="0"/>
+            </a:endParaRPr>
+          </a:p>
+          <a:p>
+            <a:pPr indent="0" algn="r" fontAlgn="auto">
+              <a:buFont typeface="Arial" panose="02080604020202020204" pitchFamily="34" charset="0"/>
+              <a:buNone/>
+            </a:pPr>
+            <a:r>
+              <a:rPr lang="en-US" altLang="en-US" u="sng">
+                <a:ln w="6350" cmpd="sng">
+                  <a:noFill/>
+                  <a:prstDash val="solid"/>
+                </a:ln>
+                <a:solidFill>
+                  <a:srgbClr val="47FF52"/>
+                </a:solidFill>
+                <a:latin typeface="OPTINational-Gothic" charset="0"/>
+                <a:cs typeface="OPTINational-Gothic" charset="0"/>
+              </a:rPr>
+              <a:t>della fisica</a:t>
+            </a:r>
+            <a:r>
+              <a:rPr lang="en-US" altLang="en-US">
+                <a:ln w="6350" cmpd="sng">
+                  <a:noFill/>
+                  <a:prstDash val="solid"/>
+                </a:ln>
+                <a:solidFill>
+                  <a:srgbClr val="47FF52"/>
+                </a:solidFill>
+                <a:latin typeface="OPTINational-Gothic" charset="0"/>
+                <a:cs typeface="OPTINational-Gothic" charset="0"/>
+              </a:rPr>
+              <a:t>, ormai conosciamo le grandi leggi della natura ed i segreti dell’armonia</a:t>
+            </a:r>
+            <a:endParaRPr lang="en-US" altLang="en-US">
+              <a:ln w="6350" cmpd="sng">
+                <a:noFill/>
+                <a:prstDash val="solid"/>
+              </a:ln>
+              <a:solidFill>
+                <a:srgbClr val="47FF52"/>
+              </a:solidFill>
+              <a:latin typeface="OPTINational-Gothic" charset="0"/>
+              <a:cs typeface="OPTINational-Gothic" charset="0"/>
+            </a:endParaRPr>
+          </a:p>
+          <a:p>
+            <a:pPr indent="0" algn="r" fontAlgn="auto">
+              <a:buFont typeface="Arial" panose="02080604020202020204" pitchFamily="34" charset="0"/>
+              <a:buNone/>
+            </a:pPr>
+            <a:r>
+              <a:rPr lang="en-US" altLang="en-US">
+                <a:ln w="6350" cmpd="sng">
+                  <a:noFill/>
+                  <a:prstDash val="solid"/>
+                </a:ln>
+                <a:solidFill>
+                  <a:srgbClr val="47FF52"/>
+                </a:solidFill>
+                <a:latin typeface="OPTINational-Gothic" charset="0"/>
+                <a:cs typeface="OPTINational-Gothic" charset="0"/>
+              </a:rPr>
+              <a:t>cosmica: i pianeti e tutti i corpi dotati di massa si muovono nell’universo seguendo le leggi</a:t>
+            </a:r>
+            <a:endParaRPr lang="en-US" altLang="en-US">
+              <a:ln w="6350" cmpd="sng">
+                <a:noFill/>
+                <a:prstDash val="solid"/>
+              </a:ln>
+              <a:solidFill>
+                <a:srgbClr val="47FF52"/>
+              </a:solidFill>
+              <a:latin typeface="OPTINational-Gothic" charset="0"/>
+              <a:cs typeface="OPTINational-Gothic" charset="0"/>
+            </a:endParaRPr>
+          </a:p>
+          <a:p>
+            <a:pPr indent="0" algn="r" fontAlgn="auto">
+              <a:buFont typeface="Arial" panose="02080604020202020204" pitchFamily="34" charset="0"/>
+              <a:buNone/>
+            </a:pPr>
+            <a:r>
+              <a:rPr lang="en-US" altLang="en-US">
+                <a:ln w="6350" cmpd="sng">
+                  <a:noFill/>
+                  <a:prstDash val="solid"/>
+                </a:ln>
+                <a:solidFill>
+                  <a:srgbClr val="47FF52"/>
+                </a:solidFill>
+                <a:latin typeface="OPTINational-Gothic" charset="0"/>
+                <a:cs typeface="OPTINational-Gothic" charset="0"/>
+              </a:rPr>
+              <a:t>della gravitazione di sir Isaac Newton, la luce e tutte le onde elettromagnetiche si</a:t>
+            </a:r>
+            <a:endParaRPr lang="en-US" altLang="en-US">
+              <a:ln w="6350" cmpd="sng">
+                <a:noFill/>
+                <a:prstDash val="solid"/>
+              </a:ln>
+              <a:solidFill>
+                <a:srgbClr val="47FF52"/>
+              </a:solidFill>
+              <a:latin typeface="OPTINational-Gothic" charset="0"/>
+              <a:cs typeface="OPTINational-Gothic" charset="0"/>
+            </a:endParaRPr>
+          </a:p>
+          <a:p>
+            <a:pPr indent="0" algn="r" fontAlgn="auto">
+              <a:buFont typeface="Arial" panose="02080604020202020204" pitchFamily="34" charset="0"/>
+              <a:buNone/>
+            </a:pPr>
+            <a:r>
+              <a:rPr lang="en-US" altLang="en-US">
+                <a:ln w="6350" cmpd="sng">
+                  <a:noFill/>
+                  <a:prstDash val="solid"/>
+                </a:ln>
+                <a:solidFill>
+                  <a:srgbClr val="47FF52"/>
+                </a:solidFill>
+                <a:latin typeface="OPTINational-Gothic" charset="0"/>
+                <a:cs typeface="OPTINational-Gothic" charset="0"/>
+              </a:rPr>
+              <a:t>propagano per il cosmo seguendo le leggi di sir James Clerk Maxwell, il calore si</a:t>
+            </a:r>
+            <a:endParaRPr lang="en-US" altLang="en-US">
+              <a:ln w="6350" cmpd="sng">
+                <a:noFill/>
+                <a:prstDash val="solid"/>
+              </a:ln>
+              <a:solidFill>
+                <a:srgbClr val="47FF52"/>
+              </a:solidFill>
+              <a:latin typeface="OPTINational-Gothic" charset="0"/>
+              <a:cs typeface="OPTINational-Gothic" charset="0"/>
+            </a:endParaRPr>
+          </a:p>
+          <a:p>
+            <a:pPr indent="0" algn="r" fontAlgn="auto">
+              <a:buFont typeface="Arial" panose="02080604020202020204" pitchFamily="34" charset="0"/>
+              <a:buNone/>
+            </a:pPr>
+            <a:r>
+              <a:rPr lang="en-US" altLang="en-US">
+                <a:ln w="6350" cmpd="sng">
+                  <a:noFill/>
+                  <a:prstDash val="solid"/>
+                </a:ln>
+                <a:solidFill>
+                  <a:srgbClr val="47FF52"/>
+                </a:solidFill>
+                <a:latin typeface="OPTINational-Gothic" charset="0"/>
+                <a:cs typeface="OPTINational-Gothic" charset="0"/>
+              </a:rPr>
+              <a:t>trasferisce da un corpo ad un altro seguendo le leggi della termodinamica che anche io,</a:t>
+            </a:r>
+            <a:endParaRPr lang="en-US" altLang="en-US">
+              <a:ln w="6350" cmpd="sng">
+                <a:noFill/>
+                <a:prstDash val="solid"/>
+              </a:ln>
+              <a:solidFill>
+                <a:srgbClr val="47FF52"/>
+              </a:solidFill>
+              <a:latin typeface="OPTINational-Gothic" charset="0"/>
+              <a:cs typeface="OPTINational-Gothic" charset="0"/>
+            </a:endParaRPr>
+          </a:p>
+          <a:p>
+            <a:pPr indent="0" algn="r" fontAlgn="auto">
+              <a:buFont typeface="Arial" panose="02080604020202020204" pitchFamily="34" charset="0"/>
+              <a:buNone/>
+            </a:pPr>
+            <a:r>
+              <a:rPr lang="en-US" altLang="en-US">
+                <a:ln w="6350" cmpd="sng">
+                  <a:noFill/>
+                  <a:prstDash val="solid"/>
+                </a:ln>
+                <a:solidFill>
+                  <a:srgbClr val="47FF52"/>
+                </a:solidFill>
+                <a:latin typeface="OPTINational-Gothic" charset="0"/>
+                <a:cs typeface="OPTINational-Gothic" charset="0"/>
+              </a:rPr>
+              <a:t>modestamente, ho contribuito a formulare. Tutti i fondamenti della fisica ci sono noti e</a:t>
+            </a:r>
+            <a:endParaRPr lang="en-US" altLang="en-US">
+              <a:ln w="6350" cmpd="sng">
+                <a:noFill/>
+                <a:prstDash val="solid"/>
+              </a:ln>
+              <a:solidFill>
+                <a:srgbClr val="47FF52"/>
+              </a:solidFill>
+              <a:latin typeface="OPTINational-Gothic" charset="0"/>
+              <a:cs typeface="OPTINational-Gothic" charset="0"/>
+            </a:endParaRPr>
+          </a:p>
+          <a:p>
+            <a:pPr indent="0" algn="r" fontAlgn="auto">
+              <a:buFont typeface="Arial" panose="02080604020202020204" pitchFamily="34" charset="0"/>
+              <a:buNone/>
+            </a:pPr>
+            <a:r>
+              <a:rPr lang="en-US" altLang="en-US">
+                <a:ln w="6350" cmpd="sng">
+                  <a:noFill/>
+                  <a:prstDash val="solid"/>
+                </a:ln>
+                <a:solidFill>
+                  <a:srgbClr val="47FF52"/>
+                </a:solidFill>
+                <a:latin typeface="OPTINational-Gothic" charset="0"/>
+                <a:cs typeface="OPTINational-Gothic" charset="0"/>
+              </a:rPr>
+              <a:t>null’altro di sostanziale c’è dunque da scoprire sulla natura fisica delle cos</a:t>
+            </a:r>
+            <a:r>
+              <a:rPr lang="" altLang="en-US">
+                <a:ln w="6350" cmpd="sng">
+                  <a:noFill/>
+                  <a:prstDash val="solid"/>
+                </a:ln>
+                <a:solidFill>
+                  <a:srgbClr val="47FF52"/>
+                </a:solidFill>
+                <a:latin typeface="OPTINational-Gothic" charset="0"/>
+                <a:cs typeface="OPTINational-Gothic" charset="0"/>
+              </a:rPr>
+              <a:t>e.”</a:t>
+            </a:r>
+            <a:endParaRPr lang="" altLang="en-US">
+              <a:ln w="6350" cmpd="sng">
+                <a:noFill/>
+                <a:prstDash val="solid"/>
+              </a:ln>
+              <a:solidFill>
+                <a:srgbClr val="47FF52"/>
+              </a:solidFill>
+              <a:latin typeface="OPTINational-Gothic" charset="0"/>
+              <a:cs typeface="OPTINational-Gothic" charset="0"/>
+            </a:endParaRPr>
+          </a:p>
+        </p:txBody>
+      </p:sp>
+      <p:sp>
+        <p:nvSpPr>
+          <p:cNvPr id="13" name="Text Box 12"/>
+          <p:cNvSpPr txBox="true"/>
+          <p:nvPr/>
+        </p:nvSpPr>
+        <p:spPr>
+          <a:xfrm>
+            <a:off x="7945120" y="4707890"/>
+            <a:ext cx="2442210" cy="337185"/>
+          </a:xfrm>
+          <a:prstGeom prst="rect">
+            <a:avLst/>
+          </a:prstGeom>
+          <a:noFill/>
+        </p:spPr>
+        <p:txBody>
+          <a:bodyPr wrap="square" rtlCol="0">
+            <a:spAutoFit/>
+          </a:bodyPr>
+          <a:p>
+            <a:pPr fontAlgn="auto"/>
+            <a:r>
+              <a:rPr lang="en-US" altLang="en-US" sz="1600">
+                <a:ln w="6350" cmpd="sng">
+                  <a:noFill/>
+                  <a:prstDash val="solid"/>
+                </a:ln>
+                <a:solidFill>
+                  <a:srgbClr val="47FF52"/>
+                </a:solidFill>
+                <a:latin typeface="OPTINational-Gothic" charset="0"/>
+                <a:cs typeface="OPTINational-Gothic" charset="0"/>
+              </a:rPr>
+              <a:t>William Thomson Lord Kelvin</a:t>
+            </a:r>
+            <a:endParaRPr lang="en-US" altLang="en-US" sz="1600">
+              <a:ln w="6350" cmpd="sng">
+                <a:noFill/>
+                <a:prstDash val="solid"/>
+              </a:ln>
+              <a:solidFill>
+                <a:srgbClr val="47FF52"/>
               </a:solidFill>
               <a:latin typeface="OPTINational-Gothic" charset="0"/>
               <a:cs typeface="OPTINational-Gothic" charset="0"/>
@@ -12387,8 +16445,8 @@
         </p:nvSpPr>
         <p:spPr>
           <a:xfrm>
-            <a:off x="3206115" y="140335"/>
-            <a:ext cx="5746115" cy="706755"/>
+            <a:off x="4229735" y="130175"/>
+            <a:ext cx="3698875" cy="706755"/>
           </a:xfrm>
           <a:prstGeom prst="rect">
             <a:avLst/>
@@ -12401,7 +16459,7 @@
           </a:bodyPr>
           <a:p>
             <a:r>
-              <a:rPr lang="en-US" altLang="en-US" sz="4000">
+              <a:rPr lang="" altLang="en-US" sz="4000">
                 <a:ln w="28575" cmpd="sng">
                   <a:solidFill>
                     <a:srgbClr val="47FF52"/>
@@ -12414,9 +16472,9 @@
                 <a:latin typeface="OPTINational-Gothic" charset="0"/>
                 <a:cs typeface="OPTINational-Gothic" charset="0"/>
               </a:rPr>
-              <a:t>DA CARTESIO A PHILIP GLASS</a:t>
+              <a:t>DALL’ 800 AL 900</a:t>
             </a:r>
-            <a:endParaRPr lang="en-US" altLang="en-US" sz="4000">
+            <a:endParaRPr lang="" altLang="en-US" sz="4000">
               <a:ln w="28575" cmpd="sng">
                 <a:solidFill>
                   <a:srgbClr val="47FF52"/>
@@ -12432,6 +16490,444 @@
           </a:p>
         </p:txBody>
       </p:sp>
+      <p:sp>
+        <p:nvSpPr>
+          <p:cNvPr id="3" name="Text Box 2"/>
+          <p:cNvSpPr txBox="true"/>
+          <p:nvPr/>
+        </p:nvSpPr>
+        <p:spPr>
+          <a:xfrm>
+            <a:off x="79375" y="836930"/>
+            <a:ext cx="8290560" cy="2030095"/>
+          </a:xfrm>
+          <a:prstGeom prst="rect">
+            <a:avLst/>
+          </a:prstGeom>
+          <a:noFill/>
+        </p:spPr>
+        <p:txBody>
+          <a:bodyPr wrap="square" rtlCol="0">
+            <a:spAutoFit/>
+          </a:bodyPr>
+          <a:p>
+            <a:pPr indent="0" algn="l" fontAlgn="auto">
+              <a:buFont typeface="Arial" panose="02080604020202020204" pitchFamily="34" charset="0"/>
+              <a:buNone/>
+            </a:pPr>
+            <a:r>
+              <a:rPr lang="en-US" altLang="en-US">
+                <a:ln w="6350" cmpd="sng">
+                  <a:noFill/>
+                  <a:prstDash val="solid"/>
+                </a:ln>
+                <a:solidFill>
+                  <a:srgbClr val="47FF52"/>
+                </a:solidFill>
+                <a:latin typeface="OPTINational-Gothic" charset="0"/>
+                <a:cs typeface="OPTINational-Gothic" charset="0"/>
+              </a:rPr>
+              <a:t>“È proprio tra la fine del secolo XIX e</a:t>
+            </a:r>
+            <a:endParaRPr lang="en-US" altLang="en-US">
+              <a:ln w="6350" cmpd="sng">
+                <a:noFill/>
+                <a:prstDash val="solid"/>
+              </a:ln>
+              <a:solidFill>
+                <a:srgbClr val="47FF52"/>
+              </a:solidFill>
+              <a:latin typeface="OPTINational-Gothic" charset="0"/>
+              <a:cs typeface="OPTINational-Gothic" charset="0"/>
+            </a:endParaRPr>
+          </a:p>
+          <a:p>
+            <a:pPr indent="0" algn="l" fontAlgn="auto">
+              <a:buFont typeface="Arial" panose="02080604020202020204" pitchFamily="34" charset="0"/>
+              <a:buNone/>
+            </a:pPr>
+            <a:r>
+              <a:rPr lang="en-US" altLang="en-US">
+                <a:ln w="6350" cmpd="sng">
+                  <a:noFill/>
+                  <a:prstDash val="solid"/>
+                </a:ln>
+                <a:solidFill>
+                  <a:srgbClr val="47FF52"/>
+                </a:solidFill>
+                <a:latin typeface="OPTINational-Gothic" charset="0"/>
+                <a:cs typeface="OPTINational-Gothic" charset="0"/>
+              </a:rPr>
+              <a:t>l'inizio del XX secolo che alcune osservazioni sperimentali pongono in crisi le concezioni</a:t>
+            </a:r>
+            <a:endParaRPr lang="en-US" altLang="en-US">
+              <a:ln w="6350" cmpd="sng">
+                <a:noFill/>
+                <a:prstDash val="solid"/>
+              </a:ln>
+              <a:solidFill>
+                <a:srgbClr val="47FF52"/>
+              </a:solidFill>
+              <a:latin typeface="OPTINational-Gothic" charset="0"/>
+              <a:cs typeface="OPTINational-Gothic" charset="0"/>
+            </a:endParaRPr>
+          </a:p>
+          <a:p>
+            <a:pPr indent="0" algn="l" fontAlgn="auto">
+              <a:buFont typeface="Arial" panose="02080604020202020204" pitchFamily="34" charset="0"/>
+              <a:buNone/>
+            </a:pPr>
+            <a:r>
+              <a:rPr lang="en-US" altLang="en-US">
+                <a:ln w="6350" cmpd="sng">
+                  <a:noFill/>
+                  <a:prstDash val="solid"/>
+                </a:ln>
+                <a:solidFill>
+                  <a:srgbClr val="47FF52"/>
+                </a:solidFill>
+                <a:latin typeface="OPTINational-Gothic" charset="0"/>
+                <a:cs typeface="OPTINational-Gothic" charset="0"/>
+              </a:rPr>
+              <a:t>classiche del mondo fisico: da un lato il comportamento della luce rispetto a diversi sistemi</a:t>
+            </a:r>
+            <a:endParaRPr lang="en-US" altLang="en-US">
+              <a:ln w="6350" cmpd="sng">
+                <a:noFill/>
+                <a:prstDash val="solid"/>
+              </a:ln>
+              <a:solidFill>
+                <a:srgbClr val="47FF52"/>
+              </a:solidFill>
+              <a:latin typeface="OPTINational-Gothic" charset="0"/>
+              <a:cs typeface="OPTINational-Gothic" charset="0"/>
+            </a:endParaRPr>
+          </a:p>
+          <a:p>
+            <a:pPr indent="0" algn="l" fontAlgn="auto">
+              <a:buFont typeface="Arial" panose="02080604020202020204" pitchFamily="34" charset="0"/>
+              <a:buNone/>
+            </a:pPr>
+            <a:r>
+              <a:rPr lang="en-US" altLang="en-US">
+                <a:ln w="6350" cmpd="sng">
+                  <a:noFill/>
+                  <a:prstDash val="solid"/>
+                </a:ln>
+                <a:solidFill>
+                  <a:srgbClr val="47FF52"/>
+                </a:solidFill>
+                <a:latin typeface="OPTINational-Gothic" charset="0"/>
+                <a:cs typeface="OPTINational-Gothic" charset="0"/>
+              </a:rPr>
+              <a:t>di riferimento in moto fra loro, dall'altro i primi indizi sulla struttura granulare dell'energia</a:t>
+            </a:r>
+            <a:endParaRPr lang="en-US" altLang="en-US">
+              <a:ln w="6350" cmpd="sng">
+                <a:noFill/>
+                <a:prstDash val="solid"/>
+              </a:ln>
+              <a:solidFill>
+                <a:srgbClr val="47FF52"/>
+              </a:solidFill>
+              <a:latin typeface="OPTINational-Gothic" charset="0"/>
+              <a:cs typeface="OPTINational-Gothic" charset="0"/>
+            </a:endParaRPr>
+          </a:p>
+          <a:p>
+            <a:pPr indent="0" algn="l" fontAlgn="auto">
+              <a:buFont typeface="Arial" panose="02080604020202020204" pitchFamily="34" charset="0"/>
+              <a:buNone/>
+            </a:pPr>
+            <a:r>
+              <a:rPr lang="en-US" altLang="en-US">
+                <a:ln w="6350" cmpd="sng">
+                  <a:noFill/>
+                  <a:prstDash val="solid"/>
+                </a:ln>
+                <a:solidFill>
+                  <a:srgbClr val="47FF52"/>
+                </a:solidFill>
+                <a:latin typeface="OPTINational-Gothic" charset="0"/>
+                <a:cs typeface="OPTINational-Gothic" charset="0"/>
+              </a:rPr>
+              <a:t>emessa o assorbita dai vari corpi sotto forma di radiazione. È nel XX secolo che questi</a:t>
+            </a:r>
+            <a:endParaRPr lang="en-US" altLang="en-US">
+              <a:ln w="6350" cmpd="sng">
+                <a:noFill/>
+                <a:prstDash val="solid"/>
+              </a:ln>
+              <a:solidFill>
+                <a:srgbClr val="47FF52"/>
+              </a:solidFill>
+              <a:latin typeface="OPTINational-Gothic" charset="0"/>
+              <a:cs typeface="OPTINational-Gothic" charset="0"/>
+            </a:endParaRPr>
+          </a:p>
+          <a:p>
+            <a:pPr indent="0" algn="l" fontAlgn="auto">
+              <a:buFont typeface="Arial" panose="02080604020202020204" pitchFamily="34" charset="0"/>
+              <a:buNone/>
+            </a:pPr>
+            <a:r>
+              <a:rPr lang="en-US" altLang="en-US">
+                <a:ln w="6350" cmpd="sng">
+                  <a:noFill/>
+                  <a:prstDash val="solid"/>
+                </a:ln>
+                <a:solidFill>
+                  <a:srgbClr val="47FF52"/>
+                </a:solidFill>
+                <a:latin typeface="OPTINational-Gothic" charset="0"/>
+                <a:cs typeface="OPTINational-Gothic" charset="0"/>
+              </a:rPr>
+              <a:t>primi quesiti, e molti altri da essi derivati, trovano la loro risposta, gli uni nella Teoria della</a:t>
+            </a:r>
+            <a:endParaRPr lang="en-US" altLang="en-US">
+              <a:ln w="6350" cmpd="sng">
+                <a:noFill/>
+                <a:prstDash val="solid"/>
+              </a:ln>
+              <a:solidFill>
+                <a:srgbClr val="47FF52"/>
+              </a:solidFill>
+              <a:latin typeface="OPTINational-Gothic" charset="0"/>
+              <a:cs typeface="OPTINational-Gothic" charset="0"/>
+            </a:endParaRPr>
+          </a:p>
+          <a:p>
+            <a:pPr indent="0" algn="l" fontAlgn="auto">
+              <a:buFont typeface="Arial" panose="02080604020202020204" pitchFamily="34" charset="0"/>
+              <a:buNone/>
+            </a:pPr>
+            <a:r>
+              <a:rPr lang="en-US" altLang="en-US">
+                <a:ln w="6350" cmpd="sng">
+                  <a:noFill/>
+                  <a:prstDash val="solid"/>
+                </a:ln>
+                <a:solidFill>
+                  <a:srgbClr val="47FF52"/>
+                </a:solidFill>
+                <a:latin typeface="OPTINational-Gothic" charset="0"/>
+                <a:cs typeface="OPTINational-Gothic" charset="0"/>
+              </a:rPr>
+              <a:t>Relatività, gli altri nella Teoria Quantistica...”.</a:t>
+            </a:r>
+            <a:endParaRPr lang="en-US" altLang="en-US">
+              <a:ln w="6350" cmpd="sng">
+                <a:noFill/>
+                <a:prstDash val="solid"/>
+              </a:ln>
+              <a:solidFill>
+                <a:srgbClr val="47FF52"/>
+              </a:solidFill>
+              <a:latin typeface="OPTINational-Gothic" charset="0"/>
+              <a:cs typeface="OPTINational-Gothic" charset="0"/>
+            </a:endParaRPr>
+          </a:p>
+        </p:txBody>
+      </p:sp>
+      <p:sp>
+        <p:nvSpPr>
+          <p:cNvPr id="13" name="Text Box 12"/>
+          <p:cNvSpPr txBox="true"/>
+          <p:nvPr/>
+        </p:nvSpPr>
+        <p:spPr>
+          <a:xfrm>
+            <a:off x="6510655" y="2867025"/>
+            <a:ext cx="1417955" cy="337185"/>
+          </a:xfrm>
+          <a:prstGeom prst="rect">
+            <a:avLst/>
+          </a:prstGeom>
+          <a:noFill/>
+        </p:spPr>
+        <p:txBody>
+          <a:bodyPr wrap="square" rtlCol="0">
+            <a:spAutoFit/>
+          </a:bodyPr>
+          <a:p>
+            <a:pPr algn="r" fontAlgn="auto"/>
+            <a:r>
+              <a:rPr lang="en-US" altLang="en-US" sz="1600">
+                <a:ln w="6350" cmpd="sng">
+                  <a:noFill/>
+                  <a:prstDash val="solid"/>
+                </a:ln>
+                <a:solidFill>
+                  <a:srgbClr val="47FF52"/>
+                </a:solidFill>
+                <a:latin typeface="OPTINational-Gothic" charset="0"/>
+                <a:cs typeface="OPTINational-Gothic" charset="0"/>
+              </a:rPr>
+              <a:t>Edoardo Amaldi</a:t>
+            </a:r>
+            <a:endParaRPr lang="en-US" altLang="en-US" sz="1600">
+              <a:ln w="6350" cmpd="sng">
+                <a:noFill/>
+                <a:prstDash val="solid"/>
+              </a:ln>
+              <a:solidFill>
+                <a:srgbClr val="47FF52"/>
+              </a:solidFill>
+              <a:latin typeface="OPTINational-Gothic" charset="0"/>
+              <a:cs typeface="OPTINational-Gothic" charset="0"/>
+            </a:endParaRPr>
+          </a:p>
+        </p:txBody>
+      </p:sp>
+      <p:pic>
+        <p:nvPicPr>
+          <p:cNvPr id="4" name="Picture 3"/>
+          <p:cNvPicPr>
+            <a:picLocks noChangeAspect="true"/>
+          </p:cNvPicPr>
+          <p:nvPr/>
+        </p:nvPicPr>
+        <p:blipFill>
+          <a:blip r:embed="rId2"/>
+          <a:stretch>
+            <a:fillRect/>
+          </a:stretch>
+        </p:blipFill>
+        <p:spPr>
+          <a:xfrm>
+            <a:off x="8551545" y="4126230"/>
+            <a:ext cx="3521075" cy="742315"/>
+          </a:xfrm>
+          <a:prstGeom prst="rect">
+            <a:avLst/>
+          </a:prstGeom>
+        </p:spPr>
+      </p:pic>
+      <p:graphicFrame>
+        <p:nvGraphicFramePr>
+          <p:cNvPr id="9" name="Diagram 8"/>
+          <p:cNvGraphicFramePr/>
+          <p:nvPr/>
+        </p:nvGraphicFramePr>
+        <p:xfrm>
+          <a:off x="74930" y="3576320"/>
+          <a:ext cx="7853680" cy="1842135"/>
+        </p:xfrm>
+        <a:graphic>
+          <a:graphicData uri="http://schemas.openxmlformats.org/drawingml/2006/diagram">
+            <dgm:relIds xmlns:dgm="http://schemas.openxmlformats.org/drawingml/2006/diagram" xmlns:r="http://schemas.openxmlformats.org/officeDocument/2006/relationships" r:dm="rId3" r:lo="rId4" r:qs="rId5" r:cs="rId6"/>
+          </a:graphicData>
+        </a:graphic>
+      </p:graphicFrame>
+      <p:cxnSp>
+        <p:nvCxnSpPr>
+          <p:cNvPr id="10" name="Straight Arrow Connector 9"/>
+          <p:cNvCxnSpPr>
+            <a:stCxn id="9" idx="3"/>
+          </p:cNvCxnSpPr>
+          <p:nvPr/>
+        </p:nvCxnSpPr>
+        <p:spPr>
+          <a:xfrm>
+            <a:off x="7928610" y="4497705"/>
+            <a:ext cx="586740" cy="6985"/>
+          </a:xfrm>
+          <a:prstGeom prst="straightConnector1">
+            <a:avLst/>
+          </a:prstGeom>
+          <a:ln>
+            <a:tailEnd type="arrow" w="med" len="med"/>
+          </a:ln>
+        </p:spPr>
+        <p:style>
+          <a:lnRef idx="1">
+            <a:schemeClr val="accent6"/>
+          </a:lnRef>
+          <a:fillRef idx="0">
+            <a:schemeClr val="accent6"/>
+          </a:fillRef>
+          <a:effectRef idx="0">
+            <a:schemeClr val="accent6"/>
+          </a:effectRef>
+          <a:fontRef idx="minor">
+            <a:schemeClr val="tx1"/>
+          </a:fontRef>
+        </p:style>
+      </p:cxnSp>
+      <p:sp>
+        <p:nvSpPr>
+          <p:cNvPr id="11" name="Text Box 10"/>
+          <p:cNvSpPr txBox="true"/>
+          <p:nvPr/>
+        </p:nvSpPr>
+        <p:spPr>
+          <a:xfrm>
+            <a:off x="8357870" y="4935855"/>
+            <a:ext cx="3714750" cy="1322070"/>
+          </a:xfrm>
+          <a:prstGeom prst="rect">
+            <a:avLst/>
+          </a:prstGeom>
+          <a:noFill/>
+        </p:spPr>
+        <p:txBody>
+          <a:bodyPr wrap="square" rtlCol="0">
+            <a:spAutoFit/>
+          </a:bodyPr>
+          <a:p>
+            <a:pPr fontAlgn="auto"/>
+            <a:r>
+              <a:rPr lang="" altLang="en-US" sz="1600">
+                <a:ln w="6350" cmpd="sng">
+                  <a:noFill/>
+                  <a:prstDash val="solid"/>
+                </a:ln>
+                <a:solidFill>
+                  <a:srgbClr val="47FF52"/>
+                </a:solidFill>
+                <a:latin typeface="OPTINational-Gothic" charset="0"/>
+                <a:cs typeface="OPTINational-Gothic" charset="0"/>
+              </a:rPr>
+              <a:t>Dove ε0 e μ0 sono rispettivamente le costanti fondamentali del campo elettrostatico e magnetico, a prova della complicità dei due nella creazione dei campi elettromagnetici.</a:t>
+            </a:r>
+            <a:endParaRPr lang="" altLang="en-US" sz="1600">
+              <a:ln w="6350" cmpd="sng">
+                <a:noFill/>
+                <a:prstDash val="solid"/>
+              </a:ln>
+              <a:solidFill>
+                <a:srgbClr val="47FF52"/>
+              </a:solidFill>
+              <a:latin typeface="OPTINational-Gothic" charset="0"/>
+              <a:cs typeface="OPTINational-Gothic" charset="0"/>
+            </a:endParaRPr>
+          </a:p>
+        </p:txBody>
+      </p:sp>
+      <p:pic>
+        <p:nvPicPr>
+          <p:cNvPr id="14" name="Picture 13" descr="Edoardo_Amaldi_pillars"/>
+          <p:cNvPicPr>
+            <a:picLocks noChangeAspect="true"/>
+          </p:cNvPicPr>
+          <p:nvPr/>
+        </p:nvPicPr>
+        <p:blipFill>
+          <a:blip r:embed="rId8"/>
+          <a:stretch>
+            <a:fillRect/>
+          </a:stretch>
+        </p:blipFill>
+        <p:spPr>
+          <a:xfrm>
+            <a:off x="8551545" y="320675"/>
+            <a:ext cx="2128520" cy="2883535"/>
+          </a:xfrm>
+          <a:prstGeom prst="rect">
+            <a:avLst/>
+          </a:prstGeom>
+        </p:spPr>
+      </p:pic>
     </p:spTree>
   </p:cSld>
   <p:clrMapOvr>
